--- a/LectureSlides/11_ModelsForMessyData.pptx
+++ b/LectureSlides/11_ModelsForMessyData.pptx
@@ -5,7 +5,7 @@
     <p:sldMasterId id="2147483648" r:id="rId1"/>
   </p:sldMasterIdLst>
   <p:notesMasterIdLst>
-    <p:notesMasterId r:id="rId63"/>
+    <p:notesMasterId r:id="rId70"/>
   </p:notesMasterIdLst>
   <p:sldIdLst>
     <p:sldId id="337" r:id="rId2"/>
@@ -31,44 +31,51 @@
     <p:sldId id="349" r:id="rId22"/>
     <p:sldId id="354" r:id="rId23"/>
     <p:sldId id="358" r:id="rId24"/>
-    <p:sldId id="359" r:id="rId25"/>
-    <p:sldId id="360" r:id="rId26"/>
-    <p:sldId id="384" r:id="rId27"/>
-    <p:sldId id="361" r:id="rId28"/>
-    <p:sldId id="362" r:id="rId29"/>
-    <p:sldId id="351" r:id="rId30"/>
-    <p:sldId id="383" r:id="rId31"/>
-    <p:sldId id="375" r:id="rId32"/>
-    <p:sldId id="376" r:id="rId33"/>
-    <p:sldId id="380" r:id="rId34"/>
-    <p:sldId id="378" r:id="rId35"/>
-    <p:sldId id="379" r:id="rId36"/>
-    <p:sldId id="377" r:id="rId37"/>
-    <p:sldId id="320" r:id="rId38"/>
-    <p:sldId id="321" r:id="rId39"/>
-    <p:sldId id="364" r:id="rId40"/>
-    <p:sldId id="365" r:id="rId41"/>
-    <p:sldId id="382" r:id="rId42"/>
-    <p:sldId id="323" r:id="rId43"/>
-    <p:sldId id="324" r:id="rId44"/>
-    <p:sldId id="326" r:id="rId45"/>
-    <p:sldId id="366" r:id="rId46"/>
-    <p:sldId id="327" r:id="rId47"/>
-    <p:sldId id="328" r:id="rId48"/>
-    <p:sldId id="329" r:id="rId49"/>
-    <p:sldId id="330" r:id="rId50"/>
-    <p:sldId id="331" r:id="rId51"/>
-    <p:sldId id="332" r:id="rId52"/>
-    <p:sldId id="333" r:id="rId53"/>
-    <p:sldId id="367" r:id="rId54"/>
-    <p:sldId id="368" r:id="rId55"/>
-    <p:sldId id="386" r:id="rId56"/>
-    <p:sldId id="389" r:id="rId57"/>
-    <p:sldId id="387" r:id="rId58"/>
-    <p:sldId id="388" r:id="rId59"/>
-    <p:sldId id="390" r:id="rId60"/>
-    <p:sldId id="385" r:id="rId61"/>
-    <p:sldId id="381" r:id="rId62"/>
+    <p:sldId id="360" r:id="rId25"/>
+    <p:sldId id="384" r:id="rId26"/>
+    <p:sldId id="361" r:id="rId27"/>
+    <p:sldId id="362" r:id="rId28"/>
+    <p:sldId id="351" r:id="rId29"/>
+    <p:sldId id="383" r:id="rId30"/>
+    <p:sldId id="375" r:id="rId31"/>
+    <p:sldId id="376" r:id="rId32"/>
+    <p:sldId id="380" r:id="rId33"/>
+    <p:sldId id="378" r:id="rId34"/>
+    <p:sldId id="379" r:id="rId35"/>
+    <p:sldId id="377" r:id="rId36"/>
+    <p:sldId id="320" r:id="rId37"/>
+    <p:sldId id="321" r:id="rId38"/>
+    <p:sldId id="364" r:id="rId39"/>
+    <p:sldId id="365" r:id="rId40"/>
+    <p:sldId id="382" r:id="rId41"/>
+    <p:sldId id="323" r:id="rId42"/>
+    <p:sldId id="324" r:id="rId43"/>
+    <p:sldId id="326" r:id="rId44"/>
+    <p:sldId id="366" r:id="rId45"/>
+    <p:sldId id="327" r:id="rId46"/>
+    <p:sldId id="328" r:id="rId47"/>
+    <p:sldId id="329" r:id="rId48"/>
+    <p:sldId id="330" r:id="rId49"/>
+    <p:sldId id="331" r:id="rId50"/>
+    <p:sldId id="332" r:id="rId51"/>
+    <p:sldId id="333" r:id="rId52"/>
+    <p:sldId id="367" r:id="rId53"/>
+    <p:sldId id="368" r:id="rId54"/>
+    <p:sldId id="386" r:id="rId55"/>
+    <p:sldId id="389" r:id="rId56"/>
+    <p:sldId id="387" r:id="rId57"/>
+    <p:sldId id="388" r:id="rId58"/>
+    <p:sldId id="391" r:id="rId59"/>
+    <p:sldId id="392" r:id="rId60"/>
+    <p:sldId id="390" r:id="rId61"/>
+    <p:sldId id="395" r:id="rId62"/>
+    <p:sldId id="393" r:id="rId63"/>
+    <p:sldId id="396" r:id="rId64"/>
+    <p:sldId id="394" r:id="rId65"/>
+    <p:sldId id="397" r:id="rId66"/>
+    <p:sldId id="398" r:id="rId67"/>
+    <p:sldId id="385" r:id="rId68"/>
+    <p:sldId id="381" r:id="rId69"/>
   </p:sldIdLst>
   <p:sldSz cx="9144000" cy="5143500" type="screen16x9"/>
   <p:notesSz cx="6858000" cy="9144000"/>
@@ -268,7 +275,7 @@
           <a:p>
             <a:fld id="{B45A0028-71D2-4800-AD8E-38BD1BCDF688}" type="datetimeFigureOut">
               <a:rPr lang="en-US" smtClean="0"/>
-              <a:t>10/1/2026</a:t>
+              <a:t>10/2/2026</a:t>
             </a:fld>
             <a:endParaRPr lang="en-US"/>
           </a:p>
@@ -798,7 +805,7 @@
           <a:p>
             <a:fld id="{241EB5C9-1307-BA42-ABA2-0BC069CD8E7F}" type="datetimeFigureOut">
               <a:rPr lang="en-US" smtClean="0"/>
-              <a:t>10/1/2026</a:t>
+              <a:t>10/2/2026</a:t>
             </a:fld>
             <a:endParaRPr lang="en-US"/>
           </a:p>
@@ -966,7 +973,7 @@
           <a:p>
             <a:fld id="{241EB5C9-1307-BA42-ABA2-0BC069CD8E7F}" type="datetimeFigureOut">
               <a:rPr lang="en-US" smtClean="0"/>
-              <a:t>10/1/2026</a:t>
+              <a:t>10/2/2026</a:t>
             </a:fld>
             <a:endParaRPr lang="en-US"/>
           </a:p>
@@ -1144,7 +1151,7 @@
           <a:p>
             <a:fld id="{241EB5C9-1307-BA42-ABA2-0BC069CD8E7F}" type="datetimeFigureOut">
               <a:rPr lang="en-US" smtClean="0"/>
-              <a:t>10/1/2026</a:t>
+              <a:t>10/2/2026</a:t>
             </a:fld>
             <a:endParaRPr lang="en-US"/>
           </a:p>
@@ -1312,7 +1319,7 @@
           <a:p>
             <a:fld id="{241EB5C9-1307-BA42-ABA2-0BC069CD8E7F}" type="datetimeFigureOut">
               <a:rPr lang="en-US" smtClean="0"/>
-              <a:t>10/1/2026</a:t>
+              <a:t>10/2/2026</a:t>
             </a:fld>
             <a:endParaRPr lang="en-US"/>
           </a:p>
@@ -1557,7 +1564,7 @@
           <a:p>
             <a:fld id="{241EB5C9-1307-BA42-ABA2-0BC069CD8E7F}" type="datetimeFigureOut">
               <a:rPr lang="en-US" smtClean="0"/>
-              <a:t>10/1/2026</a:t>
+              <a:t>10/2/2026</a:t>
             </a:fld>
             <a:endParaRPr lang="en-US"/>
           </a:p>
@@ -1842,7 +1849,7 @@
           <a:p>
             <a:fld id="{241EB5C9-1307-BA42-ABA2-0BC069CD8E7F}" type="datetimeFigureOut">
               <a:rPr lang="en-US" smtClean="0"/>
-              <a:t>10/1/2026</a:t>
+              <a:t>10/2/2026</a:t>
             </a:fld>
             <a:endParaRPr lang="en-US"/>
           </a:p>
@@ -2261,7 +2268,7 @@
           <a:p>
             <a:fld id="{241EB5C9-1307-BA42-ABA2-0BC069CD8E7F}" type="datetimeFigureOut">
               <a:rPr lang="en-US" smtClean="0"/>
-              <a:t>10/1/2026</a:t>
+              <a:t>10/2/2026</a:t>
             </a:fld>
             <a:endParaRPr lang="en-US"/>
           </a:p>
@@ -2378,7 +2385,7 @@
           <a:p>
             <a:fld id="{241EB5C9-1307-BA42-ABA2-0BC069CD8E7F}" type="datetimeFigureOut">
               <a:rPr lang="en-US" smtClean="0"/>
-              <a:t>10/1/2026</a:t>
+              <a:t>10/2/2026</a:t>
             </a:fld>
             <a:endParaRPr lang="en-US"/>
           </a:p>
@@ -2473,7 +2480,7 @@
           <a:p>
             <a:fld id="{241EB5C9-1307-BA42-ABA2-0BC069CD8E7F}" type="datetimeFigureOut">
               <a:rPr lang="en-US" smtClean="0"/>
-              <a:t>10/1/2026</a:t>
+              <a:t>10/2/2026</a:t>
             </a:fld>
             <a:endParaRPr lang="en-US"/>
           </a:p>
@@ -2748,7 +2755,7 @@
           <a:p>
             <a:fld id="{241EB5C9-1307-BA42-ABA2-0BC069CD8E7F}" type="datetimeFigureOut">
               <a:rPr lang="en-US" smtClean="0"/>
-              <a:t>10/1/2026</a:t>
+              <a:t>10/2/2026</a:t>
             </a:fld>
             <a:endParaRPr lang="en-US"/>
           </a:p>
@@ -3000,7 +3007,7 @@
           <a:p>
             <a:fld id="{241EB5C9-1307-BA42-ABA2-0BC069CD8E7F}" type="datetimeFigureOut">
               <a:rPr lang="en-US" smtClean="0"/>
-              <a:t>10/1/2026</a:t>
+              <a:t>10/2/2026</a:t>
             </a:fld>
             <a:endParaRPr lang="en-US"/>
           </a:p>
@@ -3211,7 +3218,7 @@
           <a:p>
             <a:fld id="{241EB5C9-1307-BA42-ABA2-0BC069CD8E7F}" type="datetimeFigureOut">
               <a:rPr lang="en-US" smtClean="0"/>
-              <a:t>10/1/2026</a:t>
+              <a:t>10/2/2026</a:t>
             </a:fld>
             <a:endParaRPr lang="en-US"/>
           </a:p>
@@ -9150,6 +9157,7 @@
                         <m:ctrlPr>
                           <a:rPr lang="ar-AE" i="1" smtClean="0">
                             <a:latin typeface="Cambria Math" panose="02040503050406030204" pitchFamily="18" charset="0"/>
+                            <a:ea typeface="Cambria Math" panose="02040503050406030204" pitchFamily="18" charset="0"/>
                           </a:rPr>
                         </m:ctrlPr>
                       </m:dPr>
@@ -9269,6 +9277,7 @@
                         <m:ctrlPr>
                           <a:rPr lang="ar-AE" i="1" smtClean="0">
                             <a:latin typeface="Cambria Math" panose="02040503050406030204" pitchFamily="18" charset="0"/>
+                            <a:ea typeface="Cambria Math" panose="02040503050406030204" pitchFamily="18" charset="0"/>
                           </a:rPr>
                         </m:ctrlPr>
                       </m:dPr>
@@ -9351,6 +9360,7 @@
                         <m:ctrlPr>
                           <a:rPr lang="ar-AE" i="1">
                             <a:latin typeface="Cambria Math" panose="02040503050406030204" pitchFamily="18" charset="0"/>
+                            <a:ea typeface="Cambria Math" panose="02040503050406030204" pitchFamily="18" charset="0"/>
                           </a:rPr>
                         </m:ctrlPr>
                       </m:dPr>
@@ -9434,6 +9444,7 @@
                         <m:ctrlPr>
                           <a:rPr lang="ar-AE" i="1">
                             <a:latin typeface="Cambria Math" panose="02040503050406030204" pitchFamily="18" charset="0"/>
+                            <a:ea typeface="Cambria Math" panose="02040503050406030204" pitchFamily="18" charset="0"/>
                           </a:rPr>
                         </m:ctrlPr>
                       </m:dPr>
@@ -10826,963 +10837,6 @@
 </file>
 
 <file path=ppt/slides/slide24.xml><?xml version="1.0" encoding="utf-8"?>
-<p:sld xmlns:a="http://schemas.openxmlformats.org/drawingml/2006/main" xmlns:r="http://schemas.openxmlformats.org/officeDocument/2006/relationships" xmlns:p="http://schemas.openxmlformats.org/presentationml/2006/main" show="0">
-  <p:cSld>
-    <p:spTree>
-      <p:nvGrpSpPr>
-        <p:cNvPr id="1" name="">
-          <a:extLst>
-            <a:ext uri="{FF2B5EF4-FFF2-40B4-BE49-F238E27FC236}">
-              <a16:creationId xmlns:a16="http://schemas.microsoft.com/office/drawing/2014/main" id="{57826A59-C31D-CA4F-22DC-CE0BC44AC61D}"/>
-            </a:ext>
-          </a:extLst>
-        </p:cNvPr>
-        <p:cNvGrpSpPr/>
-        <p:nvPr/>
-      </p:nvGrpSpPr>
-      <p:grpSpPr>
-        <a:xfrm>
-          <a:off x="0" y="0"/>
-          <a:ext cx="0" cy="0"/>
-          <a:chOff x="0" y="0"/>
-          <a:chExt cx="0" cy="0"/>
-        </a:xfrm>
-      </p:grpSpPr>
-      <p:sp>
-        <p:nvSpPr>
-          <p:cNvPr id="2" name="Title 1">
-            <a:extLst>
-              <a:ext uri="{FF2B5EF4-FFF2-40B4-BE49-F238E27FC236}">
-                <a16:creationId xmlns:a16="http://schemas.microsoft.com/office/drawing/2014/main" id="{35083BF8-D3F1-8411-50B3-B0EACB4B9A13}"/>
-              </a:ext>
-            </a:extLst>
-          </p:cNvPr>
-          <p:cNvSpPr>
-            <a:spLocks noGrp="1"/>
-          </p:cNvSpPr>
-          <p:nvPr>
-            <p:ph type="title"/>
-          </p:nvPr>
-        </p:nvSpPr>
-        <p:spPr/>
-        <p:txBody>
-          <a:bodyPr/>
-          <a:lstStyle/>
-          <a:p>
-            <a:pPr marL="0" lvl="0" indent="0">
-              <a:buNone/>
-            </a:pPr>
-            <a:r>
-              <a:rPr lang="en-US" dirty="0"/>
-              <a:t>Negative Binomial Distribution</a:t>
-            </a:r>
-            <a:endParaRPr dirty="0"/>
-          </a:p>
-        </p:txBody>
-      </p:sp>
-      <mc:AlternateContent xmlns:mc="http://schemas.openxmlformats.org/markup-compatibility/2006" xmlns:a14="http://schemas.microsoft.com/office/drawing/2010/main">
-        <mc:Choice Requires="a14">
-          <p:sp>
-            <p:nvSpPr>
-              <p:cNvPr id="3" name="Content Placeholder 2">
-                <a:extLst>
-                  <a:ext uri="{FF2B5EF4-FFF2-40B4-BE49-F238E27FC236}">
-                    <a16:creationId xmlns:a16="http://schemas.microsoft.com/office/drawing/2014/main" id="{B27160E7-1674-F41A-2EC9-D8EC46BD8088}"/>
-                  </a:ext>
-                </a:extLst>
-              </p:cNvPr>
-              <p:cNvSpPr>
-                <a:spLocks noGrp="1"/>
-              </p:cNvSpPr>
-              <p:nvPr>
-                <p:ph idx="1"/>
-              </p:nvPr>
-            </p:nvSpPr>
-            <p:spPr>
-              <a:xfrm>
-                <a:off x="457200" y="1105408"/>
-                <a:ext cx="8229600" cy="3616959"/>
-              </a:xfrm>
-            </p:spPr>
-            <p:txBody>
-              <a:bodyPr>
-                <a:normAutofit lnSpcReduction="10000"/>
-              </a:bodyPr>
-              <a:lstStyle/>
-              <a:p>
-                <a:pPr marL="0" lvl="0" indent="0">
-                  <a:buNone/>
-                </a:pPr>
-                <a:r>
-                  <a:rPr lang="en-US" dirty="0"/>
-                  <a:t>The </a:t>
-                </a:r>
-                <a14:m>
-                  <m:oMath xmlns:m="http://schemas.openxmlformats.org/officeDocument/2006/math">
-                    <m:r>
-                      <a:rPr lang="en-US" b="1" i="0" dirty="0" smtClean="0">
-                        <a:latin typeface="Cambria Math" panose="02040503050406030204" pitchFamily="18" charset="0"/>
-                        <a:hlinkClick r:id="rId2"/>
-                      </a:rPr>
-                      <m:t>𝐧𝐞𝐠𝐚𝐭𝐢𝐯𝐞</m:t>
-                    </m:r>
-                    <m:r>
-                      <a:rPr lang="en-US" b="1" i="0" dirty="0" smtClean="0">
-                        <a:latin typeface="Cambria Math" panose="02040503050406030204" pitchFamily="18" charset="0"/>
-                        <a:hlinkClick r:id="rId2"/>
-                      </a:rPr>
-                      <m:t> </m:t>
-                    </m:r>
-                    <m:r>
-                      <a:rPr lang="en-US" b="1" i="0" dirty="0" smtClean="0">
-                        <a:latin typeface="Cambria Math" panose="02040503050406030204" pitchFamily="18" charset="0"/>
-                        <a:hlinkClick r:id="rId2"/>
-                      </a:rPr>
-                      <m:t>𝐛𝐢𝐧𝐨𝐦𝐢𝐚𝐥</m:t>
-                    </m:r>
-                    <m:r>
-                      <a:rPr lang="en-US" b="1" i="0" dirty="0" smtClean="0">
-                        <a:latin typeface="Cambria Math" panose="02040503050406030204" pitchFamily="18" charset="0"/>
-                        <a:hlinkClick r:id="rId2"/>
-                      </a:rPr>
-                      <m:t> </m:t>
-                    </m:r>
-                    <m:r>
-                      <a:rPr lang="en-US" b="1" i="0" dirty="0" smtClean="0">
-                        <a:latin typeface="Cambria Math" panose="02040503050406030204" pitchFamily="18" charset="0"/>
-                        <a:hlinkClick r:id="rId2"/>
-                      </a:rPr>
-                      <m:t>𝐝𝐢𝐬𝐭𝐫𝐢𝐛𝐮𝐭𝐢𝐨𝐧</m:t>
-                    </m:r>
-                    <m:r>
-                      <a:rPr lang="en-US" b="1" i="0" dirty="0" smtClean="0">
-                        <a:latin typeface="Cambria Math" panose="02040503050406030204" pitchFamily="18" charset="0"/>
-                        <a:hlinkClick r:id="rId2"/>
-                      </a:rPr>
-                      <m:t> </m:t>
-                    </m:r>
-                  </m:oMath>
-                </a14:m>
-                <a:r>
-                  <a:rPr lang="en-US" dirty="0"/>
-                  <a:t>is a generalization of the Poisson distribution </a:t>
-                </a:r>
-              </a:p>
-              <a:p>
-                <a:r>
-                  <a:rPr lang="en-US" dirty="0"/>
-                  <a:t>The general form of the negative binomial distribution   </a:t>
-                </a:r>
-              </a:p>
-              <a:p>
-                <a:pPr marL="0" indent="0">
-                  <a:buNone/>
-                </a:pPr>
-                <a14:m>
-                  <m:oMathPara xmlns:m="http://schemas.openxmlformats.org/officeDocument/2006/math">
-                    <m:oMath>
-                      <m:r>
-                        <a:rPr lang="en-US" i="1">
-                          <a:latin typeface="Cambria Math" panose="02040503050406030204" pitchFamily="18" charset="0"/>
-                        </a:rPr>
-                        <m:t>𝑓</m:t>
-                      </m:r>
-                      <m:d>
-                        <m:dPr>
-                          <m:ctrlPr>
-                            <a:rPr lang="en-US" i="1">
-                              <a:latin typeface="Cambria Math" panose="02040503050406030204" pitchFamily="18" charset="0"/>
-                            </a:rPr>
-                          </m:ctrlPr>
-                        </m:dPr>
-                        <m:e>
-                          <m:r>
-                            <a:rPr lang="en-US" i="1">
-                              <a:latin typeface="Cambria Math" panose="02040503050406030204" pitchFamily="18" charset="0"/>
-                            </a:rPr>
-                            <m:t>𝑘</m:t>
-                          </m:r>
-                          <m:r>
-                            <a:rPr lang="en-US" i="1">
-                              <a:latin typeface="Cambria Math" panose="02040503050406030204" pitchFamily="18" charset="0"/>
-                            </a:rPr>
-                            <m:t> | </m:t>
-                          </m:r>
-                          <m:r>
-                            <a:rPr lang="en-US" i="1">
-                              <a:latin typeface="Cambria Math" panose="02040503050406030204" pitchFamily="18" charset="0"/>
-                            </a:rPr>
-                            <m:t>𝑟</m:t>
-                          </m:r>
-                          <m:r>
-                            <a:rPr lang="en-US" i="1">
-                              <a:latin typeface="Cambria Math" panose="02040503050406030204" pitchFamily="18" charset="0"/>
-                            </a:rPr>
-                            <m:t>, </m:t>
-                          </m:r>
-                          <m:r>
-                            <a:rPr lang="en-US" i="1">
-                              <a:latin typeface="Cambria Math" panose="02040503050406030204" pitchFamily="18" charset="0"/>
-                            </a:rPr>
-                            <m:t>𝑝</m:t>
-                          </m:r>
-                        </m:e>
-                      </m:d>
-                      <m:r>
-                        <a:rPr lang="en-US" i="1">
-                          <a:latin typeface="Cambria Math" panose="02040503050406030204" pitchFamily="18" charset="0"/>
-                        </a:rPr>
-                        <m:t>=</m:t>
-                      </m:r>
-                      <m:d>
-                        <m:dPr>
-                          <m:ctrlPr>
-                            <a:rPr lang="en-US" i="1">
-                              <a:latin typeface="Cambria Math" panose="02040503050406030204" pitchFamily="18" charset="0"/>
-                            </a:rPr>
-                          </m:ctrlPr>
-                        </m:dPr>
-                        <m:e>
-                          <m:m>
-                            <m:mPr>
-                              <m:mcs>
-                                <m:mc>
-                                  <m:mcPr>
-                                    <m:count m:val="1"/>
-                                    <m:mcJc m:val="center"/>
-                                  </m:mcPr>
-                                </m:mc>
-                              </m:mcs>
-                              <m:ctrlPr>
-                                <a:rPr lang="en-US" i="1">
-                                  <a:latin typeface="Cambria Math" panose="02040503050406030204" pitchFamily="18" charset="0"/>
-                                </a:rPr>
-                              </m:ctrlPr>
-                            </m:mPr>
-                            <m:mr>
-                              <m:e>
-                                <m:r>
-                                  <m:rPr>
-                                    <m:brk m:alnAt="7"/>
-                                  </m:rPr>
-                                  <a:rPr lang="en-US" i="1">
-                                    <a:latin typeface="Cambria Math" panose="02040503050406030204" pitchFamily="18" charset="0"/>
-                                  </a:rPr>
-                                  <m:t>𝑘</m:t>
-                                </m:r>
-                                <m:r>
-                                  <a:rPr lang="en-US" i="1">
-                                    <a:latin typeface="Cambria Math" panose="02040503050406030204" pitchFamily="18" charset="0"/>
-                                  </a:rPr>
-                                  <m:t>+</m:t>
-                                </m:r>
-                                <m:r>
-                                  <a:rPr lang="en-US" i="1">
-                                    <a:latin typeface="Cambria Math" panose="02040503050406030204" pitchFamily="18" charset="0"/>
-                                  </a:rPr>
-                                  <m:t>𝑟</m:t>
-                                </m:r>
-                                <m:r>
-                                  <a:rPr lang="en-US" i="1">
-                                    <a:latin typeface="Cambria Math" panose="02040503050406030204" pitchFamily="18" charset="0"/>
-                                  </a:rPr>
-                                  <m:t>−1</m:t>
-                                </m:r>
-                              </m:e>
-                            </m:mr>
-                            <m:mr>
-                              <m:e>
-                                <m:r>
-                                  <a:rPr lang="en-US" i="1">
-                                    <a:latin typeface="Cambria Math" panose="02040503050406030204" pitchFamily="18" charset="0"/>
-                                  </a:rPr>
-                                  <m:t>𝑟</m:t>
-                                </m:r>
-                                <m:r>
-                                  <a:rPr lang="en-US" i="1">
-                                    <a:latin typeface="Cambria Math" panose="02040503050406030204" pitchFamily="18" charset="0"/>
-                                  </a:rPr>
-                                  <m:t>−1</m:t>
-                                </m:r>
-                              </m:e>
-                            </m:mr>
-                          </m:m>
-                        </m:e>
-                      </m:d>
-                      <m:sSup>
-                        <m:sSupPr>
-                          <m:ctrlPr>
-                            <a:rPr lang="en-US" i="1">
-                              <a:latin typeface="Cambria Math" panose="02040503050406030204" pitchFamily="18" charset="0"/>
-                            </a:rPr>
-                          </m:ctrlPr>
-                        </m:sSupPr>
-                        <m:e>
-                          <m:r>
-                            <a:rPr lang="en-US" i="1">
-                              <a:latin typeface="Cambria Math" panose="02040503050406030204" pitchFamily="18" charset="0"/>
-                            </a:rPr>
-                            <m:t>𝑝</m:t>
-                          </m:r>
-                        </m:e>
-                        <m:sup>
-                          <m:r>
-                            <a:rPr lang="en-US" i="1">
-                              <a:latin typeface="Cambria Math" panose="02040503050406030204" pitchFamily="18" charset="0"/>
-                            </a:rPr>
-                            <m:t>𝑟</m:t>
-                          </m:r>
-                        </m:sup>
-                      </m:sSup>
-                      <m:sSup>
-                        <m:sSupPr>
-                          <m:ctrlPr>
-                            <a:rPr lang="en-US" i="1">
-                              <a:latin typeface="Cambria Math" panose="02040503050406030204" pitchFamily="18" charset="0"/>
-                            </a:rPr>
-                          </m:ctrlPr>
-                        </m:sSupPr>
-                        <m:e>
-                          <m:d>
-                            <m:dPr>
-                              <m:ctrlPr>
-                                <a:rPr lang="en-US" i="1">
-                                  <a:latin typeface="Cambria Math" panose="02040503050406030204" pitchFamily="18" charset="0"/>
-                                </a:rPr>
-                              </m:ctrlPr>
-                            </m:dPr>
-                            <m:e>
-                              <m:r>
-                                <a:rPr lang="en-US" i="1">
-                                  <a:latin typeface="Cambria Math" panose="02040503050406030204" pitchFamily="18" charset="0"/>
-                                </a:rPr>
-                                <m:t>1−</m:t>
-                              </m:r>
-                              <m:r>
-                                <a:rPr lang="en-US" i="1">
-                                  <a:latin typeface="Cambria Math" panose="02040503050406030204" pitchFamily="18" charset="0"/>
-                                </a:rPr>
-                                <m:t>𝑝</m:t>
-                              </m:r>
-                            </m:e>
-                          </m:d>
-                        </m:e>
-                        <m:sup>
-                          <m:r>
-                            <a:rPr lang="en-US" i="1">
-                              <a:latin typeface="Cambria Math" panose="02040503050406030204" pitchFamily="18" charset="0"/>
-                            </a:rPr>
-                            <m:t>𝑘</m:t>
-                          </m:r>
-                        </m:sup>
-                      </m:sSup>
-                    </m:oMath>
-                  </m:oMathPara>
-                </a14:m>
-                <a:endParaRPr lang="en-US" dirty="0"/>
-              </a:p>
-              <a:p>
-                <a:r>
-                  <a:rPr lang="en-US" dirty="0"/>
-                  <a:t>Reparametrize to get a form suitable for analysis in terms of the expected arrival rate, </a:t>
-                </a:r>
-                <a14:m>
-                  <m:oMath xmlns:m="http://schemas.openxmlformats.org/officeDocument/2006/math">
-                    <m:r>
-                      <a:rPr lang="en-US" i="1">
-                        <a:latin typeface="Cambria Math" panose="02040503050406030204" pitchFamily="18" charset="0"/>
-                        <a:ea typeface="Cambria Math" panose="02040503050406030204" pitchFamily="18" charset="0"/>
-                      </a:rPr>
-                      <m:t>𝜇</m:t>
-                    </m:r>
-                  </m:oMath>
-                </a14:m>
-                <a:r>
-                  <a:rPr lang="en-US" dirty="0"/>
-                  <a:t>,  variance, </a:t>
-                </a:r>
-                <a14:m>
-                  <m:oMath xmlns:m="http://schemas.openxmlformats.org/officeDocument/2006/math">
-                    <m:sSup>
-                      <m:sSupPr>
-                        <m:ctrlPr>
-                          <a:rPr lang="en-US" i="1">
-                            <a:latin typeface="Cambria Math" panose="02040503050406030204" pitchFamily="18" charset="0"/>
-                            <a:ea typeface="Cambria Math" panose="02040503050406030204" pitchFamily="18" charset="0"/>
-                          </a:rPr>
-                        </m:ctrlPr>
-                      </m:sSupPr>
-                      <m:e>
-                        <m:r>
-                          <a:rPr lang="en-US" i="1">
-                            <a:latin typeface="Cambria Math" panose="02040503050406030204" pitchFamily="18" charset="0"/>
-                            <a:ea typeface="Cambria Math" panose="02040503050406030204" pitchFamily="18" charset="0"/>
-                          </a:rPr>
-                          <m:t>𝜎</m:t>
-                        </m:r>
-                      </m:e>
-                      <m:sup>
-                        <m:r>
-                          <a:rPr lang="en-US" i="1">
-                            <a:latin typeface="Cambria Math" panose="02040503050406030204" pitchFamily="18" charset="0"/>
-                          </a:rPr>
-                          <m:t>2</m:t>
-                        </m:r>
-                      </m:sup>
-                    </m:sSup>
-                  </m:oMath>
-                </a14:m>
-                <a:r>
-                  <a:rPr lang="en-US" dirty="0"/>
-                  <a:t>, and </a:t>
-                </a:r>
-                <a:r>
-                  <a:rPr lang="en-US" b="1" dirty="0"/>
-                  <a:t>over-dispersion parameter, </a:t>
-                </a:r>
-                <a14:m>
-                  <m:oMath xmlns:m="http://schemas.openxmlformats.org/officeDocument/2006/math">
-                    <m:r>
-                      <a:rPr lang="en-US" b="1" i="1">
-                        <a:latin typeface="Cambria Math" panose="02040503050406030204" pitchFamily="18" charset="0"/>
-                        <a:ea typeface="Cambria Math" panose="02040503050406030204" pitchFamily="18" charset="0"/>
-                      </a:rPr>
-                      <m:t>𝜶</m:t>
-                    </m:r>
-                  </m:oMath>
-                </a14:m>
-                <a:endParaRPr lang="en-US" b="1" dirty="0"/>
-              </a:p>
-              <a:p>
-                <a:pPr marL="342900" lvl="1" indent="0">
-                  <a:buNone/>
-                </a:pPr>
-                <a14:m>
-                  <m:oMathPara xmlns:m="http://schemas.openxmlformats.org/officeDocument/2006/math">
-                    <m:oMath>
-                      <m:sSup>
-                        <m:sSupPr>
-                          <m:ctrlPr>
-                            <a:rPr lang="en-US" i="1">
-                              <a:latin typeface="Cambria Math" panose="02040503050406030204" pitchFamily="18" charset="0"/>
-                              <a:ea typeface="Cambria Math" panose="02040503050406030204" pitchFamily="18" charset="0"/>
-                            </a:rPr>
-                          </m:ctrlPr>
-                        </m:sSupPr>
-                        <m:e>
-                          <m:r>
-                            <a:rPr lang="en-US" i="1">
-                              <a:latin typeface="Cambria Math" panose="02040503050406030204" pitchFamily="18" charset="0"/>
-                              <a:ea typeface="Cambria Math" panose="02040503050406030204" pitchFamily="18" charset="0"/>
-                            </a:rPr>
-                            <m:t>𝜎</m:t>
-                          </m:r>
-                        </m:e>
-                        <m:sup>
-                          <m:r>
-                            <a:rPr lang="en-US" i="1">
-                              <a:latin typeface="Cambria Math" panose="02040503050406030204" pitchFamily="18" charset="0"/>
-                            </a:rPr>
-                            <m:t>2</m:t>
-                          </m:r>
-                        </m:sup>
-                      </m:sSup>
-                      <m:r>
-                        <a:rPr lang="en-US" i="1">
-                          <a:latin typeface="Cambria Math" panose="02040503050406030204" pitchFamily="18" charset="0"/>
-                        </a:rPr>
-                        <m:t>=</m:t>
-                      </m:r>
-                      <m:r>
-                        <a:rPr lang="en-US" i="1">
-                          <a:latin typeface="Cambria Math" panose="02040503050406030204" pitchFamily="18" charset="0"/>
-                          <a:ea typeface="Cambria Math" panose="02040503050406030204" pitchFamily="18" charset="0"/>
-                        </a:rPr>
-                        <m:t>𝜇</m:t>
-                      </m:r>
-                      <m:r>
-                        <a:rPr lang="en-US" i="1">
-                          <a:latin typeface="Cambria Math" panose="02040503050406030204" pitchFamily="18" charset="0"/>
-                          <a:ea typeface="Cambria Math" panose="02040503050406030204" pitchFamily="18" charset="0"/>
-                        </a:rPr>
-                        <m:t>+</m:t>
-                      </m:r>
-                      <m:r>
-                        <a:rPr lang="en-US" i="1">
-                          <a:latin typeface="Cambria Math" panose="02040503050406030204" pitchFamily="18" charset="0"/>
-                          <a:ea typeface="Cambria Math" panose="02040503050406030204" pitchFamily="18" charset="0"/>
-                        </a:rPr>
-                        <m:t>𝛼</m:t>
-                      </m:r>
-                      <m:sSup>
-                        <m:sSupPr>
-                          <m:ctrlPr>
-                            <a:rPr lang="en-US" i="1">
-                              <a:latin typeface="Cambria Math" panose="02040503050406030204" pitchFamily="18" charset="0"/>
-                              <a:ea typeface="Cambria Math" panose="02040503050406030204" pitchFamily="18" charset="0"/>
-                            </a:rPr>
-                          </m:ctrlPr>
-                        </m:sSupPr>
-                        <m:e>
-                          <m:r>
-                            <a:rPr lang="en-US" i="1">
-                              <a:latin typeface="Cambria Math" panose="02040503050406030204" pitchFamily="18" charset="0"/>
-                              <a:ea typeface="Cambria Math" panose="02040503050406030204" pitchFamily="18" charset="0"/>
-                            </a:rPr>
-                            <m:t>𝜇</m:t>
-                          </m:r>
-                        </m:e>
-                        <m:sup>
-                          <m:r>
-                            <a:rPr lang="en-US" i="1">
-                              <a:latin typeface="Cambria Math" panose="02040503050406030204" pitchFamily="18" charset="0"/>
-                            </a:rPr>
-                            <m:t>2</m:t>
-                          </m:r>
-                        </m:sup>
-                      </m:sSup>
-                      <m:r>
-                        <a:rPr lang="en-US" i="1">
-                          <a:latin typeface="Cambria Math" panose="02040503050406030204" pitchFamily="18" charset="0"/>
-                        </a:rPr>
-                        <m:t> </m:t>
-                      </m:r>
-                      <m:r>
-                        <a:rPr lang="en-US" b="0" i="1" smtClean="0">
-                          <a:latin typeface="Cambria Math" panose="02040503050406030204" pitchFamily="18" charset="0"/>
-                        </a:rPr>
-                        <m:t>,  </m:t>
-                      </m:r>
-                      <m:r>
-                        <a:rPr lang="en-US" b="0" i="1" smtClean="0">
-                          <a:latin typeface="Cambria Math" panose="02040503050406030204" pitchFamily="18" charset="0"/>
-                        </a:rPr>
-                        <m:t>𝑝</m:t>
-                      </m:r>
-                      <m:r>
-                        <a:rPr lang="en-US" b="0" i="1" smtClean="0">
-                          <a:latin typeface="Cambria Math" panose="02040503050406030204" pitchFamily="18" charset="0"/>
-                        </a:rPr>
-                        <m:t>=</m:t>
-                      </m:r>
-                      <m:f>
-                        <m:fPr>
-                          <m:ctrlPr>
-                            <a:rPr lang="en-US" b="0" i="1" smtClean="0">
-                              <a:latin typeface="Cambria Math" panose="02040503050406030204" pitchFamily="18" charset="0"/>
-                              <a:ea typeface="Cambria Math" panose="02040503050406030204" pitchFamily="18" charset="0"/>
-                            </a:rPr>
-                          </m:ctrlPr>
-                        </m:fPr>
-                        <m:num>
-                          <m:r>
-                            <a:rPr lang="en-US" b="0" i="1" smtClean="0">
-                              <a:latin typeface="Cambria Math" panose="02040503050406030204" pitchFamily="18" charset="0"/>
-                              <a:ea typeface="Cambria Math" panose="02040503050406030204" pitchFamily="18" charset="0"/>
-                            </a:rPr>
-                            <m:t>𝜇</m:t>
-                          </m:r>
-                        </m:num>
-                        <m:den>
-                          <m:sSup>
-                            <m:sSupPr>
-                              <m:ctrlPr>
-                                <a:rPr lang="en-US" b="0" i="1" smtClean="0">
-                                  <a:latin typeface="Cambria Math" panose="02040503050406030204" pitchFamily="18" charset="0"/>
-                                  <a:ea typeface="Cambria Math" panose="02040503050406030204" pitchFamily="18" charset="0"/>
-                                </a:rPr>
-                              </m:ctrlPr>
-                            </m:sSupPr>
-                            <m:e>
-                              <m:r>
-                                <a:rPr lang="en-US" b="0" i="1" smtClean="0">
-                                  <a:latin typeface="Cambria Math" panose="02040503050406030204" pitchFamily="18" charset="0"/>
-                                  <a:ea typeface="Cambria Math" panose="02040503050406030204" pitchFamily="18" charset="0"/>
-                                </a:rPr>
-                                <m:t>𝜎</m:t>
-                              </m:r>
-                            </m:e>
-                            <m:sup>
-                              <m:r>
-                                <a:rPr lang="en-US" b="0" i="1" smtClean="0">
-                                  <a:latin typeface="Cambria Math" panose="02040503050406030204" pitchFamily="18" charset="0"/>
-                                </a:rPr>
-                                <m:t>2</m:t>
-                              </m:r>
-                            </m:sup>
-                          </m:sSup>
-                        </m:den>
-                      </m:f>
-                      <m:r>
-                        <a:rPr lang="en-US" b="0" i="1" smtClean="0">
-                          <a:latin typeface="Cambria Math" panose="02040503050406030204" pitchFamily="18" charset="0"/>
-                        </a:rPr>
-                        <m:t>,    </m:t>
-                      </m:r>
-                      <m:r>
-                        <a:rPr lang="en-US" b="0" i="1" smtClean="0">
-                          <a:latin typeface="Cambria Math" panose="02040503050406030204" pitchFamily="18" charset="0"/>
-                        </a:rPr>
-                        <m:t>𝑛</m:t>
-                      </m:r>
-                      <m:r>
-                        <a:rPr lang="en-US" b="0" i="1" smtClean="0">
-                          <a:latin typeface="Cambria Math" panose="02040503050406030204" pitchFamily="18" charset="0"/>
-                        </a:rPr>
-                        <m:t>=</m:t>
-                      </m:r>
-                      <m:f>
-                        <m:fPr>
-                          <m:ctrlPr>
-                            <a:rPr lang="en-US" b="0" i="1" smtClean="0">
-                              <a:latin typeface="Cambria Math" panose="02040503050406030204" pitchFamily="18" charset="0"/>
-                            </a:rPr>
-                          </m:ctrlPr>
-                        </m:fPr>
-                        <m:num>
-                          <m:sSup>
-                            <m:sSupPr>
-                              <m:ctrlPr>
-                                <a:rPr lang="en-US" b="0" i="1" smtClean="0">
-                                  <a:latin typeface="Cambria Math" panose="02040503050406030204" pitchFamily="18" charset="0"/>
-                                  <a:ea typeface="Cambria Math" panose="02040503050406030204" pitchFamily="18" charset="0"/>
-                                </a:rPr>
-                              </m:ctrlPr>
-                            </m:sSupPr>
-                            <m:e>
-                              <m:r>
-                                <a:rPr lang="en-US" b="0" i="1" smtClean="0">
-                                  <a:latin typeface="Cambria Math" panose="02040503050406030204" pitchFamily="18" charset="0"/>
-                                  <a:ea typeface="Cambria Math" panose="02040503050406030204" pitchFamily="18" charset="0"/>
-                                </a:rPr>
-                                <m:t>𝜇</m:t>
-                              </m:r>
-                            </m:e>
-                            <m:sup>
-                              <m:r>
-                                <a:rPr lang="en-US" b="0" i="1" smtClean="0">
-                                  <a:latin typeface="Cambria Math" panose="02040503050406030204" pitchFamily="18" charset="0"/>
-                                </a:rPr>
-                                <m:t>2</m:t>
-                              </m:r>
-                            </m:sup>
-                          </m:sSup>
-                        </m:num>
-                        <m:den>
-                          <m:sSup>
-                            <m:sSupPr>
-                              <m:ctrlPr>
-                                <a:rPr lang="en-US" i="1">
-                                  <a:latin typeface="Cambria Math" panose="02040503050406030204" pitchFamily="18" charset="0"/>
-                                  <a:ea typeface="Cambria Math" panose="02040503050406030204" pitchFamily="18" charset="0"/>
-                                </a:rPr>
-                              </m:ctrlPr>
-                            </m:sSupPr>
-                            <m:e>
-                              <m:r>
-                                <a:rPr lang="en-US" i="1">
-                                  <a:latin typeface="Cambria Math" panose="02040503050406030204" pitchFamily="18" charset="0"/>
-                                  <a:ea typeface="Cambria Math" panose="02040503050406030204" pitchFamily="18" charset="0"/>
-                                </a:rPr>
-                                <m:t>𝜎</m:t>
-                              </m:r>
-                            </m:e>
-                            <m:sup>
-                              <m:r>
-                                <a:rPr lang="en-US" i="1">
-                                  <a:latin typeface="Cambria Math" panose="02040503050406030204" pitchFamily="18" charset="0"/>
-                                </a:rPr>
-                                <m:t>2</m:t>
-                              </m:r>
-                            </m:sup>
-                          </m:sSup>
-                          <m:r>
-                            <a:rPr lang="en-US" b="0" i="1" smtClean="0">
-                              <a:latin typeface="Cambria Math" panose="02040503050406030204" pitchFamily="18" charset="0"/>
-                            </a:rPr>
-                            <m:t>−</m:t>
-                          </m:r>
-                          <m:r>
-                            <a:rPr lang="en-US" i="1">
-                              <a:latin typeface="Cambria Math" panose="02040503050406030204" pitchFamily="18" charset="0"/>
-                              <a:ea typeface="Cambria Math" panose="02040503050406030204" pitchFamily="18" charset="0"/>
-                            </a:rPr>
-                            <m:t>𝜇</m:t>
-                          </m:r>
-                        </m:den>
-                      </m:f>
-                    </m:oMath>
-                  </m:oMathPara>
-                </a14:m>
-                <a:endParaRPr lang="en-US" dirty="0"/>
-              </a:p>
-              <a:p>
-                <a:pPr marL="0" indent="0">
-                  <a:buNone/>
-                </a:pPr>
-                <a:endParaRPr lang="en-US" dirty="0"/>
-              </a:p>
-              <a:p>
-                <a:pPr marL="0" indent="0">
-                  <a:buNone/>
-                </a:pPr>
-                <a:endParaRPr lang="en-US" dirty="0"/>
-              </a:p>
-              <a:p>
-                <a:pPr lvl="1"/>
-                <a:endParaRPr dirty="0"/>
-              </a:p>
-            </p:txBody>
-          </p:sp>
-        </mc:Choice>
-        <mc:Fallback xmlns="">
-          <p:sp>
-            <p:nvSpPr>
-              <p:cNvPr id="3" name="Content Placeholder 2">
-                <a:extLst>
-                  <a:ext uri="{FF2B5EF4-FFF2-40B4-BE49-F238E27FC236}">
-                    <a16:creationId xmlns:a16="http://schemas.microsoft.com/office/drawing/2014/main" id="{B27160E7-1674-F41A-2EC9-D8EC46BD8088}"/>
-                  </a:ext>
-                </a:extLst>
-              </p:cNvPr>
-              <p:cNvSpPr>
-                <a:spLocks noGrp="1" noRot="1" noChangeAspect="1" noMove="1" noResize="1" noEditPoints="1" noAdjustHandles="1" noChangeArrowheads="1" noChangeShapeType="1" noTextEdit="1"/>
-              </p:cNvSpPr>
-              <p:nvPr>
-                <p:ph idx="1"/>
-              </p:nvPr>
-            </p:nvSpPr>
-            <p:spPr>
-              <a:xfrm>
-                <a:off x="457200" y="1105408"/>
-                <a:ext cx="8229600" cy="3616959"/>
-              </a:xfrm>
-              <a:blipFill>
-                <a:blip r:embed="rId3"/>
-                <a:stretch>
-                  <a:fillRect l="-1111" t="-2357" r="-1630"/>
-                </a:stretch>
-              </a:blipFill>
-            </p:spPr>
-            <p:txBody>
-              <a:bodyPr/>
-              <a:lstStyle/>
-              <a:p>
-                <a:r>
-                  <a:rPr lang="en-US">
-                    <a:noFill/>
-                  </a:rPr>
-                  <a:t> </a:t>
-                </a:r>
-              </a:p>
-            </p:txBody>
-          </p:sp>
-        </mc:Fallback>
-      </mc:AlternateContent>
-    </p:spTree>
-    <p:extLst>
-      <p:ext uri="{BB962C8B-B14F-4D97-AF65-F5344CB8AC3E}">
-        <p14:creationId xmlns:p14="http://schemas.microsoft.com/office/powerpoint/2010/main" val="988074430"/>
-      </p:ext>
-    </p:extLst>
-  </p:cSld>
-  <p:clrMapOvr>
-    <a:masterClrMapping/>
-  </p:clrMapOvr>
-  <p:timing>
-    <p:tnLst>
-      <p:par>
-        <p:cTn id="1" dur="indefinite" restart="never" nodeType="tmRoot">
-          <p:childTnLst>
-            <p:seq concurrent="1" nextAc="seek">
-              <p:cTn id="2" dur="indefinite" nodeType="mainSeq">
-                <p:childTnLst>
-                  <p:par>
-                    <p:cTn id="3" fill="hold">
-                      <p:stCondLst>
-                        <p:cond delay="indefinite"/>
-                      </p:stCondLst>
-                      <p:childTnLst>
-                        <p:par>
-                          <p:cTn id="4" fill="hold">
-                            <p:stCondLst>
-                              <p:cond delay="0"/>
-                            </p:stCondLst>
-                            <p:childTnLst>
-                              <p:par>
-                                <p:cTn id="5" presetID="1" presetClass="entr" presetSubtype="0" fill="hold" nodeType="clickEffect">
-                                  <p:stCondLst>
-                                    <p:cond delay="0"/>
-                                  </p:stCondLst>
-                                  <p:childTnLst>
-                                    <p:set>
-                                      <p:cBhvr>
-                                        <p:cTn id="6" dur="1" fill="hold">
-                                          <p:stCondLst>
-                                            <p:cond delay="0"/>
-                                          </p:stCondLst>
-                                        </p:cTn>
-                                        <p:tgtEl>
-                                          <p:spTgt spid="3">
-                                            <p:txEl>
-                                              <p:pRg st="1" end="1"/>
-                                            </p:txEl>
-                                          </p:spTgt>
-                                        </p:tgtEl>
-                                        <p:attrNameLst>
-                                          <p:attrName>style.visibility</p:attrName>
-                                        </p:attrNameLst>
-                                      </p:cBhvr>
-                                      <p:to>
-                                        <p:strVal val="visible"/>
-                                      </p:to>
-                                    </p:set>
-                                  </p:childTnLst>
-                                </p:cTn>
-                              </p:par>
-                              <p:par>
-                                <p:cTn id="7" presetID="1" presetClass="entr" presetSubtype="0" fill="hold" nodeType="withEffect">
-                                  <p:stCondLst>
-                                    <p:cond delay="0"/>
-                                  </p:stCondLst>
-                                  <p:childTnLst>
-                                    <p:set>
-                                      <p:cBhvr>
-                                        <p:cTn id="8" dur="1" fill="hold">
-                                          <p:stCondLst>
-                                            <p:cond delay="0"/>
-                                          </p:stCondLst>
-                                        </p:cTn>
-                                        <p:tgtEl>
-                                          <p:spTgt spid="3">
-                                            <p:txEl>
-                                              <p:pRg st="2" end="2"/>
-                                            </p:txEl>
-                                          </p:spTgt>
-                                        </p:tgtEl>
-                                        <p:attrNameLst>
-                                          <p:attrName>style.visibility</p:attrName>
-                                        </p:attrNameLst>
-                                      </p:cBhvr>
-                                      <p:to>
-                                        <p:strVal val="visible"/>
-                                      </p:to>
-                                    </p:set>
-                                  </p:childTnLst>
-                                </p:cTn>
-                              </p:par>
-                            </p:childTnLst>
-                          </p:cTn>
-                        </p:par>
-                      </p:childTnLst>
-                    </p:cTn>
-                  </p:par>
-                  <p:par>
-                    <p:cTn id="9" fill="hold">
-                      <p:stCondLst>
-                        <p:cond delay="indefinite"/>
-                      </p:stCondLst>
-                      <p:childTnLst>
-                        <p:par>
-                          <p:cTn id="10" fill="hold">
-                            <p:stCondLst>
-                              <p:cond delay="0"/>
-                            </p:stCondLst>
-                            <p:childTnLst>
-                              <p:par>
-                                <p:cTn id="11" presetID="1" presetClass="entr" presetSubtype="0" fill="hold" nodeType="clickEffect">
-                                  <p:stCondLst>
-                                    <p:cond delay="0"/>
-                                  </p:stCondLst>
-                                  <p:childTnLst>
-                                    <p:set>
-                                      <p:cBhvr>
-                                        <p:cTn id="12" dur="1" fill="hold">
-                                          <p:stCondLst>
-                                            <p:cond delay="0"/>
-                                          </p:stCondLst>
-                                        </p:cTn>
-                                        <p:tgtEl>
-                                          <p:spTgt spid="3">
-                                            <p:txEl>
-                                              <p:pRg st="3" end="3"/>
-                                            </p:txEl>
-                                          </p:spTgt>
-                                        </p:tgtEl>
-                                        <p:attrNameLst>
-                                          <p:attrName>style.visibility</p:attrName>
-                                        </p:attrNameLst>
-                                      </p:cBhvr>
-                                      <p:to>
-                                        <p:strVal val="visible"/>
-                                      </p:to>
-                                    </p:set>
-                                  </p:childTnLst>
-                                </p:cTn>
-                              </p:par>
-                              <p:par>
-                                <p:cTn id="13" presetID="1" presetClass="entr" presetSubtype="0" fill="hold" nodeType="withEffect">
-                                  <p:stCondLst>
-                                    <p:cond delay="0"/>
-                                  </p:stCondLst>
-                                  <p:childTnLst>
-                                    <p:set>
-                                      <p:cBhvr>
-                                        <p:cTn id="14" dur="1" fill="hold">
-                                          <p:stCondLst>
-                                            <p:cond delay="0"/>
-                                          </p:stCondLst>
-                                        </p:cTn>
-                                        <p:tgtEl>
-                                          <p:spTgt spid="3">
-                                            <p:txEl>
-                                              <p:pRg st="4" end="4"/>
-                                            </p:txEl>
-                                          </p:spTgt>
-                                        </p:tgtEl>
-                                        <p:attrNameLst>
-                                          <p:attrName>style.visibility</p:attrName>
-                                        </p:attrNameLst>
-                                      </p:cBhvr>
-                                      <p:to>
-                                        <p:strVal val="visible"/>
-                                      </p:to>
-                                    </p:set>
-                                  </p:childTnLst>
-                                </p:cTn>
-                              </p:par>
-                            </p:childTnLst>
-                          </p:cTn>
-                        </p:par>
-                      </p:childTnLst>
-                    </p:cTn>
-                  </p:par>
-                </p:childTnLst>
-              </p:cTn>
-              <p:prevCondLst>
-                <p:cond evt="onPrev" delay="0">
-                  <p:tgtEl>
-                    <p:sldTgt/>
-                  </p:tgtEl>
-                </p:cond>
-              </p:prevCondLst>
-              <p:nextCondLst>
-                <p:cond evt="onNext" delay="0">
-                  <p:tgtEl>
-                    <p:sldTgt/>
-                  </p:tgtEl>
-                </p:cond>
-              </p:nextCondLst>
-            </p:seq>
-          </p:childTnLst>
-        </p:cTn>
-      </p:par>
-    </p:tnLst>
-  </p:timing>
-</p:sld>
-</file>
-
-<file path=ppt/slides/slide25.xml><?xml version="1.0" encoding="utf-8"?>
 <p:sld xmlns:a="http://schemas.openxmlformats.org/drawingml/2006/main" xmlns:r="http://schemas.openxmlformats.org/officeDocument/2006/relationships" xmlns:p="http://schemas.openxmlformats.org/presentationml/2006/main">
   <p:cSld>
     <p:spTree>
@@ -12068,6 +11122,7 @@
                           <m:ctrlPr>
                             <a:rPr lang="en-US" b="0" i="1" smtClean="0">
                               <a:latin typeface="Cambria Math" panose="02040503050406030204" pitchFamily="18" charset="0"/>
+                              <a:ea typeface="Cambria Math" panose="02040503050406030204" pitchFamily="18" charset="0"/>
                             </a:rPr>
                           </m:ctrlPr>
                         </m:fPr>
@@ -12261,6 +11316,7 @@
                                     <m:ctrlPr>
                                       <a:rPr lang="en-US" i="1">
                                         <a:latin typeface="Cambria Math" panose="02040503050406030204" pitchFamily="18" charset="0"/>
+                                        <a:ea typeface="Cambria Math" panose="02040503050406030204" pitchFamily="18" charset="0"/>
                                       </a:rPr>
                                     </m:ctrlPr>
                                   </m:fPr>
@@ -12386,6 +11442,7 @@
                                   <m:ctrlPr>
                                     <a:rPr lang="en-US" i="1">
                                       <a:latin typeface="Cambria Math" panose="02040503050406030204" pitchFamily="18" charset="0"/>
+                                      <a:ea typeface="Cambria Math" panose="02040503050406030204" pitchFamily="18" charset="0"/>
                                     </a:rPr>
                                   </m:ctrlPr>
                                 </m:fPr>
@@ -12484,6 +11541,7 @@
                                   <m:ctrlPr>
                                     <a:rPr lang="en-US" i="1">
                                       <a:latin typeface="Cambria Math" panose="02040503050406030204" pitchFamily="18" charset="0"/>
+                                      <a:ea typeface="Cambria Math" panose="02040503050406030204" pitchFamily="18" charset="0"/>
                                     </a:rPr>
                                   </m:ctrlPr>
                                 </m:fPr>
@@ -12556,6 +11614,7 @@
                               <m:ctrlPr>
                                 <a:rPr lang="en-US" i="1">
                                   <a:latin typeface="Cambria Math" panose="02040503050406030204" pitchFamily="18" charset="0"/>
+                                  <a:ea typeface="Cambria Math" panose="02040503050406030204" pitchFamily="18" charset="0"/>
                                 </a:rPr>
                               </m:ctrlPr>
                             </m:fPr>
@@ -12705,7 +11764,7 @@
 </p:sld>
 </file>
 
-<file path=ppt/slides/slide26.xml><?xml version="1.0" encoding="utf-8"?>
+<file path=ppt/slides/slide25.xml><?xml version="1.0" encoding="utf-8"?>
 <p:sld xmlns:a="http://schemas.openxmlformats.org/drawingml/2006/main" xmlns:r="http://schemas.openxmlformats.org/officeDocument/2006/relationships" xmlns:p="http://schemas.openxmlformats.org/presentationml/2006/main">
   <p:cSld>
     <p:spTree>
@@ -12991,6 +12050,7 @@
                           <m:ctrlPr>
                             <a:rPr lang="en-US" b="0" i="1" smtClean="0">
                               <a:latin typeface="Cambria Math" panose="02040503050406030204" pitchFamily="18" charset="0"/>
+                              <a:ea typeface="Cambria Math" panose="02040503050406030204" pitchFamily="18" charset="0"/>
                             </a:rPr>
                           </m:ctrlPr>
                         </m:fPr>
@@ -13399,7 +12459,7 @@
 </p:sld>
 </file>
 
-<file path=ppt/slides/slide27.xml><?xml version="1.0" encoding="utf-8"?>
+<file path=ppt/slides/slide26.xml><?xml version="1.0" encoding="utf-8"?>
 <p:sld xmlns:a="http://schemas.openxmlformats.org/drawingml/2006/main" xmlns:r="http://schemas.openxmlformats.org/officeDocument/2006/relationships" xmlns:p="http://schemas.openxmlformats.org/presentationml/2006/main">
   <p:cSld>
     <p:spTree>
@@ -13873,7 +12933,7 @@
 </p:sld>
 </file>
 
-<file path=ppt/slides/slide28.xml><?xml version="1.0" encoding="utf-8"?>
+<file path=ppt/slides/slide27.xml><?xml version="1.0" encoding="utf-8"?>
 <p:sld xmlns:a="http://schemas.openxmlformats.org/drawingml/2006/main" xmlns:r="http://schemas.openxmlformats.org/officeDocument/2006/relationships" xmlns:p="http://schemas.openxmlformats.org/presentationml/2006/main">
   <p:cSld>
     <p:spTree>
@@ -14534,7 +13594,7 @@
 </p:sld>
 </file>
 
-<file path=ppt/slides/slide29.xml><?xml version="1.0" encoding="utf-8"?>
+<file path=ppt/slides/slide28.xml><?xml version="1.0" encoding="utf-8"?>
 <p:sld xmlns:a="http://schemas.openxmlformats.org/drawingml/2006/main" xmlns:r="http://schemas.openxmlformats.org/officeDocument/2006/relationships" xmlns:p="http://schemas.openxmlformats.org/presentationml/2006/main">
   <p:cSld>
     <p:spTree>
@@ -15267,6 +14327,447 @@
 </p:sld>
 </file>
 
+<file path=ppt/slides/slide29.xml><?xml version="1.0" encoding="utf-8"?>
+<p:sld xmlns:a="http://schemas.openxmlformats.org/drawingml/2006/main" xmlns:r="http://schemas.openxmlformats.org/officeDocument/2006/relationships" xmlns:p="http://schemas.openxmlformats.org/presentationml/2006/main">
+  <p:cSld>
+    <p:spTree>
+      <p:nvGrpSpPr>
+        <p:cNvPr id="1" name="">
+          <a:extLst>
+            <a:ext uri="{FF2B5EF4-FFF2-40B4-BE49-F238E27FC236}">
+              <a16:creationId xmlns:a16="http://schemas.microsoft.com/office/drawing/2014/main" id="{0B7AE21E-FA0D-ED24-47F8-1E46927A3410}"/>
+            </a:ext>
+          </a:extLst>
+        </p:cNvPr>
+        <p:cNvGrpSpPr/>
+        <p:nvPr/>
+      </p:nvGrpSpPr>
+      <p:grpSpPr>
+        <a:xfrm>
+          <a:off x="0" y="0"/>
+          <a:ext cx="0" cy="0"/>
+          <a:chOff x="0" y="0"/>
+          <a:chExt cx="0" cy="0"/>
+        </a:xfrm>
+      </p:grpSpPr>
+      <p:sp>
+        <p:nvSpPr>
+          <p:cNvPr id="2" name="Title 1">
+            <a:extLst>
+              <a:ext uri="{FF2B5EF4-FFF2-40B4-BE49-F238E27FC236}">
+                <a16:creationId xmlns:a16="http://schemas.microsoft.com/office/drawing/2014/main" id="{5E7892C8-0A70-0F50-73AA-664033EB1959}"/>
+              </a:ext>
+            </a:extLst>
+          </p:cNvPr>
+          <p:cNvSpPr>
+            <a:spLocks noGrp="1"/>
+          </p:cNvSpPr>
+          <p:nvPr>
+            <p:ph type="title"/>
+          </p:nvPr>
+        </p:nvSpPr>
+        <p:spPr>
+          <a:xfrm>
+            <a:off x="457201" y="204787"/>
+            <a:ext cx="8441574" cy="451918"/>
+          </a:xfrm>
+        </p:spPr>
+        <p:txBody>
+          <a:bodyPr>
+            <a:noAutofit/>
+          </a:bodyPr>
+          <a:lstStyle/>
+          <a:p>
+            <a:pPr marL="0" lvl="0" indent="0" algn="ctr">
+              <a:buNone/>
+            </a:pPr>
+            <a:r>
+              <a:rPr lang="en-US" sz="3200" b="0" dirty="0"/>
+              <a:t>Example: Zero-Inflated Poisson Regression</a:t>
+            </a:r>
+            <a:endParaRPr sz="3200" b="0" dirty="0"/>
+          </a:p>
+        </p:txBody>
+      </p:sp>
+      <p:sp>
+        <p:nvSpPr>
+          <p:cNvPr id="4" name="Text Placeholder 3">
+            <a:extLst>
+              <a:ext uri="{FF2B5EF4-FFF2-40B4-BE49-F238E27FC236}">
+                <a16:creationId xmlns:a16="http://schemas.microsoft.com/office/drawing/2014/main" id="{D6E7B798-D7EA-4958-6E54-8FA77CBF9F8C}"/>
+              </a:ext>
+            </a:extLst>
+          </p:cNvPr>
+          <p:cNvSpPr>
+            <a:spLocks noGrp="1"/>
+          </p:cNvSpPr>
+          <p:nvPr>
+            <p:ph type="body" sz="half" idx="2"/>
+          </p:nvPr>
+        </p:nvSpPr>
+        <p:spPr>
+          <a:xfrm>
+            <a:off x="457201" y="1995055"/>
+            <a:ext cx="3871650" cy="2685011"/>
+          </a:xfrm>
+        </p:spPr>
+        <p:txBody>
+          <a:bodyPr>
+            <a:normAutofit lnSpcReduction="10000"/>
+          </a:bodyPr>
+          <a:lstStyle/>
+          <a:p>
+            <a:pPr marL="0" lvl="0" indent="0">
+              <a:buNone/>
+            </a:pPr>
+            <a:r>
+              <a:rPr sz="2000" dirty="0"/>
+              <a:t>Example: </a:t>
+            </a:r>
+            <a:r>
+              <a:rPr lang="en-US" sz="2000" dirty="0"/>
+              <a:t>model for fish caught by parties visiting a park</a:t>
+            </a:r>
+          </a:p>
+          <a:p>
+            <a:pPr marL="342900" lvl="0" indent="-342900">
+              <a:buFont typeface="Arial" panose="020B0604020202020204" pitchFamily="34" charset="0"/>
+              <a:buChar char="•"/>
+            </a:pPr>
+            <a:r>
+              <a:rPr lang="en-US" sz="2000" dirty="0"/>
+              <a:t>The distribution is zero inflated, many parties do not catch any fish</a:t>
+            </a:r>
+          </a:p>
+          <a:p>
+            <a:pPr marL="342900" lvl="0" indent="-342900">
+              <a:buFont typeface="Arial" panose="020B0604020202020204" pitchFamily="34" charset="0"/>
+              <a:buChar char="•"/>
+            </a:pPr>
+            <a:r>
+              <a:rPr lang="en-US" sz="2000" dirty="0"/>
+              <a:t>There is a strong right skew, some parties catch large numbers of fish – </a:t>
+            </a:r>
+            <a:r>
+              <a:rPr lang="en-US" sz="2000" b="1" dirty="0"/>
+              <a:t>over-dispersion!</a:t>
+            </a:r>
+          </a:p>
+        </p:txBody>
+      </p:sp>
+      <p:pic>
+        <p:nvPicPr>
+          <p:cNvPr id="6" name="Picture 5">
+            <a:extLst>
+              <a:ext uri="{FF2B5EF4-FFF2-40B4-BE49-F238E27FC236}">
+                <a16:creationId xmlns:a16="http://schemas.microsoft.com/office/drawing/2014/main" id="{1B5E8469-02D9-A783-1EFB-74AB523C7426}"/>
+              </a:ext>
+            </a:extLst>
+          </p:cNvPr>
+          <p:cNvPicPr>
+            <a:picLocks noChangeAspect="1"/>
+          </p:cNvPicPr>
+          <p:nvPr/>
+        </p:nvPicPr>
+        <p:blipFill>
+          <a:blip r:embed="rId2"/>
+          <a:stretch>
+            <a:fillRect/>
+          </a:stretch>
+        </p:blipFill>
+        <p:spPr>
+          <a:xfrm>
+            <a:off x="4355869" y="1512916"/>
+            <a:ext cx="4729701" cy="3058181"/>
+          </a:xfrm>
+          <a:prstGeom prst="rect">
+            <a:avLst/>
+          </a:prstGeom>
+        </p:spPr>
+      </p:pic>
+      <p:cxnSp>
+        <p:nvCxnSpPr>
+          <p:cNvPr id="3" name="Straight Arrow Connector 2">
+            <a:extLst>
+              <a:ext uri="{FF2B5EF4-FFF2-40B4-BE49-F238E27FC236}">
+                <a16:creationId xmlns:a16="http://schemas.microsoft.com/office/drawing/2014/main" id="{A95693FF-EB30-0F9D-74A8-44D2DBEC16AD}"/>
+              </a:ext>
+            </a:extLst>
+          </p:cNvPr>
+          <p:cNvCxnSpPr>
+            <a:cxnSpLocks/>
+          </p:cNvCxnSpPr>
+          <p:nvPr/>
+        </p:nvCxnSpPr>
+        <p:spPr>
+          <a:xfrm>
+            <a:off x="4060767" y="3125585"/>
+            <a:ext cx="910244" cy="336666"/>
+          </a:xfrm>
+          <a:prstGeom prst="straightConnector1">
+            <a:avLst/>
+          </a:prstGeom>
+          <a:ln w="38100">
+            <a:solidFill>
+              <a:srgbClr val="C00000"/>
+            </a:solidFill>
+            <a:tailEnd type="triangle"/>
+          </a:ln>
+        </p:spPr>
+        <p:style>
+          <a:lnRef idx="2">
+            <a:schemeClr val="accent1"/>
+          </a:lnRef>
+          <a:fillRef idx="0">
+            <a:schemeClr val="accent1"/>
+          </a:fillRef>
+          <a:effectRef idx="1">
+            <a:schemeClr val="accent1"/>
+          </a:effectRef>
+          <a:fontRef idx="minor">
+            <a:schemeClr val="tx1"/>
+          </a:fontRef>
+        </p:style>
+      </p:cxnSp>
+      <p:cxnSp>
+        <p:nvCxnSpPr>
+          <p:cNvPr id="8" name="Straight Arrow Connector 7">
+            <a:extLst>
+              <a:ext uri="{FF2B5EF4-FFF2-40B4-BE49-F238E27FC236}">
+                <a16:creationId xmlns:a16="http://schemas.microsoft.com/office/drawing/2014/main" id="{C202D0DE-1B74-3843-2A04-E924FE113FDA}"/>
+              </a:ext>
+            </a:extLst>
+          </p:cNvPr>
+          <p:cNvCxnSpPr>
+            <a:cxnSpLocks/>
+          </p:cNvCxnSpPr>
+          <p:nvPr/>
+        </p:nvCxnSpPr>
+        <p:spPr>
+          <a:xfrm>
+            <a:off x="3167149" y="4443153"/>
+            <a:ext cx="3133898" cy="0"/>
+          </a:xfrm>
+          <a:prstGeom prst="straightConnector1">
+            <a:avLst/>
+          </a:prstGeom>
+          <a:ln w="38100">
+            <a:solidFill>
+              <a:srgbClr val="C00000"/>
+            </a:solidFill>
+            <a:tailEnd type="triangle"/>
+          </a:ln>
+        </p:spPr>
+        <p:style>
+          <a:lnRef idx="2">
+            <a:schemeClr val="accent1"/>
+          </a:lnRef>
+          <a:fillRef idx="0">
+            <a:schemeClr val="accent1"/>
+          </a:fillRef>
+          <a:effectRef idx="1">
+            <a:schemeClr val="accent1"/>
+          </a:effectRef>
+          <a:fontRef idx="minor">
+            <a:schemeClr val="tx1"/>
+          </a:fontRef>
+        </p:style>
+      </p:cxnSp>
+    </p:spTree>
+    <p:extLst>
+      <p:ext uri="{BB962C8B-B14F-4D97-AF65-F5344CB8AC3E}">
+        <p14:creationId xmlns:p14="http://schemas.microsoft.com/office/powerpoint/2010/main" val="2527211815"/>
+      </p:ext>
+    </p:extLst>
+  </p:cSld>
+  <p:clrMapOvr>
+    <a:masterClrMapping/>
+  </p:clrMapOvr>
+  <p:timing>
+    <p:tnLst>
+      <p:par>
+        <p:cTn id="1" dur="indefinite" restart="never" nodeType="tmRoot">
+          <p:childTnLst>
+            <p:seq concurrent="1" nextAc="seek">
+              <p:cTn id="2" dur="indefinite" nodeType="mainSeq">
+                <p:childTnLst>
+                  <p:par>
+                    <p:cTn id="3" fill="hold">
+                      <p:stCondLst>
+                        <p:cond delay="indefinite"/>
+                      </p:stCondLst>
+                      <p:childTnLst>
+                        <p:par>
+                          <p:cTn id="4" fill="hold">
+                            <p:stCondLst>
+                              <p:cond delay="0"/>
+                            </p:stCondLst>
+                            <p:childTnLst>
+                              <p:par>
+                                <p:cTn id="5" presetID="1" presetClass="entr" presetSubtype="0" fill="hold" nodeType="clickEffect">
+                                  <p:stCondLst>
+                                    <p:cond delay="0"/>
+                                  </p:stCondLst>
+                                  <p:childTnLst>
+                                    <p:set>
+                                      <p:cBhvr>
+                                        <p:cTn id="6" dur="1" fill="hold">
+                                          <p:stCondLst>
+                                            <p:cond delay="0"/>
+                                          </p:stCondLst>
+                                        </p:cTn>
+                                        <p:tgtEl>
+                                          <p:spTgt spid="4">
+                                            <p:txEl>
+                                              <p:pRg st="1" end="1"/>
+                                            </p:txEl>
+                                          </p:spTgt>
+                                        </p:tgtEl>
+                                        <p:attrNameLst>
+                                          <p:attrName>style.visibility</p:attrName>
+                                        </p:attrNameLst>
+                                      </p:cBhvr>
+                                      <p:to>
+                                        <p:strVal val="visible"/>
+                                      </p:to>
+                                    </p:set>
+                                  </p:childTnLst>
+                                </p:cTn>
+                              </p:par>
+                              <p:par>
+                                <p:cTn id="7" presetID="1" presetClass="entr" presetSubtype="0" fill="hold" nodeType="withEffect">
+                                  <p:stCondLst>
+                                    <p:cond delay="0"/>
+                                  </p:stCondLst>
+                                  <p:childTnLst>
+                                    <p:set>
+                                      <p:cBhvr>
+                                        <p:cTn id="8" dur="1" fill="hold">
+                                          <p:stCondLst>
+                                            <p:cond delay="0"/>
+                                          </p:stCondLst>
+                                        </p:cTn>
+                                        <p:tgtEl>
+                                          <p:spTgt spid="3"/>
+                                        </p:tgtEl>
+                                        <p:attrNameLst>
+                                          <p:attrName>style.visibility</p:attrName>
+                                        </p:attrNameLst>
+                                      </p:cBhvr>
+                                      <p:to>
+                                        <p:strVal val="visible"/>
+                                      </p:to>
+                                    </p:set>
+                                  </p:childTnLst>
+                                </p:cTn>
+                              </p:par>
+                            </p:childTnLst>
+                          </p:cTn>
+                        </p:par>
+                      </p:childTnLst>
+                    </p:cTn>
+                  </p:par>
+                  <p:par>
+                    <p:cTn id="9" fill="hold">
+                      <p:stCondLst>
+                        <p:cond delay="indefinite"/>
+                      </p:stCondLst>
+                      <p:childTnLst>
+                        <p:par>
+                          <p:cTn id="10" fill="hold">
+                            <p:stCondLst>
+                              <p:cond delay="0"/>
+                            </p:stCondLst>
+                            <p:childTnLst>
+                              <p:par>
+                                <p:cTn id="11" presetID="1" presetClass="entr" presetSubtype="0" fill="hold" nodeType="clickEffect">
+                                  <p:stCondLst>
+                                    <p:cond delay="0"/>
+                                  </p:stCondLst>
+                                  <p:childTnLst>
+                                    <p:set>
+                                      <p:cBhvr>
+                                        <p:cTn id="12" dur="1" fill="hold">
+                                          <p:stCondLst>
+                                            <p:cond delay="0"/>
+                                          </p:stCondLst>
+                                        </p:cTn>
+                                        <p:tgtEl>
+                                          <p:spTgt spid="4">
+                                            <p:txEl>
+                                              <p:pRg st="2" end="2"/>
+                                            </p:txEl>
+                                          </p:spTgt>
+                                        </p:tgtEl>
+                                        <p:attrNameLst>
+                                          <p:attrName>style.visibility</p:attrName>
+                                        </p:attrNameLst>
+                                      </p:cBhvr>
+                                      <p:to>
+                                        <p:strVal val="visible"/>
+                                      </p:to>
+                                    </p:set>
+                                  </p:childTnLst>
+                                </p:cTn>
+                              </p:par>
+                              <p:par>
+                                <p:cTn id="13" presetID="1" presetClass="entr" presetSubtype="0" fill="hold" nodeType="withEffect">
+                                  <p:stCondLst>
+                                    <p:cond delay="0"/>
+                                  </p:stCondLst>
+                                  <p:childTnLst>
+                                    <p:set>
+                                      <p:cBhvr>
+                                        <p:cTn id="14" dur="1" fill="hold">
+                                          <p:stCondLst>
+                                            <p:cond delay="0"/>
+                                          </p:stCondLst>
+                                        </p:cTn>
+                                        <p:tgtEl>
+                                          <p:spTgt spid="8"/>
+                                        </p:tgtEl>
+                                        <p:attrNameLst>
+                                          <p:attrName>style.visibility</p:attrName>
+                                        </p:attrNameLst>
+                                      </p:cBhvr>
+                                      <p:to>
+                                        <p:strVal val="visible"/>
+                                      </p:to>
+                                    </p:set>
+                                  </p:childTnLst>
+                                </p:cTn>
+                              </p:par>
+                            </p:childTnLst>
+                          </p:cTn>
+                        </p:par>
+                      </p:childTnLst>
+                    </p:cTn>
+                  </p:par>
+                </p:childTnLst>
+              </p:cTn>
+              <p:prevCondLst>
+                <p:cond evt="onPrev" delay="0">
+                  <p:tgtEl>
+                    <p:sldTgt/>
+                  </p:tgtEl>
+                </p:cond>
+              </p:prevCondLst>
+              <p:nextCondLst>
+                <p:cond evt="onNext" delay="0">
+                  <p:tgtEl>
+                    <p:sldTgt/>
+                  </p:tgtEl>
+                </p:cond>
+              </p:nextCondLst>
+            </p:seq>
+          </p:childTnLst>
+        </p:cTn>
+      </p:par>
+    </p:tnLst>
+  </p:timing>
+</p:sld>
+</file>
+
 <file path=ppt/slides/slide3.xml><?xml version="1.0" encoding="utf-8"?>
 <p:sld xmlns:a="http://schemas.openxmlformats.org/drawingml/2006/main" xmlns:r="http://schemas.openxmlformats.org/officeDocument/2006/relationships" xmlns:p="http://schemas.openxmlformats.org/presentationml/2006/main">
   <p:cSld>
@@ -15940,447 +15441,6 @@
 </file>
 
 <file path=ppt/slides/slide30.xml><?xml version="1.0" encoding="utf-8"?>
-<p:sld xmlns:a="http://schemas.openxmlformats.org/drawingml/2006/main" xmlns:r="http://schemas.openxmlformats.org/officeDocument/2006/relationships" xmlns:p="http://schemas.openxmlformats.org/presentationml/2006/main">
-  <p:cSld>
-    <p:spTree>
-      <p:nvGrpSpPr>
-        <p:cNvPr id="1" name="">
-          <a:extLst>
-            <a:ext uri="{FF2B5EF4-FFF2-40B4-BE49-F238E27FC236}">
-              <a16:creationId xmlns:a16="http://schemas.microsoft.com/office/drawing/2014/main" id="{0B7AE21E-FA0D-ED24-47F8-1E46927A3410}"/>
-            </a:ext>
-          </a:extLst>
-        </p:cNvPr>
-        <p:cNvGrpSpPr/>
-        <p:nvPr/>
-      </p:nvGrpSpPr>
-      <p:grpSpPr>
-        <a:xfrm>
-          <a:off x="0" y="0"/>
-          <a:ext cx="0" cy="0"/>
-          <a:chOff x="0" y="0"/>
-          <a:chExt cx="0" cy="0"/>
-        </a:xfrm>
-      </p:grpSpPr>
-      <p:sp>
-        <p:nvSpPr>
-          <p:cNvPr id="2" name="Title 1">
-            <a:extLst>
-              <a:ext uri="{FF2B5EF4-FFF2-40B4-BE49-F238E27FC236}">
-                <a16:creationId xmlns:a16="http://schemas.microsoft.com/office/drawing/2014/main" id="{5E7892C8-0A70-0F50-73AA-664033EB1959}"/>
-              </a:ext>
-            </a:extLst>
-          </p:cNvPr>
-          <p:cNvSpPr>
-            <a:spLocks noGrp="1"/>
-          </p:cNvSpPr>
-          <p:nvPr>
-            <p:ph type="title"/>
-          </p:nvPr>
-        </p:nvSpPr>
-        <p:spPr>
-          <a:xfrm>
-            <a:off x="457201" y="204787"/>
-            <a:ext cx="8441574" cy="451918"/>
-          </a:xfrm>
-        </p:spPr>
-        <p:txBody>
-          <a:bodyPr>
-            <a:noAutofit/>
-          </a:bodyPr>
-          <a:lstStyle/>
-          <a:p>
-            <a:pPr marL="0" lvl="0" indent="0" algn="ctr">
-              <a:buNone/>
-            </a:pPr>
-            <a:r>
-              <a:rPr lang="en-US" sz="3200" b="0" dirty="0"/>
-              <a:t>Example: Zero-Inflated Poisson Regression</a:t>
-            </a:r>
-            <a:endParaRPr sz="3200" b="0" dirty="0"/>
-          </a:p>
-        </p:txBody>
-      </p:sp>
-      <p:sp>
-        <p:nvSpPr>
-          <p:cNvPr id="4" name="Text Placeholder 3">
-            <a:extLst>
-              <a:ext uri="{FF2B5EF4-FFF2-40B4-BE49-F238E27FC236}">
-                <a16:creationId xmlns:a16="http://schemas.microsoft.com/office/drawing/2014/main" id="{D6E7B798-D7EA-4958-6E54-8FA77CBF9F8C}"/>
-              </a:ext>
-            </a:extLst>
-          </p:cNvPr>
-          <p:cNvSpPr>
-            <a:spLocks noGrp="1"/>
-          </p:cNvSpPr>
-          <p:nvPr>
-            <p:ph type="body" sz="half" idx="2"/>
-          </p:nvPr>
-        </p:nvSpPr>
-        <p:spPr>
-          <a:xfrm>
-            <a:off x="457201" y="1995055"/>
-            <a:ext cx="3871650" cy="2685011"/>
-          </a:xfrm>
-        </p:spPr>
-        <p:txBody>
-          <a:bodyPr>
-            <a:normAutofit lnSpcReduction="10000"/>
-          </a:bodyPr>
-          <a:lstStyle/>
-          <a:p>
-            <a:pPr marL="0" lvl="0" indent="0">
-              <a:buNone/>
-            </a:pPr>
-            <a:r>
-              <a:rPr sz="2000" dirty="0"/>
-              <a:t>Example: </a:t>
-            </a:r>
-            <a:r>
-              <a:rPr lang="en-US" sz="2000" dirty="0"/>
-              <a:t>model for fish caught by parties visiting a park</a:t>
-            </a:r>
-          </a:p>
-          <a:p>
-            <a:pPr marL="342900" lvl="0" indent="-342900">
-              <a:buFont typeface="Arial" panose="020B0604020202020204" pitchFamily="34" charset="0"/>
-              <a:buChar char="•"/>
-            </a:pPr>
-            <a:r>
-              <a:rPr lang="en-US" sz="2000" dirty="0"/>
-              <a:t>The distribution is zero inflated, many parties do not catch any fish</a:t>
-            </a:r>
-          </a:p>
-          <a:p>
-            <a:pPr marL="342900" lvl="0" indent="-342900">
-              <a:buFont typeface="Arial" panose="020B0604020202020204" pitchFamily="34" charset="0"/>
-              <a:buChar char="•"/>
-            </a:pPr>
-            <a:r>
-              <a:rPr lang="en-US" sz="2000" dirty="0"/>
-              <a:t>There is a strong right skew, some parties catch large numbers of fish – </a:t>
-            </a:r>
-            <a:r>
-              <a:rPr lang="en-US" sz="2000" b="1" dirty="0"/>
-              <a:t>over-dispersion!</a:t>
-            </a:r>
-          </a:p>
-        </p:txBody>
-      </p:sp>
-      <p:pic>
-        <p:nvPicPr>
-          <p:cNvPr id="6" name="Picture 5">
-            <a:extLst>
-              <a:ext uri="{FF2B5EF4-FFF2-40B4-BE49-F238E27FC236}">
-                <a16:creationId xmlns:a16="http://schemas.microsoft.com/office/drawing/2014/main" id="{1B5E8469-02D9-A783-1EFB-74AB523C7426}"/>
-              </a:ext>
-            </a:extLst>
-          </p:cNvPr>
-          <p:cNvPicPr>
-            <a:picLocks noChangeAspect="1"/>
-          </p:cNvPicPr>
-          <p:nvPr/>
-        </p:nvPicPr>
-        <p:blipFill>
-          <a:blip r:embed="rId2"/>
-          <a:stretch>
-            <a:fillRect/>
-          </a:stretch>
-        </p:blipFill>
-        <p:spPr>
-          <a:xfrm>
-            <a:off x="4355869" y="1512916"/>
-            <a:ext cx="4729701" cy="3058181"/>
-          </a:xfrm>
-          <a:prstGeom prst="rect">
-            <a:avLst/>
-          </a:prstGeom>
-        </p:spPr>
-      </p:pic>
-      <p:cxnSp>
-        <p:nvCxnSpPr>
-          <p:cNvPr id="3" name="Straight Arrow Connector 2">
-            <a:extLst>
-              <a:ext uri="{FF2B5EF4-FFF2-40B4-BE49-F238E27FC236}">
-                <a16:creationId xmlns:a16="http://schemas.microsoft.com/office/drawing/2014/main" id="{A95693FF-EB30-0F9D-74A8-44D2DBEC16AD}"/>
-              </a:ext>
-            </a:extLst>
-          </p:cNvPr>
-          <p:cNvCxnSpPr>
-            <a:cxnSpLocks/>
-          </p:cNvCxnSpPr>
-          <p:nvPr/>
-        </p:nvCxnSpPr>
-        <p:spPr>
-          <a:xfrm>
-            <a:off x="4060767" y="3125585"/>
-            <a:ext cx="910244" cy="336666"/>
-          </a:xfrm>
-          <a:prstGeom prst="straightConnector1">
-            <a:avLst/>
-          </a:prstGeom>
-          <a:ln w="38100">
-            <a:solidFill>
-              <a:srgbClr val="C00000"/>
-            </a:solidFill>
-            <a:tailEnd type="triangle"/>
-          </a:ln>
-        </p:spPr>
-        <p:style>
-          <a:lnRef idx="2">
-            <a:schemeClr val="accent1"/>
-          </a:lnRef>
-          <a:fillRef idx="0">
-            <a:schemeClr val="accent1"/>
-          </a:fillRef>
-          <a:effectRef idx="1">
-            <a:schemeClr val="accent1"/>
-          </a:effectRef>
-          <a:fontRef idx="minor">
-            <a:schemeClr val="tx1"/>
-          </a:fontRef>
-        </p:style>
-      </p:cxnSp>
-      <p:cxnSp>
-        <p:nvCxnSpPr>
-          <p:cNvPr id="8" name="Straight Arrow Connector 7">
-            <a:extLst>
-              <a:ext uri="{FF2B5EF4-FFF2-40B4-BE49-F238E27FC236}">
-                <a16:creationId xmlns:a16="http://schemas.microsoft.com/office/drawing/2014/main" id="{C202D0DE-1B74-3843-2A04-E924FE113FDA}"/>
-              </a:ext>
-            </a:extLst>
-          </p:cNvPr>
-          <p:cNvCxnSpPr>
-            <a:cxnSpLocks/>
-          </p:cNvCxnSpPr>
-          <p:nvPr/>
-        </p:nvCxnSpPr>
-        <p:spPr>
-          <a:xfrm>
-            <a:off x="3167149" y="4443153"/>
-            <a:ext cx="3133898" cy="0"/>
-          </a:xfrm>
-          <a:prstGeom prst="straightConnector1">
-            <a:avLst/>
-          </a:prstGeom>
-          <a:ln w="38100">
-            <a:solidFill>
-              <a:srgbClr val="C00000"/>
-            </a:solidFill>
-            <a:tailEnd type="triangle"/>
-          </a:ln>
-        </p:spPr>
-        <p:style>
-          <a:lnRef idx="2">
-            <a:schemeClr val="accent1"/>
-          </a:lnRef>
-          <a:fillRef idx="0">
-            <a:schemeClr val="accent1"/>
-          </a:fillRef>
-          <a:effectRef idx="1">
-            <a:schemeClr val="accent1"/>
-          </a:effectRef>
-          <a:fontRef idx="minor">
-            <a:schemeClr val="tx1"/>
-          </a:fontRef>
-        </p:style>
-      </p:cxnSp>
-    </p:spTree>
-    <p:extLst>
-      <p:ext uri="{BB962C8B-B14F-4D97-AF65-F5344CB8AC3E}">
-        <p14:creationId xmlns:p14="http://schemas.microsoft.com/office/powerpoint/2010/main" val="2527211815"/>
-      </p:ext>
-    </p:extLst>
-  </p:cSld>
-  <p:clrMapOvr>
-    <a:masterClrMapping/>
-  </p:clrMapOvr>
-  <p:timing>
-    <p:tnLst>
-      <p:par>
-        <p:cTn id="1" dur="indefinite" restart="never" nodeType="tmRoot">
-          <p:childTnLst>
-            <p:seq concurrent="1" nextAc="seek">
-              <p:cTn id="2" dur="indefinite" nodeType="mainSeq">
-                <p:childTnLst>
-                  <p:par>
-                    <p:cTn id="3" fill="hold">
-                      <p:stCondLst>
-                        <p:cond delay="indefinite"/>
-                      </p:stCondLst>
-                      <p:childTnLst>
-                        <p:par>
-                          <p:cTn id="4" fill="hold">
-                            <p:stCondLst>
-                              <p:cond delay="0"/>
-                            </p:stCondLst>
-                            <p:childTnLst>
-                              <p:par>
-                                <p:cTn id="5" presetID="1" presetClass="entr" presetSubtype="0" fill="hold" nodeType="clickEffect">
-                                  <p:stCondLst>
-                                    <p:cond delay="0"/>
-                                  </p:stCondLst>
-                                  <p:childTnLst>
-                                    <p:set>
-                                      <p:cBhvr>
-                                        <p:cTn id="6" dur="1" fill="hold">
-                                          <p:stCondLst>
-                                            <p:cond delay="0"/>
-                                          </p:stCondLst>
-                                        </p:cTn>
-                                        <p:tgtEl>
-                                          <p:spTgt spid="4">
-                                            <p:txEl>
-                                              <p:pRg st="1" end="1"/>
-                                            </p:txEl>
-                                          </p:spTgt>
-                                        </p:tgtEl>
-                                        <p:attrNameLst>
-                                          <p:attrName>style.visibility</p:attrName>
-                                        </p:attrNameLst>
-                                      </p:cBhvr>
-                                      <p:to>
-                                        <p:strVal val="visible"/>
-                                      </p:to>
-                                    </p:set>
-                                  </p:childTnLst>
-                                </p:cTn>
-                              </p:par>
-                              <p:par>
-                                <p:cTn id="7" presetID="1" presetClass="entr" presetSubtype="0" fill="hold" nodeType="withEffect">
-                                  <p:stCondLst>
-                                    <p:cond delay="0"/>
-                                  </p:stCondLst>
-                                  <p:childTnLst>
-                                    <p:set>
-                                      <p:cBhvr>
-                                        <p:cTn id="8" dur="1" fill="hold">
-                                          <p:stCondLst>
-                                            <p:cond delay="0"/>
-                                          </p:stCondLst>
-                                        </p:cTn>
-                                        <p:tgtEl>
-                                          <p:spTgt spid="3"/>
-                                        </p:tgtEl>
-                                        <p:attrNameLst>
-                                          <p:attrName>style.visibility</p:attrName>
-                                        </p:attrNameLst>
-                                      </p:cBhvr>
-                                      <p:to>
-                                        <p:strVal val="visible"/>
-                                      </p:to>
-                                    </p:set>
-                                  </p:childTnLst>
-                                </p:cTn>
-                              </p:par>
-                            </p:childTnLst>
-                          </p:cTn>
-                        </p:par>
-                      </p:childTnLst>
-                    </p:cTn>
-                  </p:par>
-                  <p:par>
-                    <p:cTn id="9" fill="hold">
-                      <p:stCondLst>
-                        <p:cond delay="indefinite"/>
-                      </p:stCondLst>
-                      <p:childTnLst>
-                        <p:par>
-                          <p:cTn id="10" fill="hold">
-                            <p:stCondLst>
-                              <p:cond delay="0"/>
-                            </p:stCondLst>
-                            <p:childTnLst>
-                              <p:par>
-                                <p:cTn id="11" presetID="1" presetClass="entr" presetSubtype="0" fill="hold" nodeType="clickEffect">
-                                  <p:stCondLst>
-                                    <p:cond delay="0"/>
-                                  </p:stCondLst>
-                                  <p:childTnLst>
-                                    <p:set>
-                                      <p:cBhvr>
-                                        <p:cTn id="12" dur="1" fill="hold">
-                                          <p:stCondLst>
-                                            <p:cond delay="0"/>
-                                          </p:stCondLst>
-                                        </p:cTn>
-                                        <p:tgtEl>
-                                          <p:spTgt spid="4">
-                                            <p:txEl>
-                                              <p:pRg st="2" end="2"/>
-                                            </p:txEl>
-                                          </p:spTgt>
-                                        </p:tgtEl>
-                                        <p:attrNameLst>
-                                          <p:attrName>style.visibility</p:attrName>
-                                        </p:attrNameLst>
-                                      </p:cBhvr>
-                                      <p:to>
-                                        <p:strVal val="visible"/>
-                                      </p:to>
-                                    </p:set>
-                                  </p:childTnLst>
-                                </p:cTn>
-                              </p:par>
-                              <p:par>
-                                <p:cTn id="13" presetID="1" presetClass="entr" presetSubtype="0" fill="hold" nodeType="withEffect">
-                                  <p:stCondLst>
-                                    <p:cond delay="0"/>
-                                  </p:stCondLst>
-                                  <p:childTnLst>
-                                    <p:set>
-                                      <p:cBhvr>
-                                        <p:cTn id="14" dur="1" fill="hold">
-                                          <p:stCondLst>
-                                            <p:cond delay="0"/>
-                                          </p:stCondLst>
-                                        </p:cTn>
-                                        <p:tgtEl>
-                                          <p:spTgt spid="8"/>
-                                        </p:tgtEl>
-                                        <p:attrNameLst>
-                                          <p:attrName>style.visibility</p:attrName>
-                                        </p:attrNameLst>
-                                      </p:cBhvr>
-                                      <p:to>
-                                        <p:strVal val="visible"/>
-                                      </p:to>
-                                    </p:set>
-                                  </p:childTnLst>
-                                </p:cTn>
-                              </p:par>
-                            </p:childTnLst>
-                          </p:cTn>
-                        </p:par>
-                      </p:childTnLst>
-                    </p:cTn>
-                  </p:par>
-                </p:childTnLst>
-              </p:cTn>
-              <p:prevCondLst>
-                <p:cond evt="onPrev" delay="0">
-                  <p:tgtEl>
-                    <p:sldTgt/>
-                  </p:tgtEl>
-                </p:cond>
-              </p:prevCondLst>
-              <p:nextCondLst>
-                <p:cond evt="onNext" delay="0">
-                  <p:tgtEl>
-                    <p:sldTgt/>
-                  </p:tgtEl>
-                </p:cond>
-              </p:nextCondLst>
-            </p:seq>
-          </p:childTnLst>
-        </p:cTn>
-      </p:par>
-    </p:tnLst>
-  </p:timing>
-</p:sld>
-</file>
-
-<file path=ppt/slides/slide31.xml><?xml version="1.0" encoding="utf-8"?>
 <p:sld xmlns:a="http://schemas.openxmlformats.org/drawingml/2006/main" xmlns:r="http://schemas.openxmlformats.org/officeDocument/2006/relationships" xmlns:p="http://schemas.openxmlformats.org/presentationml/2006/main">
   <p:cSld>
     <p:spTree>
@@ -17177,7 +16237,7 @@
 </p:sld>
 </file>
 
-<file path=ppt/slides/slide32.xml><?xml version="1.0" encoding="utf-8"?>
+<file path=ppt/slides/slide31.xml><?xml version="1.0" encoding="utf-8"?>
 <p:sld xmlns:a="http://schemas.openxmlformats.org/drawingml/2006/main" xmlns:r="http://schemas.openxmlformats.org/officeDocument/2006/relationships" xmlns:p="http://schemas.openxmlformats.org/presentationml/2006/main">
   <p:cSld>
     <p:spTree>
@@ -17558,7 +16618,7 @@
 </p:sld>
 </file>
 
-<file path=ppt/slides/slide33.xml><?xml version="1.0" encoding="utf-8"?>
+<file path=ppt/slides/slide32.xml><?xml version="1.0" encoding="utf-8"?>
 <p:sld xmlns:a="http://schemas.openxmlformats.org/drawingml/2006/main" xmlns:r="http://schemas.openxmlformats.org/officeDocument/2006/relationships" xmlns:p="http://schemas.openxmlformats.org/presentationml/2006/main">
   <p:cSld>
     <p:spTree>
@@ -18128,7 +17188,7 @@
 </p:sld>
 </file>
 
-<file path=ppt/slides/slide34.xml><?xml version="1.0" encoding="utf-8"?>
+<file path=ppt/slides/slide33.xml><?xml version="1.0" encoding="utf-8"?>
 <p:sld xmlns:a="http://schemas.openxmlformats.org/drawingml/2006/main" xmlns:r="http://schemas.openxmlformats.org/officeDocument/2006/relationships" xmlns:p="http://schemas.openxmlformats.org/presentationml/2006/main">
   <p:cSld>
     <p:spTree>
@@ -18996,7 +18056,7 @@
 </p:sld>
 </file>
 
-<file path=ppt/slides/slide35.xml><?xml version="1.0" encoding="utf-8"?>
+<file path=ppt/slides/slide34.xml><?xml version="1.0" encoding="utf-8"?>
 <p:sld xmlns:a="http://schemas.openxmlformats.org/drawingml/2006/main" xmlns:r="http://schemas.openxmlformats.org/officeDocument/2006/relationships" xmlns:p="http://schemas.openxmlformats.org/presentationml/2006/main">
   <p:cSld>
     <p:spTree>
@@ -19661,7 +18721,7 @@
 </p:sld>
 </file>
 
-<file path=ppt/slides/slide36.xml><?xml version="1.0" encoding="utf-8"?>
+<file path=ppt/slides/slide35.xml><?xml version="1.0" encoding="utf-8"?>
 <p:sld xmlns:a="http://schemas.openxmlformats.org/drawingml/2006/main" xmlns:r="http://schemas.openxmlformats.org/officeDocument/2006/relationships" xmlns:p="http://schemas.openxmlformats.org/presentationml/2006/main">
   <p:cSld>
     <p:spTree>
@@ -19731,7 +18791,7 @@
 </p:sld>
 </file>
 
-<file path=ppt/slides/slide37.xml><?xml version="1.0" encoding="utf-8"?>
+<file path=ppt/slides/slide36.xml><?xml version="1.0" encoding="utf-8"?>
 <p:sld xmlns:a="http://schemas.openxmlformats.org/drawingml/2006/main" xmlns:r="http://schemas.openxmlformats.org/officeDocument/2006/relationships" xmlns:p="http://schemas.openxmlformats.org/presentationml/2006/main">
   <p:cSld>
     <p:spTree>
@@ -20302,7 +19362,7 @@
 </p:sld>
 </file>
 
-<file path=ppt/slides/slide38.xml><?xml version="1.0" encoding="utf-8"?>
+<file path=ppt/slides/slide37.xml><?xml version="1.0" encoding="utf-8"?>
 <p:sld xmlns:a="http://schemas.openxmlformats.org/drawingml/2006/main" xmlns:r="http://schemas.openxmlformats.org/officeDocument/2006/relationships" xmlns:p="http://schemas.openxmlformats.org/presentationml/2006/main">
   <p:cSld>
     <p:spTree>
@@ -20858,7 +19918,7 @@
 </p:sld>
 </file>
 
-<file path=ppt/slides/slide39.xml><?xml version="1.0" encoding="utf-8"?>
+<file path=ppt/slides/slide38.xml><?xml version="1.0" encoding="utf-8"?>
 <p:sld xmlns:a="http://schemas.openxmlformats.org/drawingml/2006/main" xmlns:r="http://schemas.openxmlformats.org/officeDocument/2006/relationships" xmlns:p="http://schemas.openxmlformats.org/presentationml/2006/main">
   <p:cSld>
     <p:spTree>
@@ -21389,71 +20449,7 @@
 </p:sld>
 </file>
 
-<file path=ppt/slides/slide4.xml><?xml version="1.0" encoding="utf-8"?>
-<p:sld xmlns:a="http://schemas.openxmlformats.org/drawingml/2006/main" xmlns:r="http://schemas.openxmlformats.org/officeDocument/2006/relationships" xmlns:p="http://schemas.openxmlformats.org/presentationml/2006/main">
-  <p:cSld>
-    <p:spTree>
-      <p:nvGrpSpPr>
-        <p:cNvPr id="1" name=""/>
-        <p:cNvGrpSpPr/>
-        <p:nvPr/>
-      </p:nvGrpSpPr>
-      <p:grpSpPr>
-        <a:xfrm>
-          <a:off x="0" y="0"/>
-          <a:ext cx="0" cy="0"/>
-          <a:chOff x="0" y="0"/>
-          <a:chExt cx="0" cy="0"/>
-        </a:xfrm>
-      </p:grpSpPr>
-      <p:sp>
-        <p:nvSpPr>
-          <p:cNvPr id="2" name="Title 1">
-            <a:extLst>
-              <a:ext uri="{FF2B5EF4-FFF2-40B4-BE49-F238E27FC236}">
-                <a16:creationId xmlns:a16="http://schemas.microsoft.com/office/drawing/2014/main" id="{5498C255-8488-A6BF-D8CF-6C0F8BDB00EA}"/>
-              </a:ext>
-            </a:extLst>
-          </p:cNvPr>
-          <p:cNvSpPr>
-            <a:spLocks noGrp="1"/>
-          </p:cNvSpPr>
-          <p:nvPr>
-            <p:ph type="title"/>
-          </p:nvPr>
-        </p:nvSpPr>
-        <p:spPr>
-          <a:xfrm>
-            <a:off x="771081" y="1850264"/>
-            <a:ext cx="7772400" cy="1021556"/>
-          </a:xfrm>
-        </p:spPr>
-        <p:txBody>
-          <a:bodyPr/>
-          <a:lstStyle/>
-          <a:p>
-            <a:pPr algn="ctr"/>
-            <a:r>
-              <a:rPr lang="en-US" b="0" cap="none" dirty="0"/>
-              <a:t>Models for Zero-Inflated Response</a:t>
-            </a:r>
-          </a:p>
-        </p:txBody>
-      </p:sp>
-    </p:spTree>
-    <p:extLst>
-      <p:ext uri="{BB962C8B-B14F-4D97-AF65-F5344CB8AC3E}">
-        <p14:creationId xmlns:p14="http://schemas.microsoft.com/office/powerpoint/2010/main" val="3761794938"/>
-      </p:ext>
-    </p:extLst>
-  </p:cSld>
-  <p:clrMapOvr>
-    <a:masterClrMapping/>
-  </p:clrMapOvr>
-</p:sld>
-</file>
-
-<file path=ppt/slides/slide40.xml><?xml version="1.0" encoding="utf-8"?>
+<file path=ppt/slides/slide39.xml><?xml version="1.0" encoding="utf-8"?>
 <p:sld xmlns:a="http://schemas.openxmlformats.org/drawingml/2006/main" xmlns:r="http://schemas.openxmlformats.org/officeDocument/2006/relationships" xmlns:p="http://schemas.openxmlformats.org/presentationml/2006/main">
   <p:cSld>
     <p:spTree>
@@ -22170,7 +21166,71 @@
 </p:sld>
 </file>
 
-<file path=ppt/slides/slide41.xml><?xml version="1.0" encoding="utf-8"?>
+<file path=ppt/slides/slide4.xml><?xml version="1.0" encoding="utf-8"?>
+<p:sld xmlns:a="http://schemas.openxmlformats.org/drawingml/2006/main" xmlns:r="http://schemas.openxmlformats.org/officeDocument/2006/relationships" xmlns:p="http://schemas.openxmlformats.org/presentationml/2006/main">
+  <p:cSld>
+    <p:spTree>
+      <p:nvGrpSpPr>
+        <p:cNvPr id="1" name=""/>
+        <p:cNvGrpSpPr/>
+        <p:nvPr/>
+      </p:nvGrpSpPr>
+      <p:grpSpPr>
+        <a:xfrm>
+          <a:off x="0" y="0"/>
+          <a:ext cx="0" cy="0"/>
+          <a:chOff x="0" y="0"/>
+          <a:chExt cx="0" cy="0"/>
+        </a:xfrm>
+      </p:grpSpPr>
+      <p:sp>
+        <p:nvSpPr>
+          <p:cNvPr id="2" name="Title 1">
+            <a:extLst>
+              <a:ext uri="{FF2B5EF4-FFF2-40B4-BE49-F238E27FC236}">
+                <a16:creationId xmlns:a16="http://schemas.microsoft.com/office/drawing/2014/main" id="{5498C255-8488-A6BF-D8CF-6C0F8BDB00EA}"/>
+              </a:ext>
+            </a:extLst>
+          </p:cNvPr>
+          <p:cNvSpPr>
+            <a:spLocks noGrp="1"/>
+          </p:cNvSpPr>
+          <p:nvPr>
+            <p:ph type="title"/>
+          </p:nvPr>
+        </p:nvSpPr>
+        <p:spPr>
+          <a:xfrm>
+            <a:off x="771081" y="1850264"/>
+            <a:ext cx="7772400" cy="1021556"/>
+          </a:xfrm>
+        </p:spPr>
+        <p:txBody>
+          <a:bodyPr/>
+          <a:lstStyle/>
+          <a:p>
+            <a:pPr algn="ctr"/>
+            <a:r>
+              <a:rPr lang="en-US" b="0" cap="none" dirty="0"/>
+              <a:t>Models for Zero-Inflated Response</a:t>
+            </a:r>
+          </a:p>
+        </p:txBody>
+      </p:sp>
+    </p:spTree>
+    <p:extLst>
+      <p:ext uri="{BB962C8B-B14F-4D97-AF65-F5344CB8AC3E}">
+        <p14:creationId xmlns:p14="http://schemas.microsoft.com/office/powerpoint/2010/main" val="3761794938"/>
+      </p:ext>
+    </p:extLst>
+  </p:cSld>
+  <p:clrMapOvr>
+    <a:masterClrMapping/>
+  </p:clrMapOvr>
+</p:sld>
+</file>
+
+<file path=ppt/slides/slide40.xml><?xml version="1.0" encoding="utf-8"?>
 <p:sld xmlns:a="http://schemas.openxmlformats.org/drawingml/2006/main" xmlns:r="http://schemas.openxmlformats.org/officeDocument/2006/relationships" xmlns:p="http://schemas.openxmlformats.org/presentationml/2006/main">
   <p:cSld>
     <p:spTree>
@@ -22491,7 +21551,7 @@
 </p:sld>
 </file>
 
-<file path=ppt/slides/slide42.xml><?xml version="1.0" encoding="utf-8"?>
+<file path=ppt/slides/slide41.xml><?xml version="1.0" encoding="utf-8"?>
 <p:sld xmlns:a="http://schemas.openxmlformats.org/drawingml/2006/main" xmlns:r="http://schemas.openxmlformats.org/officeDocument/2006/relationships" xmlns:p="http://schemas.openxmlformats.org/presentationml/2006/main">
   <p:cSld>
     <p:spTree>
@@ -23383,7 +22443,7 @@
 </p:sld>
 </file>
 
-<file path=ppt/slides/slide43.xml><?xml version="1.0" encoding="utf-8"?>
+<file path=ppt/slides/slide42.xml><?xml version="1.0" encoding="utf-8"?>
 <p:sld xmlns:a="http://schemas.openxmlformats.org/drawingml/2006/main" xmlns:r="http://schemas.openxmlformats.org/officeDocument/2006/relationships" xmlns:p="http://schemas.openxmlformats.org/presentationml/2006/main">
   <p:cSld>
     <p:spTree>
@@ -23532,7 +22592,7 @@
                       <m:f>
                         <m:fPr>
                           <m:ctrlPr>
-                            <a:rPr lang="ar-AE" sz="1800" i="1" smtClean="0">
+                            <a:rPr lang="ar-AE" sz="1800" i="1">
                               <a:latin typeface="Cambria Math" panose="02040503050406030204" pitchFamily="18" charset="0"/>
                             </a:rPr>
                           </m:ctrlPr>
@@ -23543,6 +22603,7 @@
                               <m:ctrlPr>
                                 <a:rPr lang="ar-AE" sz="1800" i="1">
                                   <a:latin typeface="Cambria Math" panose="02040503050406030204" pitchFamily="18" charset="0"/>
+                                  <a:ea typeface="Cambria Math" panose="02040503050406030204" pitchFamily="18" charset="0"/>
                                 </a:rPr>
                               </m:ctrlPr>
                             </m:sSubPr>
@@ -24045,7 +23106,7 @@
 </p:sld>
 </file>
 
-<file path=ppt/slides/slide44.xml><?xml version="1.0" encoding="utf-8"?>
+<file path=ppt/slides/slide43.xml><?xml version="1.0" encoding="utf-8"?>
 <p:sld xmlns:a="http://schemas.openxmlformats.org/drawingml/2006/main" xmlns:r="http://schemas.openxmlformats.org/officeDocument/2006/relationships" xmlns:p="http://schemas.openxmlformats.org/presentationml/2006/main">
   <p:cSld>
     <p:spTree>
@@ -24417,7 +23478,7 @@
 </p:sld>
 </file>
 
-<file path=ppt/slides/slide45.xml><?xml version="1.0" encoding="utf-8"?>
+<file path=ppt/slides/slide44.xml><?xml version="1.0" encoding="utf-8"?>
 <p:sld xmlns:a="http://schemas.openxmlformats.org/drawingml/2006/main" xmlns:r="http://schemas.openxmlformats.org/officeDocument/2006/relationships" xmlns:p="http://schemas.openxmlformats.org/presentationml/2006/main">
   <p:cSld>
     <p:spTree>
@@ -24968,7 +24029,7 @@
 </p:sld>
 </file>
 
-<file path=ppt/slides/slide46.xml><?xml version="1.0" encoding="utf-8"?>
+<file path=ppt/slides/slide45.xml><?xml version="1.0" encoding="utf-8"?>
 <p:sld xmlns:a="http://schemas.openxmlformats.org/drawingml/2006/main" xmlns:r="http://schemas.openxmlformats.org/officeDocument/2006/relationships" xmlns:p="http://schemas.openxmlformats.org/presentationml/2006/main">
   <p:cSld>
     <p:spTree>
@@ -25686,7 +24747,7 @@
 </p:sld>
 </file>
 
-<file path=ppt/slides/slide47.xml><?xml version="1.0" encoding="utf-8"?>
+<file path=ppt/slides/slide46.xml><?xml version="1.0" encoding="utf-8"?>
 <p:sld xmlns:a="http://schemas.openxmlformats.org/drawingml/2006/main" xmlns:r="http://schemas.openxmlformats.org/officeDocument/2006/relationships" xmlns:p="http://schemas.openxmlformats.org/presentationml/2006/main">
   <p:cSld>
     <p:spTree>
@@ -26752,7 +25813,7 @@
 </p:sld>
 </file>
 
-<file path=ppt/slides/slide48.xml><?xml version="1.0" encoding="utf-8"?>
+<file path=ppt/slides/slide47.xml><?xml version="1.0" encoding="utf-8"?>
 <p:sld xmlns:a="http://schemas.openxmlformats.org/drawingml/2006/main" xmlns:r="http://schemas.openxmlformats.org/officeDocument/2006/relationships" xmlns:p="http://schemas.openxmlformats.org/presentationml/2006/main">
   <p:cSld>
     <p:spTree>
@@ -27239,7 +26300,7 @@
 </p:sld>
 </file>
 
-<file path=ppt/slides/slide49.xml><?xml version="1.0" encoding="utf-8"?>
+<file path=ppt/slides/slide48.xml><?xml version="1.0" encoding="utf-8"?>
 <p:sld xmlns:a="http://schemas.openxmlformats.org/drawingml/2006/main" xmlns:r="http://schemas.openxmlformats.org/officeDocument/2006/relationships" xmlns:p="http://schemas.openxmlformats.org/presentationml/2006/main">
   <p:cSld>
     <p:spTree>
@@ -28302,533 +27363,7 @@
 </p:sld>
 </file>
 
-<file path=ppt/slides/slide5.xml><?xml version="1.0" encoding="utf-8"?>
-<p:sld xmlns:a="http://schemas.openxmlformats.org/drawingml/2006/main" xmlns:r="http://schemas.openxmlformats.org/officeDocument/2006/relationships" xmlns:p="http://schemas.openxmlformats.org/presentationml/2006/main">
-  <p:cSld>
-    <p:spTree>
-      <p:nvGrpSpPr>
-        <p:cNvPr id="1" name="">
-          <a:extLst>
-            <a:ext uri="{FF2B5EF4-FFF2-40B4-BE49-F238E27FC236}">
-              <a16:creationId xmlns:a16="http://schemas.microsoft.com/office/drawing/2014/main" id="{9AC68F5F-5608-0C70-F2DD-623A1DC2FC79}"/>
-            </a:ext>
-          </a:extLst>
-        </p:cNvPr>
-        <p:cNvGrpSpPr/>
-        <p:nvPr/>
-      </p:nvGrpSpPr>
-      <p:grpSpPr>
-        <a:xfrm>
-          <a:off x="0" y="0"/>
-          <a:ext cx="0" cy="0"/>
-          <a:chOff x="0" y="0"/>
-          <a:chExt cx="0" cy="0"/>
-        </a:xfrm>
-      </p:grpSpPr>
-      <p:sp>
-        <p:nvSpPr>
-          <p:cNvPr id="2" name="Title 1">
-            <a:extLst>
-              <a:ext uri="{FF2B5EF4-FFF2-40B4-BE49-F238E27FC236}">
-                <a16:creationId xmlns:a16="http://schemas.microsoft.com/office/drawing/2014/main" id="{68CF49BB-AD56-E7CF-4823-D942D28B5EBD}"/>
-              </a:ext>
-            </a:extLst>
-          </p:cNvPr>
-          <p:cNvSpPr>
-            <a:spLocks noGrp="1"/>
-          </p:cNvSpPr>
-          <p:nvPr>
-            <p:ph type="title"/>
-          </p:nvPr>
-        </p:nvSpPr>
-        <p:spPr/>
-        <p:txBody>
-          <a:bodyPr/>
-          <a:lstStyle/>
-          <a:p>
-            <a:pPr marL="0" lvl="0" indent="0">
-              <a:buNone/>
-            </a:pPr>
-            <a:r>
-              <a:rPr lang="en-US" dirty="0"/>
-              <a:t>Zero-Inflated Responses</a:t>
-            </a:r>
-            <a:endParaRPr dirty="0"/>
-          </a:p>
-        </p:txBody>
-      </p:sp>
-      <p:sp>
-        <p:nvSpPr>
-          <p:cNvPr id="3" name="Content Placeholder 2">
-            <a:extLst>
-              <a:ext uri="{FF2B5EF4-FFF2-40B4-BE49-F238E27FC236}">
-                <a16:creationId xmlns:a16="http://schemas.microsoft.com/office/drawing/2014/main" id="{A2E97D54-EC36-0EE6-7D66-58D0B07E5E81}"/>
-              </a:ext>
-            </a:extLst>
-          </p:cNvPr>
-          <p:cNvSpPr>
-            <a:spLocks noGrp="1"/>
-          </p:cNvSpPr>
-          <p:nvPr>
-            <p:ph idx="1"/>
-          </p:nvPr>
-        </p:nvSpPr>
-        <p:spPr/>
-        <p:txBody>
-          <a:bodyPr>
-            <a:normAutofit fontScale="85000" lnSpcReduction="10000"/>
-          </a:bodyPr>
-          <a:lstStyle/>
-          <a:p>
-            <a:pPr marL="0" lvl="0" indent="0">
-              <a:buNone/>
-            </a:pPr>
-            <a:r>
-              <a:rPr lang="en-US" dirty="0"/>
-              <a:t>Zero-inflated response variables arise in many situations </a:t>
-            </a:r>
-            <a:endParaRPr dirty="0"/>
-          </a:p>
-          <a:p>
-            <a:pPr lvl="0"/>
-            <a:r>
-              <a:rPr lang="en-US" dirty="0"/>
-              <a:t>Most people who view an ecommerce site buy 0 products</a:t>
-            </a:r>
-          </a:p>
-          <a:p>
-            <a:pPr lvl="0"/>
-            <a:r>
-              <a:rPr lang="en-US" dirty="0"/>
-              <a:t>Most auto drivers have no crashes per year </a:t>
-            </a:r>
-          </a:p>
-          <a:p>
-            <a:pPr lvl="0"/>
-            <a:r>
-              <a:rPr lang="en-US" dirty="0"/>
-              <a:t>Most dental patients examined require 0 root canals </a:t>
-            </a:r>
-          </a:p>
-          <a:p>
-            <a:pPr lvl="0"/>
-            <a:r>
-              <a:rPr lang="en-US" dirty="0"/>
-              <a:t>In much of the world the average rainfall amount on a specific day is 0 </a:t>
-            </a:r>
-          </a:p>
-          <a:p>
-            <a:pPr lvl="0"/>
-            <a:r>
-              <a:rPr lang="en-US" dirty="0"/>
-              <a:t>The number of sever weather events in a specific area per month is typically 0  </a:t>
-            </a:r>
-          </a:p>
-          <a:p>
-            <a:r>
-              <a:rPr lang="en-US" dirty="0"/>
-              <a:t>In epidemiology the probability distribution of the of people contracting a disease per day has many zeros</a:t>
-            </a:r>
-          </a:p>
-          <a:p>
-            <a:r>
-              <a:rPr lang="en-US" dirty="0"/>
-              <a:t>Etc.</a:t>
-            </a:r>
-          </a:p>
-          <a:p>
-            <a:pPr lvl="0"/>
-            <a:endParaRPr dirty="0"/>
-          </a:p>
-        </p:txBody>
-      </p:sp>
-    </p:spTree>
-    <p:extLst>
-      <p:ext uri="{BB962C8B-B14F-4D97-AF65-F5344CB8AC3E}">
-        <p14:creationId xmlns:p14="http://schemas.microsoft.com/office/powerpoint/2010/main" val="1417896931"/>
-      </p:ext>
-    </p:extLst>
-  </p:cSld>
-  <p:clrMapOvr>
-    <a:masterClrMapping/>
-  </p:clrMapOvr>
-  <p:timing>
-    <p:tnLst>
-      <p:par>
-        <p:cTn id="1" dur="indefinite" restart="never" nodeType="tmRoot">
-          <p:childTnLst>
-            <p:seq concurrent="1" nextAc="seek">
-              <p:cTn id="2" dur="indefinite" nodeType="mainSeq">
-                <p:childTnLst>
-                  <p:par>
-                    <p:cTn id="3" fill="hold">
-                      <p:stCondLst>
-                        <p:cond delay="indefinite"/>
-                      </p:stCondLst>
-                      <p:childTnLst>
-                        <p:par>
-                          <p:cTn id="4" fill="hold">
-                            <p:stCondLst>
-                              <p:cond delay="0"/>
-                            </p:stCondLst>
-                            <p:childTnLst>
-                              <p:par>
-                                <p:cTn id="5" presetID="1" presetClass="entr" presetSubtype="0" fill="hold" nodeType="clickEffect">
-                                  <p:stCondLst>
-                                    <p:cond delay="0"/>
-                                  </p:stCondLst>
-                                  <p:childTnLst>
-                                    <p:set>
-                                      <p:cBhvr>
-                                        <p:cTn id="6" dur="1" fill="hold">
-                                          <p:stCondLst>
-                                            <p:cond delay="0"/>
-                                          </p:stCondLst>
-                                        </p:cTn>
-                                        <p:tgtEl>
-                                          <p:spTgt spid="3">
-                                            <p:txEl>
-                                              <p:pRg st="1" end="1"/>
-                                            </p:txEl>
-                                          </p:spTgt>
-                                        </p:tgtEl>
-                                        <p:attrNameLst>
-                                          <p:attrName>style.visibility</p:attrName>
-                                        </p:attrNameLst>
-                                      </p:cBhvr>
-                                      <p:to>
-                                        <p:strVal val="visible"/>
-                                      </p:to>
-                                    </p:set>
-                                  </p:childTnLst>
-                                </p:cTn>
-                              </p:par>
-                            </p:childTnLst>
-                          </p:cTn>
-                        </p:par>
-                      </p:childTnLst>
-                    </p:cTn>
-                  </p:par>
-                  <p:par>
-                    <p:cTn id="7" fill="hold">
-                      <p:stCondLst>
-                        <p:cond delay="indefinite"/>
-                      </p:stCondLst>
-                      <p:childTnLst>
-                        <p:par>
-                          <p:cTn id="8" fill="hold">
-                            <p:stCondLst>
-                              <p:cond delay="0"/>
-                            </p:stCondLst>
-                            <p:childTnLst>
-                              <p:par>
-                                <p:cTn id="9" presetID="1" presetClass="entr" presetSubtype="0" fill="hold" nodeType="clickEffect">
-                                  <p:stCondLst>
-                                    <p:cond delay="0"/>
-                                  </p:stCondLst>
-                                  <p:childTnLst>
-                                    <p:set>
-                                      <p:cBhvr>
-                                        <p:cTn id="10" dur="1" fill="hold">
-                                          <p:stCondLst>
-                                            <p:cond delay="0"/>
-                                          </p:stCondLst>
-                                        </p:cTn>
-                                        <p:tgtEl>
-                                          <p:spTgt spid="3">
-                                            <p:txEl>
-                                              <p:pRg st="2" end="2"/>
-                                            </p:txEl>
-                                          </p:spTgt>
-                                        </p:tgtEl>
-                                        <p:attrNameLst>
-                                          <p:attrName>style.visibility</p:attrName>
-                                        </p:attrNameLst>
-                                      </p:cBhvr>
-                                      <p:to>
-                                        <p:strVal val="visible"/>
-                                      </p:to>
-                                    </p:set>
-                                  </p:childTnLst>
-                                </p:cTn>
-                              </p:par>
-                            </p:childTnLst>
-                          </p:cTn>
-                        </p:par>
-                      </p:childTnLst>
-                    </p:cTn>
-                  </p:par>
-                  <p:par>
-                    <p:cTn id="11" fill="hold">
-                      <p:stCondLst>
-                        <p:cond delay="indefinite"/>
-                      </p:stCondLst>
-                      <p:childTnLst>
-                        <p:par>
-                          <p:cTn id="12" fill="hold">
-                            <p:stCondLst>
-                              <p:cond delay="0"/>
-                            </p:stCondLst>
-                            <p:childTnLst>
-                              <p:par>
-                                <p:cTn id="13" presetID="1" presetClass="entr" presetSubtype="0" fill="hold" nodeType="clickEffect">
-                                  <p:stCondLst>
-                                    <p:cond delay="0"/>
-                                  </p:stCondLst>
-                                  <p:childTnLst>
-                                    <p:set>
-                                      <p:cBhvr>
-                                        <p:cTn id="14" dur="1" fill="hold">
-                                          <p:stCondLst>
-                                            <p:cond delay="0"/>
-                                          </p:stCondLst>
-                                        </p:cTn>
-                                        <p:tgtEl>
-                                          <p:spTgt spid="3">
-                                            <p:txEl>
-                                              <p:pRg st="3" end="3"/>
-                                            </p:txEl>
-                                          </p:spTgt>
-                                        </p:tgtEl>
-                                        <p:attrNameLst>
-                                          <p:attrName>style.visibility</p:attrName>
-                                        </p:attrNameLst>
-                                      </p:cBhvr>
-                                      <p:to>
-                                        <p:strVal val="visible"/>
-                                      </p:to>
-                                    </p:set>
-                                  </p:childTnLst>
-                                </p:cTn>
-                              </p:par>
-                            </p:childTnLst>
-                          </p:cTn>
-                        </p:par>
-                      </p:childTnLst>
-                    </p:cTn>
-                  </p:par>
-                  <p:par>
-                    <p:cTn id="15" fill="hold">
-                      <p:stCondLst>
-                        <p:cond delay="indefinite"/>
-                      </p:stCondLst>
-                      <p:childTnLst>
-                        <p:par>
-                          <p:cTn id="16" fill="hold">
-                            <p:stCondLst>
-                              <p:cond delay="0"/>
-                            </p:stCondLst>
-                            <p:childTnLst>
-                              <p:par>
-                                <p:cTn id="17" presetID="1" presetClass="entr" presetSubtype="0" fill="hold" nodeType="clickEffect">
-                                  <p:stCondLst>
-                                    <p:cond delay="0"/>
-                                  </p:stCondLst>
-                                  <p:childTnLst>
-                                    <p:set>
-                                      <p:cBhvr>
-                                        <p:cTn id="18" dur="1" fill="hold">
-                                          <p:stCondLst>
-                                            <p:cond delay="0"/>
-                                          </p:stCondLst>
-                                        </p:cTn>
-                                        <p:tgtEl>
-                                          <p:spTgt spid="3">
-                                            <p:txEl>
-                                              <p:pRg st="4" end="4"/>
-                                            </p:txEl>
-                                          </p:spTgt>
-                                        </p:tgtEl>
-                                        <p:attrNameLst>
-                                          <p:attrName>style.visibility</p:attrName>
-                                        </p:attrNameLst>
-                                      </p:cBhvr>
-                                      <p:to>
-                                        <p:strVal val="visible"/>
-                                      </p:to>
-                                    </p:set>
-                                  </p:childTnLst>
-                                </p:cTn>
-                              </p:par>
-                            </p:childTnLst>
-                          </p:cTn>
-                        </p:par>
-                      </p:childTnLst>
-                    </p:cTn>
-                  </p:par>
-                  <p:par>
-                    <p:cTn id="19" fill="hold">
-                      <p:stCondLst>
-                        <p:cond delay="indefinite"/>
-                      </p:stCondLst>
-                      <p:childTnLst>
-                        <p:par>
-                          <p:cTn id="20" fill="hold">
-                            <p:stCondLst>
-                              <p:cond delay="0"/>
-                            </p:stCondLst>
-                            <p:childTnLst>
-                              <p:par>
-                                <p:cTn id="21" presetID="1" presetClass="entr" presetSubtype="0" fill="hold" nodeType="clickEffect">
-                                  <p:stCondLst>
-                                    <p:cond delay="0"/>
-                                  </p:stCondLst>
-                                  <p:childTnLst>
-                                    <p:set>
-                                      <p:cBhvr>
-                                        <p:cTn id="22" dur="1" fill="hold">
-                                          <p:stCondLst>
-                                            <p:cond delay="0"/>
-                                          </p:stCondLst>
-                                        </p:cTn>
-                                        <p:tgtEl>
-                                          <p:spTgt spid="3">
-                                            <p:txEl>
-                                              <p:pRg st="5" end="5"/>
-                                            </p:txEl>
-                                          </p:spTgt>
-                                        </p:tgtEl>
-                                        <p:attrNameLst>
-                                          <p:attrName>style.visibility</p:attrName>
-                                        </p:attrNameLst>
-                                      </p:cBhvr>
-                                      <p:to>
-                                        <p:strVal val="visible"/>
-                                      </p:to>
-                                    </p:set>
-                                  </p:childTnLst>
-                                </p:cTn>
-                              </p:par>
-                            </p:childTnLst>
-                          </p:cTn>
-                        </p:par>
-                      </p:childTnLst>
-                    </p:cTn>
-                  </p:par>
-                  <p:par>
-                    <p:cTn id="23" fill="hold">
-                      <p:stCondLst>
-                        <p:cond delay="indefinite"/>
-                      </p:stCondLst>
-                      <p:childTnLst>
-                        <p:par>
-                          <p:cTn id="24" fill="hold">
-                            <p:stCondLst>
-                              <p:cond delay="0"/>
-                            </p:stCondLst>
-                            <p:childTnLst>
-                              <p:par>
-                                <p:cTn id="25" presetID="1" presetClass="entr" presetSubtype="0" fill="hold" nodeType="clickEffect">
-                                  <p:stCondLst>
-                                    <p:cond delay="0"/>
-                                  </p:stCondLst>
-                                  <p:childTnLst>
-                                    <p:set>
-                                      <p:cBhvr>
-                                        <p:cTn id="26" dur="1" fill="hold">
-                                          <p:stCondLst>
-                                            <p:cond delay="0"/>
-                                          </p:stCondLst>
-                                        </p:cTn>
-                                        <p:tgtEl>
-                                          <p:spTgt spid="3">
-                                            <p:txEl>
-                                              <p:pRg st="6" end="6"/>
-                                            </p:txEl>
-                                          </p:spTgt>
-                                        </p:tgtEl>
-                                        <p:attrNameLst>
-                                          <p:attrName>style.visibility</p:attrName>
-                                        </p:attrNameLst>
-                                      </p:cBhvr>
-                                      <p:to>
-                                        <p:strVal val="visible"/>
-                                      </p:to>
-                                    </p:set>
-                                  </p:childTnLst>
-                                </p:cTn>
-                              </p:par>
-                            </p:childTnLst>
-                          </p:cTn>
-                        </p:par>
-                      </p:childTnLst>
-                    </p:cTn>
-                  </p:par>
-                  <p:par>
-                    <p:cTn id="27" fill="hold">
-                      <p:stCondLst>
-                        <p:cond delay="indefinite"/>
-                      </p:stCondLst>
-                      <p:childTnLst>
-                        <p:par>
-                          <p:cTn id="28" fill="hold">
-                            <p:stCondLst>
-                              <p:cond delay="0"/>
-                            </p:stCondLst>
-                            <p:childTnLst>
-                              <p:par>
-                                <p:cTn id="29" presetID="1" presetClass="entr" presetSubtype="0" fill="hold" nodeType="clickEffect">
-                                  <p:stCondLst>
-                                    <p:cond delay="0"/>
-                                  </p:stCondLst>
-                                  <p:childTnLst>
-                                    <p:set>
-                                      <p:cBhvr>
-                                        <p:cTn id="30" dur="1" fill="hold">
-                                          <p:stCondLst>
-                                            <p:cond delay="0"/>
-                                          </p:stCondLst>
-                                        </p:cTn>
-                                        <p:tgtEl>
-                                          <p:spTgt spid="3">
-                                            <p:txEl>
-                                              <p:pRg st="7" end="7"/>
-                                            </p:txEl>
-                                          </p:spTgt>
-                                        </p:tgtEl>
-                                        <p:attrNameLst>
-                                          <p:attrName>style.visibility</p:attrName>
-                                        </p:attrNameLst>
-                                      </p:cBhvr>
-                                      <p:to>
-                                        <p:strVal val="visible"/>
-                                      </p:to>
-                                    </p:set>
-                                  </p:childTnLst>
-                                </p:cTn>
-                              </p:par>
-                            </p:childTnLst>
-                          </p:cTn>
-                        </p:par>
-                      </p:childTnLst>
-                    </p:cTn>
-                  </p:par>
-                </p:childTnLst>
-              </p:cTn>
-              <p:prevCondLst>
-                <p:cond evt="onPrev" delay="0">
-                  <p:tgtEl>
-                    <p:sldTgt/>
-                  </p:tgtEl>
-                </p:cond>
-              </p:prevCondLst>
-              <p:nextCondLst>
-                <p:cond evt="onNext" delay="0">
-                  <p:tgtEl>
-                    <p:sldTgt/>
-                  </p:tgtEl>
-                </p:cond>
-              </p:nextCondLst>
-            </p:seq>
-          </p:childTnLst>
-        </p:cTn>
-      </p:par>
-    </p:tnLst>
-  </p:timing>
-</p:sld>
-</file>
-
-<file path=ppt/slides/slide50.xml><?xml version="1.0" encoding="utf-8"?>
+<file path=ppt/slides/slide49.xml><?xml version="1.0" encoding="utf-8"?>
 <p:sld xmlns:a="http://schemas.openxmlformats.org/drawingml/2006/main" xmlns:r="http://schemas.openxmlformats.org/officeDocument/2006/relationships" xmlns:p="http://schemas.openxmlformats.org/presentationml/2006/main">
   <p:cSld>
     <p:spTree>
@@ -29793,7 +28328,533 @@
 </p:sld>
 </file>
 
-<file path=ppt/slides/slide51.xml><?xml version="1.0" encoding="utf-8"?>
+<file path=ppt/slides/slide5.xml><?xml version="1.0" encoding="utf-8"?>
+<p:sld xmlns:a="http://schemas.openxmlformats.org/drawingml/2006/main" xmlns:r="http://schemas.openxmlformats.org/officeDocument/2006/relationships" xmlns:p="http://schemas.openxmlformats.org/presentationml/2006/main">
+  <p:cSld>
+    <p:spTree>
+      <p:nvGrpSpPr>
+        <p:cNvPr id="1" name="">
+          <a:extLst>
+            <a:ext uri="{FF2B5EF4-FFF2-40B4-BE49-F238E27FC236}">
+              <a16:creationId xmlns:a16="http://schemas.microsoft.com/office/drawing/2014/main" id="{9AC68F5F-5608-0C70-F2DD-623A1DC2FC79}"/>
+            </a:ext>
+          </a:extLst>
+        </p:cNvPr>
+        <p:cNvGrpSpPr/>
+        <p:nvPr/>
+      </p:nvGrpSpPr>
+      <p:grpSpPr>
+        <a:xfrm>
+          <a:off x="0" y="0"/>
+          <a:ext cx="0" cy="0"/>
+          <a:chOff x="0" y="0"/>
+          <a:chExt cx="0" cy="0"/>
+        </a:xfrm>
+      </p:grpSpPr>
+      <p:sp>
+        <p:nvSpPr>
+          <p:cNvPr id="2" name="Title 1">
+            <a:extLst>
+              <a:ext uri="{FF2B5EF4-FFF2-40B4-BE49-F238E27FC236}">
+                <a16:creationId xmlns:a16="http://schemas.microsoft.com/office/drawing/2014/main" id="{68CF49BB-AD56-E7CF-4823-D942D28B5EBD}"/>
+              </a:ext>
+            </a:extLst>
+          </p:cNvPr>
+          <p:cNvSpPr>
+            <a:spLocks noGrp="1"/>
+          </p:cNvSpPr>
+          <p:nvPr>
+            <p:ph type="title"/>
+          </p:nvPr>
+        </p:nvSpPr>
+        <p:spPr/>
+        <p:txBody>
+          <a:bodyPr/>
+          <a:lstStyle/>
+          <a:p>
+            <a:pPr marL="0" lvl="0" indent="0">
+              <a:buNone/>
+            </a:pPr>
+            <a:r>
+              <a:rPr lang="en-US" dirty="0"/>
+              <a:t>Zero-Inflated Responses</a:t>
+            </a:r>
+            <a:endParaRPr dirty="0"/>
+          </a:p>
+        </p:txBody>
+      </p:sp>
+      <p:sp>
+        <p:nvSpPr>
+          <p:cNvPr id="3" name="Content Placeholder 2">
+            <a:extLst>
+              <a:ext uri="{FF2B5EF4-FFF2-40B4-BE49-F238E27FC236}">
+                <a16:creationId xmlns:a16="http://schemas.microsoft.com/office/drawing/2014/main" id="{A2E97D54-EC36-0EE6-7D66-58D0B07E5E81}"/>
+              </a:ext>
+            </a:extLst>
+          </p:cNvPr>
+          <p:cNvSpPr>
+            <a:spLocks noGrp="1"/>
+          </p:cNvSpPr>
+          <p:nvPr>
+            <p:ph idx="1"/>
+          </p:nvPr>
+        </p:nvSpPr>
+        <p:spPr/>
+        <p:txBody>
+          <a:bodyPr>
+            <a:normAutofit fontScale="85000" lnSpcReduction="10000"/>
+          </a:bodyPr>
+          <a:lstStyle/>
+          <a:p>
+            <a:pPr marL="0" lvl="0" indent="0">
+              <a:buNone/>
+            </a:pPr>
+            <a:r>
+              <a:rPr lang="en-US" dirty="0"/>
+              <a:t>Zero-inflated response variables arise in many situations </a:t>
+            </a:r>
+            <a:endParaRPr dirty="0"/>
+          </a:p>
+          <a:p>
+            <a:pPr lvl="0"/>
+            <a:r>
+              <a:rPr lang="en-US" dirty="0"/>
+              <a:t>Most people who view an ecommerce site buy 0 products</a:t>
+            </a:r>
+          </a:p>
+          <a:p>
+            <a:pPr lvl="0"/>
+            <a:r>
+              <a:rPr lang="en-US" dirty="0"/>
+              <a:t>Most auto drivers have no crashes per year </a:t>
+            </a:r>
+          </a:p>
+          <a:p>
+            <a:pPr lvl="0"/>
+            <a:r>
+              <a:rPr lang="en-US" dirty="0"/>
+              <a:t>Most dental patients examined require 0 root canals </a:t>
+            </a:r>
+          </a:p>
+          <a:p>
+            <a:pPr lvl="0"/>
+            <a:r>
+              <a:rPr lang="en-US" dirty="0"/>
+              <a:t>In much of the world the average rainfall amount on a specific day is 0 </a:t>
+            </a:r>
+          </a:p>
+          <a:p>
+            <a:pPr lvl="0"/>
+            <a:r>
+              <a:rPr lang="en-US" dirty="0"/>
+              <a:t>The number of sever weather events in a specific area per month is typically 0  </a:t>
+            </a:r>
+          </a:p>
+          <a:p>
+            <a:r>
+              <a:rPr lang="en-US" dirty="0"/>
+              <a:t>In epidemiology the probability distribution of the of people contracting a disease per day has many zeros</a:t>
+            </a:r>
+          </a:p>
+          <a:p>
+            <a:r>
+              <a:rPr lang="en-US" dirty="0"/>
+              <a:t>Etc.</a:t>
+            </a:r>
+          </a:p>
+          <a:p>
+            <a:pPr lvl="0"/>
+            <a:endParaRPr dirty="0"/>
+          </a:p>
+        </p:txBody>
+      </p:sp>
+    </p:spTree>
+    <p:extLst>
+      <p:ext uri="{BB962C8B-B14F-4D97-AF65-F5344CB8AC3E}">
+        <p14:creationId xmlns:p14="http://schemas.microsoft.com/office/powerpoint/2010/main" val="1417896931"/>
+      </p:ext>
+    </p:extLst>
+  </p:cSld>
+  <p:clrMapOvr>
+    <a:masterClrMapping/>
+  </p:clrMapOvr>
+  <p:timing>
+    <p:tnLst>
+      <p:par>
+        <p:cTn id="1" dur="indefinite" restart="never" nodeType="tmRoot">
+          <p:childTnLst>
+            <p:seq concurrent="1" nextAc="seek">
+              <p:cTn id="2" dur="indefinite" nodeType="mainSeq">
+                <p:childTnLst>
+                  <p:par>
+                    <p:cTn id="3" fill="hold">
+                      <p:stCondLst>
+                        <p:cond delay="indefinite"/>
+                      </p:stCondLst>
+                      <p:childTnLst>
+                        <p:par>
+                          <p:cTn id="4" fill="hold">
+                            <p:stCondLst>
+                              <p:cond delay="0"/>
+                            </p:stCondLst>
+                            <p:childTnLst>
+                              <p:par>
+                                <p:cTn id="5" presetID="1" presetClass="entr" presetSubtype="0" fill="hold" nodeType="clickEffect">
+                                  <p:stCondLst>
+                                    <p:cond delay="0"/>
+                                  </p:stCondLst>
+                                  <p:childTnLst>
+                                    <p:set>
+                                      <p:cBhvr>
+                                        <p:cTn id="6" dur="1" fill="hold">
+                                          <p:stCondLst>
+                                            <p:cond delay="0"/>
+                                          </p:stCondLst>
+                                        </p:cTn>
+                                        <p:tgtEl>
+                                          <p:spTgt spid="3">
+                                            <p:txEl>
+                                              <p:pRg st="1" end="1"/>
+                                            </p:txEl>
+                                          </p:spTgt>
+                                        </p:tgtEl>
+                                        <p:attrNameLst>
+                                          <p:attrName>style.visibility</p:attrName>
+                                        </p:attrNameLst>
+                                      </p:cBhvr>
+                                      <p:to>
+                                        <p:strVal val="visible"/>
+                                      </p:to>
+                                    </p:set>
+                                  </p:childTnLst>
+                                </p:cTn>
+                              </p:par>
+                            </p:childTnLst>
+                          </p:cTn>
+                        </p:par>
+                      </p:childTnLst>
+                    </p:cTn>
+                  </p:par>
+                  <p:par>
+                    <p:cTn id="7" fill="hold">
+                      <p:stCondLst>
+                        <p:cond delay="indefinite"/>
+                      </p:stCondLst>
+                      <p:childTnLst>
+                        <p:par>
+                          <p:cTn id="8" fill="hold">
+                            <p:stCondLst>
+                              <p:cond delay="0"/>
+                            </p:stCondLst>
+                            <p:childTnLst>
+                              <p:par>
+                                <p:cTn id="9" presetID="1" presetClass="entr" presetSubtype="0" fill="hold" nodeType="clickEffect">
+                                  <p:stCondLst>
+                                    <p:cond delay="0"/>
+                                  </p:stCondLst>
+                                  <p:childTnLst>
+                                    <p:set>
+                                      <p:cBhvr>
+                                        <p:cTn id="10" dur="1" fill="hold">
+                                          <p:stCondLst>
+                                            <p:cond delay="0"/>
+                                          </p:stCondLst>
+                                        </p:cTn>
+                                        <p:tgtEl>
+                                          <p:spTgt spid="3">
+                                            <p:txEl>
+                                              <p:pRg st="2" end="2"/>
+                                            </p:txEl>
+                                          </p:spTgt>
+                                        </p:tgtEl>
+                                        <p:attrNameLst>
+                                          <p:attrName>style.visibility</p:attrName>
+                                        </p:attrNameLst>
+                                      </p:cBhvr>
+                                      <p:to>
+                                        <p:strVal val="visible"/>
+                                      </p:to>
+                                    </p:set>
+                                  </p:childTnLst>
+                                </p:cTn>
+                              </p:par>
+                            </p:childTnLst>
+                          </p:cTn>
+                        </p:par>
+                      </p:childTnLst>
+                    </p:cTn>
+                  </p:par>
+                  <p:par>
+                    <p:cTn id="11" fill="hold">
+                      <p:stCondLst>
+                        <p:cond delay="indefinite"/>
+                      </p:stCondLst>
+                      <p:childTnLst>
+                        <p:par>
+                          <p:cTn id="12" fill="hold">
+                            <p:stCondLst>
+                              <p:cond delay="0"/>
+                            </p:stCondLst>
+                            <p:childTnLst>
+                              <p:par>
+                                <p:cTn id="13" presetID="1" presetClass="entr" presetSubtype="0" fill="hold" nodeType="clickEffect">
+                                  <p:stCondLst>
+                                    <p:cond delay="0"/>
+                                  </p:stCondLst>
+                                  <p:childTnLst>
+                                    <p:set>
+                                      <p:cBhvr>
+                                        <p:cTn id="14" dur="1" fill="hold">
+                                          <p:stCondLst>
+                                            <p:cond delay="0"/>
+                                          </p:stCondLst>
+                                        </p:cTn>
+                                        <p:tgtEl>
+                                          <p:spTgt spid="3">
+                                            <p:txEl>
+                                              <p:pRg st="3" end="3"/>
+                                            </p:txEl>
+                                          </p:spTgt>
+                                        </p:tgtEl>
+                                        <p:attrNameLst>
+                                          <p:attrName>style.visibility</p:attrName>
+                                        </p:attrNameLst>
+                                      </p:cBhvr>
+                                      <p:to>
+                                        <p:strVal val="visible"/>
+                                      </p:to>
+                                    </p:set>
+                                  </p:childTnLst>
+                                </p:cTn>
+                              </p:par>
+                            </p:childTnLst>
+                          </p:cTn>
+                        </p:par>
+                      </p:childTnLst>
+                    </p:cTn>
+                  </p:par>
+                  <p:par>
+                    <p:cTn id="15" fill="hold">
+                      <p:stCondLst>
+                        <p:cond delay="indefinite"/>
+                      </p:stCondLst>
+                      <p:childTnLst>
+                        <p:par>
+                          <p:cTn id="16" fill="hold">
+                            <p:stCondLst>
+                              <p:cond delay="0"/>
+                            </p:stCondLst>
+                            <p:childTnLst>
+                              <p:par>
+                                <p:cTn id="17" presetID="1" presetClass="entr" presetSubtype="0" fill="hold" nodeType="clickEffect">
+                                  <p:stCondLst>
+                                    <p:cond delay="0"/>
+                                  </p:stCondLst>
+                                  <p:childTnLst>
+                                    <p:set>
+                                      <p:cBhvr>
+                                        <p:cTn id="18" dur="1" fill="hold">
+                                          <p:stCondLst>
+                                            <p:cond delay="0"/>
+                                          </p:stCondLst>
+                                        </p:cTn>
+                                        <p:tgtEl>
+                                          <p:spTgt spid="3">
+                                            <p:txEl>
+                                              <p:pRg st="4" end="4"/>
+                                            </p:txEl>
+                                          </p:spTgt>
+                                        </p:tgtEl>
+                                        <p:attrNameLst>
+                                          <p:attrName>style.visibility</p:attrName>
+                                        </p:attrNameLst>
+                                      </p:cBhvr>
+                                      <p:to>
+                                        <p:strVal val="visible"/>
+                                      </p:to>
+                                    </p:set>
+                                  </p:childTnLst>
+                                </p:cTn>
+                              </p:par>
+                            </p:childTnLst>
+                          </p:cTn>
+                        </p:par>
+                      </p:childTnLst>
+                    </p:cTn>
+                  </p:par>
+                  <p:par>
+                    <p:cTn id="19" fill="hold">
+                      <p:stCondLst>
+                        <p:cond delay="indefinite"/>
+                      </p:stCondLst>
+                      <p:childTnLst>
+                        <p:par>
+                          <p:cTn id="20" fill="hold">
+                            <p:stCondLst>
+                              <p:cond delay="0"/>
+                            </p:stCondLst>
+                            <p:childTnLst>
+                              <p:par>
+                                <p:cTn id="21" presetID="1" presetClass="entr" presetSubtype="0" fill="hold" nodeType="clickEffect">
+                                  <p:stCondLst>
+                                    <p:cond delay="0"/>
+                                  </p:stCondLst>
+                                  <p:childTnLst>
+                                    <p:set>
+                                      <p:cBhvr>
+                                        <p:cTn id="22" dur="1" fill="hold">
+                                          <p:stCondLst>
+                                            <p:cond delay="0"/>
+                                          </p:stCondLst>
+                                        </p:cTn>
+                                        <p:tgtEl>
+                                          <p:spTgt spid="3">
+                                            <p:txEl>
+                                              <p:pRg st="5" end="5"/>
+                                            </p:txEl>
+                                          </p:spTgt>
+                                        </p:tgtEl>
+                                        <p:attrNameLst>
+                                          <p:attrName>style.visibility</p:attrName>
+                                        </p:attrNameLst>
+                                      </p:cBhvr>
+                                      <p:to>
+                                        <p:strVal val="visible"/>
+                                      </p:to>
+                                    </p:set>
+                                  </p:childTnLst>
+                                </p:cTn>
+                              </p:par>
+                            </p:childTnLst>
+                          </p:cTn>
+                        </p:par>
+                      </p:childTnLst>
+                    </p:cTn>
+                  </p:par>
+                  <p:par>
+                    <p:cTn id="23" fill="hold">
+                      <p:stCondLst>
+                        <p:cond delay="indefinite"/>
+                      </p:stCondLst>
+                      <p:childTnLst>
+                        <p:par>
+                          <p:cTn id="24" fill="hold">
+                            <p:stCondLst>
+                              <p:cond delay="0"/>
+                            </p:stCondLst>
+                            <p:childTnLst>
+                              <p:par>
+                                <p:cTn id="25" presetID="1" presetClass="entr" presetSubtype="0" fill="hold" nodeType="clickEffect">
+                                  <p:stCondLst>
+                                    <p:cond delay="0"/>
+                                  </p:stCondLst>
+                                  <p:childTnLst>
+                                    <p:set>
+                                      <p:cBhvr>
+                                        <p:cTn id="26" dur="1" fill="hold">
+                                          <p:stCondLst>
+                                            <p:cond delay="0"/>
+                                          </p:stCondLst>
+                                        </p:cTn>
+                                        <p:tgtEl>
+                                          <p:spTgt spid="3">
+                                            <p:txEl>
+                                              <p:pRg st="6" end="6"/>
+                                            </p:txEl>
+                                          </p:spTgt>
+                                        </p:tgtEl>
+                                        <p:attrNameLst>
+                                          <p:attrName>style.visibility</p:attrName>
+                                        </p:attrNameLst>
+                                      </p:cBhvr>
+                                      <p:to>
+                                        <p:strVal val="visible"/>
+                                      </p:to>
+                                    </p:set>
+                                  </p:childTnLst>
+                                </p:cTn>
+                              </p:par>
+                            </p:childTnLst>
+                          </p:cTn>
+                        </p:par>
+                      </p:childTnLst>
+                    </p:cTn>
+                  </p:par>
+                  <p:par>
+                    <p:cTn id="27" fill="hold">
+                      <p:stCondLst>
+                        <p:cond delay="indefinite"/>
+                      </p:stCondLst>
+                      <p:childTnLst>
+                        <p:par>
+                          <p:cTn id="28" fill="hold">
+                            <p:stCondLst>
+                              <p:cond delay="0"/>
+                            </p:stCondLst>
+                            <p:childTnLst>
+                              <p:par>
+                                <p:cTn id="29" presetID="1" presetClass="entr" presetSubtype="0" fill="hold" nodeType="clickEffect">
+                                  <p:stCondLst>
+                                    <p:cond delay="0"/>
+                                  </p:stCondLst>
+                                  <p:childTnLst>
+                                    <p:set>
+                                      <p:cBhvr>
+                                        <p:cTn id="30" dur="1" fill="hold">
+                                          <p:stCondLst>
+                                            <p:cond delay="0"/>
+                                          </p:stCondLst>
+                                        </p:cTn>
+                                        <p:tgtEl>
+                                          <p:spTgt spid="3">
+                                            <p:txEl>
+                                              <p:pRg st="7" end="7"/>
+                                            </p:txEl>
+                                          </p:spTgt>
+                                        </p:tgtEl>
+                                        <p:attrNameLst>
+                                          <p:attrName>style.visibility</p:attrName>
+                                        </p:attrNameLst>
+                                      </p:cBhvr>
+                                      <p:to>
+                                        <p:strVal val="visible"/>
+                                      </p:to>
+                                    </p:set>
+                                  </p:childTnLst>
+                                </p:cTn>
+                              </p:par>
+                            </p:childTnLst>
+                          </p:cTn>
+                        </p:par>
+                      </p:childTnLst>
+                    </p:cTn>
+                  </p:par>
+                </p:childTnLst>
+              </p:cTn>
+              <p:prevCondLst>
+                <p:cond evt="onPrev" delay="0">
+                  <p:tgtEl>
+                    <p:sldTgt/>
+                  </p:tgtEl>
+                </p:cond>
+              </p:prevCondLst>
+              <p:nextCondLst>
+                <p:cond evt="onNext" delay="0">
+                  <p:tgtEl>
+                    <p:sldTgt/>
+                  </p:tgtEl>
+                </p:cond>
+              </p:nextCondLst>
+            </p:seq>
+          </p:childTnLst>
+        </p:cTn>
+      </p:par>
+    </p:tnLst>
+  </p:timing>
+</p:sld>
+</file>
+
+<file path=ppt/slides/slide50.xml><?xml version="1.0" encoding="utf-8"?>
 <p:sld xmlns:a="http://schemas.openxmlformats.org/drawingml/2006/main" xmlns:r="http://schemas.openxmlformats.org/officeDocument/2006/relationships" xmlns:p="http://schemas.openxmlformats.org/presentationml/2006/main">
   <p:cSld>
     <p:spTree>
@@ -30146,7 +29207,7 @@
 </p:sld>
 </file>
 
-<file path=ppt/slides/slide52.xml><?xml version="1.0" encoding="utf-8"?>
+<file path=ppt/slides/slide51.xml><?xml version="1.0" encoding="utf-8"?>
 <p:sld xmlns:a="http://schemas.openxmlformats.org/drawingml/2006/main" xmlns:r="http://schemas.openxmlformats.org/officeDocument/2006/relationships" xmlns:p="http://schemas.openxmlformats.org/presentationml/2006/main">
   <p:cSld>
     <p:spTree>
@@ -30702,7 +29763,7 @@
 </p:sld>
 </file>
 
-<file path=ppt/slides/slide53.xml><?xml version="1.0" encoding="utf-8"?>
+<file path=ppt/slides/slide52.xml><?xml version="1.0" encoding="utf-8"?>
 <p:sld xmlns:a="http://schemas.openxmlformats.org/drawingml/2006/main" xmlns:r="http://schemas.openxmlformats.org/officeDocument/2006/relationships" xmlns:p="http://schemas.openxmlformats.org/presentationml/2006/main">
   <p:cSld>
     <p:spTree>
@@ -31316,7 +30377,7 @@
 </p:sld>
 </file>
 
-<file path=ppt/slides/slide54.xml><?xml version="1.0" encoding="utf-8"?>
+<file path=ppt/slides/slide53.xml><?xml version="1.0" encoding="utf-8"?>
 <p:sld xmlns:a="http://schemas.openxmlformats.org/drawingml/2006/main" xmlns:r="http://schemas.openxmlformats.org/officeDocument/2006/relationships" xmlns:p="http://schemas.openxmlformats.org/presentationml/2006/main">
   <p:cSld>
     <p:spTree>
@@ -32021,7 +31082,7 @@
 </p:sld>
 </file>
 
-<file path=ppt/slides/slide55.xml><?xml version="1.0" encoding="utf-8"?>
+<file path=ppt/slides/slide54.xml><?xml version="1.0" encoding="utf-8"?>
 <p:sld xmlns:a="http://schemas.openxmlformats.org/drawingml/2006/main" xmlns:r="http://schemas.openxmlformats.org/officeDocument/2006/relationships" xmlns:p="http://schemas.openxmlformats.org/presentationml/2006/main">
   <p:cSld>
     <p:spTree>
@@ -32091,7 +31152,7 @@
 </p:sld>
 </file>
 
-<file path=ppt/slides/slide56.xml><?xml version="1.0" encoding="utf-8"?>
+<file path=ppt/slides/slide55.xml><?xml version="1.0" encoding="utf-8"?>
 <p:sld xmlns:a="http://schemas.openxmlformats.org/drawingml/2006/main" xmlns:r="http://schemas.openxmlformats.org/officeDocument/2006/relationships" xmlns:p="http://schemas.openxmlformats.org/presentationml/2006/main">
   <p:cSld>
     <p:spTree>
@@ -32140,7 +31201,7 @@
             </a:pPr>
             <a:r>
               <a:rPr lang="en-US" dirty="0"/>
-              <a:t>Imputation of Missing Values</a:t>
+              <a:t>Understanding Missing Values</a:t>
             </a:r>
             <a:endParaRPr dirty="0"/>
           </a:p>
@@ -32170,7 +31231,7 @@
         </p:spPr>
         <p:txBody>
           <a:bodyPr>
-            <a:normAutofit fontScale="92500"/>
+            <a:normAutofit lnSpcReduction="10000"/>
           </a:bodyPr>
           <a:lstStyle/>
           <a:p>
@@ -32179,7 +31240,7 @@
             </a:pPr>
             <a:r>
               <a:rPr lang="en-US" dirty="0"/>
-              <a:t>We can classify missing data into three categories    </a:t>
+              <a:t>We can classify missing data patterns into three categories    </a:t>
             </a:r>
             <a:endParaRPr dirty="0"/>
           </a:p>
@@ -32194,18 +31255,18 @@
             </a:r>
             <a:r>
               <a:rPr lang="en-US" b="1" dirty="0"/>
-              <a:t>missing completely at random</a:t>
+              <a:t>missing completely at random (MCAR)</a:t>
             </a:r>
             <a:r>
               <a:rPr lang="en-US" dirty="0"/>
-              <a:t> have missing observations that are a random subset of all observations of a random variable. </a:t>
+              <a:t> have missing observations that are a random subset of all observations of a random variable </a:t>
             </a:r>
           </a:p>
           <a:p>
             <a:pPr lvl="1"/>
             <a:r>
               <a:rPr lang="en-US" dirty="0"/>
-              <a:t>The missing and observed values will have similar distributions in this case.</a:t>
+              <a:t>The missing and observed values will have similar distributions in this case</a:t>
             </a:r>
           </a:p>
           <a:p>
@@ -32219,7 +31280,7 @@
             </a:r>
             <a:r>
               <a:rPr lang="en-US" b="1" dirty="0"/>
-              <a:t>missing at random</a:t>
+              <a:t>missing at random (MAR)</a:t>
             </a:r>
             <a:r>
               <a:rPr lang="en-US" dirty="0"/>
@@ -32230,7 +31291,7 @@
             <a:pPr lvl="1"/>
             <a:r>
               <a:rPr lang="en-US" dirty="0"/>
-              <a:t>But these missing values can be entirely explained by other observed variables.</a:t>
+              <a:t>MAR values can be entirely explained by other observed variables</a:t>
             </a:r>
           </a:p>
         </p:txBody>
@@ -32248,7 +31309,7 @@
 </p:sld>
 </file>
 
-<file path=ppt/slides/slide57.xml><?xml version="1.0" encoding="utf-8"?>
+<file path=ppt/slides/slide56.xml><?xml version="1.0" encoding="utf-8"?>
 <p:sld xmlns:a="http://schemas.openxmlformats.org/drawingml/2006/main" xmlns:r="http://schemas.openxmlformats.org/officeDocument/2006/relationships" xmlns:p="http://schemas.openxmlformats.org/presentationml/2006/main">
   <p:cSld>
     <p:spTree>
@@ -32297,7 +31358,7 @@
             </a:pPr>
             <a:r>
               <a:rPr lang="en-US" dirty="0"/>
-              <a:t>Imputation of Missing Values</a:t>
+              <a:t>Understanding Missing Values</a:t>
             </a:r>
             <a:endParaRPr dirty="0"/>
           </a:p>
@@ -32365,7 +31426,7 @@
             <a:pPr lvl="1"/>
             <a:r>
               <a:rPr lang="en-US" dirty="0"/>
-              <a:t>For Cases of missing not at random are best address by a filling algorithms and methods such as autoencoders since the missing value pattern is systematic.</a:t>
+              <a:t>For Cases of missing not at random are best address by a filling algorithms and methods</a:t>
             </a:r>
           </a:p>
         </p:txBody>
@@ -32383,7 +31444,7 @@
 </p:sld>
 </file>
 
-<file path=ppt/slides/slide58.xml><?xml version="1.0" encoding="utf-8"?>
+<file path=ppt/slides/slide57.xml><?xml version="1.0" encoding="utf-8"?>
 <p:sld xmlns:a="http://schemas.openxmlformats.org/drawingml/2006/main" xmlns:r="http://schemas.openxmlformats.org/officeDocument/2006/relationships" xmlns:p="http://schemas.openxmlformats.org/presentationml/2006/main">
   <p:cSld>
     <p:spTree>
@@ -32462,7 +31523,7 @@
         </p:spPr>
         <p:txBody>
           <a:bodyPr>
-            <a:normAutofit fontScale="92500" lnSpcReduction="10000"/>
+            <a:normAutofit/>
           </a:bodyPr>
           <a:lstStyle/>
           <a:p>
@@ -32471,64 +31532,33 @@
             </a:pPr>
             <a:r>
               <a:rPr lang="en-US" dirty="0"/>
-              <a:t>Algorithms used for machine learning do not need to preserve distributions</a:t>
+              <a:t>Imputation methods must match the missing data pattern and intended use</a:t>
             </a:r>
           </a:p>
           <a:p>
             <a:r>
               <a:rPr lang="en-US" dirty="0"/>
-              <a:t>For ML we only need a reasonably accurate imputed value </a:t>
-            </a:r>
-          </a:p>
-          <a:p>
+              <a:t>Machine learning algorithms only need a good point estimate for the imputed value</a:t>
+            </a:r>
+          </a:p>
+          <a:p>
+            <a:pPr lvl="1"/>
             <a:r>
               <a:rPr lang="en-US" dirty="0"/>
-              <a:t>Commonly used algorithms include</a:t>
+              <a:t>For ML, we do not much care what the confidence intervals are</a:t>
+            </a:r>
+          </a:p>
+          <a:p>
+            <a:r>
+              <a:rPr lang="en-US" dirty="0"/>
+              <a:t>Inference requires drawing imputed values from the distribution of the variable  </a:t>
             </a:r>
           </a:p>
           <a:p>
             <a:pPr lvl="1"/>
             <a:r>
               <a:rPr lang="en-US" dirty="0"/>
-              <a:t>Filling, mean, median, …</a:t>
-            </a:r>
-          </a:p>
-          <a:p>
-            <a:pPr lvl="1"/>
-            <a:r>
-              <a:rPr lang="en-US" dirty="0"/>
-              <a:t>Interpolation, linear, spline, etc.     </a:t>
-            </a:r>
-          </a:p>
-          <a:p>
-            <a:pPr lvl="1"/>
-            <a:r>
-              <a:rPr lang="en-US" dirty="0"/>
-              <a:t>Forward and back filling</a:t>
-            </a:r>
-          </a:p>
-          <a:p>
-            <a:pPr lvl="1"/>
-            <a:r>
-              <a:rPr lang="en-US" dirty="0"/>
-              <a:t>K-nearest neighbors </a:t>
-            </a:r>
-          </a:p>
-          <a:p>
-            <a:pPr lvl="1"/>
-            <a:r>
-              <a:rPr lang="en-US" dirty="0" err="1"/>
-              <a:t>etc</a:t>
-            </a:r>
-            <a:r>
-              <a:rPr lang="en-US" dirty="0"/>
-              <a:t>… </a:t>
-            </a:r>
-          </a:p>
-          <a:p>
-            <a:r>
-              <a:rPr lang="en-US" dirty="0"/>
-              <a:t>These algorithms only provide point estimates and are not useful for inference   </a:t>
+              <a:t>We want unbiased estimates of the confidence intervals  </a:t>
             </a:r>
           </a:p>
           <a:p>
@@ -32549,7 +31579,7 @@
 </p:sld>
 </file>
 
-<file path=ppt/slides/slide59.xml><?xml version="1.0" encoding="utf-8"?>
+<file path=ppt/slides/slide58.xml><?xml version="1.0" encoding="utf-8"?>
 <p:sld xmlns:a="http://schemas.openxmlformats.org/drawingml/2006/main" xmlns:r="http://schemas.openxmlformats.org/officeDocument/2006/relationships" xmlns:p="http://schemas.openxmlformats.org/presentationml/2006/main">
   <p:cSld>
     <p:spTree>
@@ -32557,7 +31587,7 @@
         <p:cNvPr id="1" name="">
           <a:extLst>
             <a:ext uri="{FF2B5EF4-FFF2-40B4-BE49-F238E27FC236}">
-              <a16:creationId xmlns:a16="http://schemas.microsoft.com/office/drawing/2014/main" id="{4ABC3421-F68D-9E08-4B79-AF9B86A06B44}"/>
+              <a16:creationId xmlns:a16="http://schemas.microsoft.com/office/drawing/2014/main" id="{CE1DAB7D-6678-A6DC-17E0-2F2C67358EC1}"/>
             </a:ext>
           </a:extLst>
         </p:cNvPr>
@@ -32577,7 +31607,7 @@
           <p:cNvPr id="2" name="Title 1">
             <a:extLst>
               <a:ext uri="{FF2B5EF4-FFF2-40B4-BE49-F238E27FC236}">
-                <a16:creationId xmlns:a16="http://schemas.microsoft.com/office/drawing/2014/main" id="{1DAB17F1-C740-B30D-089D-9D06F64E3FC0}"/>
+                <a16:creationId xmlns:a16="http://schemas.microsoft.com/office/drawing/2014/main" id="{52A1E7A9-8462-AFB6-69E8-D29C815D4DD0}"/>
               </a:ext>
             </a:extLst>
           </p:cNvPr>
@@ -32609,7 +31639,7 @@
           <p:cNvPr id="3" name="Content Placeholder 2">
             <a:extLst>
               <a:ext uri="{FF2B5EF4-FFF2-40B4-BE49-F238E27FC236}">
-                <a16:creationId xmlns:a16="http://schemas.microsoft.com/office/drawing/2014/main" id="{30B1251A-5AD7-B8EC-D878-35A0925B92AC}"/>
+                <a16:creationId xmlns:a16="http://schemas.microsoft.com/office/drawing/2014/main" id="{EE8C0F07-8E21-F467-CD9D-1ED0C942B535}"/>
               </a:ext>
             </a:extLst>
           </p:cNvPr>
@@ -32628,7 +31658,7 @@
         </p:spPr>
         <p:txBody>
           <a:bodyPr>
-            <a:normAutofit fontScale="55000" lnSpcReduction="20000"/>
+            <a:normAutofit lnSpcReduction="10000"/>
           </a:bodyPr>
           <a:lstStyle/>
           <a:p>
@@ -32637,183 +31667,218 @@
             </a:pPr>
             <a:r>
               <a:rPr lang="en-US" dirty="0"/>
-              <a:t>Algorithms used for machine learning do not need to preserve distributions</a:t>
-            </a:r>
-          </a:p>
-          <a:p>
-            <a:pPr marL="457200" lvl="0" indent="-457200">
-              <a:buFont typeface="+mj-lt"/>
-              <a:buAutoNum type="arabicPeriod"/>
-            </a:pPr>
+              <a:t>Algorithms used for MCAR and MAR data for machine learning do not need to preserve distributions</a:t>
+            </a:r>
+          </a:p>
+          <a:p>
             <a:r>
               <a:rPr lang="en-US" dirty="0"/>
-              <a:t>A simple place-holder imputation, such as filling with mean values, is performed for all missing values in the dataset.</a:t>
-            </a:r>
-          </a:p>
-          <a:p>
-            <a:pPr marL="457200" lvl="0" indent="-457200">
-              <a:buFont typeface="+mj-lt"/>
-              <a:buAutoNum type="arabicPeriod"/>
-            </a:pPr>
+              <a:t>Commonly used algorithms for machine </a:t>
+            </a:r>
+            <a:r>
+              <a:rPr lang="en-US" dirty="0" err="1"/>
+              <a:t>learling</a:t>
+            </a:r>
             <a:r>
               <a:rPr lang="en-US" dirty="0"/>
-              <a:t>Place-holder imputations of one variable are set back to missing.</a:t>
-            </a:r>
-          </a:p>
-          <a:p>
-            <a:pPr marL="457200" lvl="0" indent="-457200">
-              <a:buFont typeface="+mj-lt"/>
-              <a:buAutoNum type="arabicPeriod"/>
-            </a:pPr>
+              <a:t> include</a:t>
+            </a:r>
+          </a:p>
+          <a:p>
+            <a:pPr lvl="1"/>
             <a:r>
               <a:rPr lang="en-US" dirty="0"/>
-              <a:t>The missing values from Step 2 are regressed on the other variables in the dataset. </a:t>
-            </a:r>
-          </a:p>
-          <a:p>
-            <a:pPr marL="800100" lvl="1" indent="-457200">
-              <a:buFont typeface="+mj-lt"/>
-              <a:buAutoNum type="arabicPeriod"/>
-            </a:pPr>
+              <a:t>Filling, mean, median, …</a:t>
+            </a:r>
+          </a:p>
+          <a:p>
+            <a:pPr lvl="1"/>
             <a:r>
               <a:rPr lang="en-US" dirty="0"/>
-              <a:t>Not all of the other variables need be used. </a:t>
-            </a:r>
-          </a:p>
-          <a:p>
-            <a:pPr marL="800100" lvl="1" indent="-457200">
-              <a:buFont typeface="+mj-lt"/>
-              <a:buAutoNum type="arabicPeriod"/>
-            </a:pPr>
+              <a:t>Interpolation, linear, spline, etc.     </a:t>
+            </a:r>
+          </a:p>
+          <a:p>
+            <a:pPr lvl="1"/>
             <a:r>
               <a:rPr lang="en-US" dirty="0"/>
-              <a:t>Regression models can include linear, logistic, or Poison regression models. </a:t>
-            </a:r>
-          </a:p>
-          <a:p>
-            <a:pPr marL="800100" lvl="1" indent="-457200">
-              <a:buFont typeface="+mj-lt"/>
-              <a:buAutoNum type="arabicPeriod"/>
-            </a:pPr>
+              <a:t>Forward and back filling</a:t>
+            </a:r>
+          </a:p>
+          <a:p>
+            <a:pPr lvl="1"/>
             <a:r>
               <a:rPr lang="en-US" dirty="0"/>
-              <a:t>Random forest models and other nonlinear regression models can be used.</a:t>
-            </a:r>
-          </a:p>
-          <a:p>
-            <a:pPr marL="457200" lvl="0" indent="-457200">
-              <a:buFont typeface="+mj-lt"/>
-              <a:buAutoNum type="arabicPeriod"/>
-            </a:pPr>
+              <a:t>K-nearest neighbors </a:t>
+            </a:r>
+          </a:p>
+          <a:p>
+            <a:pPr lvl="1"/>
+            <a:r>
+              <a:rPr lang="en-US" dirty="0" err="1"/>
+              <a:t>etc</a:t>
+            </a:r>
             <a:r>
               <a:rPr lang="en-US" dirty="0"/>
-              <a:t>The missing values from step 2 are replaced with predictions or imputations computed with the regression model. </a:t>
-            </a:r>
-          </a:p>
-          <a:p>
-            <a:pPr marL="800100" lvl="1" indent="-457200">
-              <a:buFont typeface="+mj-lt"/>
-              <a:buAutoNum type="arabicPeriod"/>
-            </a:pPr>
+              <a:t>… </a:t>
+            </a:r>
+          </a:p>
+          <a:p>
             <a:r>
               <a:rPr lang="en-US" dirty="0"/>
-              <a:t>The imputed value can now be used as an observation for regression on other missing values.</a:t>
-            </a:r>
-          </a:p>
-          <a:p>
-            <a:pPr marL="457200" lvl="0" indent="-457200">
-              <a:buFont typeface="+mj-lt"/>
-              <a:buAutoNum type="arabicPeriod"/>
-            </a:pPr>
-            <a:r>
-              <a:rPr lang="en-US" dirty="0"/>
-              <a:t>Steps 2–4 are then repeated for each variable with missing values. </a:t>
-            </a:r>
-          </a:p>
-          <a:p>
-            <a:pPr marL="800100" lvl="1" indent="-457200">
-              <a:buFont typeface="+mj-lt"/>
-              <a:buAutoNum type="arabicPeriod"/>
-            </a:pPr>
-            <a:r>
-              <a:rPr lang="en-US" dirty="0"/>
-              <a:t>Cycling through each of the variables with missing values constitutes one iteration of the algorithm. </a:t>
-            </a:r>
-          </a:p>
-          <a:p>
-            <a:pPr marL="800100" lvl="1" indent="-457200">
-              <a:buFont typeface="+mj-lt"/>
-              <a:buAutoNum type="arabicPeriod"/>
-            </a:pPr>
-            <a:r>
-              <a:rPr lang="en-US" dirty="0"/>
-              <a:t>This process continues until a stopping condition is reached where the imputed values are not changing significantly. </a:t>
-            </a:r>
-          </a:p>
-          <a:p>
-            <a:pPr marL="800100" lvl="1" indent="-457200">
-              <a:buFont typeface="+mj-lt"/>
-              <a:buAutoNum type="arabicPeriod"/>
-            </a:pPr>
-            <a:r>
-              <a:rPr lang="en-US" dirty="0"/>
-              <a:t>The foregoing steps are the </a:t>
-            </a:r>
-            <a:r>
-              <a:rPr lang="en-US" b="1" dirty="0"/>
-              <a:t>chained equations</a:t>
-            </a:r>
-            <a:r>
-              <a:rPr lang="en-US" dirty="0"/>
-              <a:t> giving the algorithm its name.</a:t>
-            </a:r>
-          </a:p>
-          <a:p>
-            <a:pPr marL="457200" lvl="0" indent="-457200">
-              <a:buFont typeface="+mj-lt"/>
-              <a:buAutoNum type="arabicPeriod"/>
-            </a:pPr>
-            <a:r>
-              <a:rPr lang="en-US" dirty="0"/>
-              <a:t>The process in steps 1-5 is repeated to compute random draws of the imputed values from a </a:t>
-            </a:r>
-            <a:r>
-              <a:rPr lang="en-US" b="1" dirty="0"/>
-              <a:t>posterior distribution</a:t>
-            </a:r>
-            <a:r>
-              <a:rPr lang="en-US"/>
-              <a:t>. </a:t>
-            </a:r>
-          </a:p>
-          <a:p>
-            <a:pPr marL="800100" lvl="1" indent="-457200">
-              <a:buFont typeface="+mj-lt"/>
-              <a:buAutoNum type="arabicPeriod"/>
-            </a:pPr>
-            <a:r>
-              <a:rPr lang="en-US" b="1">
-                <a:hlinkClick r:id="rId2"/>
-              </a:rPr>
-              <a:t>Rubin's </a:t>
-            </a:r>
-            <a:r>
-              <a:rPr lang="en-US" b="1" dirty="0">
-                <a:hlinkClick r:id="rId2"/>
-              </a:rPr>
-              <a:t>rules</a:t>
-            </a:r>
-            <a:r>
-              <a:rPr lang="en-US" dirty="0"/>
-              <a:t> are then used to compute the point estimate and error statistics for the imputed values.</a:t>
-            </a:r>
+              <a:t>These algorithms only provide point estimates and are not useful for inference   </a:t>
+            </a:r>
+          </a:p>
+          <a:p>
+            <a:endParaRPr dirty="0"/>
           </a:p>
         </p:txBody>
       </p:sp>
     </p:spTree>
     <p:extLst>
       <p:ext uri="{BB962C8B-B14F-4D97-AF65-F5344CB8AC3E}">
-        <p14:creationId xmlns:p14="http://schemas.microsoft.com/office/powerpoint/2010/main" val="1433634461"/>
+        <p14:creationId xmlns:p14="http://schemas.microsoft.com/office/powerpoint/2010/main" val="2617327773"/>
+      </p:ext>
+    </p:extLst>
+  </p:cSld>
+  <p:clrMapOvr>
+    <a:masterClrMapping/>
+  </p:clrMapOvr>
+</p:sld>
+</file>
+
+<file path=ppt/slides/slide59.xml><?xml version="1.0" encoding="utf-8"?>
+<p:sld xmlns:a="http://schemas.openxmlformats.org/drawingml/2006/main" xmlns:r="http://schemas.openxmlformats.org/officeDocument/2006/relationships" xmlns:p="http://schemas.openxmlformats.org/presentationml/2006/main">
+  <p:cSld>
+    <p:spTree>
+      <p:nvGrpSpPr>
+        <p:cNvPr id="1" name="">
+          <a:extLst>
+            <a:ext uri="{FF2B5EF4-FFF2-40B4-BE49-F238E27FC236}">
+              <a16:creationId xmlns:a16="http://schemas.microsoft.com/office/drawing/2014/main" id="{9B5AC65C-F5E9-BA93-5380-0CF56CA21585}"/>
+            </a:ext>
+          </a:extLst>
+        </p:cNvPr>
+        <p:cNvGrpSpPr/>
+        <p:nvPr/>
+      </p:nvGrpSpPr>
+      <p:grpSpPr>
+        <a:xfrm>
+          <a:off x="0" y="0"/>
+          <a:ext cx="0" cy="0"/>
+          <a:chOff x="0" y="0"/>
+          <a:chExt cx="0" cy="0"/>
+        </a:xfrm>
+      </p:grpSpPr>
+      <p:sp>
+        <p:nvSpPr>
+          <p:cNvPr id="2" name="Title 1">
+            <a:extLst>
+              <a:ext uri="{FF2B5EF4-FFF2-40B4-BE49-F238E27FC236}">
+                <a16:creationId xmlns:a16="http://schemas.microsoft.com/office/drawing/2014/main" id="{8963E3C6-E47C-71D3-0D0A-C423D4ADBF8A}"/>
+              </a:ext>
+            </a:extLst>
+          </p:cNvPr>
+          <p:cNvSpPr>
+            <a:spLocks noGrp="1"/>
+          </p:cNvSpPr>
+          <p:nvPr>
+            <p:ph type="title"/>
+          </p:nvPr>
+        </p:nvSpPr>
+        <p:spPr/>
+        <p:txBody>
+          <a:bodyPr/>
+          <a:lstStyle/>
+          <a:p>
+            <a:pPr marL="0" lvl="0" indent="0">
+              <a:buNone/>
+            </a:pPr>
+            <a:r>
+              <a:rPr lang="en-US" dirty="0"/>
+              <a:t>Imputation of Missing Values</a:t>
+            </a:r>
+            <a:endParaRPr dirty="0"/>
+          </a:p>
+        </p:txBody>
+      </p:sp>
+      <p:sp>
+        <p:nvSpPr>
+          <p:cNvPr id="3" name="Content Placeholder 2">
+            <a:extLst>
+              <a:ext uri="{FF2B5EF4-FFF2-40B4-BE49-F238E27FC236}">
+                <a16:creationId xmlns:a16="http://schemas.microsoft.com/office/drawing/2014/main" id="{12343A50-E82E-BC72-EB51-078AFD741C31}"/>
+              </a:ext>
+            </a:extLst>
+          </p:cNvPr>
+          <p:cNvSpPr>
+            <a:spLocks noGrp="1"/>
+          </p:cNvSpPr>
+          <p:nvPr>
+            <p:ph idx="1"/>
+          </p:nvPr>
+        </p:nvSpPr>
+        <p:spPr>
+          <a:xfrm>
+            <a:off x="457200" y="1200151"/>
+            <a:ext cx="8229600" cy="3737370"/>
+          </a:xfrm>
+        </p:spPr>
+        <p:txBody>
+          <a:bodyPr>
+            <a:normAutofit/>
+          </a:bodyPr>
+          <a:lstStyle/>
+          <a:p>
+            <a:pPr marL="0" lvl="0" indent="0">
+              <a:buNone/>
+            </a:pPr>
+            <a:r>
+              <a:rPr lang="en-US" dirty="0"/>
+              <a:t>There are several approaches to imputation for MNAR variables </a:t>
+            </a:r>
+          </a:p>
+          <a:p>
+            <a:r>
+              <a:rPr lang="en-US" dirty="0"/>
+              <a:t>Join with another table – don’t overlook the obvious!</a:t>
+            </a:r>
+          </a:p>
+          <a:p>
+            <a:r>
+              <a:rPr lang="en-US" dirty="0"/>
+              <a:t>Systematic filling    </a:t>
+            </a:r>
+          </a:p>
+          <a:p>
+            <a:pPr lvl="1"/>
+            <a:r>
+              <a:rPr lang="en-US" dirty="0"/>
+              <a:t>Example: are all the missing values 0s     </a:t>
+            </a:r>
+          </a:p>
+          <a:p>
+            <a:pPr lvl="1"/>
+            <a:r>
+              <a:rPr lang="en-US" dirty="0"/>
+              <a:t>Example are the missing values dependent on other specific values of another variable(s)</a:t>
+            </a:r>
+          </a:p>
+          <a:p>
+            <a:r>
+              <a:rPr lang="en-US" dirty="0"/>
+              <a:t>Use autoencoder to learn missing value pattern   </a:t>
+            </a:r>
+          </a:p>
+          <a:p>
+            <a:endParaRPr dirty="0"/>
+          </a:p>
+        </p:txBody>
+      </p:sp>
+    </p:spTree>
+    <p:extLst>
+      <p:ext uri="{BB962C8B-B14F-4D97-AF65-F5344CB8AC3E}">
+        <p14:creationId xmlns:p14="http://schemas.microsoft.com/office/powerpoint/2010/main" val="763742610"/>
       </p:ext>
     </p:extLst>
   </p:cSld>
@@ -33323,6 +32388,1845 @@
         <p:cNvPr id="1" name="">
           <a:extLst>
             <a:ext uri="{FF2B5EF4-FFF2-40B4-BE49-F238E27FC236}">
+              <a16:creationId xmlns:a16="http://schemas.microsoft.com/office/drawing/2014/main" id="{4ABC3421-F68D-9E08-4B79-AF9B86A06B44}"/>
+            </a:ext>
+          </a:extLst>
+        </p:cNvPr>
+        <p:cNvGrpSpPr/>
+        <p:nvPr/>
+      </p:nvGrpSpPr>
+      <p:grpSpPr>
+        <a:xfrm>
+          <a:off x="0" y="0"/>
+          <a:ext cx="0" cy="0"/>
+          <a:chOff x="0" y="0"/>
+          <a:chExt cx="0" cy="0"/>
+        </a:xfrm>
+      </p:grpSpPr>
+      <p:sp>
+        <p:nvSpPr>
+          <p:cNvPr id="2" name="Title 1">
+            <a:extLst>
+              <a:ext uri="{FF2B5EF4-FFF2-40B4-BE49-F238E27FC236}">
+                <a16:creationId xmlns:a16="http://schemas.microsoft.com/office/drawing/2014/main" id="{1DAB17F1-C740-B30D-089D-9D06F64E3FC0}"/>
+              </a:ext>
+            </a:extLst>
+          </p:cNvPr>
+          <p:cNvSpPr>
+            <a:spLocks noGrp="1"/>
+          </p:cNvSpPr>
+          <p:nvPr>
+            <p:ph type="title"/>
+          </p:nvPr>
+        </p:nvSpPr>
+        <p:spPr/>
+        <p:txBody>
+          <a:bodyPr/>
+          <a:lstStyle/>
+          <a:p>
+            <a:pPr marL="0" lvl="0" indent="0">
+              <a:buNone/>
+            </a:pPr>
+            <a:r>
+              <a:rPr lang="en-US" dirty="0"/>
+              <a:t>Imputation of Missing Values</a:t>
+            </a:r>
+            <a:endParaRPr dirty="0"/>
+          </a:p>
+        </p:txBody>
+      </p:sp>
+      <p:sp>
+        <p:nvSpPr>
+          <p:cNvPr id="3" name="Content Placeholder 2">
+            <a:extLst>
+              <a:ext uri="{FF2B5EF4-FFF2-40B4-BE49-F238E27FC236}">
+                <a16:creationId xmlns:a16="http://schemas.microsoft.com/office/drawing/2014/main" id="{30B1251A-5AD7-B8EC-D878-35A0925B92AC}"/>
+              </a:ext>
+            </a:extLst>
+          </p:cNvPr>
+          <p:cNvSpPr>
+            <a:spLocks noGrp="1"/>
+          </p:cNvSpPr>
+          <p:nvPr>
+            <p:ph idx="1"/>
+          </p:nvPr>
+        </p:nvSpPr>
+        <p:spPr>
+          <a:xfrm>
+            <a:off x="457200" y="1200151"/>
+            <a:ext cx="8229600" cy="3737370"/>
+          </a:xfrm>
+        </p:spPr>
+        <p:txBody>
+          <a:bodyPr>
+            <a:normAutofit/>
+          </a:bodyPr>
+          <a:lstStyle/>
+          <a:p>
+            <a:pPr marL="0" lvl="0" indent="0">
+              <a:buNone/>
+            </a:pPr>
+            <a:r>
+              <a:rPr lang="en-US" b="1" dirty="0">
+                <a:hlinkClick r:id="rId2"/>
+              </a:rPr>
+              <a:t>The Multivariate Imputation by Chained Equations (MICE) </a:t>
+            </a:r>
+            <a:r>
+              <a:rPr lang="en-US" dirty="0"/>
+              <a:t>algorithm preserves distributions for MCAR and MAR variables by these 6 steps:    </a:t>
+            </a:r>
+          </a:p>
+          <a:p>
+            <a:pPr marL="457200" lvl="0" indent="-457200">
+              <a:buFont typeface="+mj-lt"/>
+              <a:buAutoNum type="arabicPeriod"/>
+            </a:pPr>
+            <a:r>
+              <a:rPr lang="en-US" dirty="0"/>
+              <a:t>A simple place-holder imputation, such as filling with mean values, is performed for all missing values in the dataset</a:t>
+            </a:r>
+          </a:p>
+          <a:p>
+            <a:pPr marL="457200" lvl="0" indent="-457200">
+              <a:buFont typeface="+mj-lt"/>
+              <a:buAutoNum type="arabicPeriod"/>
+            </a:pPr>
+            <a:r>
+              <a:rPr lang="en-US" dirty="0"/>
+              <a:t>Place-holder imputations of one variable are set back to missing</a:t>
+            </a:r>
+          </a:p>
+          <a:p>
+            <a:pPr marL="457200" lvl="0" indent="-457200">
+              <a:buFont typeface="+mj-lt"/>
+              <a:buAutoNum type="arabicPeriod"/>
+            </a:pPr>
+            <a:endParaRPr lang="en-US" dirty="0"/>
+          </a:p>
+        </p:txBody>
+      </p:sp>
+    </p:spTree>
+    <p:extLst>
+      <p:ext uri="{BB962C8B-B14F-4D97-AF65-F5344CB8AC3E}">
+        <p14:creationId xmlns:p14="http://schemas.microsoft.com/office/powerpoint/2010/main" val="1433634461"/>
+      </p:ext>
+    </p:extLst>
+  </p:cSld>
+  <p:clrMapOvr>
+    <a:masterClrMapping/>
+  </p:clrMapOvr>
+  <p:timing>
+    <p:tnLst>
+      <p:par>
+        <p:cTn id="1" dur="indefinite" restart="never" nodeType="tmRoot">
+          <p:childTnLst>
+            <p:seq concurrent="1" nextAc="seek">
+              <p:cTn id="2" dur="indefinite" nodeType="mainSeq">
+                <p:childTnLst>
+                  <p:par>
+                    <p:cTn id="3" fill="hold">
+                      <p:stCondLst>
+                        <p:cond delay="indefinite"/>
+                      </p:stCondLst>
+                      <p:childTnLst>
+                        <p:par>
+                          <p:cTn id="4" fill="hold">
+                            <p:stCondLst>
+                              <p:cond delay="0"/>
+                            </p:stCondLst>
+                            <p:childTnLst>
+                              <p:par>
+                                <p:cTn id="5" presetID="1" presetClass="entr" presetSubtype="0" fill="hold" nodeType="clickEffect">
+                                  <p:stCondLst>
+                                    <p:cond delay="0"/>
+                                  </p:stCondLst>
+                                  <p:childTnLst>
+                                    <p:set>
+                                      <p:cBhvr>
+                                        <p:cTn id="6" dur="1" fill="hold">
+                                          <p:stCondLst>
+                                            <p:cond delay="0"/>
+                                          </p:stCondLst>
+                                        </p:cTn>
+                                        <p:tgtEl>
+                                          <p:spTgt spid="3">
+                                            <p:txEl>
+                                              <p:pRg st="1" end="1"/>
+                                            </p:txEl>
+                                          </p:spTgt>
+                                        </p:tgtEl>
+                                        <p:attrNameLst>
+                                          <p:attrName>style.visibility</p:attrName>
+                                        </p:attrNameLst>
+                                      </p:cBhvr>
+                                      <p:to>
+                                        <p:strVal val="visible"/>
+                                      </p:to>
+                                    </p:set>
+                                  </p:childTnLst>
+                                </p:cTn>
+                              </p:par>
+                            </p:childTnLst>
+                          </p:cTn>
+                        </p:par>
+                      </p:childTnLst>
+                    </p:cTn>
+                  </p:par>
+                  <p:par>
+                    <p:cTn id="7" fill="hold">
+                      <p:stCondLst>
+                        <p:cond delay="indefinite"/>
+                      </p:stCondLst>
+                      <p:childTnLst>
+                        <p:par>
+                          <p:cTn id="8" fill="hold">
+                            <p:stCondLst>
+                              <p:cond delay="0"/>
+                            </p:stCondLst>
+                            <p:childTnLst>
+                              <p:par>
+                                <p:cTn id="9" presetID="1" presetClass="entr" presetSubtype="0" fill="hold" nodeType="clickEffect">
+                                  <p:stCondLst>
+                                    <p:cond delay="0"/>
+                                  </p:stCondLst>
+                                  <p:childTnLst>
+                                    <p:set>
+                                      <p:cBhvr>
+                                        <p:cTn id="10" dur="1" fill="hold">
+                                          <p:stCondLst>
+                                            <p:cond delay="0"/>
+                                          </p:stCondLst>
+                                        </p:cTn>
+                                        <p:tgtEl>
+                                          <p:spTgt spid="3">
+                                            <p:txEl>
+                                              <p:pRg st="2" end="2"/>
+                                            </p:txEl>
+                                          </p:spTgt>
+                                        </p:tgtEl>
+                                        <p:attrNameLst>
+                                          <p:attrName>style.visibility</p:attrName>
+                                        </p:attrNameLst>
+                                      </p:cBhvr>
+                                      <p:to>
+                                        <p:strVal val="visible"/>
+                                      </p:to>
+                                    </p:set>
+                                  </p:childTnLst>
+                                </p:cTn>
+                              </p:par>
+                            </p:childTnLst>
+                          </p:cTn>
+                        </p:par>
+                      </p:childTnLst>
+                    </p:cTn>
+                  </p:par>
+                </p:childTnLst>
+              </p:cTn>
+              <p:prevCondLst>
+                <p:cond evt="onPrev" delay="0">
+                  <p:tgtEl>
+                    <p:sldTgt/>
+                  </p:tgtEl>
+                </p:cond>
+              </p:prevCondLst>
+              <p:nextCondLst>
+                <p:cond evt="onNext" delay="0">
+                  <p:tgtEl>
+                    <p:sldTgt/>
+                  </p:tgtEl>
+                </p:cond>
+              </p:nextCondLst>
+            </p:seq>
+          </p:childTnLst>
+        </p:cTn>
+      </p:par>
+    </p:tnLst>
+  </p:timing>
+</p:sld>
+</file>
+
+<file path=ppt/slides/slide61.xml><?xml version="1.0" encoding="utf-8"?>
+<p:sld xmlns:a="http://schemas.openxmlformats.org/drawingml/2006/main" xmlns:r="http://schemas.openxmlformats.org/officeDocument/2006/relationships" xmlns:p="http://schemas.openxmlformats.org/presentationml/2006/main">
+  <p:cSld>
+    <p:spTree>
+      <p:nvGrpSpPr>
+        <p:cNvPr id="1" name="">
+          <a:extLst>
+            <a:ext uri="{FF2B5EF4-FFF2-40B4-BE49-F238E27FC236}">
+              <a16:creationId xmlns:a16="http://schemas.microsoft.com/office/drawing/2014/main" id="{1041B7C3-210B-370C-B6C3-38ABEBEE6309}"/>
+            </a:ext>
+          </a:extLst>
+        </p:cNvPr>
+        <p:cNvGrpSpPr/>
+        <p:nvPr/>
+      </p:nvGrpSpPr>
+      <p:grpSpPr>
+        <a:xfrm>
+          <a:off x="0" y="0"/>
+          <a:ext cx="0" cy="0"/>
+          <a:chOff x="0" y="0"/>
+          <a:chExt cx="0" cy="0"/>
+        </a:xfrm>
+      </p:grpSpPr>
+      <p:sp>
+        <p:nvSpPr>
+          <p:cNvPr id="2" name="Title 1">
+            <a:extLst>
+              <a:ext uri="{FF2B5EF4-FFF2-40B4-BE49-F238E27FC236}">
+                <a16:creationId xmlns:a16="http://schemas.microsoft.com/office/drawing/2014/main" id="{7A689AB8-9F65-B28B-2A5A-3E24473D330A}"/>
+              </a:ext>
+            </a:extLst>
+          </p:cNvPr>
+          <p:cNvSpPr>
+            <a:spLocks noGrp="1"/>
+          </p:cNvSpPr>
+          <p:nvPr>
+            <p:ph type="title"/>
+          </p:nvPr>
+        </p:nvSpPr>
+        <p:spPr/>
+        <p:txBody>
+          <a:bodyPr/>
+          <a:lstStyle/>
+          <a:p>
+            <a:pPr marL="0" lvl="0" indent="0">
+              <a:buNone/>
+            </a:pPr>
+            <a:r>
+              <a:rPr lang="en-US" dirty="0"/>
+              <a:t>Imputation of Missing Values</a:t>
+            </a:r>
+            <a:endParaRPr dirty="0"/>
+          </a:p>
+        </p:txBody>
+      </p:sp>
+      <p:sp>
+        <p:nvSpPr>
+          <p:cNvPr id="3" name="Content Placeholder 2">
+            <a:extLst>
+              <a:ext uri="{FF2B5EF4-FFF2-40B4-BE49-F238E27FC236}">
+                <a16:creationId xmlns:a16="http://schemas.microsoft.com/office/drawing/2014/main" id="{D8576CD8-C93A-8576-5679-AB49B0548381}"/>
+              </a:ext>
+            </a:extLst>
+          </p:cNvPr>
+          <p:cNvSpPr>
+            <a:spLocks noGrp="1"/>
+          </p:cNvSpPr>
+          <p:nvPr>
+            <p:ph idx="1"/>
+          </p:nvPr>
+        </p:nvSpPr>
+        <p:spPr>
+          <a:xfrm>
+            <a:off x="457200" y="1200151"/>
+            <a:ext cx="8229600" cy="3737370"/>
+          </a:xfrm>
+        </p:spPr>
+        <p:txBody>
+          <a:bodyPr>
+            <a:normAutofit fontScale="92500"/>
+          </a:bodyPr>
+          <a:lstStyle/>
+          <a:p>
+            <a:pPr marL="0" lvl="0" indent="0">
+              <a:buNone/>
+            </a:pPr>
+            <a:r>
+              <a:rPr lang="en-US" b="1" dirty="0">
+                <a:hlinkClick r:id="rId2"/>
+              </a:rPr>
+              <a:t>The Multivariate Imputation by Chained Equations (MICE) </a:t>
+            </a:r>
+            <a:r>
+              <a:rPr lang="en-US" dirty="0"/>
+              <a:t>algorithm preserves distributions for MCAR and MAR variables by these 6 steps:    </a:t>
+            </a:r>
+          </a:p>
+          <a:p>
+            <a:pPr marL="457200" lvl="0" indent="-457200">
+              <a:buFont typeface="+mj-lt"/>
+              <a:buAutoNum type="arabicPeriod" startAt="3"/>
+            </a:pPr>
+            <a:r>
+              <a:rPr lang="en-US" dirty="0"/>
+              <a:t>The missing values from Step 2 are regressed on the other variables in the dataset. </a:t>
+            </a:r>
+          </a:p>
+          <a:p>
+            <a:pPr lvl="1"/>
+            <a:r>
+              <a:rPr lang="en-US" dirty="0"/>
+              <a:t>The multivariate aspect of the algorithm </a:t>
+            </a:r>
+          </a:p>
+          <a:p>
+            <a:pPr lvl="1"/>
+            <a:r>
+              <a:rPr lang="en-US" dirty="0"/>
+              <a:t>Not all of the other variables need be used </a:t>
+            </a:r>
+          </a:p>
+          <a:p>
+            <a:pPr lvl="1"/>
+            <a:r>
+              <a:rPr lang="en-US" dirty="0"/>
+              <a:t>Regression models can include linear, logistic, or Poison regression models </a:t>
+            </a:r>
+          </a:p>
+          <a:p>
+            <a:pPr lvl="1"/>
+            <a:r>
+              <a:rPr lang="en-US" dirty="0"/>
+              <a:t>Random forest models and other nonlinear regression models can be used</a:t>
+            </a:r>
+          </a:p>
+        </p:txBody>
+      </p:sp>
+    </p:spTree>
+    <p:extLst>
+      <p:ext uri="{BB962C8B-B14F-4D97-AF65-F5344CB8AC3E}">
+        <p14:creationId xmlns:p14="http://schemas.microsoft.com/office/powerpoint/2010/main" val="3065592653"/>
+      </p:ext>
+    </p:extLst>
+  </p:cSld>
+  <p:clrMapOvr>
+    <a:masterClrMapping/>
+  </p:clrMapOvr>
+</p:sld>
+</file>
+
+<file path=ppt/slides/slide62.xml><?xml version="1.0" encoding="utf-8"?>
+<p:sld xmlns:a="http://schemas.openxmlformats.org/drawingml/2006/main" xmlns:r="http://schemas.openxmlformats.org/officeDocument/2006/relationships" xmlns:p="http://schemas.openxmlformats.org/presentationml/2006/main">
+  <p:cSld>
+    <p:spTree>
+      <p:nvGrpSpPr>
+        <p:cNvPr id="1" name="">
+          <a:extLst>
+            <a:ext uri="{FF2B5EF4-FFF2-40B4-BE49-F238E27FC236}">
+              <a16:creationId xmlns:a16="http://schemas.microsoft.com/office/drawing/2014/main" id="{E7ECCA10-8659-0568-7E6A-2430CC13FF90}"/>
+            </a:ext>
+          </a:extLst>
+        </p:cNvPr>
+        <p:cNvGrpSpPr/>
+        <p:nvPr/>
+      </p:nvGrpSpPr>
+      <p:grpSpPr>
+        <a:xfrm>
+          <a:off x="0" y="0"/>
+          <a:ext cx="0" cy="0"/>
+          <a:chOff x="0" y="0"/>
+          <a:chExt cx="0" cy="0"/>
+        </a:xfrm>
+      </p:grpSpPr>
+      <p:sp>
+        <p:nvSpPr>
+          <p:cNvPr id="2" name="Title 1">
+            <a:extLst>
+              <a:ext uri="{FF2B5EF4-FFF2-40B4-BE49-F238E27FC236}">
+                <a16:creationId xmlns:a16="http://schemas.microsoft.com/office/drawing/2014/main" id="{9EEC6B91-5570-8280-7BB8-0DC26D21BB62}"/>
+              </a:ext>
+            </a:extLst>
+          </p:cNvPr>
+          <p:cNvSpPr>
+            <a:spLocks noGrp="1"/>
+          </p:cNvSpPr>
+          <p:nvPr>
+            <p:ph type="title"/>
+          </p:nvPr>
+        </p:nvSpPr>
+        <p:spPr/>
+        <p:txBody>
+          <a:bodyPr/>
+          <a:lstStyle/>
+          <a:p>
+            <a:pPr marL="0" lvl="0" indent="0">
+              <a:buNone/>
+            </a:pPr>
+            <a:r>
+              <a:rPr lang="en-US" dirty="0"/>
+              <a:t>Imputation of Missing Values</a:t>
+            </a:r>
+            <a:endParaRPr dirty="0"/>
+          </a:p>
+        </p:txBody>
+      </p:sp>
+      <p:sp>
+        <p:nvSpPr>
+          <p:cNvPr id="3" name="Content Placeholder 2">
+            <a:extLst>
+              <a:ext uri="{FF2B5EF4-FFF2-40B4-BE49-F238E27FC236}">
+                <a16:creationId xmlns:a16="http://schemas.microsoft.com/office/drawing/2014/main" id="{753EFFFB-3E9D-ACBC-E7BB-CA6D7DE2C4A5}"/>
+              </a:ext>
+            </a:extLst>
+          </p:cNvPr>
+          <p:cNvSpPr>
+            <a:spLocks noGrp="1"/>
+          </p:cNvSpPr>
+          <p:nvPr>
+            <p:ph idx="1"/>
+          </p:nvPr>
+        </p:nvSpPr>
+        <p:spPr>
+          <a:xfrm>
+            <a:off x="457200" y="1200151"/>
+            <a:ext cx="8229600" cy="3737370"/>
+          </a:xfrm>
+        </p:spPr>
+        <p:txBody>
+          <a:bodyPr>
+            <a:normAutofit/>
+          </a:bodyPr>
+          <a:lstStyle/>
+          <a:p>
+            <a:pPr marL="0" indent="0">
+              <a:buNone/>
+            </a:pPr>
+            <a:r>
+              <a:rPr lang="en-US" b="1" dirty="0">
+                <a:hlinkClick r:id="rId2"/>
+              </a:rPr>
+              <a:t>The Multivariate Imputation by Chained Equations (MICE) </a:t>
+            </a:r>
+            <a:r>
+              <a:rPr lang="en-US" dirty="0"/>
+              <a:t>algorithm preserves distributions for MCAR and MAR variables by these 6 steps: </a:t>
+            </a:r>
+          </a:p>
+          <a:p>
+            <a:pPr marL="457200" indent="-457200">
+              <a:buFont typeface="+mj-lt"/>
+              <a:buAutoNum type="arabicPeriod" startAt="4"/>
+            </a:pPr>
+            <a:r>
+              <a:rPr lang="en-US" dirty="0"/>
+              <a:t>The missing values from step 2 are replaced with predictions or imputations computed with the multivariate regression model. </a:t>
+            </a:r>
+          </a:p>
+          <a:p>
+            <a:pPr lvl="1"/>
+            <a:r>
+              <a:rPr lang="en-US" dirty="0"/>
+              <a:t>The imputed value can now be used as an observation for regression on other missing values.</a:t>
+            </a:r>
+          </a:p>
+        </p:txBody>
+      </p:sp>
+    </p:spTree>
+    <p:extLst>
+      <p:ext uri="{BB962C8B-B14F-4D97-AF65-F5344CB8AC3E}">
+        <p14:creationId xmlns:p14="http://schemas.microsoft.com/office/powerpoint/2010/main" val="2183285068"/>
+      </p:ext>
+    </p:extLst>
+  </p:cSld>
+  <p:clrMapOvr>
+    <a:masterClrMapping/>
+  </p:clrMapOvr>
+</p:sld>
+</file>
+
+<file path=ppt/slides/slide63.xml><?xml version="1.0" encoding="utf-8"?>
+<p:sld xmlns:a="http://schemas.openxmlformats.org/drawingml/2006/main" xmlns:r="http://schemas.openxmlformats.org/officeDocument/2006/relationships" xmlns:p="http://schemas.openxmlformats.org/presentationml/2006/main">
+  <p:cSld>
+    <p:spTree>
+      <p:nvGrpSpPr>
+        <p:cNvPr id="1" name="">
+          <a:extLst>
+            <a:ext uri="{FF2B5EF4-FFF2-40B4-BE49-F238E27FC236}">
+              <a16:creationId xmlns:a16="http://schemas.microsoft.com/office/drawing/2014/main" id="{B97326DB-FF4A-1FEF-E137-2107F1491F9E}"/>
+            </a:ext>
+          </a:extLst>
+        </p:cNvPr>
+        <p:cNvGrpSpPr/>
+        <p:nvPr/>
+      </p:nvGrpSpPr>
+      <p:grpSpPr>
+        <a:xfrm>
+          <a:off x="0" y="0"/>
+          <a:ext cx="0" cy="0"/>
+          <a:chOff x="0" y="0"/>
+          <a:chExt cx="0" cy="0"/>
+        </a:xfrm>
+      </p:grpSpPr>
+      <p:sp>
+        <p:nvSpPr>
+          <p:cNvPr id="2" name="Title 1">
+            <a:extLst>
+              <a:ext uri="{FF2B5EF4-FFF2-40B4-BE49-F238E27FC236}">
+                <a16:creationId xmlns:a16="http://schemas.microsoft.com/office/drawing/2014/main" id="{96BB8C3B-01BF-4170-86C2-BBC213AA3EA4}"/>
+              </a:ext>
+            </a:extLst>
+          </p:cNvPr>
+          <p:cNvSpPr>
+            <a:spLocks noGrp="1"/>
+          </p:cNvSpPr>
+          <p:nvPr>
+            <p:ph type="title"/>
+          </p:nvPr>
+        </p:nvSpPr>
+        <p:spPr/>
+        <p:txBody>
+          <a:bodyPr/>
+          <a:lstStyle/>
+          <a:p>
+            <a:pPr marL="0" lvl="0" indent="0">
+              <a:buNone/>
+            </a:pPr>
+            <a:r>
+              <a:rPr lang="en-US" dirty="0"/>
+              <a:t>Imputation of Missing Values</a:t>
+            </a:r>
+            <a:endParaRPr dirty="0"/>
+          </a:p>
+        </p:txBody>
+      </p:sp>
+      <p:sp>
+        <p:nvSpPr>
+          <p:cNvPr id="3" name="Content Placeholder 2">
+            <a:extLst>
+              <a:ext uri="{FF2B5EF4-FFF2-40B4-BE49-F238E27FC236}">
+                <a16:creationId xmlns:a16="http://schemas.microsoft.com/office/drawing/2014/main" id="{DC73BA41-3815-C25D-8F1B-6DA25C110B50}"/>
+              </a:ext>
+            </a:extLst>
+          </p:cNvPr>
+          <p:cNvSpPr>
+            <a:spLocks noGrp="1"/>
+          </p:cNvSpPr>
+          <p:nvPr>
+            <p:ph idx="1"/>
+          </p:nvPr>
+        </p:nvSpPr>
+        <p:spPr>
+          <a:xfrm>
+            <a:off x="457200" y="1200151"/>
+            <a:ext cx="8229600" cy="3737370"/>
+          </a:xfrm>
+        </p:spPr>
+        <p:txBody>
+          <a:bodyPr>
+            <a:normAutofit lnSpcReduction="10000"/>
+          </a:bodyPr>
+          <a:lstStyle/>
+          <a:p>
+            <a:pPr marL="0" indent="0">
+              <a:buNone/>
+            </a:pPr>
+            <a:r>
+              <a:rPr lang="en-US" b="1" dirty="0">
+                <a:hlinkClick r:id="rId2"/>
+              </a:rPr>
+              <a:t>The Multivariate Imputation by Chained Equations (MICE) </a:t>
+            </a:r>
+            <a:r>
+              <a:rPr lang="en-US" dirty="0"/>
+              <a:t>algorithm preserves distributions for MCAR and MAR variables by these 6 steps: </a:t>
+            </a:r>
+          </a:p>
+          <a:p>
+            <a:pPr marL="457200" indent="-457200">
+              <a:buFont typeface="+mj-lt"/>
+              <a:buAutoNum type="arabicPeriod" startAt="5"/>
+            </a:pPr>
+            <a:r>
+              <a:rPr lang="en-US" dirty="0"/>
+              <a:t>Steps 2–4 are then repeated for each variable with missing values. </a:t>
+            </a:r>
+          </a:p>
+          <a:p>
+            <a:pPr lvl="1"/>
+            <a:r>
+              <a:rPr lang="en-US" dirty="0"/>
+              <a:t>Cycling through each of the variables with missing values constitutes one iteration of the algorithm. </a:t>
+            </a:r>
+          </a:p>
+          <a:p>
+            <a:pPr lvl="1"/>
+            <a:r>
+              <a:rPr lang="en-US" dirty="0"/>
+              <a:t>This process continues until a stopping condition is reached where the imputed values are not changing significantly. </a:t>
+            </a:r>
+          </a:p>
+          <a:p>
+            <a:pPr lvl="1"/>
+            <a:r>
+              <a:rPr lang="en-US" dirty="0"/>
+              <a:t>The foregoing steps are the </a:t>
+            </a:r>
+            <a:r>
+              <a:rPr lang="en-US" b="1" dirty="0"/>
+              <a:t>chained equations</a:t>
+            </a:r>
+            <a:endParaRPr lang="en-US" dirty="0"/>
+          </a:p>
+        </p:txBody>
+      </p:sp>
+    </p:spTree>
+    <p:extLst>
+      <p:ext uri="{BB962C8B-B14F-4D97-AF65-F5344CB8AC3E}">
+        <p14:creationId xmlns:p14="http://schemas.microsoft.com/office/powerpoint/2010/main" val="2305751545"/>
+      </p:ext>
+    </p:extLst>
+  </p:cSld>
+  <p:clrMapOvr>
+    <a:masterClrMapping/>
+  </p:clrMapOvr>
+</p:sld>
+</file>
+
+<file path=ppt/slides/slide64.xml><?xml version="1.0" encoding="utf-8"?>
+<p:sld xmlns:a="http://schemas.openxmlformats.org/drawingml/2006/main" xmlns:r="http://schemas.openxmlformats.org/officeDocument/2006/relationships" xmlns:p="http://schemas.openxmlformats.org/presentationml/2006/main">
+  <p:cSld>
+    <p:spTree>
+      <p:nvGrpSpPr>
+        <p:cNvPr id="1" name="">
+          <a:extLst>
+            <a:ext uri="{FF2B5EF4-FFF2-40B4-BE49-F238E27FC236}">
+              <a16:creationId xmlns:a16="http://schemas.microsoft.com/office/drawing/2014/main" id="{971463BA-A01B-DDE4-A809-65DB245067C8}"/>
+            </a:ext>
+          </a:extLst>
+        </p:cNvPr>
+        <p:cNvGrpSpPr/>
+        <p:nvPr/>
+      </p:nvGrpSpPr>
+      <p:grpSpPr>
+        <a:xfrm>
+          <a:off x="0" y="0"/>
+          <a:ext cx="0" cy="0"/>
+          <a:chOff x="0" y="0"/>
+          <a:chExt cx="0" cy="0"/>
+        </a:xfrm>
+      </p:grpSpPr>
+      <p:sp>
+        <p:nvSpPr>
+          <p:cNvPr id="2" name="Title 1">
+            <a:extLst>
+              <a:ext uri="{FF2B5EF4-FFF2-40B4-BE49-F238E27FC236}">
+                <a16:creationId xmlns:a16="http://schemas.microsoft.com/office/drawing/2014/main" id="{05E01377-1844-FAA6-8F3E-0B3817129D8F}"/>
+              </a:ext>
+            </a:extLst>
+          </p:cNvPr>
+          <p:cNvSpPr>
+            <a:spLocks noGrp="1"/>
+          </p:cNvSpPr>
+          <p:nvPr>
+            <p:ph type="title"/>
+          </p:nvPr>
+        </p:nvSpPr>
+        <p:spPr/>
+        <p:txBody>
+          <a:bodyPr/>
+          <a:lstStyle/>
+          <a:p>
+            <a:pPr marL="0" lvl="0" indent="0">
+              <a:buNone/>
+            </a:pPr>
+            <a:r>
+              <a:rPr lang="en-US" dirty="0"/>
+              <a:t>Imputation of Missing Values</a:t>
+            </a:r>
+            <a:endParaRPr dirty="0"/>
+          </a:p>
+        </p:txBody>
+      </p:sp>
+      <p:sp>
+        <p:nvSpPr>
+          <p:cNvPr id="3" name="Content Placeholder 2">
+            <a:extLst>
+              <a:ext uri="{FF2B5EF4-FFF2-40B4-BE49-F238E27FC236}">
+                <a16:creationId xmlns:a16="http://schemas.microsoft.com/office/drawing/2014/main" id="{E05CB0FE-8635-5317-1761-A40FC3346F54}"/>
+              </a:ext>
+            </a:extLst>
+          </p:cNvPr>
+          <p:cNvSpPr>
+            <a:spLocks noGrp="1"/>
+          </p:cNvSpPr>
+          <p:nvPr>
+            <p:ph idx="1"/>
+          </p:nvPr>
+        </p:nvSpPr>
+        <p:spPr>
+          <a:xfrm>
+            <a:off x="457200" y="1200151"/>
+            <a:ext cx="8229600" cy="3737370"/>
+          </a:xfrm>
+        </p:spPr>
+        <p:txBody>
+          <a:bodyPr>
+            <a:normAutofit/>
+          </a:bodyPr>
+          <a:lstStyle/>
+          <a:p>
+            <a:pPr marL="0" indent="0">
+              <a:buNone/>
+            </a:pPr>
+            <a:r>
+              <a:rPr lang="en-US" b="1" dirty="0">
+                <a:hlinkClick r:id="rId2"/>
+              </a:rPr>
+              <a:t>The Multivariate Imputation by Chained Equations (MICE) </a:t>
+            </a:r>
+            <a:r>
+              <a:rPr lang="en-US" dirty="0"/>
+              <a:t>algorithm preserves distributions for MCAR and MAR variables by these 6 steps: </a:t>
+            </a:r>
+          </a:p>
+          <a:p>
+            <a:pPr marL="457200" lvl="0" indent="-457200">
+              <a:buFont typeface="+mj-lt"/>
+              <a:buAutoNum type="arabicPeriod" startAt="6"/>
+            </a:pPr>
+            <a:r>
+              <a:rPr lang="en-US" dirty="0"/>
+              <a:t>The process in steps 1-5 is repeated to compute random draws of the imputed values from a </a:t>
+            </a:r>
+            <a:r>
+              <a:rPr lang="en-US" b="1" dirty="0"/>
+              <a:t>posterior distribution</a:t>
+            </a:r>
+            <a:r>
+              <a:rPr lang="en-US" dirty="0"/>
+              <a:t>. </a:t>
+            </a:r>
+          </a:p>
+          <a:p>
+            <a:pPr lvl="1"/>
+            <a:r>
+              <a:rPr lang="en-US" b="1" dirty="0">
+                <a:hlinkClick r:id="rId3"/>
+              </a:rPr>
+              <a:t>Rubin's rules</a:t>
+            </a:r>
+            <a:r>
+              <a:rPr lang="en-US" dirty="0"/>
+              <a:t> are then used to compute the point estimate and error statistics for the imputed values.</a:t>
+            </a:r>
+          </a:p>
+        </p:txBody>
+      </p:sp>
+    </p:spTree>
+    <p:extLst>
+      <p:ext uri="{BB962C8B-B14F-4D97-AF65-F5344CB8AC3E}">
+        <p14:creationId xmlns:p14="http://schemas.microsoft.com/office/powerpoint/2010/main" val="1995929552"/>
+      </p:ext>
+    </p:extLst>
+  </p:cSld>
+  <p:clrMapOvr>
+    <a:masterClrMapping/>
+  </p:clrMapOvr>
+</p:sld>
+</file>
+
+<file path=ppt/slides/slide65.xml><?xml version="1.0" encoding="utf-8"?>
+<p:sld xmlns:a="http://schemas.openxmlformats.org/drawingml/2006/main" xmlns:r="http://schemas.openxmlformats.org/officeDocument/2006/relationships" xmlns:p="http://schemas.openxmlformats.org/presentationml/2006/main">
+  <p:cSld>
+    <p:spTree>
+      <p:nvGrpSpPr>
+        <p:cNvPr id="1" name="">
+          <a:extLst>
+            <a:ext uri="{FF2B5EF4-FFF2-40B4-BE49-F238E27FC236}">
+              <a16:creationId xmlns:a16="http://schemas.microsoft.com/office/drawing/2014/main" id="{952EFE69-FF52-779B-06EE-4206D23B27B0}"/>
+            </a:ext>
+          </a:extLst>
+        </p:cNvPr>
+        <p:cNvGrpSpPr/>
+        <p:nvPr/>
+      </p:nvGrpSpPr>
+      <p:grpSpPr>
+        <a:xfrm>
+          <a:off x="0" y="0"/>
+          <a:ext cx="0" cy="0"/>
+          <a:chOff x="0" y="0"/>
+          <a:chExt cx="0" cy="0"/>
+        </a:xfrm>
+      </p:grpSpPr>
+      <p:sp>
+        <p:nvSpPr>
+          <p:cNvPr id="2" name="Title 1">
+            <a:extLst>
+              <a:ext uri="{FF2B5EF4-FFF2-40B4-BE49-F238E27FC236}">
+                <a16:creationId xmlns:a16="http://schemas.microsoft.com/office/drawing/2014/main" id="{FB500575-F732-ADC4-E2FF-1355EB049DAD}"/>
+              </a:ext>
+            </a:extLst>
+          </p:cNvPr>
+          <p:cNvSpPr>
+            <a:spLocks noGrp="1"/>
+          </p:cNvSpPr>
+          <p:nvPr>
+            <p:ph type="title"/>
+          </p:nvPr>
+        </p:nvSpPr>
+        <p:spPr/>
+        <p:txBody>
+          <a:bodyPr/>
+          <a:lstStyle/>
+          <a:p>
+            <a:pPr marL="0" lvl="0" indent="0">
+              <a:buNone/>
+            </a:pPr>
+            <a:r>
+              <a:rPr lang="en-US" dirty="0"/>
+              <a:t>Imputation of Missing Values</a:t>
+            </a:r>
+            <a:endParaRPr dirty="0"/>
+          </a:p>
+        </p:txBody>
+      </p:sp>
+      <mc:AlternateContent xmlns:mc="http://schemas.openxmlformats.org/markup-compatibility/2006">
+        <mc:Choice xmlns:a14="http://schemas.microsoft.com/office/drawing/2010/main" Requires="a14">
+          <p:sp>
+            <p:nvSpPr>
+              <p:cNvPr id="3" name="Content Placeholder 2">
+                <a:extLst>
+                  <a:ext uri="{FF2B5EF4-FFF2-40B4-BE49-F238E27FC236}">
+                    <a16:creationId xmlns:a16="http://schemas.microsoft.com/office/drawing/2014/main" id="{927C40EC-2022-743F-8E8E-B56CE7748300}"/>
+                  </a:ext>
+                </a:extLst>
+              </p:cNvPr>
+              <p:cNvSpPr>
+                <a:spLocks noGrp="1"/>
+              </p:cNvSpPr>
+              <p:nvPr>
+                <p:ph idx="1"/>
+              </p:nvPr>
+            </p:nvSpPr>
+            <p:spPr>
+              <a:xfrm>
+                <a:off x="457200" y="1200151"/>
+                <a:ext cx="8229600" cy="3737370"/>
+              </a:xfrm>
+            </p:spPr>
+            <p:txBody>
+              <a:bodyPr>
+                <a:normAutofit/>
+              </a:bodyPr>
+              <a:lstStyle/>
+              <a:p>
+                <a:pPr marL="0" indent="0">
+                  <a:buNone/>
+                </a:pPr>
+                <a:r>
+                  <a:rPr lang="en-US" b="1" dirty="0">
+                    <a:hlinkClick r:id="rId2"/>
+                  </a:rPr>
+                  <a:t>Rubin's rules</a:t>
+                </a:r>
+                <a:r>
+                  <a:rPr lang="en-US" dirty="0"/>
+                  <a:t> applied to compute the point estimate and error statistics for the imputed values of multiple imputations</a:t>
+                </a:r>
+              </a:p>
+              <a:p>
+                <a:r>
+                  <a:rPr lang="en-US" dirty="0"/>
+                  <a:t>Computing the point estimate is straight forward, the mean  </a:t>
+                </a:r>
+              </a:p>
+              <a:p>
+                <a:pPr marL="0" indent="0">
+                  <a:buNone/>
+                </a:pPr>
+                <a14:m>
+                  <m:oMathPara xmlns:m="http://schemas.openxmlformats.org/officeDocument/2006/math">
+                    <m:oMath>
+                      <m:r>
+                        <a:rPr lang="en-US" b="0" i="1" smtClean="0">
+                          <a:latin typeface="Cambria Math" panose="02040503050406030204" pitchFamily="18" charset="0"/>
+                        </a:rPr>
+                        <m:t>𝑄</m:t>
+                      </m:r>
+                      <m:r>
+                        <a:rPr lang="en-US" b="0" i="1" smtClean="0">
+                          <a:latin typeface="Cambria Math" panose="02040503050406030204" pitchFamily="18" charset="0"/>
+                        </a:rPr>
+                        <m:t>=</m:t>
+                      </m:r>
+                      <m:f>
+                        <m:fPr>
+                          <m:ctrlPr>
+                            <a:rPr lang="en-US" b="0" i="1" smtClean="0">
+                              <a:latin typeface="Cambria Math" panose="02040503050406030204" pitchFamily="18" charset="0"/>
+                            </a:rPr>
+                          </m:ctrlPr>
+                        </m:fPr>
+                        <m:num>
+                          <m:r>
+                            <a:rPr lang="en-US" b="0" i="1" smtClean="0">
+                              <a:latin typeface="Cambria Math" panose="02040503050406030204" pitchFamily="18" charset="0"/>
+                            </a:rPr>
+                            <m:t>1</m:t>
+                          </m:r>
+                        </m:num>
+                        <m:den>
+                          <m:r>
+                            <a:rPr lang="en-US" b="0" i="1" smtClean="0">
+                              <a:latin typeface="Cambria Math" panose="02040503050406030204" pitchFamily="18" charset="0"/>
+                            </a:rPr>
+                            <m:t>𝑚</m:t>
+                          </m:r>
+                        </m:den>
+                      </m:f>
+                      <m:nary>
+                        <m:naryPr>
+                          <m:chr m:val="∑"/>
+                          <m:subHide m:val="on"/>
+                          <m:supHide m:val="on"/>
+                          <m:ctrlPr>
+                            <a:rPr lang="en-US" b="0" i="1" smtClean="0">
+                              <a:latin typeface="Cambria Math" panose="02040503050406030204" pitchFamily="18" charset="0"/>
+                            </a:rPr>
+                          </m:ctrlPr>
+                        </m:naryPr>
+                        <m:sub/>
+                        <m:sup/>
+                        <m:e>
+                          <m:sSub>
+                            <m:sSubPr>
+                              <m:ctrlPr>
+                                <a:rPr lang="en-US" b="0" i="1" smtClean="0">
+                                  <a:latin typeface="Cambria Math" panose="02040503050406030204" pitchFamily="18" charset="0"/>
+                                </a:rPr>
+                              </m:ctrlPr>
+                            </m:sSubPr>
+                            <m:e>
+                              <m:r>
+                                <a:rPr lang="en-US" b="0" i="1" smtClean="0">
+                                  <a:latin typeface="Cambria Math" panose="02040503050406030204" pitchFamily="18" charset="0"/>
+                                </a:rPr>
+                                <m:t>𝑄</m:t>
+                              </m:r>
+                            </m:e>
+                            <m:sub>
+                              <m:r>
+                                <a:rPr lang="en-US" b="0" i="1" smtClean="0">
+                                  <a:latin typeface="Cambria Math" panose="02040503050406030204" pitchFamily="18" charset="0"/>
+                                </a:rPr>
+                                <m:t>𝑖</m:t>
+                              </m:r>
+                            </m:sub>
+                          </m:sSub>
+                        </m:e>
+                      </m:nary>
+                    </m:oMath>
+                  </m:oMathPara>
+                </a14:m>
+                <a:endParaRPr lang="en-US" dirty="0"/>
+              </a:p>
+              <a:p>
+                <a:pPr marL="342900" lvl="1" indent="0">
+                  <a:buNone/>
+                </a:pPr>
+                <a:r>
+                  <a:rPr lang="en-US" dirty="0"/>
+                  <a:t>Where, </a:t>
+                </a:r>
+                <a14:m>
+                  <m:oMath xmlns:m="http://schemas.openxmlformats.org/officeDocument/2006/math">
+                    <m:r>
+                      <a:rPr lang="en-US" i="1">
+                        <a:latin typeface="Cambria Math" panose="02040503050406030204" pitchFamily="18" charset="0"/>
+                      </a:rPr>
+                      <m:t>𝑄</m:t>
+                    </m:r>
+                  </m:oMath>
+                </a14:m>
+                <a:r>
+                  <a:rPr lang="en-US" dirty="0"/>
+                  <a:t> is the overall point estimate given the </a:t>
+                </a:r>
+                <a14:m>
+                  <m:oMath xmlns:m="http://schemas.openxmlformats.org/officeDocument/2006/math">
+                    <m:r>
+                      <a:rPr lang="en-US" i="1">
+                        <a:latin typeface="Cambria Math" panose="02040503050406030204" pitchFamily="18" charset="0"/>
+                      </a:rPr>
+                      <m:t>𝑚</m:t>
+                    </m:r>
+                  </m:oMath>
+                </a14:m>
+                <a:r>
+                  <a:rPr lang="en-US" dirty="0"/>
+                  <a:t> imputation values </a:t>
+                </a:r>
+                <a14:m>
+                  <m:oMath xmlns:m="http://schemas.openxmlformats.org/officeDocument/2006/math">
+                    <m:sSub>
+                      <m:sSubPr>
+                        <m:ctrlPr>
+                          <a:rPr lang="en-US" i="1">
+                            <a:latin typeface="Cambria Math" panose="02040503050406030204" pitchFamily="18" charset="0"/>
+                          </a:rPr>
+                        </m:ctrlPr>
+                      </m:sSubPr>
+                      <m:e>
+                        <m:r>
+                          <a:rPr lang="en-US" i="1">
+                            <a:latin typeface="Cambria Math" panose="02040503050406030204" pitchFamily="18" charset="0"/>
+                          </a:rPr>
+                          <m:t>𝑄</m:t>
+                        </m:r>
+                      </m:e>
+                      <m:sub>
+                        <m:r>
+                          <a:rPr lang="en-US" i="1">
+                            <a:latin typeface="Cambria Math" panose="02040503050406030204" pitchFamily="18" charset="0"/>
+                          </a:rPr>
+                          <m:t>𝑖</m:t>
+                        </m:r>
+                      </m:sub>
+                    </m:sSub>
+                  </m:oMath>
+                </a14:m>
+                <a:r>
+                  <a:rPr lang="en-US" dirty="0"/>
+                  <a:t> </a:t>
+                </a:r>
+              </a:p>
+              <a:p>
+                <a:r>
+                  <a:rPr lang="en-US" dirty="0"/>
+                  <a:t>Computing the total variance requires integrating the </a:t>
+                </a:r>
+                <a:r>
+                  <a:rPr lang="en-US" b="1" dirty="0"/>
+                  <a:t>within imputation variance </a:t>
+                </a:r>
+                <a:r>
+                  <a:rPr lang="en-US" dirty="0"/>
+                  <a:t>and </a:t>
+                </a:r>
+                <a:r>
+                  <a:rPr lang="en-US" b="1" dirty="0"/>
+                  <a:t>between imputation variance      </a:t>
+                </a:r>
+              </a:p>
+            </p:txBody>
+          </p:sp>
+        </mc:Choice>
+        <mc:Fallback>
+          <p:sp>
+            <p:nvSpPr>
+              <p:cNvPr id="3" name="Content Placeholder 2">
+                <a:extLst>
+                  <a:ext uri="{FF2B5EF4-FFF2-40B4-BE49-F238E27FC236}">
+                    <a16:creationId xmlns:a16="http://schemas.microsoft.com/office/drawing/2014/main" id="{927C40EC-2022-743F-8E8E-B56CE7748300}"/>
+                  </a:ext>
+                </a:extLst>
+              </p:cNvPr>
+              <p:cNvSpPr>
+                <a:spLocks noGrp="1" noRot="1" noChangeAspect="1" noMove="1" noResize="1" noEditPoints="1" noAdjustHandles="1" noChangeArrowheads="1" noChangeShapeType="1" noTextEdit="1"/>
+              </p:cNvSpPr>
+              <p:nvPr>
+                <p:ph idx="1"/>
+              </p:nvPr>
+            </p:nvSpPr>
+            <p:spPr>
+              <a:xfrm>
+                <a:off x="457200" y="1200151"/>
+                <a:ext cx="8229600" cy="3737370"/>
+              </a:xfrm>
+              <a:blipFill>
+                <a:blip r:embed="rId3"/>
+                <a:stretch>
+                  <a:fillRect l="-1111" t="-1305" b="-1631"/>
+                </a:stretch>
+              </a:blipFill>
+            </p:spPr>
+            <p:txBody>
+              <a:bodyPr/>
+              <a:lstStyle/>
+              <a:p>
+                <a:r>
+                  <a:rPr lang="en-US">
+                    <a:noFill/>
+                  </a:rPr>
+                  <a:t> </a:t>
+                </a:r>
+              </a:p>
+            </p:txBody>
+          </p:sp>
+        </mc:Fallback>
+      </mc:AlternateContent>
+    </p:spTree>
+    <p:extLst>
+      <p:ext uri="{BB962C8B-B14F-4D97-AF65-F5344CB8AC3E}">
+        <p14:creationId xmlns:p14="http://schemas.microsoft.com/office/powerpoint/2010/main" val="2051774076"/>
+      </p:ext>
+    </p:extLst>
+  </p:cSld>
+  <p:clrMapOvr>
+    <a:masterClrMapping/>
+  </p:clrMapOvr>
+</p:sld>
+</file>
+
+<file path=ppt/slides/slide66.xml><?xml version="1.0" encoding="utf-8"?>
+<p:sld xmlns:a="http://schemas.openxmlformats.org/drawingml/2006/main" xmlns:r="http://schemas.openxmlformats.org/officeDocument/2006/relationships" xmlns:p="http://schemas.openxmlformats.org/presentationml/2006/main">
+  <p:cSld>
+    <p:spTree>
+      <p:nvGrpSpPr>
+        <p:cNvPr id="1" name="">
+          <a:extLst>
+            <a:ext uri="{FF2B5EF4-FFF2-40B4-BE49-F238E27FC236}">
+              <a16:creationId xmlns:a16="http://schemas.microsoft.com/office/drawing/2014/main" id="{DA9D5FFB-7E2C-1265-20AA-9F5F72AD5A0E}"/>
+            </a:ext>
+          </a:extLst>
+        </p:cNvPr>
+        <p:cNvGrpSpPr/>
+        <p:nvPr/>
+      </p:nvGrpSpPr>
+      <p:grpSpPr>
+        <a:xfrm>
+          <a:off x="0" y="0"/>
+          <a:ext cx="0" cy="0"/>
+          <a:chOff x="0" y="0"/>
+          <a:chExt cx="0" cy="0"/>
+        </a:xfrm>
+      </p:grpSpPr>
+      <p:sp>
+        <p:nvSpPr>
+          <p:cNvPr id="2" name="Title 1">
+            <a:extLst>
+              <a:ext uri="{FF2B5EF4-FFF2-40B4-BE49-F238E27FC236}">
+                <a16:creationId xmlns:a16="http://schemas.microsoft.com/office/drawing/2014/main" id="{2A251F58-F0CC-85E4-CBDE-2E9DBB0B699E}"/>
+              </a:ext>
+            </a:extLst>
+          </p:cNvPr>
+          <p:cNvSpPr>
+            <a:spLocks noGrp="1"/>
+          </p:cNvSpPr>
+          <p:nvPr>
+            <p:ph type="title"/>
+          </p:nvPr>
+        </p:nvSpPr>
+        <p:spPr/>
+        <p:txBody>
+          <a:bodyPr/>
+          <a:lstStyle/>
+          <a:p>
+            <a:pPr marL="0" lvl="0" indent="0">
+              <a:buNone/>
+            </a:pPr>
+            <a:r>
+              <a:rPr lang="en-US" dirty="0"/>
+              <a:t>Imputation of Missing Values</a:t>
+            </a:r>
+            <a:endParaRPr dirty="0"/>
+          </a:p>
+        </p:txBody>
+      </p:sp>
+      <mc:AlternateContent xmlns:mc="http://schemas.openxmlformats.org/markup-compatibility/2006">
+        <mc:Choice xmlns:a14="http://schemas.microsoft.com/office/drawing/2010/main" Requires="a14">
+          <p:sp>
+            <p:nvSpPr>
+              <p:cNvPr id="3" name="Content Placeholder 2">
+                <a:extLst>
+                  <a:ext uri="{FF2B5EF4-FFF2-40B4-BE49-F238E27FC236}">
+                    <a16:creationId xmlns:a16="http://schemas.microsoft.com/office/drawing/2014/main" id="{1F9D4262-09CB-52BE-80D8-AEC77005B5F1}"/>
+                  </a:ext>
+                </a:extLst>
+              </p:cNvPr>
+              <p:cNvSpPr>
+                <a:spLocks noGrp="1"/>
+              </p:cNvSpPr>
+              <p:nvPr>
+                <p:ph idx="1"/>
+              </p:nvPr>
+            </p:nvSpPr>
+            <p:spPr>
+              <a:xfrm>
+                <a:off x="457200" y="1200151"/>
+                <a:ext cx="8229600" cy="3737370"/>
+              </a:xfrm>
+            </p:spPr>
+            <p:txBody>
+              <a:bodyPr>
+                <a:normAutofit fontScale="92500"/>
+              </a:bodyPr>
+              <a:lstStyle/>
+              <a:p>
+                <a:pPr marL="0" indent="0">
+                  <a:buNone/>
+                </a:pPr>
+                <a:r>
+                  <a:rPr lang="en-US" b="1" dirty="0">
+                    <a:hlinkClick r:id="rId2"/>
+                  </a:rPr>
+                  <a:t>Rubin's rules</a:t>
+                </a:r>
+                <a:r>
+                  <a:rPr lang="en-US" dirty="0"/>
+                  <a:t> applied to compute the point estimate and error statistics for the imputed values of multiple imputations</a:t>
+                </a:r>
+              </a:p>
+              <a:p>
+                <a:r>
+                  <a:rPr lang="en-US" dirty="0"/>
+                  <a:t>Computing the total variance, </a:t>
+                </a:r>
+                <a14:m>
+                  <m:oMath xmlns:m="http://schemas.openxmlformats.org/officeDocument/2006/math">
+                    <m:r>
+                      <a:rPr lang="en-US" b="0" i="1" smtClean="0">
+                        <a:latin typeface="Cambria Math" panose="02040503050406030204" pitchFamily="18" charset="0"/>
+                      </a:rPr>
+                      <m:t>𝑇</m:t>
+                    </m:r>
+                  </m:oMath>
+                </a14:m>
+                <a:r>
+                  <a:rPr lang="en-US" dirty="0"/>
+                  <a:t>, requires integrating the </a:t>
+                </a:r>
+                <a:r>
+                  <a:rPr lang="en-US" b="1" dirty="0"/>
+                  <a:t>within imputation variance </a:t>
+                </a:r>
+                <a:r>
+                  <a:rPr lang="en-US" dirty="0"/>
+                  <a:t>and </a:t>
+                </a:r>
+                <a:r>
+                  <a:rPr lang="en-US" b="1" dirty="0"/>
+                  <a:t>between imputation variance   </a:t>
+                </a:r>
+              </a:p>
+              <a:p>
+                <a:pPr marL="0" indent="0">
+                  <a:buNone/>
+                </a:pPr>
+                <a14:m>
+                  <m:oMathPara xmlns:m="http://schemas.openxmlformats.org/officeDocument/2006/math">
+                    <m:oMath>
+                      <m:r>
+                        <a:rPr lang="en-US" b="1" i="0" smtClean="0">
+                          <a:latin typeface="Cambria Math" panose="02040503050406030204" pitchFamily="18" charset="0"/>
+                        </a:rPr>
+                        <m:t>𝐓</m:t>
+                      </m:r>
+                      <m:r>
+                        <a:rPr lang="en-US" b="1" i="0" smtClean="0">
+                          <a:latin typeface="Cambria Math" panose="02040503050406030204" pitchFamily="18" charset="0"/>
+                        </a:rPr>
+                        <m:t>=</m:t>
+                      </m:r>
+                      <m:acc>
+                        <m:accPr>
+                          <m:chr m:val="̂"/>
+                          <m:ctrlPr>
+                            <a:rPr lang="en-US" b="1" i="1" smtClean="0">
+                              <a:latin typeface="Cambria Math" panose="02040503050406030204" pitchFamily="18" charset="0"/>
+                            </a:rPr>
+                          </m:ctrlPr>
+                        </m:accPr>
+                        <m:e>
+                          <m:r>
+                            <a:rPr lang="en-US" b="1" i="1" smtClean="0">
+                              <a:latin typeface="Cambria Math" panose="02040503050406030204" pitchFamily="18" charset="0"/>
+                            </a:rPr>
+                            <m:t>𝑼</m:t>
+                          </m:r>
+                        </m:e>
+                      </m:acc>
+                      <m:r>
+                        <a:rPr lang="en-US" b="1" i="1" smtClean="0">
+                          <a:latin typeface="Cambria Math" panose="02040503050406030204" pitchFamily="18" charset="0"/>
+                        </a:rPr>
+                        <m:t>+</m:t>
+                      </m:r>
+                      <m:r>
+                        <a:rPr lang="en-US" b="1" i="1" smtClean="0">
+                          <a:latin typeface="Cambria Math" panose="02040503050406030204" pitchFamily="18" charset="0"/>
+                        </a:rPr>
+                        <m:t>𝑩</m:t>
+                      </m:r>
+                      <m:r>
+                        <a:rPr lang="en-US" b="1" i="1" smtClean="0">
+                          <a:latin typeface="Cambria Math" panose="02040503050406030204" pitchFamily="18" charset="0"/>
+                        </a:rPr>
+                        <m:t>+</m:t>
+                      </m:r>
+                      <m:f>
+                        <m:fPr>
+                          <m:ctrlPr>
+                            <a:rPr lang="en-US" b="1" i="1" smtClean="0">
+                              <a:latin typeface="Cambria Math" panose="02040503050406030204" pitchFamily="18" charset="0"/>
+                            </a:rPr>
+                          </m:ctrlPr>
+                        </m:fPr>
+                        <m:num>
+                          <m:r>
+                            <a:rPr lang="en-US" b="1" i="1" smtClean="0">
+                              <a:latin typeface="Cambria Math" panose="02040503050406030204" pitchFamily="18" charset="0"/>
+                            </a:rPr>
+                            <m:t>𝟏</m:t>
+                          </m:r>
+                        </m:num>
+                        <m:den>
+                          <m:r>
+                            <a:rPr lang="en-US" b="1" i="1" smtClean="0">
+                              <a:latin typeface="Cambria Math" panose="02040503050406030204" pitchFamily="18" charset="0"/>
+                            </a:rPr>
+                            <m:t>𝒎</m:t>
+                          </m:r>
+                        </m:den>
+                      </m:f>
+                      <m:r>
+                        <a:rPr lang="en-US" b="1" i="1" smtClean="0">
+                          <a:latin typeface="Cambria Math" panose="02040503050406030204" pitchFamily="18" charset="0"/>
+                        </a:rPr>
+                        <m:t>𝑩</m:t>
+                      </m:r>
+                      <m:r>
+                        <a:rPr lang="en-US" b="1" i="1" smtClean="0">
+                          <a:latin typeface="Cambria Math" panose="02040503050406030204" pitchFamily="18" charset="0"/>
+                        </a:rPr>
+                        <m:t>=</m:t>
+                      </m:r>
+                      <m:acc>
+                        <m:accPr>
+                          <m:chr m:val="̂"/>
+                          <m:ctrlPr>
+                            <a:rPr lang="en-US" b="1" i="1">
+                              <a:latin typeface="Cambria Math" panose="02040503050406030204" pitchFamily="18" charset="0"/>
+                            </a:rPr>
+                          </m:ctrlPr>
+                        </m:accPr>
+                        <m:e>
+                          <m:r>
+                            <a:rPr lang="en-US" b="1" i="1">
+                              <a:latin typeface="Cambria Math" panose="02040503050406030204" pitchFamily="18" charset="0"/>
+                            </a:rPr>
+                            <m:t>𝑼</m:t>
+                          </m:r>
+                        </m:e>
+                      </m:acc>
+                      <m:r>
+                        <a:rPr lang="en-US" b="1" i="1" smtClean="0">
+                          <a:latin typeface="Cambria Math" panose="02040503050406030204" pitchFamily="18" charset="0"/>
+                        </a:rPr>
+                        <m:t>+</m:t>
+                      </m:r>
+                      <m:d>
+                        <m:dPr>
+                          <m:ctrlPr>
+                            <a:rPr lang="en-US" b="1" i="1" smtClean="0">
+                              <a:latin typeface="Cambria Math" panose="02040503050406030204" pitchFamily="18" charset="0"/>
+                            </a:rPr>
+                          </m:ctrlPr>
+                        </m:dPr>
+                        <m:e>
+                          <m:r>
+                            <a:rPr lang="en-US" b="1" i="1" smtClean="0">
+                              <a:latin typeface="Cambria Math" panose="02040503050406030204" pitchFamily="18" charset="0"/>
+                            </a:rPr>
+                            <m:t>𝟏</m:t>
+                          </m:r>
+                          <m:r>
+                            <a:rPr lang="en-US" b="1" i="1" smtClean="0">
+                              <a:latin typeface="Cambria Math" panose="02040503050406030204" pitchFamily="18" charset="0"/>
+                            </a:rPr>
+                            <m:t>+</m:t>
+                          </m:r>
+                          <m:f>
+                            <m:fPr>
+                              <m:ctrlPr>
+                                <a:rPr lang="en-US" b="1" i="1" smtClean="0">
+                                  <a:latin typeface="Cambria Math" panose="02040503050406030204" pitchFamily="18" charset="0"/>
+                                </a:rPr>
+                              </m:ctrlPr>
+                            </m:fPr>
+                            <m:num>
+                              <m:r>
+                                <a:rPr lang="en-US" b="1" i="1" smtClean="0">
+                                  <a:latin typeface="Cambria Math" panose="02040503050406030204" pitchFamily="18" charset="0"/>
+                                </a:rPr>
+                                <m:t>𝟏</m:t>
+                              </m:r>
+                            </m:num>
+                            <m:den>
+                              <m:r>
+                                <a:rPr lang="en-US" b="1" i="1" smtClean="0">
+                                  <a:latin typeface="Cambria Math" panose="02040503050406030204" pitchFamily="18" charset="0"/>
+                                </a:rPr>
+                                <m:t>𝒎</m:t>
+                              </m:r>
+                            </m:den>
+                          </m:f>
+                        </m:e>
+                      </m:d>
+                      <m:r>
+                        <a:rPr lang="en-US" b="1" i="1" smtClean="0">
+                          <a:latin typeface="Cambria Math" panose="02040503050406030204" pitchFamily="18" charset="0"/>
+                        </a:rPr>
+                        <m:t>𝑩</m:t>
+                      </m:r>
+                    </m:oMath>
+                  </m:oMathPara>
+                </a14:m>
+                <a:endParaRPr lang="en-US" b="1" dirty="0"/>
+              </a:p>
+              <a:p>
+                <a:pPr lvl="1"/>
+                <a:r>
+                  <a:rPr lang="en-US" dirty="0"/>
+                  <a:t>Within imputation variance, given the sampling variances, </a:t>
+                </a:r>
+                <a14:m>
+                  <m:oMath xmlns:m="http://schemas.openxmlformats.org/officeDocument/2006/math">
+                    <m:sSub>
+                      <m:sSubPr>
+                        <m:ctrlPr>
+                          <a:rPr lang="en-US" i="1">
+                            <a:latin typeface="Cambria Math" panose="02040503050406030204" pitchFamily="18" charset="0"/>
+                          </a:rPr>
+                        </m:ctrlPr>
+                      </m:sSubPr>
+                      <m:e>
+                        <m:r>
+                          <a:rPr lang="en-US" i="1">
+                            <a:latin typeface="Cambria Math" panose="02040503050406030204" pitchFamily="18" charset="0"/>
+                          </a:rPr>
+                          <m:t>𝑈</m:t>
+                        </m:r>
+                      </m:e>
+                      <m:sub>
+                        <m:r>
+                          <a:rPr lang="en-US" i="1">
+                            <a:latin typeface="Cambria Math" panose="02040503050406030204" pitchFamily="18" charset="0"/>
+                          </a:rPr>
+                          <m:t>𝑖</m:t>
+                        </m:r>
+                      </m:sub>
+                    </m:sSub>
+                    <m:r>
+                      <a:rPr lang="en-US" i="1">
+                        <a:latin typeface="Cambria Math" panose="02040503050406030204" pitchFamily="18" charset="0"/>
+                      </a:rPr>
+                      <m:t> </m:t>
+                    </m:r>
+                  </m:oMath>
+                </a14:m>
+                <a:r>
+                  <a:rPr lang="en-US" dirty="0"/>
+                  <a:t>: </a:t>
+                </a:r>
+                <a14:m>
+                  <m:oMath xmlns:m="http://schemas.openxmlformats.org/officeDocument/2006/math">
+                    <m:acc>
+                      <m:accPr>
+                        <m:chr m:val="̂"/>
+                        <m:ctrlPr>
+                          <a:rPr lang="en-US" b="1" i="1">
+                            <a:latin typeface="Cambria Math" panose="02040503050406030204" pitchFamily="18" charset="0"/>
+                          </a:rPr>
+                        </m:ctrlPr>
+                      </m:accPr>
+                      <m:e>
+                        <m:r>
+                          <a:rPr lang="en-US" b="1" i="1">
+                            <a:latin typeface="Cambria Math" panose="02040503050406030204" pitchFamily="18" charset="0"/>
+                          </a:rPr>
+                          <m:t>𝑼</m:t>
+                        </m:r>
+                      </m:e>
+                    </m:acc>
+                    <m:r>
+                      <a:rPr lang="en-US" b="1" i="1" smtClean="0">
+                        <a:latin typeface="Cambria Math" panose="02040503050406030204" pitchFamily="18" charset="0"/>
+                      </a:rPr>
+                      <m:t>=</m:t>
+                    </m:r>
+                    <m:f>
+                      <m:fPr>
+                        <m:ctrlPr>
+                          <a:rPr lang="en-US" i="1">
+                            <a:latin typeface="Cambria Math" panose="02040503050406030204" pitchFamily="18" charset="0"/>
+                          </a:rPr>
+                        </m:ctrlPr>
+                      </m:fPr>
+                      <m:num>
+                        <m:r>
+                          <a:rPr lang="en-US" i="1">
+                            <a:latin typeface="Cambria Math" panose="02040503050406030204" pitchFamily="18" charset="0"/>
+                          </a:rPr>
+                          <m:t>1</m:t>
+                        </m:r>
+                      </m:num>
+                      <m:den>
+                        <m:r>
+                          <a:rPr lang="en-US" i="1">
+                            <a:latin typeface="Cambria Math" panose="02040503050406030204" pitchFamily="18" charset="0"/>
+                          </a:rPr>
+                          <m:t>𝑚</m:t>
+                        </m:r>
+                      </m:den>
+                    </m:f>
+                    <m:nary>
+                      <m:naryPr>
+                        <m:chr m:val="∑"/>
+                        <m:subHide m:val="on"/>
+                        <m:supHide m:val="on"/>
+                        <m:ctrlPr>
+                          <a:rPr lang="en-US" i="1">
+                            <a:latin typeface="Cambria Math" panose="02040503050406030204" pitchFamily="18" charset="0"/>
+                          </a:rPr>
+                        </m:ctrlPr>
+                      </m:naryPr>
+                      <m:sub/>
+                      <m:sup/>
+                      <m:e>
+                        <m:sSub>
+                          <m:sSubPr>
+                            <m:ctrlPr>
+                              <a:rPr lang="en-US" b="0" i="1" smtClean="0">
+                                <a:latin typeface="Cambria Math" panose="02040503050406030204" pitchFamily="18" charset="0"/>
+                              </a:rPr>
+                            </m:ctrlPr>
+                          </m:sSubPr>
+                          <m:e>
+                            <m:r>
+                              <a:rPr lang="en-US" b="0" i="1" smtClean="0">
+                                <a:latin typeface="Cambria Math" panose="02040503050406030204" pitchFamily="18" charset="0"/>
+                              </a:rPr>
+                              <m:t>𝑈</m:t>
+                            </m:r>
+                          </m:e>
+                          <m:sub>
+                            <m:r>
+                              <a:rPr lang="en-US" i="1">
+                                <a:latin typeface="Cambria Math" panose="02040503050406030204" pitchFamily="18" charset="0"/>
+                              </a:rPr>
+                              <m:t>𝑖</m:t>
+                            </m:r>
+                          </m:sub>
+                        </m:sSub>
+                      </m:e>
+                    </m:nary>
+                  </m:oMath>
+                </a14:m>
+                <a:endParaRPr lang="en-US" b="1" dirty="0"/>
+              </a:p>
+              <a:p>
+                <a:pPr lvl="1"/>
+                <a:r>
+                  <a:rPr lang="en-US" dirty="0"/>
+                  <a:t>Between imputation variance</a:t>
+                </a:r>
+                <a14:m>
+                  <m:oMath xmlns:m="http://schemas.openxmlformats.org/officeDocument/2006/math">
+                    <m:r>
+                      <a:rPr lang="en-US" b="1" i="1" smtClean="0">
+                        <a:latin typeface="Cambria Math" panose="02040503050406030204" pitchFamily="18" charset="0"/>
+                      </a:rPr>
+                      <m:t>:</m:t>
+                    </m:r>
+                  </m:oMath>
+                </a14:m>
+                <a:r>
+                  <a:rPr lang="en-US" b="1" dirty="0"/>
+                  <a:t> </a:t>
+                </a:r>
+                <a14:m>
+                  <m:oMath xmlns:m="http://schemas.openxmlformats.org/officeDocument/2006/math">
+                    <m:r>
+                      <a:rPr lang="en-US" b="1" i="1" smtClean="0">
+                        <a:latin typeface="Cambria Math" panose="02040503050406030204" pitchFamily="18" charset="0"/>
+                      </a:rPr>
+                      <m:t>𝑩</m:t>
+                    </m:r>
+                    <m:r>
+                      <a:rPr lang="en-US" b="1" i="1">
+                        <a:latin typeface="Cambria Math" panose="02040503050406030204" pitchFamily="18" charset="0"/>
+                      </a:rPr>
+                      <m:t>=</m:t>
+                    </m:r>
+                    <m:f>
+                      <m:fPr>
+                        <m:ctrlPr>
+                          <a:rPr lang="en-US" i="1">
+                            <a:latin typeface="Cambria Math" panose="02040503050406030204" pitchFamily="18" charset="0"/>
+                          </a:rPr>
+                        </m:ctrlPr>
+                      </m:fPr>
+                      <m:num>
+                        <m:r>
+                          <a:rPr lang="en-US" i="1">
+                            <a:latin typeface="Cambria Math" panose="02040503050406030204" pitchFamily="18" charset="0"/>
+                          </a:rPr>
+                          <m:t>1</m:t>
+                        </m:r>
+                      </m:num>
+                      <m:den>
+                        <m:r>
+                          <a:rPr lang="en-US" i="1">
+                            <a:latin typeface="Cambria Math" panose="02040503050406030204" pitchFamily="18" charset="0"/>
+                          </a:rPr>
+                          <m:t>𝑚</m:t>
+                        </m:r>
+                        <m:r>
+                          <a:rPr lang="en-US" b="0" i="1" smtClean="0">
+                            <a:latin typeface="Cambria Math" panose="02040503050406030204" pitchFamily="18" charset="0"/>
+                          </a:rPr>
+                          <m:t>−1</m:t>
+                        </m:r>
+                      </m:den>
+                    </m:f>
+                    <m:nary>
+                      <m:naryPr>
+                        <m:chr m:val="∑"/>
+                        <m:subHide m:val="on"/>
+                        <m:supHide m:val="on"/>
+                        <m:ctrlPr>
+                          <a:rPr lang="en-US" i="1">
+                            <a:latin typeface="Cambria Math" panose="02040503050406030204" pitchFamily="18" charset="0"/>
+                          </a:rPr>
+                        </m:ctrlPr>
+                      </m:naryPr>
+                      <m:sub/>
+                      <m:sup/>
+                      <m:e>
+                        <m:sSup>
+                          <m:sSupPr>
+                            <m:ctrlPr>
+                              <a:rPr lang="en-US" i="1" smtClean="0">
+                                <a:latin typeface="Cambria Math" panose="02040503050406030204" pitchFamily="18" charset="0"/>
+                              </a:rPr>
+                            </m:ctrlPr>
+                          </m:sSupPr>
+                          <m:e>
+                            <m:d>
+                              <m:dPr>
+                                <m:ctrlPr>
+                                  <a:rPr lang="en-US" b="0" i="1" smtClean="0">
+                                    <a:latin typeface="Cambria Math" panose="02040503050406030204" pitchFamily="18" charset="0"/>
+                                  </a:rPr>
+                                </m:ctrlPr>
+                              </m:dPr>
+                              <m:e>
+                                <m:r>
+                                  <a:rPr lang="en-US" b="0" i="1" smtClean="0">
+                                    <a:latin typeface="Cambria Math" panose="02040503050406030204" pitchFamily="18" charset="0"/>
+                                  </a:rPr>
+                                  <m:t>𝑄</m:t>
+                                </m:r>
+                                <m:r>
+                                  <a:rPr lang="en-US" b="0" i="1" smtClean="0">
+                                    <a:latin typeface="Cambria Math" panose="02040503050406030204" pitchFamily="18" charset="0"/>
+                                  </a:rPr>
+                                  <m:t>−</m:t>
+                                </m:r>
+                                <m:sSub>
+                                  <m:sSubPr>
+                                    <m:ctrlPr>
+                                      <a:rPr lang="en-US" b="0" i="1" smtClean="0">
+                                        <a:latin typeface="Cambria Math" panose="02040503050406030204" pitchFamily="18" charset="0"/>
+                                      </a:rPr>
+                                    </m:ctrlPr>
+                                  </m:sSubPr>
+                                  <m:e>
+                                    <m:r>
+                                      <a:rPr lang="en-US" b="0" i="1" smtClean="0">
+                                        <a:latin typeface="Cambria Math" panose="02040503050406030204" pitchFamily="18" charset="0"/>
+                                      </a:rPr>
+                                      <m:t>𝑄</m:t>
+                                    </m:r>
+                                  </m:e>
+                                  <m:sub>
+                                    <m:r>
+                                      <a:rPr lang="en-US" b="0" i="1" smtClean="0">
+                                        <a:latin typeface="Cambria Math" panose="02040503050406030204" pitchFamily="18" charset="0"/>
+                                      </a:rPr>
+                                      <m:t>𝑖</m:t>
+                                    </m:r>
+                                  </m:sub>
+                                </m:sSub>
+                              </m:e>
+                            </m:d>
+                          </m:e>
+                          <m:sup>
+                            <m:r>
+                              <a:rPr lang="en-US" b="0" i="1" smtClean="0">
+                                <a:latin typeface="Cambria Math" panose="02040503050406030204" pitchFamily="18" charset="0"/>
+                              </a:rPr>
+                              <m:t>2</m:t>
+                            </m:r>
+                          </m:sup>
+                        </m:sSup>
+                      </m:e>
+                    </m:nary>
+                  </m:oMath>
+                </a14:m>
+                <a:endParaRPr lang="en-US" dirty="0"/>
+              </a:p>
+            </p:txBody>
+          </p:sp>
+        </mc:Choice>
+        <mc:Fallback>
+          <p:sp>
+            <p:nvSpPr>
+              <p:cNvPr id="3" name="Content Placeholder 2">
+                <a:extLst>
+                  <a:ext uri="{FF2B5EF4-FFF2-40B4-BE49-F238E27FC236}">
+                    <a16:creationId xmlns:a16="http://schemas.microsoft.com/office/drawing/2014/main" id="{1F9D4262-09CB-52BE-80D8-AEC77005B5F1}"/>
+                  </a:ext>
+                </a:extLst>
+              </p:cNvPr>
+              <p:cNvSpPr>
+                <a:spLocks noGrp="1" noRot="1" noChangeAspect="1" noMove="1" noResize="1" noEditPoints="1" noAdjustHandles="1" noChangeArrowheads="1" noChangeShapeType="1" noTextEdit="1"/>
+              </p:cNvSpPr>
+              <p:nvPr>
+                <p:ph idx="1"/>
+              </p:nvPr>
+            </p:nvSpPr>
+            <p:spPr>
+              <a:xfrm>
+                <a:off x="457200" y="1200151"/>
+                <a:ext cx="8229600" cy="3737370"/>
+              </a:xfrm>
+              <a:blipFill>
+                <a:blip r:embed="rId3"/>
+                <a:stretch>
+                  <a:fillRect l="-963" t="-1142" r="-5259" b="-3915"/>
+                </a:stretch>
+              </a:blipFill>
+            </p:spPr>
+            <p:txBody>
+              <a:bodyPr/>
+              <a:lstStyle/>
+              <a:p>
+                <a:r>
+                  <a:rPr lang="en-US">
+                    <a:noFill/>
+                  </a:rPr>
+                  <a:t> </a:t>
+                </a:r>
+              </a:p>
+            </p:txBody>
+          </p:sp>
+        </mc:Fallback>
+      </mc:AlternateContent>
+    </p:spTree>
+    <p:extLst>
+      <p:ext uri="{BB962C8B-B14F-4D97-AF65-F5344CB8AC3E}">
+        <p14:creationId xmlns:p14="http://schemas.microsoft.com/office/powerpoint/2010/main" val="2966300334"/>
+      </p:ext>
+    </p:extLst>
+  </p:cSld>
+  <p:clrMapOvr>
+    <a:masterClrMapping/>
+  </p:clrMapOvr>
+</p:sld>
+</file>
+
+<file path=ppt/slides/slide67.xml><?xml version="1.0" encoding="utf-8"?>
+<p:sld xmlns:a="http://schemas.openxmlformats.org/drawingml/2006/main" xmlns:r="http://schemas.openxmlformats.org/officeDocument/2006/relationships" xmlns:p="http://schemas.openxmlformats.org/presentationml/2006/main">
+  <p:cSld>
+    <p:spTree>
+      <p:nvGrpSpPr>
+        <p:cNvPr id="1" name="">
+          <a:extLst>
+            <a:ext uri="{FF2B5EF4-FFF2-40B4-BE49-F238E27FC236}">
               <a16:creationId xmlns:a16="http://schemas.microsoft.com/office/drawing/2014/main" id="{18D4F6EF-706E-6110-32E4-EBA25FEA32ED}"/>
             </a:ext>
           </a:extLst>
@@ -33385,7 +34289,7 @@
 </p:sld>
 </file>
 
-<file path=ppt/slides/slide61.xml><?xml version="1.0" encoding="utf-8"?>
+<file path=ppt/slides/slide68.xml><?xml version="1.0" encoding="utf-8"?>
 <p:sld xmlns:a="http://schemas.openxmlformats.org/drawingml/2006/main" xmlns:r="http://schemas.openxmlformats.org/officeDocument/2006/relationships" xmlns:p="http://schemas.openxmlformats.org/presentationml/2006/main">
   <p:cSld>
     <p:spTree>
@@ -35196,6 +36100,7 @@
                           <m:ctrlPr>
                             <a:rPr lang="en-US" b="0" i="1" smtClean="0">
                               <a:latin typeface="Cambria Math" panose="02040503050406030204" pitchFamily="18" charset="0"/>
+                              <a:ea typeface="Cambria Math" panose="02040503050406030204" pitchFamily="18" charset="0"/>
                             </a:rPr>
                           </m:ctrlPr>
                         </m:fPr>
@@ -35658,6 +36563,7 @@
                                 <m:ctrlPr>
                                   <a:rPr lang="en-US" i="1">
                                     <a:latin typeface="Cambria Math" panose="02040503050406030204" pitchFamily="18" charset="0"/>
+                                    <a:ea typeface="Cambria Math" panose="02040503050406030204" pitchFamily="18" charset="0"/>
                                   </a:rPr>
                                 </m:ctrlPr>
                               </m:fPr>

--- a/LectureSlides/11_ModelsForMessyData.pptx
+++ b/LectureSlides/11_ModelsForMessyData.pptx
@@ -5,7 +5,7 @@
     <p:sldMasterId id="2147483648" r:id="rId1"/>
   </p:sldMasterIdLst>
   <p:notesMasterIdLst>
-    <p:notesMasterId r:id="rId70"/>
+    <p:notesMasterId r:id="rId77"/>
   </p:notesMasterIdLst>
   <p:sldIdLst>
     <p:sldId id="337" r:id="rId2"/>
@@ -61,21 +61,28 @@
     <p:sldId id="333" r:id="rId52"/>
     <p:sldId id="367" r:id="rId53"/>
     <p:sldId id="368" r:id="rId54"/>
-    <p:sldId id="386" r:id="rId55"/>
-    <p:sldId id="389" r:id="rId56"/>
-    <p:sldId id="387" r:id="rId57"/>
-    <p:sldId id="388" r:id="rId58"/>
-    <p:sldId id="391" r:id="rId59"/>
-    <p:sldId id="392" r:id="rId60"/>
-    <p:sldId id="390" r:id="rId61"/>
-    <p:sldId id="395" r:id="rId62"/>
-    <p:sldId id="393" r:id="rId63"/>
-    <p:sldId id="396" r:id="rId64"/>
-    <p:sldId id="394" r:id="rId65"/>
-    <p:sldId id="397" r:id="rId66"/>
-    <p:sldId id="398" r:id="rId67"/>
-    <p:sldId id="385" r:id="rId68"/>
-    <p:sldId id="381" r:id="rId69"/>
+    <p:sldId id="403" r:id="rId55"/>
+    <p:sldId id="386" r:id="rId56"/>
+    <p:sldId id="389" r:id="rId57"/>
+    <p:sldId id="387" r:id="rId58"/>
+    <p:sldId id="399" r:id="rId59"/>
+    <p:sldId id="400" r:id="rId60"/>
+    <p:sldId id="404" r:id="rId61"/>
+    <p:sldId id="388" r:id="rId62"/>
+    <p:sldId id="391" r:id="rId63"/>
+    <p:sldId id="392" r:id="rId64"/>
+    <p:sldId id="390" r:id="rId65"/>
+    <p:sldId id="395" r:id="rId66"/>
+    <p:sldId id="393" r:id="rId67"/>
+    <p:sldId id="396" r:id="rId68"/>
+    <p:sldId id="394" r:id="rId69"/>
+    <p:sldId id="397" r:id="rId70"/>
+    <p:sldId id="398" r:id="rId71"/>
+    <p:sldId id="401" r:id="rId72"/>
+    <p:sldId id="405" r:id="rId73"/>
+    <p:sldId id="402" r:id="rId74"/>
+    <p:sldId id="385" r:id="rId75"/>
+    <p:sldId id="381" r:id="rId76"/>
   </p:sldIdLst>
   <p:sldSz cx="9144000" cy="5143500" type="screen16x9"/>
   <p:notesSz cx="6858000" cy="9144000"/>
@@ -275,7 +282,7 @@
           <a:p>
             <a:fld id="{B45A0028-71D2-4800-AD8E-38BD1BCDF688}" type="datetimeFigureOut">
               <a:rPr lang="en-US" smtClean="0"/>
-              <a:t>10/2/2026</a:t>
+              <a:t>10/3/2026</a:t>
             </a:fld>
             <a:endParaRPr lang="en-US"/>
           </a:p>
@@ -805,7 +812,7 @@
           <a:p>
             <a:fld id="{241EB5C9-1307-BA42-ABA2-0BC069CD8E7F}" type="datetimeFigureOut">
               <a:rPr lang="en-US" smtClean="0"/>
-              <a:t>10/2/2026</a:t>
+              <a:t>10/3/2026</a:t>
             </a:fld>
             <a:endParaRPr lang="en-US"/>
           </a:p>
@@ -973,7 +980,7 @@
           <a:p>
             <a:fld id="{241EB5C9-1307-BA42-ABA2-0BC069CD8E7F}" type="datetimeFigureOut">
               <a:rPr lang="en-US" smtClean="0"/>
-              <a:t>10/2/2026</a:t>
+              <a:t>10/3/2026</a:t>
             </a:fld>
             <a:endParaRPr lang="en-US"/>
           </a:p>
@@ -1151,7 +1158,7 @@
           <a:p>
             <a:fld id="{241EB5C9-1307-BA42-ABA2-0BC069CD8E7F}" type="datetimeFigureOut">
               <a:rPr lang="en-US" smtClean="0"/>
-              <a:t>10/2/2026</a:t>
+              <a:t>10/3/2026</a:t>
             </a:fld>
             <a:endParaRPr lang="en-US"/>
           </a:p>
@@ -1319,7 +1326,7 @@
           <a:p>
             <a:fld id="{241EB5C9-1307-BA42-ABA2-0BC069CD8E7F}" type="datetimeFigureOut">
               <a:rPr lang="en-US" smtClean="0"/>
-              <a:t>10/2/2026</a:t>
+              <a:t>10/3/2026</a:t>
             </a:fld>
             <a:endParaRPr lang="en-US"/>
           </a:p>
@@ -1564,7 +1571,7 @@
           <a:p>
             <a:fld id="{241EB5C9-1307-BA42-ABA2-0BC069CD8E7F}" type="datetimeFigureOut">
               <a:rPr lang="en-US" smtClean="0"/>
-              <a:t>10/2/2026</a:t>
+              <a:t>10/3/2026</a:t>
             </a:fld>
             <a:endParaRPr lang="en-US"/>
           </a:p>
@@ -1849,7 +1856,7 @@
           <a:p>
             <a:fld id="{241EB5C9-1307-BA42-ABA2-0BC069CD8E7F}" type="datetimeFigureOut">
               <a:rPr lang="en-US" smtClean="0"/>
-              <a:t>10/2/2026</a:t>
+              <a:t>10/3/2026</a:t>
             </a:fld>
             <a:endParaRPr lang="en-US"/>
           </a:p>
@@ -2268,7 +2275,7 @@
           <a:p>
             <a:fld id="{241EB5C9-1307-BA42-ABA2-0BC069CD8E7F}" type="datetimeFigureOut">
               <a:rPr lang="en-US" smtClean="0"/>
-              <a:t>10/2/2026</a:t>
+              <a:t>10/3/2026</a:t>
             </a:fld>
             <a:endParaRPr lang="en-US"/>
           </a:p>
@@ -2385,7 +2392,7 @@
           <a:p>
             <a:fld id="{241EB5C9-1307-BA42-ABA2-0BC069CD8E7F}" type="datetimeFigureOut">
               <a:rPr lang="en-US" smtClean="0"/>
-              <a:t>10/2/2026</a:t>
+              <a:t>10/3/2026</a:t>
             </a:fld>
             <a:endParaRPr lang="en-US"/>
           </a:p>
@@ -2480,7 +2487,7 @@
           <a:p>
             <a:fld id="{241EB5C9-1307-BA42-ABA2-0BC069CD8E7F}" type="datetimeFigureOut">
               <a:rPr lang="en-US" smtClean="0"/>
-              <a:t>10/2/2026</a:t>
+              <a:t>10/3/2026</a:t>
             </a:fld>
             <a:endParaRPr lang="en-US"/>
           </a:p>
@@ -2755,7 +2762,7 @@
           <a:p>
             <a:fld id="{241EB5C9-1307-BA42-ABA2-0BC069CD8E7F}" type="datetimeFigureOut">
               <a:rPr lang="en-US" smtClean="0"/>
-              <a:t>10/2/2026</a:t>
+              <a:t>10/3/2026</a:t>
             </a:fld>
             <a:endParaRPr lang="en-US"/>
           </a:p>
@@ -3007,7 +3014,7 @@
           <a:p>
             <a:fld id="{241EB5C9-1307-BA42-ABA2-0BC069CD8E7F}" type="datetimeFigureOut">
               <a:rPr lang="en-US" smtClean="0"/>
-              <a:t>10/2/2026</a:t>
+              <a:t>10/3/2026</a:t>
             </a:fld>
             <a:endParaRPr lang="en-US"/>
           </a:p>
@@ -3218,7 +3225,7 @@
           <a:p>
             <a:fld id="{241EB5C9-1307-BA42-ABA2-0BC069CD8E7F}" type="datetimeFigureOut">
               <a:rPr lang="en-US" smtClean="0"/>
-              <a:t>10/2/2026</a:t>
+              <a:t>10/3/2026</a:t>
             </a:fld>
             <a:endParaRPr lang="en-US"/>
           </a:p>
@@ -11523,6 +11530,7 @@
                           <m:ctrlPr>
                             <a:rPr lang="en-US" i="1">
                               <a:latin typeface="Cambria Math" panose="02040503050406030204" pitchFamily="18" charset="0"/>
+                              <a:ea typeface="Cambria Math" panose="02040503050406030204" pitchFamily="18" charset="0"/>
                             </a:rPr>
                           </m:ctrlPr>
                         </m:sSupPr>
@@ -11532,6 +11540,7 @@
                               <m:ctrlPr>
                                 <a:rPr lang="en-US" i="1">
                                   <a:latin typeface="Cambria Math" panose="02040503050406030204" pitchFamily="18" charset="0"/>
+                                  <a:ea typeface="Cambria Math" panose="02040503050406030204" pitchFamily="18" charset="0"/>
                                 </a:rPr>
                               </m:ctrlPr>
                             </m:dPr>
@@ -18842,10 +18851,15 @@
             <p:ph idx="1"/>
           </p:nvPr>
         </p:nvSpPr>
-        <p:spPr/>
+        <p:spPr>
+          <a:xfrm>
+            <a:off x="457200" y="1200151"/>
+            <a:ext cx="8229600" cy="3772902"/>
+          </a:xfrm>
+        </p:spPr>
         <p:txBody>
           <a:bodyPr>
-            <a:normAutofit fontScale="77500" lnSpcReduction="20000"/>
+            <a:normAutofit fontScale="92500" lnSpcReduction="20000"/>
           </a:bodyPr>
           <a:lstStyle/>
           <a:p>
@@ -22594,6 +22608,7 @@
                           <m:ctrlPr>
                             <a:rPr lang="ar-AE" sz="1800" i="1">
                               <a:latin typeface="Cambria Math" panose="02040503050406030204" pitchFamily="18" charset="0"/>
+                              <a:ea typeface="Cambria Math" panose="02040503050406030204" pitchFamily="18" charset="0"/>
                             </a:rPr>
                           </m:ctrlPr>
                         </m:fPr>
@@ -31090,6 +31105,221 @@
         <p:cNvPr id="1" name="">
           <a:extLst>
             <a:ext uri="{FF2B5EF4-FFF2-40B4-BE49-F238E27FC236}">
+              <a16:creationId xmlns:a16="http://schemas.microsoft.com/office/drawing/2014/main" id="{2F3EC160-83A9-5F30-E943-086D24A9DB70}"/>
+            </a:ext>
+          </a:extLst>
+        </p:cNvPr>
+        <p:cNvGrpSpPr/>
+        <p:nvPr/>
+      </p:nvGrpSpPr>
+      <p:grpSpPr>
+        <a:xfrm>
+          <a:off x="0" y="0"/>
+          <a:ext cx="0" cy="0"/>
+          <a:chOff x="0" y="0"/>
+          <a:chExt cx="0" cy="0"/>
+        </a:xfrm>
+      </p:grpSpPr>
+      <p:sp>
+        <p:nvSpPr>
+          <p:cNvPr id="2" name="Title 1">
+            <a:extLst>
+              <a:ext uri="{FF2B5EF4-FFF2-40B4-BE49-F238E27FC236}">
+                <a16:creationId xmlns:a16="http://schemas.microsoft.com/office/drawing/2014/main" id="{75DAC60E-EE1A-7913-8401-689C5F2F588C}"/>
+              </a:ext>
+            </a:extLst>
+          </p:cNvPr>
+          <p:cNvSpPr>
+            <a:spLocks noGrp="1"/>
+          </p:cNvSpPr>
+          <p:nvPr>
+            <p:ph type="title"/>
+          </p:nvPr>
+        </p:nvSpPr>
+        <p:spPr>
+          <a:xfrm>
+            <a:off x="457201" y="204787"/>
+            <a:ext cx="8329352" cy="564140"/>
+          </a:xfrm>
+        </p:spPr>
+        <p:txBody>
+          <a:bodyPr>
+            <a:noAutofit/>
+          </a:bodyPr>
+          <a:lstStyle/>
+          <a:p>
+            <a:pPr marL="0" lvl="0" indent="0" algn="ctr">
+              <a:buNone/>
+            </a:pPr>
+            <a:r>
+              <a:rPr lang="en-US" sz="3200" b="0" dirty="0"/>
+              <a:t>Example: </a:t>
+            </a:r>
+            <a:r>
+              <a:rPr sz="3200" b="0" dirty="0"/>
+              <a:t>Dealing With Outliers</a:t>
+            </a:r>
+          </a:p>
+        </p:txBody>
+      </p:sp>
+      <p:sp>
+        <p:nvSpPr>
+          <p:cNvPr id="4" name="Text Placeholder 3">
+            <a:extLst>
+              <a:ext uri="{FF2B5EF4-FFF2-40B4-BE49-F238E27FC236}">
+                <a16:creationId xmlns:a16="http://schemas.microsoft.com/office/drawing/2014/main" id="{A5514A14-8CB1-4BA9-ECA5-1EEB9A7ABBCC}"/>
+              </a:ext>
+            </a:extLst>
+          </p:cNvPr>
+          <p:cNvSpPr>
+            <a:spLocks noGrp="1"/>
+          </p:cNvSpPr>
+          <p:nvPr>
+            <p:ph type="body" sz="half" idx="2"/>
+          </p:nvPr>
+        </p:nvSpPr>
+        <p:spPr>
+          <a:xfrm>
+            <a:off x="457201" y="1076326"/>
+            <a:ext cx="7930341" cy="3518297"/>
+          </a:xfrm>
+        </p:spPr>
+        <p:txBody>
+          <a:bodyPr>
+            <a:normAutofit fontScale="92500" lnSpcReduction="10000"/>
+          </a:bodyPr>
+          <a:lstStyle/>
+          <a:p>
+            <a:pPr marL="0" lvl="0" indent="0">
+              <a:buNone/>
+            </a:pPr>
+            <a:r>
+              <a:rPr lang="en-US" sz="2800" dirty="0"/>
+              <a:t>For further reading on robust statistical models</a:t>
+            </a:r>
+          </a:p>
+          <a:p>
+            <a:pPr marL="457200" lvl="0" indent="-457200">
+              <a:buFont typeface="Arial" panose="020B0604020202020204" pitchFamily="34" charset="0"/>
+              <a:buChar char="•"/>
+            </a:pPr>
+            <a:r>
+              <a:rPr lang="en-US" sz="2800" dirty="0"/>
+              <a:t>For an up to date broad and deep treatment of theory and practical use of robust models see </a:t>
+            </a:r>
+            <a:r>
+              <a:rPr lang="en-US" sz="2800" dirty="0">
+                <a:hlinkClick r:id="rId2"/>
+              </a:rPr>
+              <a:t>Robust Statistics, Theory and Methods (with R), Second Edition, </a:t>
+            </a:r>
+            <a:r>
+              <a:rPr lang="en-US" sz="2800" dirty="0" err="1">
+                <a:hlinkClick r:id="rId2"/>
+              </a:rPr>
+              <a:t>Maronna</a:t>
+            </a:r>
+            <a:r>
+              <a:rPr lang="en-US" sz="2800" dirty="0">
+                <a:hlinkClick r:id="rId2"/>
+              </a:rPr>
+              <a:t>, Martin, Yohai, </a:t>
+            </a:r>
+            <a:r>
+              <a:rPr lang="en-US" sz="2800" dirty="0" err="1">
+                <a:hlinkClick r:id="rId2"/>
+              </a:rPr>
+              <a:t>Salibian</a:t>
+            </a:r>
+            <a:r>
+              <a:rPr lang="en-US" sz="2800" dirty="0">
+                <a:hlinkClick r:id="rId2"/>
+              </a:rPr>
+              <a:t>-Barrera, Wiley, 2019</a:t>
+            </a:r>
+            <a:r>
+              <a:rPr lang="en-US" sz="2800" dirty="0"/>
+              <a:t>      </a:t>
+            </a:r>
+          </a:p>
+          <a:p>
+            <a:pPr marL="457200" lvl="0" indent="-457200">
+              <a:buFont typeface="Arial" panose="020B0604020202020204" pitchFamily="34" charset="0"/>
+              <a:buChar char="•"/>
+            </a:pPr>
+            <a:r>
+              <a:rPr lang="en-US" sz="2800" dirty="0"/>
+              <a:t>The classic treatment of this subject is Robust Statistics, </a:t>
+            </a:r>
+            <a:r>
+              <a:rPr lang="en-US" sz="2800" dirty="0">
+                <a:hlinkClick r:id="rId3"/>
+              </a:rPr>
+              <a:t>The Approach Based on Influence Functions, Hample, </a:t>
+            </a:r>
+            <a:r>
+              <a:rPr lang="en-US" sz="2800" dirty="0" err="1">
+                <a:hlinkClick r:id="rId3"/>
+              </a:rPr>
+              <a:t>Rousseeuw</a:t>
+            </a:r>
+            <a:r>
+              <a:rPr lang="en-US" sz="2800" dirty="0">
+                <a:hlinkClick r:id="rId3"/>
+              </a:rPr>
+              <a:t>, Ronchetti, Stahel, </a:t>
+            </a:r>
+            <a:r>
+              <a:rPr lang="en-US" sz="2800" dirty="0" err="1">
+                <a:hlinkClick r:id="rId3"/>
+              </a:rPr>
+              <a:t>Weily</a:t>
+            </a:r>
+            <a:r>
+              <a:rPr lang="en-US" sz="2800" dirty="0">
+                <a:hlinkClick r:id="rId3"/>
+              </a:rPr>
+              <a:t>, 1986</a:t>
+            </a:r>
+            <a:endParaRPr lang="en-US" sz="2800" dirty="0"/>
+          </a:p>
+          <a:p>
+            <a:pPr marL="457200" lvl="0" indent="-457200">
+              <a:buFont typeface="Arial" panose="020B0604020202020204" pitchFamily="34" charset="0"/>
+              <a:buChar char="•"/>
+            </a:pPr>
+            <a:endParaRPr lang="en-US" sz="2800" dirty="0"/>
+          </a:p>
+          <a:p>
+            <a:pPr marL="457200" lvl="0" indent="-457200">
+              <a:buFont typeface="Arial" panose="020B0604020202020204" pitchFamily="34" charset="0"/>
+              <a:buChar char="•"/>
+            </a:pPr>
+            <a:endParaRPr sz="2800" dirty="0"/>
+          </a:p>
+        </p:txBody>
+      </p:sp>
+    </p:spTree>
+    <p:extLst>
+      <p:ext uri="{BB962C8B-B14F-4D97-AF65-F5344CB8AC3E}">
+        <p14:creationId xmlns:p14="http://schemas.microsoft.com/office/powerpoint/2010/main" val="673293599"/>
+      </p:ext>
+    </p:extLst>
+  </p:cSld>
+  <p:clrMapOvr>
+    <a:masterClrMapping/>
+  </p:clrMapOvr>
+</p:sld>
+</file>
+
+<file path=ppt/slides/slide55.xml><?xml version="1.0" encoding="utf-8"?>
+<p:sld xmlns:a="http://schemas.openxmlformats.org/drawingml/2006/main" xmlns:r="http://schemas.openxmlformats.org/officeDocument/2006/relationships" xmlns:p="http://schemas.openxmlformats.org/presentationml/2006/main">
+  <p:cSld>
+    <p:spTree>
+      <p:nvGrpSpPr>
+        <p:cNvPr id="1" name="">
+          <a:extLst>
+            <a:ext uri="{FF2B5EF4-FFF2-40B4-BE49-F238E27FC236}">
               <a16:creationId xmlns:a16="http://schemas.microsoft.com/office/drawing/2014/main" id="{E8000A26-C1B1-F422-3D2C-56EDC696E9A1}"/>
             </a:ext>
           </a:extLst>
@@ -31152,7 +31382,7 @@
 </p:sld>
 </file>
 
-<file path=ppt/slides/slide55.xml><?xml version="1.0" encoding="utf-8"?>
+<file path=ppt/slides/slide56.xml><?xml version="1.0" encoding="utf-8"?>
 <p:sld xmlns:a="http://schemas.openxmlformats.org/drawingml/2006/main" xmlns:r="http://schemas.openxmlformats.org/officeDocument/2006/relationships" xmlns:p="http://schemas.openxmlformats.org/presentationml/2006/main">
   <p:cSld>
     <p:spTree>
@@ -31309,7 +31539,7 @@
 </p:sld>
 </file>
 
-<file path=ppt/slides/slide56.xml><?xml version="1.0" encoding="utf-8"?>
+<file path=ppt/slides/slide57.xml><?xml version="1.0" encoding="utf-8"?>
 <p:sld xmlns:a="http://schemas.openxmlformats.org/drawingml/2006/main" xmlns:r="http://schemas.openxmlformats.org/officeDocument/2006/relationships" xmlns:p="http://schemas.openxmlformats.org/presentationml/2006/main">
   <p:cSld>
     <p:spTree>
@@ -31444,7 +31674,7 @@
 </p:sld>
 </file>
 
-<file path=ppt/slides/slide57.xml><?xml version="1.0" encoding="utf-8"?>
+<file path=ppt/slides/slide58.xml><?xml version="1.0" encoding="utf-8"?>
 <p:sld xmlns:a="http://schemas.openxmlformats.org/drawingml/2006/main" xmlns:r="http://schemas.openxmlformats.org/officeDocument/2006/relationships" xmlns:p="http://schemas.openxmlformats.org/presentationml/2006/main">
   <p:cSld>
     <p:spTree>
@@ -31452,7 +31682,7 @@
         <p:cNvPr id="1" name="">
           <a:extLst>
             <a:ext uri="{FF2B5EF4-FFF2-40B4-BE49-F238E27FC236}">
-              <a16:creationId xmlns:a16="http://schemas.microsoft.com/office/drawing/2014/main" id="{7169A6A7-2558-E14C-937F-76133ACABB72}"/>
+              <a16:creationId xmlns:a16="http://schemas.microsoft.com/office/drawing/2014/main" id="{DA02ECB3-6BBE-DCFD-B036-32887A538AC9}"/>
             </a:ext>
           </a:extLst>
         </p:cNvPr>
@@ -31472,7 +31702,7 @@
           <p:cNvPr id="2" name="Title 1">
             <a:extLst>
               <a:ext uri="{FF2B5EF4-FFF2-40B4-BE49-F238E27FC236}">
-                <a16:creationId xmlns:a16="http://schemas.microsoft.com/office/drawing/2014/main" id="{A919FC23-6B25-1B58-E331-78BC2B52991B}"/>
+                <a16:creationId xmlns:a16="http://schemas.microsoft.com/office/drawing/2014/main" id="{6DD8DEE9-EFE3-5E17-CBBA-D4D63BA5D13C}"/>
               </a:ext>
             </a:extLst>
           </p:cNvPr>
@@ -31493,7 +31723,7 @@
             </a:pPr>
             <a:r>
               <a:rPr lang="en-US" dirty="0"/>
-              <a:t>Imputation of Missing Values</a:t>
+              <a:t>Understanding Missing Values</a:t>
             </a:r>
             <a:endParaRPr dirty="0"/>
           </a:p>
@@ -31504,7 +31734,7 @@
           <p:cNvPr id="3" name="Content Placeholder 2">
             <a:extLst>
               <a:ext uri="{FF2B5EF4-FFF2-40B4-BE49-F238E27FC236}">
-                <a16:creationId xmlns:a16="http://schemas.microsoft.com/office/drawing/2014/main" id="{C310ECD3-6581-1420-5CE3-136248DB3BEE}"/>
+                <a16:creationId xmlns:a16="http://schemas.microsoft.com/office/drawing/2014/main" id="{C5512292-9EC6-85A5-8689-82BEEAD3493E}"/>
               </a:ext>
             </a:extLst>
           </p:cNvPr>
@@ -31517,8 +31747,8 @@
         </p:nvSpPr>
         <p:spPr>
           <a:xfrm>
-            <a:off x="457200" y="1200151"/>
-            <a:ext cx="8229600" cy="3737370"/>
+            <a:off x="429610" y="924711"/>
+            <a:ext cx="8229600" cy="510408"/>
           </a:xfrm>
         </p:spPr>
         <p:txBody>
@@ -31532,44 +31762,229 @@
             </a:pPr>
             <a:r>
               <a:rPr lang="en-US" dirty="0"/>
-              <a:t>Imputation methods must match the missing data pattern and intended use</a:t>
-            </a:r>
-          </a:p>
+              <a:t>Exploring missing data patterns </a:t>
+            </a:r>
+          </a:p>
+        </p:txBody>
+      </p:sp>
+      <p:pic>
+        <p:nvPicPr>
+          <p:cNvPr id="6" name="Picture 5">
+            <a:extLst>
+              <a:ext uri="{FF2B5EF4-FFF2-40B4-BE49-F238E27FC236}">
+                <a16:creationId xmlns:a16="http://schemas.microsoft.com/office/drawing/2014/main" id="{EB6F8BBD-102D-4477-D7E5-A856650979A0}"/>
+              </a:ext>
+            </a:extLst>
+          </p:cNvPr>
+          <p:cNvPicPr>
+            <a:picLocks noChangeAspect="1"/>
+          </p:cNvPicPr>
+          <p:nvPr/>
+        </p:nvPicPr>
+        <p:blipFill>
+          <a:blip r:embed="rId2"/>
+          <a:stretch>
+            <a:fillRect/>
+          </a:stretch>
+        </p:blipFill>
+        <p:spPr>
+          <a:xfrm>
+            <a:off x="3565027" y="1730266"/>
+            <a:ext cx="5578973" cy="2982102"/>
+          </a:xfrm>
+          <a:prstGeom prst="rect">
+            <a:avLst/>
+          </a:prstGeom>
+        </p:spPr>
+      </p:pic>
+      <p:sp>
+        <p:nvSpPr>
+          <p:cNvPr id="7" name="Content Placeholder 2">
+            <a:extLst>
+              <a:ext uri="{FF2B5EF4-FFF2-40B4-BE49-F238E27FC236}">
+                <a16:creationId xmlns:a16="http://schemas.microsoft.com/office/drawing/2014/main" id="{0D483E30-C1C6-1F1B-F030-57B9C64F5F97}"/>
+              </a:ext>
+            </a:extLst>
+          </p:cNvPr>
+          <p:cNvSpPr txBox="1">
+            <a:spLocks/>
+          </p:cNvSpPr>
+          <p:nvPr/>
+        </p:nvSpPr>
+        <p:spPr>
+          <a:xfrm>
+            <a:off x="457200" y="1399674"/>
+            <a:ext cx="3007895" cy="3621505"/>
+          </a:xfrm>
+          <a:prstGeom prst="rect">
+            <a:avLst/>
+          </a:prstGeom>
+        </p:spPr>
+        <p:txBody>
+          <a:bodyPr vert="horz" lIns="91440" tIns="45720" rIns="91440" bIns="45720" rtlCol="0">
+            <a:normAutofit/>
+          </a:bodyPr>
+          <a:lstStyle>
+            <a:lvl1pPr marL="342900" indent="-342900" algn="l" defTabSz="342900" rtl="0" eaLnBrk="1" latinLnBrk="0" hangingPunct="1">
+              <a:spcBef>
+                <a:spcPct val="20000"/>
+              </a:spcBef>
+              <a:buFont typeface="Arial"/>
+              <a:buChar char="•"/>
+              <a:defRPr sz="2400" kern="1200">
+                <a:solidFill>
+                  <a:schemeClr val="tx1"/>
+                </a:solidFill>
+                <a:latin typeface="+mn-lt"/>
+                <a:ea typeface="+mn-ea"/>
+                <a:cs typeface="+mn-cs"/>
+              </a:defRPr>
+            </a:lvl1pPr>
+            <a:lvl2pPr marL="685800" indent="-342900" algn="l" defTabSz="342900" rtl="0" eaLnBrk="1" latinLnBrk="0" hangingPunct="1">
+              <a:spcBef>
+                <a:spcPct val="20000"/>
+              </a:spcBef>
+              <a:buFont typeface="Arial"/>
+              <a:buChar char="–"/>
+              <a:defRPr sz="2100" kern="1200">
+                <a:solidFill>
+                  <a:schemeClr val="tx1"/>
+                </a:solidFill>
+                <a:latin typeface="+mn-lt"/>
+                <a:ea typeface="+mn-ea"/>
+                <a:cs typeface="+mn-cs"/>
+              </a:defRPr>
+            </a:lvl2pPr>
+            <a:lvl3pPr marL="1028700" indent="-342900" algn="l" defTabSz="342900" rtl="0" eaLnBrk="1" latinLnBrk="0" hangingPunct="1">
+              <a:spcBef>
+                <a:spcPct val="20000"/>
+              </a:spcBef>
+              <a:buFont typeface="Arial"/>
+              <a:buChar char="•"/>
+              <a:defRPr sz="1800" kern="1200">
+                <a:solidFill>
+                  <a:schemeClr val="tx1"/>
+                </a:solidFill>
+                <a:latin typeface="+mn-lt"/>
+                <a:ea typeface="+mn-ea"/>
+                <a:cs typeface="+mn-cs"/>
+              </a:defRPr>
+            </a:lvl3pPr>
+            <a:lvl4pPr marL="1371600" indent="-342900" algn="l" defTabSz="342900" rtl="0" eaLnBrk="1" latinLnBrk="0" hangingPunct="1">
+              <a:spcBef>
+                <a:spcPct val="20000"/>
+              </a:spcBef>
+              <a:buFont typeface="Arial"/>
+              <a:buChar char="–"/>
+              <a:defRPr sz="1500" kern="1200">
+                <a:solidFill>
+                  <a:schemeClr val="tx1"/>
+                </a:solidFill>
+                <a:latin typeface="+mn-lt"/>
+                <a:ea typeface="+mn-ea"/>
+                <a:cs typeface="+mn-cs"/>
+              </a:defRPr>
+            </a:lvl4pPr>
+            <a:lvl5pPr marL="1714500" indent="-342900" algn="l" defTabSz="342900" rtl="0" eaLnBrk="1" latinLnBrk="0" hangingPunct="1">
+              <a:spcBef>
+                <a:spcPct val="20000"/>
+              </a:spcBef>
+              <a:buFont typeface="Arial"/>
+              <a:buChar char="»"/>
+              <a:defRPr sz="1500" kern="1200">
+                <a:solidFill>
+                  <a:schemeClr val="tx1"/>
+                </a:solidFill>
+                <a:latin typeface="+mn-lt"/>
+                <a:ea typeface="+mn-ea"/>
+                <a:cs typeface="+mn-cs"/>
+              </a:defRPr>
+            </a:lvl5pPr>
+            <a:lvl6pPr marL="2057400" indent="-342900" algn="l" defTabSz="342900" rtl="0" eaLnBrk="1" latinLnBrk="0" hangingPunct="1">
+              <a:spcBef>
+                <a:spcPct val="20000"/>
+              </a:spcBef>
+              <a:buFont typeface="Arial"/>
+              <a:buChar char="•"/>
+              <a:defRPr sz="1500" kern="1200">
+                <a:solidFill>
+                  <a:schemeClr val="tx1"/>
+                </a:solidFill>
+                <a:latin typeface="+mn-lt"/>
+                <a:ea typeface="+mn-ea"/>
+                <a:cs typeface="+mn-cs"/>
+              </a:defRPr>
+            </a:lvl6pPr>
+            <a:lvl7pPr marL="2400300" indent="-342900" algn="l" defTabSz="342900" rtl="0" eaLnBrk="1" latinLnBrk="0" hangingPunct="1">
+              <a:spcBef>
+                <a:spcPct val="20000"/>
+              </a:spcBef>
+              <a:buFont typeface="Arial"/>
+              <a:buChar char="•"/>
+              <a:defRPr sz="1500" kern="1200">
+                <a:solidFill>
+                  <a:schemeClr val="tx1"/>
+                </a:solidFill>
+                <a:latin typeface="+mn-lt"/>
+                <a:ea typeface="+mn-ea"/>
+                <a:cs typeface="+mn-cs"/>
+              </a:defRPr>
+            </a:lvl7pPr>
+            <a:lvl8pPr marL="2743200" indent="-342900" algn="l" defTabSz="342900" rtl="0" eaLnBrk="1" latinLnBrk="0" hangingPunct="1">
+              <a:spcBef>
+                <a:spcPct val="20000"/>
+              </a:spcBef>
+              <a:buFont typeface="Arial"/>
+              <a:buChar char="•"/>
+              <a:defRPr sz="1500" kern="1200">
+                <a:solidFill>
+                  <a:schemeClr val="tx1"/>
+                </a:solidFill>
+                <a:latin typeface="+mn-lt"/>
+                <a:ea typeface="+mn-ea"/>
+                <a:cs typeface="+mn-cs"/>
+              </a:defRPr>
+            </a:lvl8pPr>
+            <a:lvl9pPr marL="3086100" indent="-342900" algn="l" defTabSz="342900" rtl="0" eaLnBrk="1" latinLnBrk="0" hangingPunct="1">
+              <a:spcBef>
+                <a:spcPct val="20000"/>
+              </a:spcBef>
+              <a:buFont typeface="Arial"/>
+              <a:buChar char="•"/>
+              <a:defRPr sz="1500" kern="1200">
+                <a:solidFill>
+                  <a:schemeClr val="tx1"/>
+                </a:solidFill>
+                <a:latin typeface="+mn-lt"/>
+                <a:ea typeface="+mn-ea"/>
+                <a:cs typeface="+mn-cs"/>
+              </a:defRPr>
+            </a:lvl9pPr>
+          </a:lstStyle>
           <a:p>
             <a:r>
               <a:rPr lang="en-US" dirty="0"/>
-              <a:t>Machine learning algorithms only need a good point estimate for the imputed value</a:t>
-            </a:r>
-          </a:p>
-          <a:p>
-            <a:pPr lvl="1"/>
+              <a:t>Plot reveals missing value pattern in variables by row         </a:t>
+            </a:r>
+          </a:p>
+          <a:p>
             <a:r>
               <a:rPr lang="en-US" dirty="0"/>
-              <a:t>For ML, we do not much care what the confidence intervals are</a:t>
+              <a:t>Some rows have only one missing value</a:t>
             </a:r>
           </a:p>
           <a:p>
             <a:r>
               <a:rPr lang="en-US" dirty="0"/>
-              <a:t>Inference requires drawing imputed values from the distribution of the variable  </a:t>
-            </a:r>
-          </a:p>
-          <a:p>
-            <a:pPr lvl="1"/>
-            <a:r>
-              <a:rPr lang="en-US" dirty="0"/>
-              <a:t>We want unbiased estimates of the confidence intervals  </a:t>
-            </a:r>
-          </a:p>
-          <a:p>
-            <a:endParaRPr dirty="0"/>
+              <a:t>Other rows have multiple missing values  </a:t>
+            </a:r>
           </a:p>
         </p:txBody>
       </p:sp>
     </p:spTree>
     <p:extLst>
       <p:ext uri="{BB962C8B-B14F-4D97-AF65-F5344CB8AC3E}">
-        <p14:creationId xmlns:p14="http://schemas.microsoft.com/office/powerpoint/2010/main" val="1833434833"/>
+        <p14:creationId xmlns:p14="http://schemas.microsoft.com/office/powerpoint/2010/main" val="3028361265"/>
       </p:ext>
     </p:extLst>
   </p:cSld>
@@ -31579,7 +31994,7 @@
 </p:sld>
 </file>
 
-<file path=ppt/slides/slide58.xml><?xml version="1.0" encoding="utf-8"?>
+<file path=ppt/slides/slide59.xml><?xml version="1.0" encoding="utf-8"?>
 <p:sld xmlns:a="http://schemas.openxmlformats.org/drawingml/2006/main" xmlns:r="http://schemas.openxmlformats.org/officeDocument/2006/relationships" xmlns:p="http://schemas.openxmlformats.org/presentationml/2006/main">
   <p:cSld>
     <p:spTree>
@@ -31587,7 +32002,7 @@
         <p:cNvPr id="1" name="">
           <a:extLst>
             <a:ext uri="{FF2B5EF4-FFF2-40B4-BE49-F238E27FC236}">
-              <a16:creationId xmlns:a16="http://schemas.microsoft.com/office/drawing/2014/main" id="{CE1DAB7D-6678-A6DC-17E0-2F2C67358EC1}"/>
+              <a16:creationId xmlns:a16="http://schemas.microsoft.com/office/drawing/2014/main" id="{3D44FDFC-4F69-DFB8-A2BC-CF8EB3C07576}"/>
             </a:ext>
           </a:extLst>
         </p:cNvPr>
@@ -31607,7 +32022,7 @@
           <p:cNvPr id="2" name="Title 1">
             <a:extLst>
               <a:ext uri="{FF2B5EF4-FFF2-40B4-BE49-F238E27FC236}">
-                <a16:creationId xmlns:a16="http://schemas.microsoft.com/office/drawing/2014/main" id="{52A1E7A9-8462-AFB6-69E8-D29C815D4DD0}"/>
+                <a16:creationId xmlns:a16="http://schemas.microsoft.com/office/drawing/2014/main" id="{91A30F1C-4589-D04C-A165-DD3A86E76EE2}"/>
               </a:ext>
             </a:extLst>
           </p:cNvPr>
@@ -31628,257 +32043,253 @@
             </a:pPr>
             <a:r>
               <a:rPr lang="en-US" dirty="0"/>
-              <a:t>Imputation of Missing Values</a:t>
+              <a:t>Understanding Missing Values</a:t>
             </a:r>
             <a:endParaRPr dirty="0"/>
           </a:p>
         </p:txBody>
       </p:sp>
-      <p:sp>
-        <p:nvSpPr>
-          <p:cNvPr id="3" name="Content Placeholder 2">
-            <a:extLst>
-              <a:ext uri="{FF2B5EF4-FFF2-40B4-BE49-F238E27FC236}">
-                <a16:creationId xmlns:a16="http://schemas.microsoft.com/office/drawing/2014/main" id="{EE8C0F07-8E21-F467-CD9D-1ED0C942B535}"/>
-              </a:ext>
-            </a:extLst>
-          </p:cNvPr>
-          <p:cNvSpPr>
-            <a:spLocks noGrp="1"/>
-          </p:cNvSpPr>
-          <p:nvPr>
-            <p:ph idx="1"/>
-          </p:nvPr>
-        </p:nvSpPr>
-        <p:spPr>
-          <a:xfrm>
-            <a:off x="457200" y="1200151"/>
-            <a:ext cx="8229600" cy="3737370"/>
-          </a:xfrm>
-        </p:spPr>
-        <p:txBody>
-          <a:bodyPr>
-            <a:normAutofit lnSpcReduction="10000"/>
-          </a:bodyPr>
-          <a:lstStyle/>
-          <a:p>
-            <a:pPr marL="0" lvl="0" indent="0">
-              <a:buNone/>
-            </a:pPr>
-            <a:r>
-              <a:rPr lang="en-US" dirty="0"/>
-              <a:t>Algorithms used for MCAR and MAR data for machine learning do not need to preserve distributions</a:t>
-            </a:r>
-          </a:p>
-          <a:p>
-            <a:r>
-              <a:rPr lang="en-US" dirty="0"/>
-              <a:t>Commonly used algorithms for machine </a:t>
-            </a:r>
-            <a:r>
-              <a:rPr lang="en-US" dirty="0" err="1"/>
-              <a:t>learling</a:t>
-            </a:r>
-            <a:r>
-              <a:rPr lang="en-US" dirty="0"/>
-              <a:t> include</a:t>
-            </a:r>
-          </a:p>
-          <a:p>
-            <a:pPr lvl="1"/>
-            <a:r>
-              <a:rPr lang="en-US" dirty="0"/>
-              <a:t>Filling, mean, median, …</a:t>
-            </a:r>
-          </a:p>
-          <a:p>
-            <a:pPr lvl="1"/>
-            <a:r>
-              <a:rPr lang="en-US" dirty="0"/>
-              <a:t>Interpolation, linear, spline, etc.     </a:t>
-            </a:r>
-          </a:p>
-          <a:p>
-            <a:pPr lvl="1"/>
-            <a:r>
-              <a:rPr lang="en-US" dirty="0"/>
-              <a:t>Forward and back filling</a:t>
-            </a:r>
-          </a:p>
-          <a:p>
-            <a:pPr lvl="1"/>
-            <a:r>
-              <a:rPr lang="en-US" dirty="0"/>
-              <a:t>K-nearest neighbors </a:t>
-            </a:r>
-          </a:p>
-          <a:p>
-            <a:pPr lvl="1"/>
-            <a:r>
-              <a:rPr lang="en-US" dirty="0" err="1"/>
-              <a:t>etc</a:t>
-            </a:r>
-            <a:r>
-              <a:rPr lang="en-US" dirty="0"/>
-              <a:t>… </a:t>
-            </a:r>
-          </a:p>
-          <a:p>
-            <a:r>
-              <a:rPr lang="en-US" dirty="0"/>
-              <a:t>These algorithms only provide point estimates and are not useful for inference   </a:t>
-            </a:r>
-          </a:p>
-          <a:p>
-            <a:endParaRPr dirty="0"/>
-          </a:p>
-        </p:txBody>
-      </p:sp>
+      <mc:AlternateContent xmlns:mc="http://schemas.openxmlformats.org/markup-compatibility/2006" xmlns:a14="http://schemas.microsoft.com/office/drawing/2010/main">
+        <mc:Choice Requires="a14">
+          <p:sp>
+            <p:nvSpPr>
+              <p:cNvPr id="3" name="Content Placeholder 2">
+                <a:extLst>
+                  <a:ext uri="{FF2B5EF4-FFF2-40B4-BE49-F238E27FC236}">
+                    <a16:creationId xmlns:a16="http://schemas.microsoft.com/office/drawing/2014/main" id="{94599B7E-B879-000C-DCA7-404F6FA7D88B}"/>
+                  </a:ext>
+                </a:extLst>
+              </p:cNvPr>
+              <p:cNvSpPr>
+                <a:spLocks noGrp="1"/>
+              </p:cNvSpPr>
+              <p:nvPr>
+                <p:ph idx="1"/>
+              </p:nvPr>
+            </p:nvSpPr>
+            <p:spPr>
+              <a:xfrm>
+                <a:off x="457200" y="1200151"/>
+                <a:ext cx="8229600" cy="3737370"/>
+              </a:xfrm>
+            </p:spPr>
+            <p:txBody>
+              <a:bodyPr>
+                <a:normAutofit lnSpcReduction="10000"/>
+              </a:bodyPr>
+              <a:lstStyle/>
+              <a:p>
+                <a:pPr marL="0" lvl="0" indent="0">
+                  <a:buNone/>
+                </a:pPr>
+                <a:r>
+                  <a:rPr lang="en-US" dirty="0"/>
+                  <a:t>We can use </a:t>
+                </a:r>
+                <a:r>
+                  <a:rPr lang="en-US" b="1" dirty="0"/>
+                  <a:t>Little’s MCAR test </a:t>
+                </a:r>
+                <a:r>
+                  <a:rPr lang="en-US" dirty="0"/>
+                  <a:t>to support a hypothesis of a missing pattern</a:t>
+                </a:r>
+              </a:p>
+              <a:p>
+                <a:r>
+                  <a:rPr lang="en-US" b="1" dirty="0"/>
+                  <a:t>Test Statistic: </a:t>
+                </a:r>
+                <a:r>
+                  <a:rPr lang="en-US" dirty="0"/>
+                  <a:t>Observed means across different missing data patterns with expected population means are chi-square (χ²) distributed </a:t>
+                </a:r>
+              </a:p>
+              <a:p>
+                <a:pPr lvl="0"/>
+                <a:r>
+                  <a:rPr lang="en-US" b="1" dirty="0"/>
+                  <a:t>Null Hypothesis </a:t>
+                </a:r>
+                <a14:m>
+                  <m:oMath xmlns:m="http://schemas.openxmlformats.org/officeDocument/2006/math">
+                    <m:d>
+                      <m:dPr>
+                        <m:ctrlPr>
+                          <a:rPr lang="en-US" b="1" i="1" smtClean="0">
+                            <a:latin typeface="Cambria Math" panose="02040503050406030204" pitchFamily="18" charset="0"/>
+                          </a:rPr>
+                        </m:ctrlPr>
+                      </m:dPr>
+                      <m:e>
+                        <m:sSub>
+                          <m:sSubPr>
+                            <m:ctrlPr>
+                              <a:rPr lang="en-US" b="1" i="1" smtClean="0">
+                                <a:latin typeface="Cambria Math" panose="02040503050406030204" pitchFamily="18" charset="0"/>
+                              </a:rPr>
+                            </m:ctrlPr>
+                          </m:sSubPr>
+                          <m:e>
+                            <m:r>
+                              <a:rPr lang="en-US" b="1" i="1" smtClean="0">
+                                <a:latin typeface="Cambria Math" panose="02040503050406030204" pitchFamily="18" charset="0"/>
+                              </a:rPr>
+                              <m:t>𝑯</m:t>
+                            </m:r>
+                          </m:e>
+                          <m:sub>
+                            <m:r>
+                              <a:rPr lang="en-US" b="1" i="1" smtClean="0">
+                                <a:latin typeface="Cambria Math" panose="02040503050406030204" pitchFamily="18" charset="0"/>
+                              </a:rPr>
+                              <m:t>𝟎</m:t>
+                            </m:r>
+                          </m:sub>
+                        </m:sSub>
+                      </m:e>
+                    </m:d>
+                  </m:oMath>
+                </a14:m>
+                <a:r>
+                  <a:rPr lang="en-US" b="1" dirty="0"/>
+                  <a:t>:</a:t>
+                </a:r>
+                <a:r>
+                  <a:rPr lang="en-US" dirty="0"/>
+                  <a:t> The data are Missing Completely at Random</a:t>
+                </a:r>
+              </a:p>
+              <a:p>
+                <a:pPr lvl="1"/>
+                <a:r>
+                  <a:rPr lang="en-US" dirty="0"/>
+                  <a:t>The missing values do not depend on the data values)</a:t>
+                </a:r>
+              </a:p>
+              <a:p>
+                <a:pPr lvl="1"/>
+                <a:r>
+                  <a:rPr lang="en-US" b="1" dirty="0"/>
+                  <a:t>Alternative Hypothesis </a:t>
+                </a:r>
+                <a14:m>
+                  <m:oMath xmlns:m="http://schemas.openxmlformats.org/officeDocument/2006/math">
+                    <m:d>
+                      <m:dPr>
+                        <m:ctrlPr>
+                          <a:rPr lang="en-US" b="1" i="1">
+                            <a:latin typeface="Cambria Math" panose="02040503050406030204" pitchFamily="18" charset="0"/>
+                          </a:rPr>
+                        </m:ctrlPr>
+                      </m:dPr>
+                      <m:e>
+                        <m:sSub>
+                          <m:sSubPr>
+                            <m:ctrlPr>
+                              <a:rPr lang="en-US" b="1" i="1">
+                                <a:latin typeface="Cambria Math" panose="02040503050406030204" pitchFamily="18" charset="0"/>
+                              </a:rPr>
+                            </m:ctrlPr>
+                          </m:sSubPr>
+                          <m:e>
+                            <m:r>
+                              <a:rPr lang="en-US" b="1" i="1">
+                                <a:latin typeface="Cambria Math" panose="02040503050406030204" pitchFamily="18" charset="0"/>
+                              </a:rPr>
+                              <m:t>𝑯</m:t>
+                            </m:r>
+                          </m:e>
+                          <m:sub>
+                            <m:r>
+                              <a:rPr lang="en-US" b="1" i="1" smtClean="0">
+                                <a:latin typeface="Cambria Math" panose="02040503050406030204" pitchFamily="18" charset="0"/>
+                              </a:rPr>
+                              <m:t>𝒂</m:t>
+                            </m:r>
+                          </m:sub>
+                        </m:sSub>
+                      </m:e>
+                    </m:d>
+                    <m:r>
+                      <a:rPr lang="en-US" b="1" i="1">
+                        <a:latin typeface="Cambria Math" panose="02040503050406030204" pitchFamily="18" charset="0"/>
+                      </a:rPr>
+                      <m:t> </m:t>
+                    </m:r>
+                  </m:oMath>
+                </a14:m>
+                <a:r>
+                  <a:rPr lang="en-US" b="1" dirty="0"/>
+                  <a:t>:</a:t>
+                </a:r>
+                <a:r>
+                  <a:rPr lang="en-US" dirty="0"/>
+                  <a:t> Data are </a:t>
+                </a:r>
+                <a:r>
+                  <a:rPr lang="en-US" i="1" dirty="0"/>
+                  <a:t>not</a:t>
+                </a:r>
+                <a:r>
+                  <a:rPr lang="en-US" dirty="0"/>
+                  <a:t> Missing Completely at Random</a:t>
+                </a:r>
+              </a:p>
+              <a:p>
+                <a:endParaRPr dirty="0"/>
+              </a:p>
+            </p:txBody>
+          </p:sp>
+        </mc:Choice>
+        <mc:Fallback xmlns="">
+          <p:sp>
+            <p:nvSpPr>
+              <p:cNvPr id="3" name="Content Placeholder 2">
+                <a:extLst>
+                  <a:ext uri="{FF2B5EF4-FFF2-40B4-BE49-F238E27FC236}">
+                    <a16:creationId xmlns:a16="http://schemas.microsoft.com/office/drawing/2014/main" id="{94599B7E-B879-000C-DCA7-404F6FA7D88B}"/>
+                  </a:ext>
+                </a:extLst>
+              </p:cNvPr>
+              <p:cNvSpPr>
+                <a:spLocks noGrp="1" noRot="1" noChangeAspect="1" noMove="1" noResize="1" noEditPoints="1" noAdjustHandles="1" noChangeArrowheads="1" noChangeShapeType="1" noTextEdit="1"/>
+              </p:cNvSpPr>
+              <p:nvPr>
+                <p:ph idx="1"/>
+              </p:nvPr>
+            </p:nvSpPr>
+            <p:spPr>
+              <a:xfrm>
+                <a:off x="457200" y="1200151"/>
+                <a:ext cx="8229600" cy="3737370"/>
+              </a:xfrm>
+              <a:blipFill>
+                <a:blip r:embed="rId2"/>
+                <a:stretch>
+                  <a:fillRect l="-1111" t="-2284"/>
+                </a:stretch>
+              </a:blipFill>
+            </p:spPr>
+            <p:txBody>
+              <a:bodyPr/>
+              <a:lstStyle/>
+              <a:p>
+                <a:r>
+                  <a:rPr lang="en-US">
+                    <a:noFill/>
+                  </a:rPr>
+                  <a:t> </a:t>
+                </a:r>
+              </a:p>
+            </p:txBody>
+          </p:sp>
+        </mc:Fallback>
+      </mc:AlternateContent>
     </p:spTree>
     <p:extLst>
       <p:ext uri="{BB962C8B-B14F-4D97-AF65-F5344CB8AC3E}">
-        <p14:creationId xmlns:p14="http://schemas.microsoft.com/office/powerpoint/2010/main" val="2617327773"/>
-      </p:ext>
-    </p:extLst>
-  </p:cSld>
-  <p:clrMapOvr>
-    <a:masterClrMapping/>
-  </p:clrMapOvr>
-</p:sld>
-</file>
-
-<file path=ppt/slides/slide59.xml><?xml version="1.0" encoding="utf-8"?>
-<p:sld xmlns:a="http://schemas.openxmlformats.org/drawingml/2006/main" xmlns:r="http://schemas.openxmlformats.org/officeDocument/2006/relationships" xmlns:p="http://schemas.openxmlformats.org/presentationml/2006/main">
-  <p:cSld>
-    <p:spTree>
-      <p:nvGrpSpPr>
-        <p:cNvPr id="1" name="">
-          <a:extLst>
-            <a:ext uri="{FF2B5EF4-FFF2-40B4-BE49-F238E27FC236}">
-              <a16:creationId xmlns:a16="http://schemas.microsoft.com/office/drawing/2014/main" id="{9B5AC65C-F5E9-BA93-5380-0CF56CA21585}"/>
-            </a:ext>
-          </a:extLst>
-        </p:cNvPr>
-        <p:cNvGrpSpPr/>
-        <p:nvPr/>
-      </p:nvGrpSpPr>
-      <p:grpSpPr>
-        <a:xfrm>
-          <a:off x="0" y="0"/>
-          <a:ext cx="0" cy="0"/>
-          <a:chOff x="0" y="0"/>
-          <a:chExt cx="0" cy="0"/>
-        </a:xfrm>
-      </p:grpSpPr>
-      <p:sp>
-        <p:nvSpPr>
-          <p:cNvPr id="2" name="Title 1">
-            <a:extLst>
-              <a:ext uri="{FF2B5EF4-FFF2-40B4-BE49-F238E27FC236}">
-                <a16:creationId xmlns:a16="http://schemas.microsoft.com/office/drawing/2014/main" id="{8963E3C6-E47C-71D3-0D0A-C423D4ADBF8A}"/>
-              </a:ext>
-            </a:extLst>
-          </p:cNvPr>
-          <p:cNvSpPr>
-            <a:spLocks noGrp="1"/>
-          </p:cNvSpPr>
-          <p:nvPr>
-            <p:ph type="title"/>
-          </p:nvPr>
-        </p:nvSpPr>
-        <p:spPr/>
-        <p:txBody>
-          <a:bodyPr/>
-          <a:lstStyle/>
-          <a:p>
-            <a:pPr marL="0" lvl="0" indent="0">
-              <a:buNone/>
-            </a:pPr>
-            <a:r>
-              <a:rPr lang="en-US" dirty="0"/>
-              <a:t>Imputation of Missing Values</a:t>
-            </a:r>
-            <a:endParaRPr dirty="0"/>
-          </a:p>
-        </p:txBody>
-      </p:sp>
-      <p:sp>
-        <p:nvSpPr>
-          <p:cNvPr id="3" name="Content Placeholder 2">
-            <a:extLst>
-              <a:ext uri="{FF2B5EF4-FFF2-40B4-BE49-F238E27FC236}">
-                <a16:creationId xmlns:a16="http://schemas.microsoft.com/office/drawing/2014/main" id="{12343A50-E82E-BC72-EB51-078AFD741C31}"/>
-              </a:ext>
-            </a:extLst>
-          </p:cNvPr>
-          <p:cNvSpPr>
-            <a:spLocks noGrp="1"/>
-          </p:cNvSpPr>
-          <p:nvPr>
-            <p:ph idx="1"/>
-          </p:nvPr>
-        </p:nvSpPr>
-        <p:spPr>
-          <a:xfrm>
-            <a:off x="457200" y="1200151"/>
-            <a:ext cx="8229600" cy="3737370"/>
-          </a:xfrm>
-        </p:spPr>
-        <p:txBody>
-          <a:bodyPr>
-            <a:normAutofit/>
-          </a:bodyPr>
-          <a:lstStyle/>
-          <a:p>
-            <a:pPr marL="0" lvl="0" indent="0">
-              <a:buNone/>
-            </a:pPr>
-            <a:r>
-              <a:rPr lang="en-US" dirty="0"/>
-              <a:t>There are several approaches to imputation for MNAR variables </a:t>
-            </a:r>
-          </a:p>
-          <a:p>
-            <a:r>
-              <a:rPr lang="en-US" dirty="0"/>
-              <a:t>Join with another table – don’t overlook the obvious!</a:t>
-            </a:r>
-          </a:p>
-          <a:p>
-            <a:r>
-              <a:rPr lang="en-US" dirty="0"/>
-              <a:t>Systematic filling    </a:t>
-            </a:r>
-          </a:p>
-          <a:p>
-            <a:pPr lvl="1"/>
-            <a:r>
-              <a:rPr lang="en-US" dirty="0"/>
-              <a:t>Example: are all the missing values 0s     </a:t>
-            </a:r>
-          </a:p>
-          <a:p>
-            <a:pPr lvl="1"/>
-            <a:r>
-              <a:rPr lang="en-US" dirty="0"/>
-              <a:t>Example are the missing values dependent on other specific values of another variable(s)</a:t>
-            </a:r>
-          </a:p>
-          <a:p>
-            <a:r>
-              <a:rPr lang="en-US" dirty="0"/>
-              <a:t>Use autoencoder to learn missing value pattern   </a:t>
-            </a:r>
-          </a:p>
-          <a:p>
-            <a:endParaRPr dirty="0"/>
-          </a:p>
-        </p:txBody>
-      </p:sp>
-    </p:spTree>
-    <p:extLst>
-      <p:ext uri="{BB962C8B-B14F-4D97-AF65-F5344CB8AC3E}">
-        <p14:creationId xmlns:p14="http://schemas.microsoft.com/office/powerpoint/2010/main" val="763742610"/>
+        <p14:creationId xmlns:p14="http://schemas.microsoft.com/office/powerpoint/2010/main" val="3368580357"/>
       </p:ext>
     </p:extLst>
   </p:cSld>
@@ -32388,6 +32799,668 @@
         <p:cNvPr id="1" name="">
           <a:extLst>
             <a:ext uri="{FF2B5EF4-FFF2-40B4-BE49-F238E27FC236}">
+              <a16:creationId xmlns:a16="http://schemas.microsoft.com/office/drawing/2014/main" id="{B2E95FDB-1853-8343-20B0-D9B47438654D}"/>
+            </a:ext>
+          </a:extLst>
+        </p:cNvPr>
+        <p:cNvGrpSpPr/>
+        <p:nvPr/>
+      </p:nvGrpSpPr>
+      <p:grpSpPr>
+        <a:xfrm>
+          <a:off x="0" y="0"/>
+          <a:ext cx="0" cy="0"/>
+          <a:chOff x="0" y="0"/>
+          <a:chExt cx="0" cy="0"/>
+        </a:xfrm>
+      </p:grpSpPr>
+      <p:sp>
+        <p:nvSpPr>
+          <p:cNvPr id="2" name="Title 1">
+            <a:extLst>
+              <a:ext uri="{FF2B5EF4-FFF2-40B4-BE49-F238E27FC236}">
+                <a16:creationId xmlns:a16="http://schemas.microsoft.com/office/drawing/2014/main" id="{62AE1C6E-376E-4A89-0385-7A4648742FBD}"/>
+              </a:ext>
+            </a:extLst>
+          </p:cNvPr>
+          <p:cNvSpPr>
+            <a:spLocks noGrp="1"/>
+          </p:cNvSpPr>
+          <p:nvPr>
+            <p:ph type="title"/>
+          </p:nvPr>
+        </p:nvSpPr>
+        <p:spPr/>
+        <p:txBody>
+          <a:bodyPr/>
+          <a:lstStyle/>
+          <a:p>
+            <a:pPr marL="0" lvl="0" indent="0">
+              <a:buNone/>
+            </a:pPr>
+            <a:r>
+              <a:rPr lang="en-US" dirty="0"/>
+              <a:t>Understanding Missing Values</a:t>
+            </a:r>
+            <a:endParaRPr dirty="0"/>
+          </a:p>
+        </p:txBody>
+      </p:sp>
+      <mc:AlternateContent xmlns:mc="http://schemas.openxmlformats.org/markup-compatibility/2006" xmlns:a14="http://schemas.microsoft.com/office/drawing/2010/main">
+        <mc:Choice Requires="a14">
+          <p:sp>
+            <p:nvSpPr>
+              <p:cNvPr id="3" name="Content Placeholder 2">
+                <a:extLst>
+                  <a:ext uri="{FF2B5EF4-FFF2-40B4-BE49-F238E27FC236}">
+                    <a16:creationId xmlns:a16="http://schemas.microsoft.com/office/drawing/2014/main" id="{CBDBA2D1-06AA-8062-6F0F-7C1864344E52}"/>
+                  </a:ext>
+                </a:extLst>
+              </p:cNvPr>
+              <p:cNvSpPr>
+                <a:spLocks noGrp="1"/>
+              </p:cNvSpPr>
+              <p:nvPr>
+                <p:ph idx="1"/>
+              </p:nvPr>
+            </p:nvSpPr>
+            <p:spPr>
+              <a:xfrm>
+                <a:off x="457200" y="1200151"/>
+                <a:ext cx="8229600" cy="3737370"/>
+              </a:xfrm>
+            </p:spPr>
+            <p:txBody>
+              <a:bodyPr>
+                <a:normAutofit fontScale="92500"/>
+              </a:bodyPr>
+              <a:lstStyle/>
+              <a:p>
+                <a:pPr marL="0" lvl="0" indent="0">
+                  <a:buNone/>
+                </a:pPr>
+                <a:r>
+                  <a:rPr lang="en-US" b="1" dirty="0"/>
+                  <a:t>Little’s MCAR test </a:t>
+                </a:r>
+                <a:r>
+                  <a:rPr lang="en-US" dirty="0"/>
+                  <a:t>has some restrictive assumptions limiting its applicability</a:t>
+                </a:r>
+              </a:p>
+              <a:p>
+                <a:pPr lvl="0"/>
+                <a:r>
+                  <a:rPr lang="en-US" b="1" dirty="0"/>
+                  <a:t>Normality Assumption:</a:t>
+                </a:r>
+                <a:r>
+                  <a:rPr lang="en-US" dirty="0"/>
+                  <a:t> Little’s MCAR test assumes data follow a multivariate normal distribution and works poorly with categorical variables or severe non-normality</a:t>
+                </a:r>
+              </a:p>
+              <a:p>
+                <a:pPr lvl="0"/>
+                <a:r>
+                  <a:rPr lang="en-US" b="1"/>
+                  <a:t>No Specific Variable </a:t>
+                </a:r>
+                <a:r>
+                  <a:rPr lang="en-US" b="1" dirty="0"/>
+                  <a:t>Identification:</a:t>
+                </a:r>
+                <a:r>
+                  <a:rPr lang="en-US" dirty="0"/>
+                  <a:t> Like all such tests you cannot tell which variables result in low p-value </a:t>
+                </a:r>
+              </a:p>
+              <a:p>
+                <a:pPr lvl="1"/>
+                <a:r>
+                  <a:rPr lang="en-US" dirty="0"/>
+                  <a:t>Can apply pairwise</a:t>
+                </a:r>
+              </a:p>
+              <a:p>
+                <a:pPr lvl="0"/>
+                <a:r>
+                  <a:rPr lang="en-US" b="1" dirty="0"/>
+                  <a:t>Failure at High Missing Rates:</a:t>
+                </a:r>
+                <a:r>
+                  <a:rPr lang="en-US" dirty="0"/>
+                  <a:t> Generally, the test is thought to be unreliable (low power) with high rates of missing data, </a:t>
+                </a:r>
+                <a14:m>
+                  <m:oMath xmlns:m="http://schemas.openxmlformats.org/officeDocument/2006/math">
+                    <m:r>
+                      <a:rPr lang="en-US" b="0" i="1" smtClean="0">
+                        <a:latin typeface="Cambria Math" panose="02040503050406030204" pitchFamily="18" charset="0"/>
+                      </a:rPr>
+                      <m:t>&gt;30% </m:t>
+                    </m:r>
+                  </m:oMath>
+                </a14:m>
+                <a:r>
+                  <a:rPr lang="en-US" dirty="0"/>
+                  <a:t> </a:t>
+                </a:r>
+              </a:p>
+              <a:p>
+                <a:endParaRPr dirty="0"/>
+              </a:p>
+            </p:txBody>
+          </p:sp>
+        </mc:Choice>
+        <mc:Fallback xmlns="">
+          <p:sp>
+            <p:nvSpPr>
+              <p:cNvPr id="3" name="Content Placeholder 2">
+                <a:extLst>
+                  <a:ext uri="{FF2B5EF4-FFF2-40B4-BE49-F238E27FC236}">
+                    <a16:creationId xmlns:a16="http://schemas.microsoft.com/office/drawing/2014/main" id="{CBDBA2D1-06AA-8062-6F0F-7C1864344E52}"/>
+                  </a:ext>
+                </a:extLst>
+              </p:cNvPr>
+              <p:cNvSpPr>
+                <a:spLocks noGrp="1" noRot="1" noChangeAspect="1" noMove="1" noResize="1" noEditPoints="1" noAdjustHandles="1" noChangeArrowheads="1" noChangeShapeType="1" noTextEdit="1"/>
+              </p:cNvSpPr>
+              <p:nvPr>
+                <p:ph idx="1"/>
+              </p:nvPr>
+            </p:nvSpPr>
+            <p:spPr>
+              <a:xfrm>
+                <a:off x="457200" y="1200151"/>
+                <a:ext cx="8229600" cy="3737370"/>
+              </a:xfrm>
+              <a:blipFill>
+                <a:blip r:embed="rId2"/>
+                <a:stretch>
+                  <a:fillRect l="-963" t="-1142" b="-1142"/>
+                </a:stretch>
+              </a:blipFill>
+            </p:spPr>
+            <p:txBody>
+              <a:bodyPr/>
+              <a:lstStyle/>
+              <a:p>
+                <a:r>
+                  <a:rPr lang="en-US">
+                    <a:noFill/>
+                  </a:rPr>
+                  <a:t> </a:t>
+                </a:r>
+              </a:p>
+            </p:txBody>
+          </p:sp>
+        </mc:Fallback>
+      </mc:AlternateContent>
+    </p:spTree>
+    <p:extLst>
+      <p:ext uri="{BB962C8B-B14F-4D97-AF65-F5344CB8AC3E}">
+        <p14:creationId xmlns:p14="http://schemas.microsoft.com/office/powerpoint/2010/main" val="2695271168"/>
+      </p:ext>
+    </p:extLst>
+  </p:cSld>
+  <p:clrMapOvr>
+    <a:masterClrMapping/>
+  </p:clrMapOvr>
+</p:sld>
+</file>
+
+<file path=ppt/slides/slide61.xml><?xml version="1.0" encoding="utf-8"?>
+<p:sld xmlns:a="http://schemas.openxmlformats.org/drawingml/2006/main" xmlns:r="http://schemas.openxmlformats.org/officeDocument/2006/relationships" xmlns:p="http://schemas.openxmlformats.org/presentationml/2006/main">
+  <p:cSld>
+    <p:spTree>
+      <p:nvGrpSpPr>
+        <p:cNvPr id="1" name="">
+          <a:extLst>
+            <a:ext uri="{FF2B5EF4-FFF2-40B4-BE49-F238E27FC236}">
+              <a16:creationId xmlns:a16="http://schemas.microsoft.com/office/drawing/2014/main" id="{7169A6A7-2558-E14C-937F-76133ACABB72}"/>
+            </a:ext>
+          </a:extLst>
+        </p:cNvPr>
+        <p:cNvGrpSpPr/>
+        <p:nvPr/>
+      </p:nvGrpSpPr>
+      <p:grpSpPr>
+        <a:xfrm>
+          <a:off x="0" y="0"/>
+          <a:ext cx="0" cy="0"/>
+          <a:chOff x="0" y="0"/>
+          <a:chExt cx="0" cy="0"/>
+        </a:xfrm>
+      </p:grpSpPr>
+      <p:sp>
+        <p:nvSpPr>
+          <p:cNvPr id="2" name="Title 1">
+            <a:extLst>
+              <a:ext uri="{FF2B5EF4-FFF2-40B4-BE49-F238E27FC236}">
+                <a16:creationId xmlns:a16="http://schemas.microsoft.com/office/drawing/2014/main" id="{A919FC23-6B25-1B58-E331-78BC2B52991B}"/>
+              </a:ext>
+            </a:extLst>
+          </p:cNvPr>
+          <p:cNvSpPr>
+            <a:spLocks noGrp="1"/>
+          </p:cNvSpPr>
+          <p:nvPr>
+            <p:ph type="title"/>
+          </p:nvPr>
+        </p:nvSpPr>
+        <p:spPr/>
+        <p:txBody>
+          <a:bodyPr/>
+          <a:lstStyle/>
+          <a:p>
+            <a:pPr marL="0" lvl="0" indent="0">
+              <a:buNone/>
+            </a:pPr>
+            <a:r>
+              <a:rPr lang="en-US" dirty="0"/>
+              <a:t>Imputation of Missing Values</a:t>
+            </a:r>
+            <a:endParaRPr dirty="0"/>
+          </a:p>
+        </p:txBody>
+      </p:sp>
+      <p:sp>
+        <p:nvSpPr>
+          <p:cNvPr id="3" name="Content Placeholder 2">
+            <a:extLst>
+              <a:ext uri="{FF2B5EF4-FFF2-40B4-BE49-F238E27FC236}">
+                <a16:creationId xmlns:a16="http://schemas.microsoft.com/office/drawing/2014/main" id="{C310ECD3-6581-1420-5CE3-136248DB3BEE}"/>
+              </a:ext>
+            </a:extLst>
+          </p:cNvPr>
+          <p:cNvSpPr>
+            <a:spLocks noGrp="1"/>
+          </p:cNvSpPr>
+          <p:nvPr>
+            <p:ph idx="1"/>
+          </p:nvPr>
+        </p:nvSpPr>
+        <p:spPr>
+          <a:xfrm>
+            <a:off x="457200" y="1200151"/>
+            <a:ext cx="8229600" cy="3737370"/>
+          </a:xfrm>
+        </p:spPr>
+        <p:txBody>
+          <a:bodyPr>
+            <a:normAutofit/>
+          </a:bodyPr>
+          <a:lstStyle/>
+          <a:p>
+            <a:pPr marL="0" lvl="0" indent="0">
+              <a:buNone/>
+            </a:pPr>
+            <a:r>
+              <a:rPr lang="en-US" dirty="0"/>
+              <a:t>Imputation methods must match the missing data pattern and intended use</a:t>
+            </a:r>
+          </a:p>
+          <a:p>
+            <a:r>
+              <a:rPr lang="en-US" dirty="0"/>
+              <a:t>Machine learning algorithms only need a good point estimate for the imputed value</a:t>
+            </a:r>
+          </a:p>
+          <a:p>
+            <a:pPr lvl="1"/>
+            <a:r>
+              <a:rPr lang="en-US" dirty="0"/>
+              <a:t>For ML, we do not much care what the confidence intervals are</a:t>
+            </a:r>
+          </a:p>
+          <a:p>
+            <a:r>
+              <a:rPr lang="en-US" dirty="0"/>
+              <a:t>Inference requires drawing imputed values from the distribution of the variable  </a:t>
+            </a:r>
+          </a:p>
+          <a:p>
+            <a:pPr lvl="1"/>
+            <a:r>
+              <a:rPr lang="en-US" dirty="0"/>
+              <a:t>We want unbiased estimates of the confidence intervals  </a:t>
+            </a:r>
+          </a:p>
+          <a:p>
+            <a:endParaRPr dirty="0"/>
+          </a:p>
+        </p:txBody>
+      </p:sp>
+    </p:spTree>
+    <p:extLst>
+      <p:ext uri="{BB962C8B-B14F-4D97-AF65-F5344CB8AC3E}">
+        <p14:creationId xmlns:p14="http://schemas.microsoft.com/office/powerpoint/2010/main" val="1833434833"/>
+      </p:ext>
+    </p:extLst>
+  </p:cSld>
+  <p:clrMapOvr>
+    <a:masterClrMapping/>
+  </p:clrMapOvr>
+</p:sld>
+</file>
+
+<file path=ppt/slides/slide62.xml><?xml version="1.0" encoding="utf-8"?>
+<p:sld xmlns:a="http://schemas.openxmlformats.org/drawingml/2006/main" xmlns:r="http://schemas.openxmlformats.org/officeDocument/2006/relationships" xmlns:p="http://schemas.openxmlformats.org/presentationml/2006/main">
+  <p:cSld>
+    <p:spTree>
+      <p:nvGrpSpPr>
+        <p:cNvPr id="1" name="">
+          <a:extLst>
+            <a:ext uri="{FF2B5EF4-FFF2-40B4-BE49-F238E27FC236}">
+              <a16:creationId xmlns:a16="http://schemas.microsoft.com/office/drawing/2014/main" id="{CE1DAB7D-6678-A6DC-17E0-2F2C67358EC1}"/>
+            </a:ext>
+          </a:extLst>
+        </p:cNvPr>
+        <p:cNvGrpSpPr/>
+        <p:nvPr/>
+      </p:nvGrpSpPr>
+      <p:grpSpPr>
+        <a:xfrm>
+          <a:off x="0" y="0"/>
+          <a:ext cx="0" cy="0"/>
+          <a:chOff x="0" y="0"/>
+          <a:chExt cx="0" cy="0"/>
+        </a:xfrm>
+      </p:grpSpPr>
+      <p:sp>
+        <p:nvSpPr>
+          <p:cNvPr id="2" name="Title 1">
+            <a:extLst>
+              <a:ext uri="{FF2B5EF4-FFF2-40B4-BE49-F238E27FC236}">
+                <a16:creationId xmlns:a16="http://schemas.microsoft.com/office/drawing/2014/main" id="{52A1E7A9-8462-AFB6-69E8-D29C815D4DD0}"/>
+              </a:ext>
+            </a:extLst>
+          </p:cNvPr>
+          <p:cNvSpPr>
+            <a:spLocks noGrp="1"/>
+          </p:cNvSpPr>
+          <p:nvPr>
+            <p:ph type="title"/>
+          </p:nvPr>
+        </p:nvSpPr>
+        <p:spPr/>
+        <p:txBody>
+          <a:bodyPr/>
+          <a:lstStyle/>
+          <a:p>
+            <a:pPr marL="0" lvl="0" indent="0">
+              <a:buNone/>
+            </a:pPr>
+            <a:r>
+              <a:rPr lang="en-US" dirty="0"/>
+              <a:t>Imputation of Missing Values</a:t>
+            </a:r>
+            <a:endParaRPr dirty="0"/>
+          </a:p>
+        </p:txBody>
+      </p:sp>
+      <p:sp>
+        <p:nvSpPr>
+          <p:cNvPr id="3" name="Content Placeholder 2">
+            <a:extLst>
+              <a:ext uri="{FF2B5EF4-FFF2-40B4-BE49-F238E27FC236}">
+                <a16:creationId xmlns:a16="http://schemas.microsoft.com/office/drawing/2014/main" id="{EE8C0F07-8E21-F467-CD9D-1ED0C942B535}"/>
+              </a:ext>
+            </a:extLst>
+          </p:cNvPr>
+          <p:cNvSpPr>
+            <a:spLocks noGrp="1"/>
+          </p:cNvSpPr>
+          <p:nvPr>
+            <p:ph idx="1"/>
+          </p:nvPr>
+        </p:nvSpPr>
+        <p:spPr>
+          <a:xfrm>
+            <a:off x="457200" y="1200151"/>
+            <a:ext cx="8229600" cy="3737370"/>
+          </a:xfrm>
+        </p:spPr>
+        <p:txBody>
+          <a:bodyPr>
+            <a:normAutofit lnSpcReduction="10000"/>
+          </a:bodyPr>
+          <a:lstStyle/>
+          <a:p>
+            <a:pPr marL="0" lvl="0" indent="0">
+              <a:buNone/>
+            </a:pPr>
+            <a:r>
+              <a:rPr lang="en-US" dirty="0"/>
+              <a:t>Algorithms used for MCAR and MAR data for machine learning do not need to preserve distributions</a:t>
+            </a:r>
+          </a:p>
+          <a:p>
+            <a:r>
+              <a:rPr lang="en-US" dirty="0"/>
+              <a:t>Commonly used algorithms for machine </a:t>
+            </a:r>
+            <a:r>
+              <a:rPr lang="en-US" dirty="0" err="1"/>
+              <a:t>learling</a:t>
+            </a:r>
+            <a:r>
+              <a:rPr lang="en-US" dirty="0"/>
+              <a:t> include</a:t>
+            </a:r>
+          </a:p>
+          <a:p>
+            <a:pPr lvl="1"/>
+            <a:r>
+              <a:rPr lang="en-US" dirty="0"/>
+              <a:t>Filling, mean, median, …</a:t>
+            </a:r>
+          </a:p>
+          <a:p>
+            <a:pPr lvl="1"/>
+            <a:r>
+              <a:rPr lang="en-US" dirty="0"/>
+              <a:t>Interpolation, linear, spline, etc.     </a:t>
+            </a:r>
+          </a:p>
+          <a:p>
+            <a:pPr lvl="1"/>
+            <a:r>
+              <a:rPr lang="en-US" dirty="0"/>
+              <a:t>Forward and back filling</a:t>
+            </a:r>
+          </a:p>
+          <a:p>
+            <a:pPr lvl="1"/>
+            <a:r>
+              <a:rPr lang="en-US" dirty="0"/>
+              <a:t>K-nearest neighbors </a:t>
+            </a:r>
+          </a:p>
+          <a:p>
+            <a:pPr lvl="1"/>
+            <a:r>
+              <a:rPr lang="en-US" dirty="0" err="1"/>
+              <a:t>etc</a:t>
+            </a:r>
+            <a:r>
+              <a:rPr lang="en-US" dirty="0"/>
+              <a:t>… </a:t>
+            </a:r>
+          </a:p>
+          <a:p>
+            <a:r>
+              <a:rPr lang="en-US" dirty="0"/>
+              <a:t>These algorithms only provide point estimates and are not useful for inference   </a:t>
+            </a:r>
+          </a:p>
+          <a:p>
+            <a:endParaRPr dirty="0"/>
+          </a:p>
+        </p:txBody>
+      </p:sp>
+    </p:spTree>
+    <p:extLst>
+      <p:ext uri="{BB962C8B-B14F-4D97-AF65-F5344CB8AC3E}">
+        <p14:creationId xmlns:p14="http://schemas.microsoft.com/office/powerpoint/2010/main" val="2617327773"/>
+      </p:ext>
+    </p:extLst>
+  </p:cSld>
+  <p:clrMapOvr>
+    <a:masterClrMapping/>
+  </p:clrMapOvr>
+</p:sld>
+</file>
+
+<file path=ppt/slides/slide63.xml><?xml version="1.0" encoding="utf-8"?>
+<p:sld xmlns:a="http://schemas.openxmlformats.org/drawingml/2006/main" xmlns:r="http://schemas.openxmlformats.org/officeDocument/2006/relationships" xmlns:p="http://schemas.openxmlformats.org/presentationml/2006/main">
+  <p:cSld>
+    <p:spTree>
+      <p:nvGrpSpPr>
+        <p:cNvPr id="1" name="">
+          <a:extLst>
+            <a:ext uri="{FF2B5EF4-FFF2-40B4-BE49-F238E27FC236}">
+              <a16:creationId xmlns:a16="http://schemas.microsoft.com/office/drawing/2014/main" id="{9B5AC65C-F5E9-BA93-5380-0CF56CA21585}"/>
+            </a:ext>
+          </a:extLst>
+        </p:cNvPr>
+        <p:cNvGrpSpPr/>
+        <p:nvPr/>
+      </p:nvGrpSpPr>
+      <p:grpSpPr>
+        <a:xfrm>
+          <a:off x="0" y="0"/>
+          <a:ext cx="0" cy="0"/>
+          <a:chOff x="0" y="0"/>
+          <a:chExt cx="0" cy="0"/>
+        </a:xfrm>
+      </p:grpSpPr>
+      <p:sp>
+        <p:nvSpPr>
+          <p:cNvPr id="2" name="Title 1">
+            <a:extLst>
+              <a:ext uri="{FF2B5EF4-FFF2-40B4-BE49-F238E27FC236}">
+                <a16:creationId xmlns:a16="http://schemas.microsoft.com/office/drawing/2014/main" id="{8963E3C6-E47C-71D3-0D0A-C423D4ADBF8A}"/>
+              </a:ext>
+            </a:extLst>
+          </p:cNvPr>
+          <p:cNvSpPr>
+            <a:spLocks noGrp="1"/>
+          </p:cNvSpPr>
+          <p:nvPr>
+            <p:ph type="title"/>
+          </p:nvPr>
+        </p:nvSpPr>
+        <p:spPr/>
+        <p:txBody>
+          <a:bodyPr/>
+          <a:lstStyle/>
+          <a:p>
+            <a:pPr marL="0" lvl="0" indent="0">
+              <a:buNone/>
+            </a:pPr>
+            <a:r>
+              <a:rPr lang="en-US" dirty="0"/>
+              <a:t>Imputation of Missing Values</a:t>
+            </a:r>
+            <a:endParaRPr dirty="0"/>
+          </a:p>
+        </p:txBody>
+      </p:sp>
+      <p:sp>
+        <p:nvSpPr>
+          <p:cNvPr id="3" name="Content Placeholder 2">
+            <a:extLst>
+              <a:ext uri="{FF2B5EF4-FFF2-40B4-BE49-F238E27FC236}">
+                <a16:creationId xmlns:a16="http://schemas.microsoft.com/office/drawing/2014/main" id="{12343A50-E82E-BC72-EB51-078AFD741C31}"/>
+              </a:ext>
+            </a:extLst>
+          </p:cNvPr>
+          <p:cNvSpPr>
+            <a:spLocks noGrp="1"/>
+          </p:cNvSpPr>
+          <p:nvPr>
+            <p:ph idx="1"/>
+          </p:nvPr>
+        </p:nvSpPr>
+        <p:spPr>
+          <a:xfrm>
+            <a:off x="457200" y="1200151"/>
+            <a:ext cx="8229600" cy="3737370"/>
+          </a:xfrm>
+        </p:spPr>
+        <p:txBody>
+          <a:bodyPr>
+            <a:normAutofit/>
+          </a:bodyPr>
+          <a:lstStyle/>
+          <a:p>
+            <a:pPr marL="0" lvl="0" indent="0">
+              <a:buNone/>
+            </a:pPr>
+            <a:r>
+              <a:rPr lang="en-US" dirty="0"/>
+              <a:t>There are several approaches to imputation for MNAR variables </a:t>
+            </a:r>
+          </a:p>
+          <a:p>
+            <a:r>
+              <a:rPr lang="en-US" dirty="0"/>
+              <a:t>Join with another table – don’t overlook the obvious!</a:t>
+            </a:r>
+          </a:p>
+          <a:p>
+            <a:r>
+              <a:rPr lang="en-US" dirty="0"/>
+              <a:t>Systematic filling    </a:t>
+            </a:r>
+          </a:p>
+          <a:p>
+            <a:pPr lvl="1"/>
+            <a:r>
+              <a:rPr lang="en-US" dirty="0"/>
+              <a:t>Example: are all the missing values 0s     </a:t>
+            </a:r>
+          </a:p>
+          <a:p>
+            <a:pPr lvl="1"/>
+            <a:r>
+              <a:rPr lang="en-US" dirty="0"/>
+              <a:t>Example are the missing values dependent on other specific values of another variable(s)</a:t>
+            </a:r>
+          </a:p>
+          <a:p>
+            <a:r>
+              <a:rPr lang="en-US" dirty="0"/>
+              <a:t>Use autoencoder to learn missing value pattern   </a:t>
+            </a:r>
+          </a:p>
+          <a:p>
+            <a:endParaRPr dirty="0"/>
+          </a:p>
+        </p:txBody>
+      </p:sp>
+    </p:spTree>
+    <p:extLst>
+      <p:ext uri="{BB962C8B-B14F-4D97-AF65-F5344CB8AC3E}">
+        <p14:creationId xmlns:p14="http://schemas.microsoft.com/office/powerpoint/2010/main" val="763742610"/>
+      </p:ext>
+    </p:extLst>
+  </p:cSld>
+  <p:clrMapOvr>
+    <a:masterClrMapping/>
+  </p:clrMapOvr>
+</p:sld>
+</file>
+
+<file path=ppt/slides/slide64.xml><?xml version="1.0" encoding="utf-8"?>
+<p:sld xmlns:a="http://schemas.openxmlformats.org/drawingml/2006/main" xmlns:r="http://schemas.openxmlformats.org/officeDocument/2006/relationships" xmlns:p="http://schemas.openxmlformats.org/presentationml/2006/main">
+  <p:cSld>
+    <p:spTree>
+      <p:nvGrpSpPr>
+        <p:cNvPr id="1" name="">
+          <a:extLst>
+            <a:ext uri="{FF2B5EF4-FFF2-40B4-BE49-F238E27FC236}">
               <a16:creationId xmlns:a16="http://schemas.microsoft.com/office/drawing/2014/main" id="{4ABC3421-F68D-9E08-4B79-AF9B86A06B44}"/>
             </a:ext>
           </a:extLst>
@@ -32647,7 +33720,7 @@
 </p:sld>
 </file>
 
-<file path=ppt/slides/slide61.xml><?xml version="1.0" encoding="utf-8"?>
+<file path=ppt/slides/slide65.xml><?xml version="1.0" encoding="utf-8"?>
 <p:sld xmlns:a="http://schemas.openxmlformats.org/drawingml/2006/main" xmlns:r="http://schemas.openxmlformats.org/officeDocument/2006/relationships" xmlns:p="http://schemas.openxmlformats.org/presentationml/2006/main">
   <p:cSld>
     <p:spTree>
@@ -32797,7 +33870,7 @@
 </p:sld>
 </file>
 
-<file path=ppt/slides/slide62.xml><?xml version="1.0" encoding="utf-8"?>
+<file path=ppt/slides/slide66.xml><?xml version="1.0" encoding="utf-8"?>
 <p:sld xmlns:a="http://schemas.openxmlformats.org/drawingml/2006/main" xmlns:r="http://schemas.openxmlformats.org/officeDocument/2006/relationships" xmlns:p="http://schemas.openxmlformats.org/presentationml/2006/main">
   <p:cSld>
     <p:spTree>
@@ -32926,7 +33999,7 @@
 </p:sld>
 </file>
 
-<file path=ppt/slides/slide63.xml><?xml version="1.0" encoding="utf-8"?>
+<file path=ppt/slides/slide67.xml><?xml version="1.0" encoding="utf-8"?>
 <p:sld xmlns:a="http://schemas.openxmlformats.org/drawingml/2006/main" xmlns:r="http://schemas.openxmlformats.org/officeDocument/2006/relationships" xmlns:p="http://schemas.openxmlformats.org/presentationml/2006/main">
   <p:cSld>
     <p:spTree>
@@ -33074,7 +34147,7 @@
 </p:sld>
 </file>
 
-<file path=ppt/slides/slide64.xml><?xml version="1.0" encoding="utf-8"?>
+<file path=ppt/slides/slide68.xml><?xml version="1.0" encoding="utf-8"?>
 <p:sld xmlns:a="http://schemas.openxmlformats.org/drawingml/2006/main" xmlns:r="http://schemas.openxmlformats.org/officeDocument/2006/relationships" xmlns:p="http://schemas.openxmlformats.org/presentationml/2006/main">
   <p:cSld>
     <p:spTree>
@@ -33217,7 +34290,7 @@
 </p:sld>
 </file>
 
-<file path=ppt/slides/slide65.xml><?xml version="1.0" encoding="utf-8"?>
+<file path=ppt/slides/slide69.xml><?xml version="1.0" encoding="utf-8"?>
 <p:sld xmlns:a="http://schemas.openxmlformats.org/drawingml/2006/main" xmlns:r="http://schemas.openxmlformats.org/officeDocument/2006/relationships" xmlns:p="http://schemas.openxmlformats.org/presentationml/2006/main">
   <p:cSld>
     <p:spTree>
@@ -33272,8 +34345,8 @@
           </a:p>
         </p:txBody>
       </p:sp>
-      <mc:AlternateContent xmlns:mc="http://schemas.openxmlformats.org/markup-compatibility/2006">
-        <mc:Choice xmlns:a14="http://schemas.microsoft.com/office/drawing/2010/main" Requires="a14">
+      <mc:AlternateContent xmlns:mc="http://schemas.openxmlformats.org/markup-compatibility/2006" xmlns:a14="http://schemas.microsoft.com/office/drawing/2010/main">
+        <mc:Choice Requires="a14">
           <p:sp>
             <p:nvSpPr>
               <p:cNvPr id="3" name="Content Placeholder 2">
@@ -33503,7 +34576,7 @@
             </p:txBody>
           </p:sp>
         </mc:Choice>
-        <mc:Fallback>
+        <mc:Fallback xmlns="">
           <p:sp>
             <p:nvSpPr>
               <p:cNvPr id="3" name="Content Placeholder 2">
@@ -33560,7 +34633,386 @@
 </p:sld>
 </file>
 
-<file path=ppt/slides/slide66.xml><?xml version="1.0" encoding="utf-8"?>
+<file path=ppt/slides/slide7.xml><?xml version="1.0" encoding="utf-8"?>
+<p:sld xmlns:a="http://schemas.openxmlformats.org/drawingml/2006/main" xmlns:r="http://schemas.openxmlformats.org/officeDocument/2006/relationships" xmlns:p="http://schemas.openxmlformats.org/presentationml/2006/main">
+  <p:cSld>
+    <p:spTree>
+      <p:nvGrpSpPr>
+        <p:cNvPr id="1" name="">
+          <a:extLst>
+            <a:ext uri="{FF2B5EF4-FFF2-40B4-BE49-F238E27FC236}">
+              <a16:creationId xmlns:a16="http://schemas.microsoft.com/office/drawing/2014/main" id="{B3993F59-9009-4191-4BD0-62EAFBE3087E}"/>
+            </a:ext>
+          </a:extLst>
+        </p:cNvPr>
+        <p:cNvGrpSpPr/>
+        <p:nvPr/>
+      </p:nvGrpSpPr>
+      <p:grpSpPr>
+        <a:xfrm>
+          <a:off x="0" y="0"/>
+          <a:ext cx="0" cy="0"/>
+          <a:chOff x="0" y="0"/>
+          <a:chExt cx="0" cy="0"/>
+        </a:xfrm>
+      </p:grpSpPr>
+      <p:sp>
+        <p:nvSpPr>
+          <p:cNvPr id="2" name="Title 1">
+            <a:extLst>
+              <a:ext uri="{FF2B5EF4-FFF2-40B4-BE49-F238E27FC236}">
+                <a16:creationId xmlns:a16="http://schemas.microsoft.com/office/drawing/2014/main" id="{5A5D5B7B-EC31-F645-671E-3F2116407953}"/>
+              </a:ext>
+            </a:extLst>
+          </p:cNvPr>
+          <p:cNvSpPr>
+            <a:spLocks noGrp="1"/>
+          </p:cNvSpPr>
+          <p:nvPr>
+            <p:ph type="title"/>
+          </p:nvPr>
+        </p:nvSpPr>
+        <p:spPr/>
+        <p:txBody>
+          <a:bodyPr/>
+          <a:lstStyle/>
+          <a:p>
+            <a:pPr marL="0" lvl="0" indent="0">
+              <a:buNone/>
+            </a:pPr>
+            <a:r>
+              <a:rPr lang="en-US" dirty="0"/>
+              <a:t>Modeling Zero-Inflated Distributions</a:t>
+            </a:r>
+            <a:endParaRPr dirty="0"/>
+          </a:p>
+        </p:txBody>
+      </p:sp>
+      <p:sp>
+        <p:nvSpPr>
+          <p:cNvPr id="3" name="Content Placeholder 2">
+            <a:extLst>
+              <a:ext uri="{FF2B5EF4-FFF2-40B4-BE49-F238E27FC236}">
+                <a16:creationId xmlns:a16="http://schemas.microsoft.com/office/drawing/2014/main" id="{4C4AB32E-A8D9-3191-4BF8-4C76B8CCB7FC}"/>
+              </a:ext>
+            </a:extLst>
+          </p:cNvPr>
+          <p:cNvSpPr>
+            <a:spLocks noGrp="1"/>
+          </p:cNvSpPr>
+          <p:nvPr>
+            <p:ph idx="1"/>
+          </p:nvPr>
+        </p:nvSpPr>
+        <p:spPr/>
+        <p:txBody>
+          <a:bodyPr>
+            <a:normAutofit/>
+          </a:bodyPr>
+          <a:lstStyle/>
+          <a:p>
+            <a:pPr marL="0" lvl="0" indent="0">
+              <a:buNone/>
+            </a:pPr>
+            <a:r>
+              <a:rPr lang="en-US" dirty="0"/>
+              <a:t>How can we model zero inflated distributions?  </a:t>
+            </a:r>
+            <a:endParaRPr dirty="0"/>
+          </a:p>
+          <a:p>
+            <a:pPr lvl="0"/>
+            <a:r>
+              <a:rPr lang="en-US" dirty="0"/>
+              <a:t>Standard ‘named’ distributions do not account for zero-inflation  </a:t>
+            </a:r>
+          </a:p>
+          <a:p>
+            <a:pPr lvl="0"/>
+            <a:r>
+              <a:rPr lang="en-US" dirty="0"/>
+              <a:t>Can use a mixture of two distributions  </a:t>
+            </a:r>
+          </a:p>
+          <a:p>
+            <a:pPr lvl="1"/>
+            <a:r>
+              <a:rPr lang="en-US" dirty="0"/>
+              <a:t>A binomial distribution, or switching distribution  </a:t>
+            </a:r>
+          </a:p>
+          <a:p>
+            <a:pPr lvl="1"/>
+            <a:r>
+              <a:rPr lang="en-US" dirty="0"/>
+              <a:t>A standard distribution </a:t>
+            </a:r>
+          </a:p>
+          <a:p>
+            <a:r>
+              <a:rPr lang="en-US" dirty="0"/>
+              <a:t>The binomial distribution serves as a ‘switch’ between 0 response and the other distribution   </a:t>
+            </a:r>
+          </a:p>
+          <a:p>
+            <a:pPr lvl="0"/>
+            <a:endParaRPr dirty="0"/>
+          </a:p>
+        </p:txBody>
+      </p:sp>
+    </p:spTree>
+    <p:extLst>
+      <p:ext uri="{BB962C8B-B14F-4D97-AF65-F5344CB8AC3E}">
+        <p14:creationId xmlns:p14="http://schemas.microsoft.com/office/powerpoint/2010/main" val="4064511800"/>
+      </p:ext>
+    </p:extLst>
+  </p:cSld>
+  <p:clrMapOvr>
+    <a:masterClrMapping/>
+  </p:clrMapOvr>
+  <p:timing>
+    <p:tnLst>
+      <p:par>
+        <p:cTn id="1" dur="indefinite" restart="never" nodeType="tmRoot">
+          <p:childTnLst>
+            <p:seq concurrent="1" nextAc="seek">
+              <p:cTn id="2" dur="indefinite" nodeType="mainSeq">
+                <p:childTnLst>
+                  <p:par>
+                    <p:cTn id="3" fill="hold">
+                      <p:stCondLst>
+                        <p:cond delay="indefinite"/>
+                      </p:stCondLst>
+                      <p:childTnLst>
+                        <p:par>
+                          <p:cTn id="4" fill="hold">
+                            <p:stCondLst>
+                              <p:cond delay="0"/>
+                            </p:stCondLst>
+                            <p:childTnLst>
+                              <p:par>
+                                <p:cTn id="5" presetID="1" presetClass="entr" presetSubtype="0" fill="hold" nodeType="clickEffect">
+                                  <p:stCondLst>
+                                    <p:cond delay="0"/>
+                                  </p:stCondLst>
+                                  <p:childTnLst>
+                                    <p:set>
+                                      <p:cBhvr>
+                                        <p:cTn id="6" dur="1" fill="hold">
+                                          <p:stCondLst>
+                                            <p:cond delay="0"/>
+                                          </p:stCondLst>
+                                        </p:cTn>
+                                        <p:tgtEl>
+                                          <p:spTgt spid="3">
+                                            <p:txEl>
+                                              <p:pRg st="1" end="1"/>
+                                            </p:txEl>
+                                          </p:spTgt>
+                                        </p:tgtEl>
+                                        <p:attrNameLst>
+                                          <p:attrName>style.visibility</p:attrName>
+                                        </p:attrNameLst>
+                                      </p:cBhvr>
+                                      <p:to>
+                                        <p:strVal val="visible"/>
+                                      </p:to>
+                                    </p:set>
+                                  </p:childTnLst>
+                                </p:cTn>
+                              </p:par>
+                            </p:childTnLst>
+                          </p:cTn>
+                        </p:par>
+                      </p:childTnLst>
+                    </p:cTn>
+                  </p:par>
+                  <p:par>
+                    <p:cTn id="7" fill="hold">
+                      <p:stCondLst>
+                        <p:cond delay="indefinite"/>
+                      </p:stCondLst>
+                      <p:childTnLst>
+                        <p:par>
+                          <p:cTn id="8" fill="hold">
+                            <p:stCondLst>
+                              <p:cond delay="0"/>
+                            </p:stCondLst>
+                            <p:childTnLst>
+                              <p:par>
+                                <p:cTn id="9" presetID="1" presetClass="entr" presetSubtype="0" fill="hold" nodeType="clickEffect">
+                                  <p:stCondLst>
+                                    <p:cond delay="0"/>
+                                  </p:stCondLst>
+                                  <p:childTnLst>
+                                    <p:set>
+                                      <p:cBhvr>
+                                        <p:cTn id="10" dur="1" fill="hold">
+                                          <p:stCondLst>
+                                            <p:cond delay="0"/>
+                                          </p:stCondLst>
+                                        </p:cTn>
+                                        <p:tgtEl>
+                                          <p:spTgt spid="3">
+                                            <p:txEl>
+                                              <p:pRg st="2" end="2"/>
+                                            </p:txEl>
+                                          </p:spTgt>
+                                        </p:tgtEl>
+                                        <p:attrNameLst>
+                                          <p:attrName>style.visibility</p:attrName>
+                                        </p:attrNameLst>
+                                      </p:cBhvr>
+                                      <p:to>
+                                        <p:strVal val="visible"/>
+                                      </p:to>
+                                    </p:set>
+                                  </p:childTnLst>
+                                </p:cTn>
+                              </p:par>
+                              <p:par>
+                                <p:cTn id="11" presetID="1" presetClass="entr" presetSubtype="0" fill="hold" nodeType="withEffect">
+                                  <p:stCondLst>
+                                    <p:cond delay="0"/>
+                                  </p:stCondLst>
+                                  <p:childTnLst>
+                                    <p:set>
+                                      <p:cBhvr>
+                                        <p:cTn id="12" dur="1" fill="hold">
+                                          <p:stCondLst>
+                                            <p:cond delay="0"/>
+                                          </p:stCondLst>
+                                        </p:cTn>
+                                        <p:tgtEl>
+                                          <p:spTgt spid="3">
+                                            <p:txEl>
+                                              <p:pRg st="3" end="3"/>
+                                            </p:txEl>
+                                          </p:spTgt>
+                                        </p:tgtEl>
+                                        <p:attrNameLst>
+                                          <p:attrName>style.visibility</p:attrName>
+                                        </p:attrNameLst>
+                                      </p:cBhvr>
+                                      <p:to>
+                                        <p:strVal val="visible"/>
+                                      </p:to>
+                                    </p:set>
+                                  </p:childTnLst>
+                                </p:cTn>
+                              </p:par>
+                              <p:par>
+                                <p:cTn id="13" presetID="1" presetClass="entr" presetSubtype="0" fill="hold" nodeType="withEffect">
+                                  <p:stCondLst>
+                                    <p:cond delay="0"/>
+                                  </p:stCondLst>
+                                  <p:childTnLst>
+                                    <p:set>
+                                      <p:cBhvr>
+                                        <p:cTn id="14" dur="1" fill="hold">
+                                          <p:stCondLst>
+                                            <p:cond delay="0"/>
+                                          </p:stCondLst>
+                                        </p:cTn>
+                                        <p:tgtEl>
+                                          <p:spTgt spid="3">
+                                            <p:txEl>
+                                              <p:pRg st="4" end="4"/>
+                                            </p:txEl>
+                                          </p:spTgt>
+                                        </p:tgtEl>
+                                        <p:attrNameLst>
+                                          <p:attrName>style.visibility</p:attrName>
+                                        </p:attrNameLst>
+                                      </p:cBhvr>
+                                      <p:to>
+                                        <p:strVal val="visible"/>
+                                      </p:to>
+                                    </p:set>
+                                  </p:childTnLst>
+                                </p:cTn>
+                              </p:par>
+                            </p:childTnLst>
+                          </p:cTn>
+                        </p:par>
+                      </p:childTnLst>
+                    </p:cTn>
+                  </p:par>
+                  <p:par>
+                    <p:cTn id="15" fill="hold">
+                      <p:stCondLst>
+                        <p:cond delay="indefinite"/>
+                      </p:stCondLst>
+                      <p:childTnLst>
+                        <p:par>
+                          <p:cTn id="16" fill="hold">
+                            <p:stCondLst>
+                              <p:cond delay="0"/>
+                            </p:stCondLst>
+                            <p:childTnLst>
+                              <p:par>
+                                <p:cTn id="17" presetID="1" presetClass="entr" presetSubtype="0" fill="hold" nodeType="clickEffect">
+                                  <p:stCondLst>
+                                    <p:cond delay="0"/>
+                                  </p:stCondLst>
+                                  <p:childTnLst>
+                                    <p:set>
+                                      <p:cBhvr>
+                                        <p:cTn id="18" dur="1" fill="hold">
+                                          <p:stCondLst>
+                                            <p:cond delay="0"/>
+                                          </p:stCondLst>
+                                        </p:cTn>
+                                        <p:tgtEl>
+                                          <p:spTgt spid="3">
+                                            <p:txEl>
+                                              <p:pRg st="5" end="5"/>
+                                            </p:txEl>
+                                          </p:spTgt>
+                                        </p:tgtEl>
+                                        <p:attrNameLst>
+                                          <p:attrName>style.visibility</p:attrName>
+                                        </p:attrNameLst>
+                                      </p:cBhvr>
+                                      <p:to>
+                                        <p:strVal val="visible"/>
+                                      </p:to>
+                                    </p:set>
+                                  </p:childTnLst>
+                                </p:cTn>
+                              </p:par>
+                            </p:childTnLst>
+                          </p:cTn>
+                        </p:par>
+                      </p:childTnLst>
+                    </p:cTn>
+                  </p:par>
+                </p:childTnLst>
+              </p:cTn>
+              <p:prevCondLst>
+                <p:cond evt="onPrev" delay="0">
+                  <p:tgtEl>
+                    <p:sldTgt/>
+                  </p:tgtEl>
+                </p:cond>
+              </p:prevCondLst>
+              <p:nextCondLst>
+                <p:cond evt="onNext" delay="0">
+                  <p:tgtEl>
+                    <p:sldTgt/>
+                  </p:tgtEl>
+                </p:cond>
+              </p:nextCondLst>
+            </p:seq>
+          </p:childTnLst>
+        </p:cTn>
+      </p:par>
+    </p:tnLst>
+  </p:timing>
+</p:sld>
+</file>
+
+<file path=ppt/slides/slide70.xml><?xml version="1.0" encoding="utf-8"?>
 <p:sld xmlns:a="http://schemas.openxmlformats.org/drawingml/2006/main" xmlns:r="http://schemas.openxmlformats.org/officeDocument/2006/relationships" xmlns:p="http://schemas.openxmlformats.org/presentationml/2006/main">
   <p:cSld>
     <p:spTree>
@@ -33615,8 +35067,8 @@
           </a:p>
         </p:txBody>
       </p:sp>
-      <mc:AlternateContent xmlns:mc="http://schemas.openxmlformats.org/markup-compatibility/2006">
-        <mc:Choice xmlns:a14="http://schemas.microsoft.com/office/drawing/2010/main" Requires="a14">
+      <mc:AlternateContent xmlns:mc="http://schemas.openxmlformats.org/markup-compatibility/2006" xmlns:a14="http://schemas.microsoft.com/office/drawing/2010/main">
+        <mc:Choice Requires="a14">
           <p:sp>
             <p:nvSpPr>
               <p:cNvPr id="3" name="Content Placeholder 2">
@@ -34089,7 +35541,7 @@
                         <m:sSup>
                           <m:sSupPr>
                             <m:ctrlPr>
-                              <a:rPr lang="en-US" i="1" smtClean="0">
+                              <a:rPr lang="en-US" b="0" i="1" smtClean="0">
                                 <a:latin typeface="Cambria Math" panose="02040503050406030204" pitchFamily="18" charset="0"/>
                               </a:rPr>
                             </m:ctrlPr>
@@ -34162,7 +35614,7 @@
             </p:txBody>
           </p:sp>
         </mc:Choice>
-        <mc:Fallback>
+        <mc:Fallback xmlns="">
           <p:sp>
             <p:nvSpPr>
               <p:cNvPr id="3" name="Content Placeholder 2">
@@ -34219,7 +35671,776 @@
 </p:sld>
 </file>
 
-<file path=ppt/slides/slide67.xml><?xml version="1.0" encoding="utf-8"?>
+<file path=ppt/slides/slide71.xml><?xml version="1.0" encoding="utf-8"?>
+<p:sld xmlns:a="http://schemas.openxmlformats.org/drawingml/2006/main" xmlns:r="http://schemas.openxmlformats.org/officeDocument/2006/relationships" xmlns:p="http://schemas.openxmlformats.org/presentationml/2006/main">
+  <p:cSld>
+    <p:spTree>
+      <p:nvGrpSpPr>
+        <p:cNvPr id="1" name="">
+          <a:extLst>
+            <a:ext uri="{FF2B5EF4-FFF2-40B4-BE49-F238E27FC236}">
+              <a16:creationId xmlns:a16="http://schemas.microsoft.com/office/drawing/2014/main" id="{28DDD204-02A5-4C7D-94AC-03D691A946EF}"/>
+            </a:ext>
+          </a:extLst>
+        </p:cNvPr>
+        <p:cNvGrpSpPr/>
+        <p:nvPr/>
+      </p:nvGrpSpPr>
+      <p:grpSpPr>
+        <a:xfrm>
+          <a:off x="0" y="0"/>
+          <a:ext cx="0" cy="0"/>
+          <a:chOff x="0" y="0"/>
+          <a:chExt cx="0" cy="0"/>
+        </a:xfrm>
+      </p:grpSpPr>
+      <p:sp>
+        <p:nvSpPr>
+          <p:cNvPr id="2" name="Title 1">
+            <a:extLst>
+              <a:ext uri="{FF2B5EF4-FFF2-40B4-BE49-F238E27FC236}">
+                <a16:creationId xmlns:a16="http://schemas.microsoft.com/office/drawing/2014/main" id="{A2F0256E-0122-8881-335F-1BFB8BE1BFD1}"/>
+              </a:ext>
+            </a:extLst>
+          </p:cNvPr>
+          <p:cNvSpPr>
+            <a:spLocks noGrp="1"/>
+          </p:cNvSpPr>
+          <p:nvPr>
+            <p:ph type="title"/>
+          </p:nvPr>
+        </p:nvSpPr>
+        <p:spPr/>
+        <p:txBody>
+          <a:bodyPr/>
+          <a:lstStyle/>
+          <a:p>
+            <a:pPr marL="0" lvl="0" indent="0">
+              <a:buNone/>
+            </a:pPr>
+            <a:r>
+              <a:rPr lang="en-US" dirty="0"/>
+              <a:t>Imputing Missing Values</a:t>
+            </a:r>
+            <a:endParaRPr dirty="0"/>
+          </a:p>
+        </p:txBody>
+      </p:sp>
+      <p:sp>
+        <p:nvSpPr>
+          <p:cNvPr id="3" name="Content Placeholder 2">
+            <a:extLst>
+              <a:ext uri="{FF2B5EF4-FFF2-40B4-BE49-F238E27FC236}">
+                <a16:creationId xmlns:a16="http://schemas.microsoft.com/office/drawing/2014/main" id="{B3518033-C630-C463-BBC8-5492514F1494}"/>
+              </a:ext>
+            </a:extLst>
+          </p:cNvPr>
+          <p:cNvSpPr>
+            <a:spLocks noGrp="1"/>
+          </p:cNvSpPr>
+          <p:nvPr>
+            <p:ph idx="1"/>
+          </p:nvPr>
+        </p:nvSpPr>
+        <p:spPr>
+          <a:xfrm>
+            <a:off x="457200" y="1146006"/>
+            <a:ext cx="8229600" cy="520365"/>
+          </a:xfrm>
+        </p:spPr>
+        <p:txBody>
+          <a:bodyPr>
+            <a:normAutofit/>
+          </a:bodyPr>
+          <a:lstStyle/>
+          <a:p>
+            <a:pPr marL="0" lvl="0" indent="0">
+              <a:buNone/>
+            </a:pPr>
+            <a:r>
+              <a:rPr lang="en-US" dirty="0"/>
+              <a:t>We can visualize the quality of the imputed results </a:t>
+            </a:r>
+          </a:p>
+          <a:p>
+            <a:endParaRPr dirty="0"/>
+          </a:p>
+        </p:txBody>
+      </p:sp>
+      <p:sp>
+        <p:nvSpPr>
+          <p:cNvPr id="4" name="Content Placeholder 2">
+            <a:extLst>
+              <a:ext uri="{FF2B5EF4-FFF2-40B4-BE49-F238E27FC236}">
+                <a16:creationId xmlns:a16="http://schemas.microsoft.com/office/drawing/2014/main" id="{EC6A6F6A-4C4C-D14B-7204-E38796CFBE53}"/>
+              </a:ext>
+            </a:extLst>
+          </p:cNvPr>
+          <p:cNvSpPr txBox="1">
+            <a:spLocks/>
+          </p:cNvSpPr>
+          <p:nvPr/>
+        </p:nvSpPr>
+        <p:spPr>
+          <a:xfrm>
+            <a:off x="457200" y="1872916"/>
+            <a:ext cx="4002505" cy="2891589"/>
+          </a:xfrm>
+          <a:prstGeom prst="rect">
+            <a:avLst/>
+          </a:prstGeom>
+        </p:spPr>
+        <p:txBody>
+          <a:bodyPr vert="horz" lIns="91440" tIns="45720" rIns="91440" bIns="45720" rtlCol="0">
+            <a:normAutofit/>
+          </a:bodyPr>
+          <a:lstStyle>
+            <a:lvl1pPr marL="342900" indent="-342900" algn="l" defTabSz="342900" rtl="0" eaLnBrk="1" latinLnBrk="0" hangingPunct="1">
+              <a:spcBef>
+                <a:spcPct val="20000"/>
+              </a:spcBef>
+              <a:buFont typeface="Arial"/>
+              <a:buChar char="•"/>
+              <a:defRPr sz="2400" kern="1200">
+                <a:solidFill>
+                  <a:schemeClr val="tx1"/>
+                </a:solidFill>
+                <a:latin typeface="+mn-lt"/>
+                <a:ea typeface="+mn-ea"/>
+                <a:cs typeface="+mn-cs"/>
+              </a:defRPr>
+            </a:lvl1pPr>
+            <a:lvl2pPr marL="685800" indent="-342900" algn="l" defTabSz="342900" rtl="0" eaLnBrk="1" latinLnBrk="0" hangingPunct="1">
+              <a:spcBef>
+                <a:spcPct val="20000"/>
+              </a:spcBef>
+              <a:buFont typeface="Arial"/>
+              <a:buChar char="–"/>
+              <a:defRPr sz="2100" kern="1200">
+                <a:solidFill>
+                  <a:schemeClr val="tx1"/>
+                </a:solidFill>
+                <a:latin typeface="+mn-lt"/>
+                <a:ea typeface="+mn-ea"/>
+                <a:cs typeface="+mn-cs"/>
+              </a:defRPr>
+            </a:lvl2pPr>
+            <a:lvl3pPr marL="1028700" indent="-342900" algn="l" defTabSz="342900" rtl="0" eaLnBrk="1" latinLnBrk="0" hangingPunct="1">
+              <a:spcBef>
+                <a:spcPct val="20000"/>
+              </a:spcBef>
+              <a:buFont typeface="Arial"/>
+              <a:buChar char="•"/>
+              <a:defRPr sz="1800" kern="1200">
+                <a:solidFill>
+                  <a:schemeClr val="tx1"/>
+                </a:solidFill>
+                <a:latin typeface="+mn-lt"/>
+                <a:ea typeface="+mn-ea"/>
+                <a:cs typeface="+mn-cs"/>
+              </a:defRPr>
+            </a:lvl3pPr>
+            <a:lvl4pPr marL="1371600" indent="-342900" algn="l" defTabSz="342900" rtl="0" eaLnBrk="1" latinLnBrk="0" hangingPunct="1">
+              <a:spcBef>
+                <a:spcPct val="20000"/>
+              </a:spcBef>
+              <a:buFont typeface="Arial"/>
+              <a:buChar char="–"/>
+              <a:defRPr sz="1500" kern="1200">
+                <a:solidFill>
+                  <a:schemeClr val="tx1"/>
+                </a:solidFill>
+                <a:latin typeface="+mn-lt"/>
+                <a:ea typeface="+mn-ea"/>
+                <a:cs typeface="+mn-cs"/>
+              </a:defRPr>
+            </a:lvl4pPr>
+            <a:lvl5pPr marL="1714500" indent="-342900" algn="l" defTabSz="342900" rtl="0" eaLnBrk="1" latinLnBrk="0" hangingPunct="1">
+              <a:spcBef>
+                <a:spcPct val="20000"/>
+              </a:spcBef>
+              <a:buFont typeface="Arial"/>
+              <a:buChar char="»"/>
+              <a:defRPr sz="1500" kern="1200">
+                <a:solidFill>
+                  <a:schemeClr val="tx1"/>
+                </a:solidFill>
+                <a:latin typeface="+mn-lt"/>
+                <a:ea typeface="+mn-ea"/>
+                <a:cs typeface="+mn-cs"/>
+              </a:defRPr>
+            </a:lvl5pPr>
+            <a:lvl6pPr marL="2057400" indent="-342900" algn="l" defTabSz="342900" rtl="0" eaLnBrk="1" latinLnBrk="0" hangingPunct="1">
+              <a:spcBef>
+                <a:spcPct val="20000"/>
+              </a:spcBef>
+              <a:buFont typeface="Arial"/>
+              <a:buChar char="•"/>
+              <a:defRPr sz="1500" kern="1200">
+                <a:solidFill>
+                  <a:schemeClr val="tx1"/>
+                </a:solidFill>
+                <a:latin typeface="+mn-lt"/>
+                <a:ea typeface="+mn-ea"/>
+                <a:cs typeface="+mn-cs"/>
+              </a:defRPr>
+            </a:lvl6pPr>
+            <a:lvl7pPr marL="2400300" indent="-342900" algn="l" defTabSz="342900" rtl="0" eaLnBrk="1" latinLnBrk="0" hangingPunct="1">
+              <a:spcBef>
+                <a:spcPct val="20000"/>
+              </a:spcBef>
+              <a:buFont typeface="Arial"/>
+              <a:buChar char="•"/>
+              <a:defRPr sz="1500" kern="1200">
+                <a:solidFill>
+                  <a:schemeClr val="tx1"/>
+                </a:solidFill>
+                <a:latin typeface="+mn-lt"/>
+                <a:ea typeface="+mn-ea"/>
+                <a:cs typeface="+mn-cs"/>
+              </a:defRPr>
+            </a:lvl7pPr>
+            <a:lvl8pPr marL="2743200" indent="-342900" algn="l" defTabSz="342900" rtl="0" eaLnBrk="1" latinLnBrk="0" hangingPunct="1">
+              <a:spcBef>
+                <a:spcPct val="20000"/>
+              </a:spcBef>
+              <a:buFont typeface="Arial"/>
+              <a:buChar char="•"/>
+              <a:defRPr sz="1500" kern="1200">
+                <a:solidFill>
+                  <a:schemeClr val="tx1"/>
+                </a:solidFill>
+                <a:latin typeface="+mn-lt"/>
+                <a:ea typeface="+mn-ea"/>
+                <a:cs typeface="+mn-cs"/>
+              </a:defRPr>
+            </a:lvl8pPr>
+            <a:lvl9pPr marL="3086100" indent="-342900" algn="l" defTabSz="342900" rtl="0" eaLnBrk="1" latinLnBrk="0" hangingPunct="1">
+              <a:spcBef>
+                <a:spcPct val="20000"/>
+              </a:spcBef>
+              <a:buFont typeface="Arial"/>
+              <a:buChar char="•"/>
+              <a:defRPr sz="1500" kern="1200">
+                <a:solidFill>
+                  <a:schemeClr val="tx1"/>
+                </a:solidFill>
+                <a:latin typeface="+mn-lt"/>
+                <a:ea typeface="+mn-ea"/>
+                <a:cs typeface="+mn-cs"/>
+              </a:defRPr>
+            </a:lvl9pPr>
+          </a:lstStyle>
+          <a:p>
+            <a:r>
+              <a:rPr lang="en-US" dirty="0"/>
+              <a:t>The distributions of imputed and observed values should match</a:t>
+            </a:r>
+          </a:p>
+          <a:p>
+            <a:endParaRPr lang="en-US" dirty="0"/>
+          </a:p>
+          <a:p>
+            <a:endParaRPr lang="en-US" dirty="0"/>
+          </a:p>
+        </p:txBody>
+      </p:sp>
+      <p:pic>
+        <p:nvPicPr>
+          <p:cNvPr id="6" name="Picture 5">
+            <a:extLst>
+              <a:ext uri="{FF2B5EF4-FFF2-40B4-BE49-F238E27FC236}">
+                <a16:creationId xmlns:a16="http://schemas.microsoft.com/office/drawing/2014/main" id="{D587DBF9-0D43-0A27-06D4-7C7F5BBAB6D1}"/>
+              </a:ext>
+            </a:extLst>
+          </p:cNvPr>
+          <p:cNvPicPr>
+            <a:picLocks noChangeAspect="1"/>
+          </p:cNvPicPr>
+          <p:nvPr/>
+        </p:nvPicPr>
+        <p:blipFill>
+          <a:blip r:embed="rId2"/>
+          <a:stretch>
+            <a:fillRect/>
+          </a:stretch>
+        </p:blipFill>
+        <p:spPr>
+          <a:xfrm>
+            <a:off x="4503821" y="1749148"/>
+            <a:ext cx="4483337" cy="3348036"/>
+          </a:xfrm>
+          <a:prstGeom prst="rect">
+            <a:avLst/>
+          </a:prstGeom>
+        </p:spPr>
+      </p:pic>
+    </p:spTree>
+    <p:extLst>
+      <p:ext uri="{BB962C8B-B14F-4D97-AF65-F5344CB8AC3E}">
+        <p14:creationId xmlns:p14="http://schemas.microsoft.com/office/powerpoint/2010/main" val="1690185777"/>
+      </p:ext>
+    </p:extLst>
+  </p:cSld>
+  <p:clrMapOvr>
+    <a:masterClrMapping/>
+  </p:clrMapOvr>
+</p:sld>
+</file>
+
+<file path=ppt/slides/slide72.xml><?xml version="1.0" encoding="utf-8"?>
+<p:sld xmlns:a="http://schemas.openxmlformats.org/drawingml/2006/main" xmlns:r="http://schemas.openxmlformats.org/officeDocument/2006/relationships" xmlns:p="http://schemas.openxmlformats.org/presentationml/2006/main">
+  <p:cSld>
+    <p:spTree>
+      <p:nvGrpSpPr>
+        <p:cNvPr id="1" name="">
+          <a:extLst>
+            <a:ext uri="{FF2B5EF4-FFF2-40B4-BE49-F238E27FC236}">
+              <a16:creationId xmlns:a16="http://schemas.microsoft.com/office/drawing/2014/main" id="{A770891B-F205-F94D-41EB-427DEE81C67A}"/>
+            </a:ext>
+          </a:extLst>
+        </p:cNvPr>
+        <p:cNvGrpSpPr/>
+        <p:nvPr/>
+      </p:nvGrpSpPr>
+      <p:grpSpPr>
+        <a:xfrm>
+          <a:off x="0" y="0"/>
+          <a:ext cx="0" cy="0"/>
+          <a:chOff x="0" y="0"/>
+          <a:chExt cx="0" cy="0"/>
+        </a:xfrm>
+      </p:grpSpPr>
+      <p:sp>
+        <p:nvSpPr>
+          <p:cNvPr id="2" name="Title 1">
+            <a:extLst>
+              <a:ext uri="{FF2B5EF4-FFF2-40B4-BE49-F238E27FC236}">
+                <a16:creationId xmlns:a16="http://schemas.microsoft.com/office/drawing/2014/main" id="{168B350F-CE79-8679-F991-FC7A70E444C3}"/>
+              </a:ext>
+            </a:extLst>
+          </p:cNvPr>
+          <p:cNvSpPr>
+            <a:spLocks noGrp="1"/>
+          </p:cNvSpPr>
+          <p:nvPr>
+            <p:ph type="title"/>
+          </p:nvPr>
+        </p:nvSpPr>
+        <p:spPr/>
+        <p:txBody>
+          <a:bodyPr/>
+          <a:lstStyle/>
+          <a:p>
+            <a:pPr marL="0" lvl="0" indent="0">
+              <a:buNone/>
+            </a:pPr>
+            <a:r>
+              <a:rPr lang="en-US" dirty="0"/>
+              <a:t>Imputing Missing Values</a:t>
+            </a:r>
+            <a:endParaRPr dirty="0"/>
+          </a:p>
+        </p:txBody>
+      </p:sp>
+      <p:sp>
+        <p:nvSpPr>
+          <p:cNvPr id="3" name="Content Placeholder 2">
+            <a:extLst>
+              <a:ext uri="{FF2B5EF4-FFF2-40B4-BE49-F238E27FC236}">
+                <a16:creationId xmlns:a16="http://schemas.microsoft.com/office/drawing/2014/main" id="{29F3A58E-C420-D9E3-3C9F-030B2AD0212D}"/>
+              </a:ext>
+            </a:extLst>
+          </p:cNvPr>
+          <p:cNvSpPr>
+            <a:spLocks noGrp="1"/>
+          </p:cNvSpPr>
+          <p:nvPr>
+            <p:ph idx="1"/>
+          </p:nvPr>
+        </p:nvSpPr>
+        <p:spPr>
+          <a:xfrm>
+            <a:off x="457200" y="1146006"/>
+            <a:ext cx="8229600" cy="520365"/>
+          </a:xfrm>
+        </p:spPr>
+        <p:txBody>
+          <a:bodyPr>
+            <a:normAutofit/>
+          </a:bodyPr>
+          <a:lstStyle/>
+          <a:p>
+            <a:pPr marL="0" lvl="0" indent="0">
+              <a:buNone/>
+            </a:pPr>
+            <a:r>
+              <a:rPr lang="en-US" dirty="0"/>
+              <a:t>We can visualize the quality of the imputed results </a:t>
+            </a:r>
+          </a:p>
+          <a:p>
+            <a:endParaRPr dirty="0"/>
+          </a:p>
+        </p:txBody>
+      </p:sp>
+      <p:sp>
+        <p:nvSpPr>
+          <p:cNvPr id="4" name="Content Placeholder 2">
+            <a:extLst>
+              <a:ext uri="{FF2B5EF4-FFF2-40B4-BE49-F238E27FC236}">
+                <a16:creationId xmlns:a16="http://schemas.microsoft.com/office/drawing/2014/main" id="{F4F51AFB-2D5F-8DEA-6A00-F7CB6777C5B8}"/>
+              </a:ext>
+            </a:extLst>
+          </p:cNvPr>
+          <p:cNvSpPr txBox="1">
+            <a:spLocks/>
+          </p:cNvSpPr>
+          <p:nvPr/>
+        </p:nvSpPr>
+        <p:spPr>
+          <a:xfrm>
+            <a:off x="457200" y="1872916"/>
+            <a:ext cx="4002505" cy="2891589"/>
+          </a:xfrm>
+          <a:prstGeom prst="rect">
+            <a:avLst/>
+          </a:prstGeom>
+        </p:spPr>
+        <p:txBody>
+          <a:bodyPr vert="horz" lIns="91440" tIns="45720" rIns="91440" bIns="45720" rtlCol="0">
+            <a:normAutofit/>
+          </a:bodyPr>
+          <a:lstStyle>
+            <a:lvl1pPr marL="342900" indent="-342900" algn="l" defTabSz="342900" rtl="0" eaLnBrk="1" latinLnBrk="0" hangingPunct="1">
+              <a:spcBef>
+                <a:spcPct val="20000"/>
+              </a:spcBef>
+              <a:buFont typeface="Arial"/>
+              <a:buChar char="•"/>
+              <a:defRPr sz="2400" kern="1200">
+                <a:solidFill>
+                  <a:schemeClr val="tx1"/>
+                </a:solidFill>
+                <a:latin typeface="+mn-lt"/>
+                <a:ea typeface="+mn-ea"/>
+                <a:cs typeface="+mn-cs"/>
+              </a:defRPr>
+            </a:lvl1pPr>
+            <a:lvl2pPr marL="685800" indent="-342900" algn="l" defTabSz="342900" rtl="0" eaLnBrk="1" latinLnBrk="0" hangingPunct="1">
+              <a:spcBef>
+                <a:spcPct val="20000"/>
+              </a:spcBef>
+              <a:buFont typeface="Arial"/>
+              <a:buChar char="–"/>
+              <a:defRPr sz="2100" kern="1200">
+                <a:solidFill>
+                  <a:schemeClr val="tx1"/>
+                </a:solidFill>
+                <a:latin typeface="+mn-lt"/>
+                <a:ea typeface="+mn-ea"/>
+                <a:cs typeface="+mn-cs"/>
+              </a:defRPr>
+            </a:lvl2pPr>
+            <a:lvl3pPr marL="1028700" indent="-342900" algn="l" defTabSz="342900" rtl="0" eaLnBrk="1" latinLnBrk="0" hangingPunct="1">
+              <a:spcBef>
+                <a:spcPct val="20000"/>
+              </a:spcBef>
+              <a:buFont typeface="Arial"/>
+              <a:buChar char="•"/>
+              <a:defRPr sz="1800" kern="1200">
+                <a:solidFill>
+                  <a:schemeClr val="tx1"/>
+                </a:solidFill>
+                <a:latin typeface="+mn-lt"/>
+                <a:ea typeface="+mn-ea"/>
+                <a:cs typeface="+mn-cs"/>
+              </a:defRPr>
+            </a:lvl3pPr>
+            <a:lvl4pPr marL="1371600" indent="-342900" algn="l" defTabSz="342900" rtl="0" eaLnBrk="1" latinLnBrk="0" hangingPunct="1">
+              <a:spcBef>
+                <a:spcPct val="20000"/>
+              </a:spcBef>
+              <a:buFont typeface="Arial"/>
+              <a:buChar char="–"/>
+              <a:defRPr sz="1500" kern="1200">
+                <a:solidFill>
+                  <a:schemeClr val="tx1"/>
+                </a:solidFill>
+                <a:latin typeface="+mn-lt"/>
+                <a:ea typeface="+mn-ea"/>
+                <a:cs typeface="+mn-cs"/>
+              </a:defRPr>
+            </a:lvl4pPr>
+            <a:lvl5pPr marL="1714500" indent="-342900" algn="l" defTabSz="342900" rtl="0" eaLnBrk="1" latinLnBrk="0" hangingPunct="1">
+              <a:spcBef>
+                <a:spcPct val="20000"/>
+              </a:spcBef>
+              <a:buFont typeface="Arial"/>
+              <a:buChar char="»"/>
+              <a:defRPr sz="1500" kern="1200">
+                <a:solidFill>
+                  <a:schemeClr val="tx1"/>
+                </a:solidFill>
+                <a:latin typeface="+mn-lt"/>
+                <a:ea typeface="+mn-ea"/>
+                <a:cs typeface="+mn-cs"/>
+              </a:defRPr>
+            </a:lvl5pPr>
+            <a:lvl6pPr marL="2057400" indent="-342900" algn="l" defTabSz="342900" rtl="0" eaLnBrk="1" latinLnBrk="0" hangingPunct="1">
+              <a:spcBef>
+                <a:spcPct val="20000"/>
+              </a:spcBef>
+              <a:buFont typeface="Arial"/>
+              <a:buChar char="•"/>
+              <a:defRPr sz="1500" kern="1200">
+                <a:solidFill>
+                  <a:schemeClr val="tx1"/>
+                </a:solidFill>
+                <a:latin typeface="+mn-lt"/>
+                <a:ea typeface="+mn-ea"/>
+                <a:cs typeface="+mn-cs"/>
+              </a:defRPr>
+            </a:lvl6pPr>
+            <a:lvl7pPr marL="2400300" indent="-342900" algn="l" defTabSz="342900" rtl="0" eaLnBrk="1" latinLnBrk="0" hangingPunct="1">
+              <a:spcBef>
+                <a:spcPct val="20000"/>
+              </a:spcBef>
+              <a:buFont typeface="Arial"/>
+              <a:buChar char="•"/>
+              <a:defRPr sz="1500" kern="1200">
+                <a:solidFill>
+                  <a:schemeClr val="tx1"/>
+                </a:solidFill>
+                <a:latin typeface="+mn-lt"/>
+                <a:ea typeface="+mn-ea"/>
+                <a:cs typeface="+mn-cs"/>
+              </a:defRPr>
+            </a:lvl7pPr>
+            <a:lvl8pPr marL="2743200" indent="-342900" algn="l" defTabSz="342900" rtl="0" eaLnBrk="1" latinLnBrk="0" hangingPunct="1">
+              <a:spcBef>
+                <a:spcPct val="20000"/>
+              </a:spcBef>
+              <a:buFont typeface="Arial"/>
+              <a:buChar char="•"/>
+              <a:defRPr sz="1500" kern="1200">
+                <a:solidFill>
+                  <a:schemeClr val="tx1"/>
+                </a:solidFill>
+                <a:latin typeface="+mn-lt"/>
+                <a:ea typeface="+mn-ea"/>
+                <a:cs typeface="+mn-cs"/>
+              </a:defRPr>
+            </a:lvl8pPr>
+            <a:lvl9pPr marL="3086100" indent="-342900" algn="l" defTabSz="342900" rtl="0" eaLnBrk="1" latinLnBrk="0" hangingPunct="1">
+              <a:spcBef>
+                <a:spcPct val="20000"/>
+              </a:spcBef>
+              <a:buFont typeface="Arial"/>
+              <a:buChar char="•"/>
+              <a:defRPr sz="1500" kern="1200">
+                <a:solidFill>
+                  <a:schemeClr val="tx1"/>
+                </a:solidFill>
+                <a:latin typeface="+mn-lt"/>
+                <a:ea typeface="+mn-ea"/>
+                <a:cs typeface="+mn-cs"/>
+              </a:defRPr>
+            </a:lvl9pPr>
+          </a:lstStyle>
+          <a:p>
+            <a:r>
+              <a:rPr lang="en-US" dirty="0"/>
+              <a:t>Biplots show the relationship of observed and imputed values between two variables </a:t>
+            </a:r>
+          </a:p>
+          <a:p>
+            <a:endParaRPr lang="en-US" dirty="0"/>
+          </a:p>
+          <a:p>
+            <a:endParaRPr lang="en-US" dirty="0"/>
+          </a:p>
+        </p:txBody>
+      </p:sp>
+      <p:pic>
+        <p:nvPicPr>
+          <p:cNvPr id="7" name="Picture 6">
+            <a:extLst>
+              <a:ext uri="{FF2B5EF4-FFF2-40B4-BE49-F238E27FC236}">
+                <a16:creationId xmlns:a16="http://schemas.microsoft.com/office/drawing/2014/main" id="{65808BB2-1393-4E26-5116-8482A55BA6D4}"/>
+              </a:ext>
+            </a:extLst>
+          </p:cNvPr>
+          <p:cNvPicPr>
+            <a:picLocks noChangeAspect="1"/>
+          </p:cNvPicPr>
+          <p:nvPr/>
+        </p:nvPicPr>
+        <p:blipFill>
+          <a:blip r:embed="rId2"/>
+          <a:stretch>
+            <a:fillRect/>
+          </a:stretch>
+        </p:blipFill>
+        <p:spPr>
+          <a:xfrm>
+            <a:off x="4512639" y="1666371"/>
+            <a:ext cx="4469043" cy="3026698"/>
+          </a:xfrm>
+          <a:prstGeom prst="rect">
+            <a:avLst/>
+          </a:prstGeom>
+        </p:spPr>
+      </p:pic>
+    </p:spTree>
+    <p:extLst>
+      <p:ext uri="{BB962C8B-B14F-4D97-AF65-F5344CB8AC3E}">
+        <p14:creationId xmlns:p14="http://schemas.microsoft.com/office/powerpoint/2010/main" val="3678721740"/>
+      </p:ext>
+    </p:extLst>
+  </p:cSld>
+  <p:clrMapOvr>
+    <a:masterClrMapping/>
+  </p:clrMapOvr>
+</p:sld>
+</file>
+
+<file path=ppt/slides/slide73.xml><?xml version="1.0" encoding="utf-8"?>
+<p:sld xmlns:a="http://schemas.openxmlformats.org/drawingml/2006/main" xmlns:r="http://schemas.openxmlformats.org/officeDocument/2006/relationships" xmlns:p="http://schemas.openxmlformats.org/presentationml/2006/main">
+  <p:cSld>
+    <p:spTree>
+      <p:nvGrpSpPr>
+        <p:cNvPr id="1" name="">
+          <a:extLst>
+            <a:ext uri="{FF2B5EF4-FFF2-40B4-BE49-F238E27FC236}">
+              <a16:creationId xmlns:a16="http://schemas.microsoft.com/office/drawing/2014/main" id="{AA75778F-09DD-FFFC-15F5-F74D0C1FF0D2}"/>
+            </a:ext>
+          </a:extLst>
+        </p:cNvPr>
+        <p:cNvGrpSpPr/>
+        <p:nvPr/>
+      </p:nvGrpSpPr>
+      <p:grpSpPr>
+        <a:xfrm>
+          <a:off x="0" y="0"/>
+          <a:ext cx="0" cy="0"/>
+          <a:chOff x="0" y="0"/>
+          <a:chExt cx="0" cy="0"/>
+        </a:xfrm>
+      </p:grpSpPr>
+      <p:sp>
+        <p:nvSpPr>
+          <p:cNvPr id="2" name="Title 1">
+            <a:extLst>
+              <a:ext uri="{FF2B5EF4-FFF2-40B4-BE49-F238E27FC236}">
+                <a16:creationId xmlns:a16="http://schemas.microsoft.com/office/drawing/2014/main" id="{A84A741E-04F8-FEF4-B8A1-314DA00DBCC9}"/>
+              </a:ext>
+            </a:extLst>
+          </p:cNvPr>
+          <p:cNvSpPr>
+            <a:spLocks noGrp="1"/>
+          </p:cNvSpPr>
+          <p:nvPr>
+            <p:ph type="title"/>
+          </p:nvPr>
+        </p:nvSpPr>
+        <p:spPr/>
+        <p:txBody>
+          <a:bodyPr/>
+          <a:lstStyle/>
+          <a:p>
+            <a:pPr marL="0" lvl="0" indent="0">
+              <a:buNone/>
+            </a:pPr>
+            <a:r>
+              <a:rPr lang="en-US" dirty="0"/>
+              <a:t>Imputation of Missing Values</a:t>
+            </a:r>
+            <a:endParaRPr dirty="0"/>
+          </a:p>
+        </p:txBody>
+      </p:sp>
+      <p:sp>
+        <p:nvSpPr>
+          <p:cNvPr id="3" name="Content Placeholder 2">
+            <a:extLst>
+              <a:ext uri="{FF2B5EF4-FFF2-40B4-BE49-F238E27FC236}">
+                <a16:creationId xmlns:a16="http://schemas.microsoft.com/office/drawing/2014/main" id="{94EEE77B-4365-0FA5-6DB3-6DCFF70501D1}"/>
+              </a:ext>
+            </a:extLst>
+          </p:cNvPr>
+          <p:cNvSpPr>
+            <a:spLocks noGrp="1"/>
+          </p:cNvSpPr>
+          <p:nvPr>
+            <p:ph idx="1"/>
+          </p:nvPr>
+        </p:nvSpPr>
+        <p:spPr>
+          <a:xfrm>
+            <a:off x="457200" y="1200151"/>
+            <a:ext cx="8229600" cy="3737370"/>
+          </a:xfrm>
+        </p:spPr>
+        <p:txBody>
+          <a:bodyPr>
+            <a:normAutofit/>
+          </a:bodyPr>
+          <a:lstStyle/>
+          <a:p>
+            <a:pPr marL="0" indent="0">
+              <a:buNone/>
+            </a:pPr>
+            <a:r>
+              <a:rPr lang="en-US" dirty="0"/>
+              <a:t>For further reading: </a:t>
+            </a:r>
+          </a:p>
+          <a:p>
+            <a:r>
+              <a:rPr lang="en-US" dirty="0"/>
+              <a:t>For a detailed discussion of imputation with the MICE algorithm see </a:t>
+            </a:r>
+            <a:r>
+              <a:rPr lang="en-US" dirty="0">
+                <a:hlinkClick r:id="rId2"/>
+              </a:rPr>
+              <a:t>Flexible Imputation of Missing Data, Second Edition, Stef van Buuren, Chapman and Hall, 2018</a:t>
+            </a:r>
+            <a:endParaRPr lang="en-US" dirty="0"/>
+          </a:p>
+          <a:p>
+            <a:r>
+              <a:rPr lang="en-US" dirty="0"/>
+              <a:t>For a broad and deep exploration of working with missing data see </a:t>
+            </a:r>
+            <a:r>
+              <a:rPr lang="en-US" dirty="0">
+                <a:hlinkClick r:id="rId3"/>
+              </a:rPr>
+              <a:t>Statistical Analysis with Missing Data, Little and Rudin, Wiley, 2020</a:t>
+            </a:r>
+            <a:endParaRPr lang="en-US" dirty="0"/>
+          </a:p>
+          <a:p>
+            <a:endParaRPr lang="en-US" dirty="0"/>
+          </a:p>
+        </p:txBody>
+      </p:sp>
+    </p:spTree>
+    <p:extLst>
+      <p:ext uri="{BB962C8B-B14F-4D97-AF65-F5344CB8AC3E}">
+        <p14:creationId xmlns:p14="http://schemas.microsoft.com/office/powerpoint/2010/main" val="1504276749"/>
+      </p:ext>
+    </p:extLst>
+  </p:cSld>
+  <p:clrMapOvr>
+    <a:masterClrMapping/>
+  </p:clrMapOvr>
+</p:sld>
+</file>
+
+<file path=ppt/slides/slide74.xml><?xml version="1.0" encoding="utf-8"?>
 <p:sld xmlns:a="http://schemas.openxmlformats.org/drawingml/2006/main" xmlns:r="http://schemas.openxmlformats.org/officeDocument/2006/relationships" xmlns:p="http://schemas.openxmlformats.org/presentationml/2006/main">
   <p:cSld>
     <p:spTree>
@@ -34289,7 +36510,7 @@
 </p:sld>
 </file>
 
-<file path=ppt/slides/slide68.xml><?xml version="1.0" encoding="utf-8"?>
+<file path=ppt/slides/slide75.xml><?xml version="1.0" encoding="utf-8"?>
 <p:sld xmlns:a="http://schemas.openxmlformats.org/drawingml/2006/main" xmlns:r="http://schemas.openxmlformats.org/officeDocument/2006/relationships" xmlns:p="http://schemas.openxmlformats.org/presentationml/2006/main">
   <p:cSld>
     <p:spTree>
@@ -34484,385 +36705,6 @@
   <p:clrMapOvr>
     <a:masterClrMapping/>
   </p:clrMapOvr>
-</p:sld>
-</file>
-
-<file path=ppt/slides/slide7.xml><?xml version="1.0" encoding="utf-8"?>
-<p:sld xmlns:a="http://schemas.openxmlformats.org/drawingml/2006/main" xmlns:r="http://schemas.openxmlformats.org/officeDocument/2006/relationships" xmlns:p="http://schemas.openxmlformats.org/presentationml/2006/main">
-  <p:cSld>
-    <p:spTree>
-      <p:nvGrpSpPr>
-        <p:cNvPr id="1" name="">
-          <a:extLst>
-            <a:ext uri="{FF2B5EF4-FFF2-40B4-BE49-F238E27FC236}">
-              <a16:creationId xmlns:a16="http://schemas.microsoft.com/office/drawing/2014/main" id="{B3993F59-9009-4191-4BD0-62EAFBE3087E}"/>
-            </a:ext>
-          </a:extLst>
-        </p:cNvPr>
-        <p:cNvGrpSpPr/>
-        <p:nvPr/>
-      </p:nvGrpSpPr>
-      <p:grpSpPr>
-        <a:xfrm>
-          <a:off x="0" y="0"/>
-          <a:ext cx="0" cy="0"/>
-          <a:chOff x="0" y="0"/>
-          <a:chExt cx="0" cy="0"/>
-        </a:xfrm>
-      </p:grpSpPr>
-      <p:sp>
-        <p:nvSpPr>
-          <p:cNvPr id="2" name="Title 1">
-            <a:extLst>
-              <a:ext uri="{FF2B5EF4-FFF2-40B4-BE49-F238E27FC236}">
-                <a16:creationId xmlns:a16="http://schemas.microsoft.com/office/drawing/2014/main" id="{5A5D5B7B-EC31-F645-671E-3F2116407953}"/>
-              </a:ext>
-            </a:extLst>
-          </p:cNvPr>
-          <p:cNvSpPr>
-            <a:spLocks noGrp="1"/>
-          </p:cNvSpPr>
-          <p:nvPr>
-            <p:ph type="title"/>
-          </p:nvPr>
-        </p:nvSpPr>
-        <p:spPr/>
-        <p:txBody>
-          <a:bodyPr/>
-          <a:lstStyle/>
-          <a:p>
-            <a:pPr marL="0" lvl="0" indent="0">
-              <a:buNone/>
-            </a:pPr>
-            <a:r>
-              <a:rPr lang="en-US" dirty="0"/>
-              <a:t>Modeling Zero-Inflated Distributions</a:t>
-            </a:r>
-            <a:endParaRPr dirty="0"/>
-          </a:p>
-        </p:txBody>
-      </p:sp>
-      <p:sp>
-        <p:nvSpPr>
-          <p:cNvPr id="3" name="Content Placeholder 2">
-            <a:extLst>
-              <a:ext uri="{FF2B5EF4-FFF2-40B4-BE49-F238E27FC236}">
-                <a16:creationId xmlns:a16="http://schemas.microsoft.com/office/drawing/2014/main" id="{4C4AB32E-A8D9-3191-4BF8-4C76B8CCB7FC}"/>
-              </a:ext>
-            </a:extLst>
-          </p:cNvPr>
-          <p:cNvSpPr>
-            <a:spLocks noGrp="1"/>
-          </p:cNvSpPr>
-          <p:nvPr>
-            <p:ph idx="1"/>
-          </p:nvPr>
-        </p:nvSpPr>
-        <p:spPr/>
-        <p:txBody>
-          <a:bodyPr>
-            <a:normAutofit/>
-          </a:bodyPr>
-          <a:lstStyle/>
-          <a:p>
-            <a:pPr marL="0" lvl="0" indent="0">
-              <a:buNone/>
-            </a:pPr>
-            <a:r>
-              <a:rPr lang="en-US" dirty="0"/>
-              <a:t>How can we model zero inflated distributions?  </a:t>
-            </a:r>
-            <a:endParaRPr dirty="0"/>
-          </a:p>
-          <a:p>
-            <a:pPr lvl="0"/>
-            <a:r>
-              <a:rPr lang="en-US" dirty="0"/>
-              <a:t>Standard ‘named’ distributions do not account for zero-inflation  </a:t>
-            </a:r>
-          </a:p>
-          <a:p>
-            <a:pPr lvl="0"/>
-            <a:r>
-              <a:rPr lang="en-US" dirty="0"/>
-              <a:t>Can use a mixture of two distributions  </a:t>
-            </a:r>
-          </a:p>
-          <a:p>
-            <a:pPr lvl="1"/>
-            <a:r>
-              <a:rPr lang="en-US" dirty="0"/>
-              <a:t>A binomial distribution, or switching distribution  </a:t>
-            </a:r>
-          </a:p>
-          <a:p>
-            <a:pPr lvl="1"/>
-            <a:r>
-              <a:rPr lang="en-US" dirty="0"/>
-              <a:t>A standard distribution </a:t>
-            </a:r>
-          </a:p>
-          <a:p>
-            <a:r>
-              <a:rPr lang="en-US" dirty="0"/>
-              <a:t>The binomial distribution serves as a ‘switch’ between 0 response and the other distribution   </a:t>
-            </a:r>
-          </a:p>
-          <a:p>
-            <a:pPr lvl="0"/>
-            <a:endParaRPr dirty="0"/>
-          </a:p>
-        </p:txBody>
-      </p:sp>
-    </p:spTree>
-    <p:extLst>
-      <p:ext uri="{BB962C8B-B14F-4D97-AF65-F5344CB8AC3E}">
-        <p14:creationId xmlns:p14="http://schemas.microsoft.com/office/powerpoint/2010/main" val="4064511800"/>
-      </p:ext>
-    </p:extLst>
-  </p:cSld>
-  <p:clrMapOvr>
-    <a:masterClrMapping/>
-  </p:clrMapOvr>
-  <p:timing>
-    <p:tnLst>
-      <p:par>
-        <p:cTn id="1" dur="indefinite" restart="never" nodeType="tmRoot">
-          <p:childTnLst>
-            <p:seq concurrent="1" nextAc="seek">
-              <p:cTn id="2" dur="indefinite" nodeType="mainSeq">
-                <p:childTnLst>
-                  <p:par>
-                    <p:cTn id="3" fill="hold">
-                      <p:stCondLst>
-                        <p:cond delay="indefinite"/>
-                      </p:stCondLst>
-                      <p:childTnLst>
-                        <p:par>
-                          <p:cTn id="4" fill="hold">
-                            <p:stCondLst>
-                              <p:cond delay="0"/>
-                            </p:stCondLst>
-                            <p:childTnLst>
-                              <p:par>
-                                <p:cTn id="5" presetID="1" presetClass="entr" presetSubtype="0" fill="hold" nodeType="clickEffect">
-                                  <p:stCondLst>
-                                    <p:cond delay="0"/>
-                                  </p:stCondLst>
-                                  <p:childTnLst>
-                                    <p:set>
-                                      <p:cBhvr>
-                                        <p:cTn id="6" dur="1" fill="hold">
-                                          <p:stCondLst>
-                                            <p:cond delay="0"/>
-                                          </p:stCondLst>
-                                        </p:cTn>
-                                        <p:tgtEl>
-                                          <p:spTgt spid="3">
-                                            <p:txEl>
-                                              <p:pRg st="1" end="1"/>
-                                            </p:txEl>
-                                          </p:spTgt>
-                                        </p:tgtEl>
-                                        <p:attrNameLst>
-                                          <p:attrName>style.visibility</p:attrName>
-                                        </p:attrNameLst>
-                                      </p:cBhvr>
-                                      <p:to>
-                                        <p:strVal val="visible"/>
-                                      </p:to>
-                                    </p:set>
-                                  </p:childTnLst>
-                                </p:cTn>
-                              </p:par>
-                            </p:childTnLst>
-                          </p:cTn>
-                        </p:par>
-                      </p:childTnLst>
-                    </p:cTn>
-                  </p:par>
-                  <p:par>
-                    <p:cTn id="7" fill="hold">
-                      <p:stCondLst>
-                        <p:cond delay="indefinite"/>
-                      </p:stCondLst>
-                      <p:childTnLst>
-                        <p:par>
-                          <p:cTn id="8" fill="hold">
-                            <p:stCondLst>
-                              <p:cond delay="0"/>
-                            </p:stCondLst>
-                            <p:childTnLst>
-                              <p:par>
-                                <p:cTn id="9" presetID="1" presetClass="entr" presetSubtype="0" fill="hold" nodeType="clickEffect">
-                                  <p:stCondLst>
-                                    <p:cond delay="0"/>
-                                  </p:stCondLst>
-                                  <p:childTnLst>
-                                    <p:set>
-                                      <p:cBhvr>
-                                        <p:cTn id="10" dur="1" fill="hold">
-                                          <p:stCondLst>
-                                            <p:cond delay="0"/>
-                                          </p:stCondLst>
-                                        </p:cTn>
-                                        <p:tgtEl>
-                                          <p:spTgt spid="3">
-                                            <p:txEl>
-                                              <p:pRg st="2" end="2"/>
-                                            </p:txEl>
-                                          </p:spTgt>
-                                        </p:tgtEl>
-                                        <p:attrNameLst>
-                                          <p:attrName>style.visibility</p:attrName>
-                                        </p:attrNameLst>
-                                      </p:cBhvr>
-                                      <p:to>
-                                        <p:strVal val="visible"/>
-                                      </p:to>
-                                    </p:set>
-                                  </p:childTnLst>
-                                </p:cTn>
-                              </p:par>
-                              <p:par>
-                                <p:cTn id="11" presetID="1" presetClass="entr" presetSubtype="0" fill="hold" nodeType="withEffect">
-                                  <p:stCondLst>
-                                    <p:cond delay="0"/>
-                                  </p:stCondLst>
-                                  <p:childTnLst>
-                                    <p:set>
-                                      <p:cBhvr>
-                                        <p:cTn id="12" dur="1" fill="hold">
-                                          <p:stCondLst>
-                                            <p:cond delay="0"/>
-                                          </p:stCondLst>
-                                        </p:cTn>
-                                        <p:tgtEl>
-                                          <p:spTgt spid="3">
-                                            <p:txEl>
-                                              <p:pRg st="3" end="3"/>
-                                            </p:txEl>
-                                          </p:spTgt>
-                                        </p:tgtEl>
-                                        <p:attrNameLst>
-                                          <p:attrName>style.visibility</p:attrName>
-                                        </p:attrNameLst>
-                                      </p:cBhvr>
-                                      <p:to>
-                                        <p:strVal val="visible"/>
-                                      </p:to>
-                                    </p:set>
-                                  </p:childTnLst>
-                                </p:cTn>
-                              </p:par>
-                              <p:par>
-                                <p:cTn id="13" presetID="1" presetClass="entr" presetSubtype="0" fill="hold" nodeType="withEffect">
-                                  <p:stCondLst>
-                                    <p:cond delay="0"/>
-                                  </p:stCondLst>
-                                  <p:childTnLst>
-                                    <p:set>
-                                      <p:cBhvr>
-                                        <p:cTn id="14" dur="1" fill="hold">
-                                          <p:stCondLst>
-                                            <p:cond delay="0"/>
-                                          </p:stCondLst>
-                                        </p:cTn>
-                                        <p:tgtEl>
-                                          <p:spTgt spid="3">
-                                            <p:txEl>
-                                              <p:pRg st="4" end="4"/>
-                                            </p:txEl>
-                                          </p:spTgt>
-                                        </p:tgtEl>
-                                        <p:attrNameLst>
-                                          <p:attrName>style.visibility</p:attrName>
-                                        </p:attrNameLst>
-                                      </p:cBhvr>
-                                      <p:to>
-                                        <p:strVal val="visible"/>
-                                      </p:to>
-                                    </p:set>
-                                  </p:childTnLst>
-                                </p:cTn>
-                              </p:par>
-                            </p:childTnLst>
-                          </p:cTn>
-                        </p:par>
-                      </p:childTnLst>
-                    </p:cTn>
-                  </p:par>
-                  <p:par>
-                    <p:cTn id="15" fill="hold">
-                      <p:stCondLst>
-                        <p:cond delay="indefinite"/>
-                      </p:stCondLst>
-                      <p:childTnLst>
-                        <p:par>
-                          <p:cTn id="16" fill="hold">
-                            <p:stCondLst>
-                              <p:cond delay="0"/>
-                            </p:stCondLst>
-                            <p:childTnLst>
-                              <p:par>
-                                <p:cTn id="17" presetID="1" presetClass="entr" presetSubtype="0" fill="hold" nodeType="clickEffect">
-                                  <p:stCondLst>
-                                    <p:cond delay="0"/>
-                                  </p:stCondLst>
-                                  <p:childTnLst>
-                                    <p:set>
-                                      <p:cBhvr>
-                                        <p:cTn id="18" dur="1" fill="hold">
-                                          <p:stCondLst>
-                                            <p:cond delay="0"/>
-                                          </p:stCondLst>
-                                        </p:cTn>
-                                        <p:tgtEl>
-                                          <p:spTgt spid="3">
-                                            <p:txEl>
-                                              <p:pRg st="5" end="5"/>
-                                            </p:txEl>
-                                          </p:spTgt>
-                                        </p:tgtEl>
-                                        <p:attrNameLst>
-                                          <p:attrName>style.visibility</p:attrName>
-                                        </p:attrNameLst>
-                                      </p:cBhvr>
-                                      <p:to>
-                                        <p:strVal val="visible"/>
-                                      </p:to>
-                                    </p:set>
-                                  </p:childTnLst>
-                                </p:cTn>
-                              </p:par>
-                            </p:childTnLst>
-                          </p:cTn>
-                        </p:par>
-                      </p:childTnLst>
-                    </p:cTn>
-                  </p:par>
-                </p:childTnLst>
-              </p:cTn>
-              <p:prevCondLst>
-                <p:cond evt="onPrev" delay="0">
-                  <p:tgtEl>
-                    <p:sldTgt/>
-                  </p:tgtEl>
-                </p:cond>
-              </p:prevCondLst>
-              <p:nextCondLst>
-                <p:cond evt="onNext" delay="0">
-                  <p:tgtEl>
-                    <p:sldTgt/>
-                  </p:tgtEl>
-                </p:cond>
-              </p:nextCondLst>
-            </p:seq>
-          </p:childTnLst>
-        </p:cTn>
-      </p:par>
-    </p:tnLst>
-  </p:timing>
 </p:sld>
 </file>
 

--- a/LectureSlides/11_ModelsForMessyData.pptx
+++ b/LectureSlides/11_ModelsForMessyData.pptx
@@ -5,7 +5,7 @@
     <p:sldMasterId id="2147483648" r:id="rId1"/>
   </p:sldMasterIdLst>
   <p:notesMasterIdLst>
-    <p:notesMasterId r:id="rId77"/>
+    <p:notesMasterId r:id="rId81"/>
   </p:notesMasterIdLst>
   <p:sldIdLst>
     <p:sldId id="337" r:id="rId2"/>
@@ -62,27 +62,31 @@
     <p:sldId id="367" r:id="rId53"/>
     <p:sldId id="368" r:id="rId54"/>
     <p:sldId id="403" r:id="rId55"/>
-    <p:sldId id="386" r:id="rId56"/>
-    <p:sldId id="389" r:id="rId57"/>
-    <p:sldId id="387" r:id="rId58"/>
-    <p:sldId id="399" r:id="rId59"/>
-    <p:sldId id="400" r:id="rId60"/>
-    <p:sldId id="404" r:id="rId61"/>
-    <p:sldId id="388" r:id="rId62"/>
-    <p:sldId id="391" r:id="rId63"/>
-    <p:sldId id="392" r:id="rId64"/>
-    <p:sldId id="390" r:id="rId65"/>
-    <p:sldId id="395" r:id="rId66"/>
-    <p:sldId id="393" r:id="rId67"/>
-    <p:sldId id="396" r:id="rId68"/>
-    <p:sldId id="394" r:id="rId69"/>
-    <p:sldId id="397" r:id="rId70"/>
-    <p:sldId id="398" r:id="rId71"/>
-    <p:sldId id="401" r:id="rId72"/>
-    <p:sldId id="405" r:id="rId73"/>
-    <p:sldId id="402" r:id="rId74"/>
-    <p:sldId id="385" r:id="rId75"/>
-    <p:sldId id="381" r:id="rId76"/>
+    <p:sldId id="408" r:id="rId56"/>
+    <p:sldId id="386" r:id="rId57"/>
+    <p:sldId id="389" r:id="rId58"/>
+    <p:sldId id="409" r:id="rId59"/>
+    <p:sldId id="387" r:id="rId60"/>
+    <p:sldId id="399" r:id="rId61"/>
+    <p:sldId id="400" r:id="rId62"/>
+    <p:sldId id="404" r:id="rId63"/>
+    <p:sldId id="388" r:id="rId64"/>
+    <p:sldId id="391" r:id="rId65"/>
+    <p:sldId id="392" r:id="rId66"/>
+    <p:sldId id="390" r:id="rId67"/>
+    <p:sldId id="395" r:id="rId68"/>
+    <p:sldId id="393" r:id="rId69"/>
+    <p:sldId id="396" r:id="rId70"/>
+    <p:sldId id="394" r:id="rId71"/>
+    <p:sldId id="397" r:id="rId72"/>
+    <p:sldId id="398" r:id="rId73"/>
+    <p:sldId id="401" r:id="rId74"/>
+    <p:sldId id="405" r:id="rId75"/>
+    <p:sldId id="402" r:id="rId76"/>
+    <p:sldId id="407" r:id="rId77"/>
+    <p:sldId id="406" r:id="rId78"/>
+    <p:sldId id="385" r:id="rId79"/>
+    <p:sldId id="381" r:id="rId80"/>
   </p:sldIdLst>
   <p:sldSz cx="9144000" cy="5143500" type="screen16x9"/>
   <p:notesSz cx="6858000" cy="9144000"/>
@@ -282,7 +286,7 @@
           <a:p>
             <a:fld id="{B45A0028-71D2-4800-AD8E-38BD1BCDF688}" type="datetimeFigureOut">
               <a:rPr lang="en-US" smtClean="0"/>
-              <a:t>10/3/2026</a:t>
+              <a:t>10/4/2026</a:t>
             </a:fld>
             <a:endParaRPr lang="en-US"/>
           </a:p>
@@ -812,7 +816,7 @@
           <a:p>
             <a:fld id="{241EB5C9-1307-BA42-ABA2-0BC069CD8E7F}" type="datetimeFigureOut">
               <a:rPr lang="en-US" smtClean="0"/>
-              <a:t>10/3/2026</a:t>
+              <a:t>10/4/2026</a:t>
             </a:fld>
             <a:endParaRPr lang="en-US"/>
           </a:p>
@@ -980,7 +984,7 @@
           <a:p>
             <a:fld id="{241EB5C9-1307-BA42-ABA2-0BC069CD8E7F}" type="datetimeFigureOut">
               <a:rPr lang="en-US" smtClean="0"/>
-              <a:t>10/3/2026</a:t>
+              <a:t>10/4/2026</a:t>
             </a:fld>
             <a:endParaRPr lang="en-US"/>
           </a:p>
@@ -1158,7 +1162,7 @@
           <a:p>
             <a:fld id="{241EB5C9-1307-BA42-ABA2-0BC069CD8E7F}" type="datetimeFigureOut">
               <a:rPr lang="en-US" smtClean="0"/>
-              <a:t>10/3/2026</a:t>
+              <a:t>10/4/2026</a:t>
             </a:fld>
             <a:endParaRPr lang="en-US"/>
           </a:p>
@@ -1326,7 +1330,7 @@
           <a:p>
             <a:fld id="{241EB5C9-1307-BA42-ABA2-0BC069CD8E7F}" type="datetimeFigureOut">
               <a:rPr lang="en-US" smtClean="0"/>
-              <a:t>10/3/2026</a:t>
+              <a:t>10/4/2026</a:t>
             </a:fld>
             <a:endParaRPr lang="en-US"/>
           </a:p>
@@ -1571,7 +1575,7 @@
           <a:p>
             <a:fld id="{241EB5C9-1307-BA42-ABA2-0BC069CD8E7F}" type="datetimeFigureOut">
               <a:rPr lang="en-US" smtClean="0"/>
-              <a:t>10/3/2026</a:t>
+              <a:t>10/4/2026</a:t>
             </a:fld>
             <a:endParaRPr lang="en-US"/>
           </a:p>
@@ -1856,7 +1860,7 @@
           <a:p>
             <a:fld id="{241EB5C9-1307-BA42-ABA2-0BC069CD8E7F}" type="datetimeFigureOut">
               <a:rPr lang="en-US" smtClean="0"/>
-              <a:t>10/3/2026</a:t>
+              <a:t>10/4/2026</a:t>
             </a:fld>
             <a:endParaRPr lang="en-US"/>
           </a:p>
@@ -2275,7 +2279,7 @@
           <a:p>
             <a:fld id="{241EB5C9-1307-BA42-ABA2-0BC069CD8E7F}" type="datetimeFigureOut">
               <a:rPr lang="en-US" smtClean="0"/>
-              <a:t>10/3/2026</a:t>
+              <a:t>10/4/2026</a:t>
             </a:fld>
             <a:endParaRPr lang="en-US"/>
           </a:p>
@@ -2392,7 +2396,7 @@
           <a:p>
             <a:fld id="{241EB5C9-1307-BA42-ABA2-0BC069CD8E7F}" type="datetimeFigureOut">
               <a:rPr lang="en-US" smtClean="0"/>
-              <a:t>10/3/2026</a:t>
+              <a:t>10/4/2026</a:t>
             </a:fld>
             <a:endParaRPr lang="en-US"/>
           </a:p>
@@ -2487,7 +2491,7 @@
           <a:p>
             <a:fld id="{241EB5C9-1307-BA42-ABA2-0BC069CD8E7F}" type="datetimeFigureOut">
               <a:rPr lang="en-US" smtClean="0"/>
-              <a:t>10/3/2026</a:t>
+              <a:t>10/4/2026</a:t>
             </a:fld>
             <a:endParaRPr lang="en-US"/>
           </a:p>
@@ -2762,7 +2766,7 @@
           <a:p>
             <a:fld id="{241EB5C9-1307-BA42-ABA2-0BC069CD8E7F}" type="datetimeFigureOut">
               <a:rPr lang="en-US" smtClean="0"/>
-              <a:t>10/3/2026</a:t>
+              <a:t>10/4/2026</a:t>
             </a:fld>
             <a:endParaRPr lang="en-US"/>
           </a:p>
@@ -3014,7 +3018,7 @@
           <a:p>
             <a:fld id="{241EB5C9-1307-BA42-ABA2-0BC069CD8E7F}" type="datetimeFigureOut">
               <a:rPr lang="en-US" smtClean="0"/>
-              <a:t>10/3/2026</a:t>
+              <a:t>10/4/2026</a:t>
             </a:fld>
             <a:endParaRPr lang="en-US"/>
           </a:p>
@@ -3225,7 +3229,7 @@
           <a:p>
             <a:fld id="{241EB5C9-1307-BA42-ABA2-0BC069CD8E7F}" type="datetimeFigureOut">
               <a:rPr lang="en-US" smtClean="0"/>
-              <a:t>10/3/2026</a:t>
+              <a:t>10/4/2026</a:t>
             </a:fld>
             <a:endParaRPr lang="en-US"/>
           </a:p>
@@ -7881,7 +7885,7 @@
         <p:spPr/>
         <p:txBody>
           <a:bodyPr>
-            <a:normAutofit fontScale="77500" lnSpcReduction="20000"/>
+            <a:normAutofit fontScale="70000" lnSpcReduction="20000"/>
           </a:bodyPr>
           <a:lstStyle/>
           <a:p>
@@ -7913,6 +7917,13 @@
             <a:r>
               <a:rPr lang="en-US" dirty="0"/>
               <a:t>Number of emergency patients seen at a hospital can surge well beyond the norm</a:t>
+            </a:r>
+          </a:p>
+          <a:p>
+            <a:pPr lvl="0"/>
+            <a:r>
+              <a:rPr lang="en-US" dirty="0"/>
+              <a:t>Sightings of heard and flock animals seen at a location can have large numbers at some times</a:t>
             </a:r>
           </a:p>
           <a:p>
@@ -8344,6 +8355,55 @@
                                           <p:spTgt spid="3">
                                             <p:txEl>
                                               <p:pRg st="8" end="8"/>
+                                            </p:txEl>
+                                          </p:spTgt>
+                                        </p:tgtEl>
+                                        <p:attrNameLst>
+                                          <p:attrName>style.visibility</p:attrName>
+                                        </p:attrNameLst>
+                                      </p:cBhvr>
+                                      <p:to>
+                                        <p:strVal val="visible"/>
+                                      </p:to>
+                                    </p:set>
+                                  </p:childTnLst>
+                                </p:cTn>
+                              </p:par>
+                            </p:childTnLst>
+                          </p:cTn>
+                        </p:par>
+                      </p:childTnLst>
+                    </p:cTn>
+                  </p:par>
+                  <p:par>
+                    <p:cTn id="35" fill="hold">
+                      <p:stCondLst>
+                        <p:cond delay="indefinite"/>
+                      </p:stCondLst>
+                      <p:childTnLst>
+                        <p:par>
+                          <p:cTn id="36" fill="hold">
+                            <p:stCondLst>
+                              <p:cond delay="0"/>
+                            </p:stCondLst>
+                            <p:childTnLst>
+                              <p:par>
+                                <p:cTn id="37" presetID="1" presetClass="entr" presetSubtype="0" fill="hold" nodeType="clickEffect">
+                                  <p:stCondLst>
+                                    <p:cond delay="0"/>
+                                  </p:stCondLst>
+                                  <p:childTnLst>
+                                    <p:set>
+                                      <p:cBhvr>
+                                        <p:cTn id="38" dur="1" fill="hold">
+                                          <p:stCondLst>
+                                            <p:cond delay="0"/>
+                                          </p:stCondLst>
+                                        </p:cTn>
+                                        <p:tgtEl>
+                                          <p:spTgt spid="3">
+                                            <p:txEl>
+                                              <p:pRg st="9" end="9"/>
                                             </p:txEl>
                                           </p:spTgt>
                                         </p:tgtEl>
@@ -28455,7 +28515,7 @@
             <a:pPr lvl="0"/>
             <a:r>
               <a:rPr lang="en-US" dirty="0"/>
-              <a:t>In much of the world the average rainfall amount on a specific day is 0 </a:t>
+              <a:t>In much of the world the average rainfall measured on a specific day is 0 </a:t>
             </a:r>
           </a:p>
           <a:p>
@@ -28468,7 +28528,7 @@
           <a:p>
             <a:r>
               <a:rPr lang="en-US" dirty="0"/>
-              <a:t>In epidemiology the probability distribution of the of people contracting a disease per day has many zeros</a:t>
+              <a:t>In epidemiology the probability distribution of the of people contracting a disease per day in a geographic area is often 0</a:t>
             </a:r>
           </a:p>
           <a:p>
@@ -31153,12 +31213,9 @@
             </a:pPr>
             <a:r>
               <a:rPr lang="en-US" sz="3200" b="0" dirty="0"/>
-              <a:t>Example: </a:t>
-            </a:r>
-            <a:r>
-              <a:rPr sz="3200" b="0" dirty="0"/>
-              <a:t>Dealing With Outliers</a:t>
-            </a:r>
+              <a:t>Limitations of Robust Estimators</a:t>
+            </a:r>
+            <a:endParaRPr sz="3200" b="0" dirty="0"/>
           </a:p>
         </p:txBody>
       </p:sp>
@@ -31186,7 +31243,7 @@
         </p:spPr>
         <p:txBody>
           <a:bodyPr>
-            <a:normAutofit fontScale="92500" lnSpcReduction="10000"/>
+            <a:normAutofit fontScale="70000" lnSpcReduction="20000"/>
           </a:bodyPr>
           <a:lstStyle/>
           <a:p>
@@ -31195,7 +31252,7 @@
             </a:pPr>
             <a:r>
               <a:rPr lang="en-US" sz="2800" dirty="0"/>
-              <a:t>For further reading on robust statistical models</a:t>
+              <a:t>Robust estimators have some important limitations</a:t>
             </a:r>
           </a:p>
           <a:p>
@@ -31205,96 +31262,58 @@
             </a:pPr>
             <a:r>
               <a:rPr lang="en-US" sz="2800" dirty="0"/>
-              <a:t>For an up to date broad and deep treatment of theory and practical use of robust models see </a:t>
-            </a:r>
-            <a:r>
-              <a:rPr lang="en-US" sz="2800" dirty="0">
-                <a:hlinkClick r:id="rId2"/>
-              </a:rPr>
-              <a:t>Robust Statistics, Theory and Methods (with R), Second Edition, </a:t>
-            </a:r>
-            <a:r>
-              <a:rPr lang="en-US" sz="2800" dirty="0" err="1">
-                <a:hlinkClick r:id="rId2"/>
-              </a:rPr>
-              <a:t>Maronna</a:t>
-            </a:r>
-            <a:r>
-              <a:rPr lang="en-US" sz="2800" dirty="0">
-                <a:hlinkClick r:id="rId2"/>
-              </a:rPr>
-              <a:t>, Martin, Yohai, </a:t>
-            </a:r>
-            <a:r>
-              <a:rPr lang="en-US" sz="2800" dirty="0" err="1">
-                <a:hlinkClick r:id="rId2"/>
-              </a:rPr>
-              <a:t>Salibian</a:t>
-            </a:r>
-            <a:r>
-              <a:rPr lang="en-US" sz="2800" dirty="0">
-                <a:hlinkClick r:id="rId2"/>
-              </a:rPr>
-              <a:t>-Barrera, Wiley, 2019</a:t>
-            </a:r>
-            <a:r>
-              <a:rPr lang="en-US" sz="2800" dirty="0"/>
-              <a:t>      </a:t>
-            </a:r>
-          </a:p>
-          <a:p>
-            <a:pPr marL="457200" lvl="0" indent="-457200">
+              <a:t>The nonlinear treatment precludes parametric estimation of confidence intervals</a:t>
+            </a:r>
+          </a:p>
+          <a:p>
+            <a:pPr marL="800100" lvl="1" indent="-457200">
               <a:buFont typeface="Arial" panose="020B0604020202020204" pitchFamily="34" charset="0"/>
               <a:buChar char="•"/>
             </a:pPr>
             <a:r>
-              <a:rPr lang="en-US" sz="2800" dirty="0"/>
-              <a:t>The classic treatment of this subject is Robust Statistics, </a:t>
-            </a:r>
-            <a:r>
-              <a:rPr lang="en-US" sz="2800" dirty="0">
-                <a:hlinkClick r:id="rId3"/>
-              </a:rPr>
-              <a:t>The Approach Based on Influence Functions, Hample, </a:t>
-            </a:r>
-            <a:r>
-              <a:rPr lang="en-US" sz="2800" dirty="0" err="1">
-                <a:hlinkClick r:id="rId3"/>
-              </a:rPr>
-              <a:t>Rousseeuw</a:t>
-            </a:r>
-            <a:r>
-              <a:rPr lang="en-US" sz="2800" dirty="0">
-                <a:hlinkClick r:id="rId3"/>
-              </a:rPr>
-              <a:t>, Ronchetti, Stahel, </a:t>
-            </a:r>
-            <a:r>
-              <a:rPr lang="en-US" sz="2800" dirty="0" err="1">
-                <a:hlinkClick r:id="rId3"/>
-              </a:rPr>
-              <a:t>Weily</a:t>
-            </a:r>
-            <a:r>
-              <a:rPr lang="en-US" sz="2800" dirty="0">
-                <a:hlinkClick r:id="rId3"/>
-              </a:rPr>
-              <a:t>, 1986</a:t>
-            </a:r>
-            <a:endParaRPr lang="en-US" sz="2800" dirty="0"/>
-          </a:p>
-          <a:p>
-            <a:pPr marL="457200" lvl="0" indent="-457200">
+              <a:rPr lang="en-US" sz="2650" b="1" dirty="0"/>
+              <a:t>Bootstrap instead! </a:t>
+            </a:r>
+          </a:p>
+          <a:p>
+            <a:pPr marL="457200" indent="-457200">
               <a:buFont typeface="Arial" panose="020B0604020202020204" pitchFamily="34" charset="0"/>
               <a:buChar char="•"/>
             </a:pPr>
-            <a:endParaRPr lang="en-US" sz="2800" dirty="0"/>
-          </a:p>
-          <a:p>
-            <a:pPr marL="457200" lvl="0" indent="-457200">
+            <a:r>
+              <a:rPr lang="en-US" sz="2800" dirty="0"/>
+              <a:t>Robust estimators do not work when the number of outliers is past the breakdown point</a:t>
+            </a:r>
+          </a:p>
+          <a:p>
+            <a:pPr marL="800100" lvl="1" indent="-457200">
               <a:buFont typeface="Arial" panose="020B0604020202020204" pitchFamily="34" charset="0"/>
               <a:buChar char="•"/>
             </a:pPr>
+            <a:r>
+              <a:rPr lang="en-US" sz="2650" dirty="0"/>
+              <a:t>For example, at 50% outliers the univariate median estimator breaks down  </a:t>
+            </a:r>
+          </a:p>
+          <a:p>
+            <a:pPr marL="457200" indent="-457200">
+              <a:buFont typeface="Arial" panose="020B0604020202020204" pitchFamily="34" charset="0"/>
+              <a:buChar char="•"/>
+            </a:pPr>
+            <a:r>
+              <a:rPr lang="en-US" sz="2800" dirty="0"/>
+              <a:t>Robust estimators struggle with the detection and treatment of high-dimensional outliers  </a:t>
+            </a:r>
+          </a:p>
+          <a:p>
+            <a:pPr marL="457200" indent="-457200">
+              <a:buFont typeface="Arial" panose="020B0604020202020204" pitchFamily="34" charset="0"/>
+              <a:buChar char="•"/>
+            </a:pPr>
+            <a:r>
+              <a:rPr lang="en-US" sz="2800" dirty="0"/>
+              <a:t>Variance of point estimates is inherently worse than for linear estimators </a:t>
+            </a:r>
             <a:endParaRPr sz="2800" dirty="0"/>
           </a:p>
         </p:txBody>
@@ -31309,10 +31328,513 @@
   <p:clrMapOvr>
     <a:masterClrMapping/>
   </p:clrMapOvr>
+  <p:timing>
+    <p:tnLst>
+      <p:par>
+        <p:cTn id="1" dur="indefinite" restart="never" nodeType="tmRoot">
+          <p:childTnLst>
+            <p:seq concurrent="1" nextAc="seek">
+              <p:cTn id="2" dur="indefinite" nodeType="mainSeq">
+                <p:childTnLst>
+                  <p:par>
+                    <p:cTn id="3" fill="hold">
+                      <p:stCondLst>
+                        <p:cond delay="indefinite"/>
+                      </p:stCondLst>
+                      <p:childTnLst>
+                        <p:par>
+                          <p:cTn id="4" fill="hold">
+                            <p:stCondLst>
+                              <p:cond delay="0"/>
+                            </p:stCondLst>
+                            <p:childTnLst>
+                              <p:par>
+                                <p:cTn id="5" presetID="1" presetClass="entr" presetSubtype="0" fill="hold" nodeType="clickEffect">
+                                  <p:stCondLst>
+                                    <p:cond delay="0"/>
+                                  </p:stCondLst>
+                                  <p:childTnLst>
+                                    <p:set>
+                                      <p:cBhvr>
+                                        <p:cTn id="6" dur="1" fill="hold">
+                                          <p:stCondLst>
+                                            <p:cond delay="0"/>
+                                          </p:stCondLst>
+                                        </p:cTn>
+                                        <p:tgtEl>
+                                          <p:spTgt spid="4">
+                                            <p:txEl>
+                                              <p:pRg st="1" end="1"/>
+                                            </p:txEl>
+                                          </p:spTgt>
+                                        </p:tgtEl>
+                                        <p:attrNameLst>
+                                          <p:attrName>style.visibility</p:attrName>
+                                        </p:attrNameLst>
+                                      </p:cBhvr>
+                                      <p:to>
+                                        <p:strVal val="visible"/>
+                                      </p:to>
+                                    </p:set>
+                                  </p:childTnLst>
+                                </p:cTn>
+                              </p:par>
+                              <p:par>
+                                <p:cTn id="7" presetID="1" presetClass="entr" presetSubtype="0" fill="hold" nodeType="withEffect">
+                                  <p:stCondLst>
+                                    <p:cond delay="0"/>
+                                  </p:stCondLst>
+                                  <p:childTnLst>
+                                    <p:set>
+                                      <p:cBhvr>
+                                        <p:cTn id="8" dur="1" fill="hold">
+                                          <p:stCondLst>
+                                            <p:cond delay="0"/>
+                                          </p:stCondLst>
+                                        </p:cTn>
+                                        <p:tgtEl>
+                                          <p:spTgt spid="4">
+                                            <p:txEl>
+                                              <p:pRg st="2" end="2"/>
+                                            </p:txEl>
+                                          </p:spTgt>
+                                        </p:tgtEl>
+                                        <p:attrNameLst>
+                                          <p:attrName>style.visibility</p:attrName>
+                                        </p:attrNameLst>
+                                      </p:cBhvr>
+                                      <p:to>
+                                        <p:strVal val="visible"/>
+                                      </p:to>
+                                    </p:set>
+                                  </p:childTnLst>
+                                </p:cTn>
+                              </p:par>
+                            </p:childTnLst>
+                          </p:cTn>
+                        </p:par>
+                      </p:childTnLst>
+                    </p:cTn>
+                  </p:par>
+                  <p:par>
+                    <p:cTn id="9" fill="hold">
+                      <p:stCondLst>
+                        <p:cond delay="indefinite"/>
+                      </p:stCondLst>
+                      <p:childTnLst>
+                        <p:par>
+                          <p:cTn id="10" fill="hold">
+                            <p:stCondLst>
+                              <p:cond delay="0"/>
+                            </p:stCondLst>
+                            <p:childTnLst>
+                              <p:par>
+                                <p:cTn id="11" presetID="1" presetClass="entr" presetSubtype="0" fill="hold" nodeType="clickEffect">
+                                  <p:stCondLst>
+                                    <p:cond delay="0"/>
+                                  </p:stCondLst>
+                                  <p:childTnLst>
+                                    <p:set>
+                                      <p:cBhvr>
+                                        <p:cTn id="12" dur="1" fill="hold">
+                                          <p:stCondLst>
+                                            <p:cond delay="0"/>
+                                          </p:stCondLst>
+                                        </p:cTn>
+                                        <p:tgtEl>
+                                          <p:spTgt spid="4">
+                                            <p:txEl>
+                                              <p:pRg st="3" end="3"/>
+                                            </p:txEl>
+                                          </p:spTgt>
+                                        </p:tgtEl>
+                                        <p:attrNameLst>
+                                          <p:attrName>style.visibility</p:attrName>
+                                        </p:attrNameLst>
+                                      </p:cBhvr>
+                                      <p:to>
+                                        <p:strVal val="visible"/>
+                                      </p:to>
+                                    </p:set>
+                                  </p:childTnLst>
+                                </p:cTn>
+                              </p:par>
+                              <p:par>
+                                <p:cTn id="13" presetID="1" presetClass="entr" presetSubtype="0" fill="hold" nodeType="withEffect">
+                                  <p:stCondLst>
+                                    <p:cond delay="0"/>
+                                  </p:stCondLst>
+                                  <p:childTnLst>
+                                    <p:set>
+                                      <p:cBhvr>
+                                        <p:cTn id="14" dur="1" fill="hold">
+                                          <p:stCondLst>
+                                            <p:cond delay="0"/>
+                                          </p:stCondLst>
+                                        </p:cTn>
+                                        <p:tgtEl>
+                                          <p:spTgt spid="4">
+                                            <p:txEl>
+                                              <p:pRg st="4" end="4"/>
+                                            </p:txEl>
+                                          </p:spTgt>
+                                        </p:tgtEl>
+                                        <p:attrNameLst>
+                                          <p:attrName>style.visibility</p:attrName>
+                                        </p:attrNameLst>
+                                      </p:cBhvr>
+                                      <p:to>
+                                        <p:strVal val="visible"/>
+                                      </p:to>
+                                    </p:set>
+                                  </p:childTnLst>
+                                </p:cTn>
+                              </p:par>
+                            </p:childTnLst>
+                          </p:cTn>
+                        </p:par>
+                      </p:childTnLst>
+                    </p:cTn>
+                  </p:par>
+                  <p:par>
+                    <p:cTn id="15" fill="hold">
+                      <p:stCondLst>
+                        <p:cond delay="indefinite"/>
+                      </p:stCondLst>
+                      <p:childTnLst>
+                        <p:par>
+                          <p:cTn id="16" fill="hold">
+                            <p:stCondLst>
+                              <p:cond delay="0"/>
+                            </p:stCondLst>
+                            <p:childTnLst>
+                              <p:par>
+                                <p:cTn id="17" presetID="1" presetClass="entr" presetSubtype="0" fill="hold" nodeType="clickEffect">
+                                  <p:stCondLst>
+                                    <p:cond delay="0"/>
+                                  </p:stCondLst>
+                                  <p:childTnLst>
+                                    <p:set>
+                                      <p:cBhvr>
+                                        <p:cTn id="18" dur="1" fill="hold">
+                                          <p:stCondLst>
+                                            <p:cond delay="0"/>
+                                          </p:stCondLst>
+                                        </p:cTn>
+                                        <p:tgtEl>
+                                          <p:spTgt spid="4">
+                                            <p:txEl>
+                                              <p:pRg st="5" end="5"/>
+                                            </p:txEl>
+                                          </p:spTgt>
+                                        </p:tgtEl>
+                                        <p:attrNameLst>
+                                          <p:attrName>style.visibility</p:attrName>
+                                        </p:attrNameLst>
+                                      </p:cBhvr>
+                                      <p:to>
+                                        <p:strVal val="visible"/>
+                                      </p:to>
+                                    </p:set>
+                                  </p:childTnLst>
+                                </p:cTn>
+                              </p:par>
+                            </p:childTnLst>
+                          </p:cTn>
+                        </p:par>
+                      </p:childTnLst>
+                    </p:cTn>
+                  </p:par>
+                  <p:par>
+                    <p:cTn id="19" fill="hold">
+                      <p:stCondLst>
+                        <p:cond delay="indefinite"/>
+                      </p:stCondLst>
+                      <p:childTnLst>
+                        <p:par>
+                          <p:cTn id="20" fill="hold">
+                            <p:stCondLst>
+                              <p:cond delay="0"/>
+                            </p:stCondLst>
+                            <p:childTnLst>
+                              <p:par>
+                                <p:cTn id="21" presetID="1" presetClass="entr" presetSubtype="0" fill="hold" nodeType="clickEffect">
+                                  <p:stCondLst>
+                                    <p:cond delay="0"/>
+                                  </p:stCondLst>
+                                  <p:childTnLst>
+                                    <p:set>
+                                      <p:cBhvr>
+                                        <p:cTn id="22" dur="1" fill="hold">
+                                          <p:stCondLst>
+                                            <p:cond delay="0"/>
+                                          </p:stCondLst>
+                                        </p:cTn>
+                                        <p:tgtEl>
+                                          <p:spTgt spid="4">
+                                            <p:txEl>
+                                              <p:pRg st="6" end="6"/>
+                                            </p:txEl>
+                                          </p:spTgt>
+                                        </p:tgtEl>
+                                        <p:attrNameLst>
+                                          <p:attrName>style.visibility</p:attrName>
+                                        </p:attrNameLst>
+                                      </p:cBhvr>
+                                      <p:to>
+                                        <p:strVal val="visible"/>
+                                      </p:to>
+                                    </p:set>
+                                  </p:childTnLst>
+                                </p:cTn>
+                              </p:par>
+                            </p:childTnLst>
+                          </p:cTn>
+                        </p:par>
+                      </p:childTnLst>
+                    </p:cTn>
+                  </p:par>
+                </p:childTnLst>
+              </p:cTn>
+              <p:prevCondLst>
+                <p:cond evt="onPrev" delay="0">
+                  <p:tgtEl>
+                    <p:sldTgt/>
+                  </p:tgtEl>
+                </p:cond>
+              </p:prevCondLst>
+              <p:nextCondLst>
+                <p:cond evt="onNext" delay="0">
+                  <p:tgtEl>
+                    <p:sldTgt/>
+                  </p:tgtEl>
+                </p:cond>
+              </p:nextCondLst>
+            </p:seq>
+          </p:childTnLst>
+        </p:cTn>
+      </p:par>
+    </p:tnLst>
+  </p:timing>
 </p:sld>
 </file>
 
 <file path=ppt/slides/slide55.xml><?xml version="1.0" encoding="utf-8"?>
+<p:sld xmlns:a="http://schemas.openxmlformats.org/drawingml/2006/main" xmlns:r="http://schemas.openxmlformats.org/officeDocument/2006/relationships" xmlns:p="http://schemas.openxmlformats.org/presentationml/2006/main">
+  <p:cSld>
+    <p:spTree>
+      <p:nvGrpSpPr>
+        <p:cNvPr id="1" name="">
+          <a:extLst>
+            <a:ext uri="{FF2B5EF4-FFF2-40B4-BE49-F238E27FC236}">
+              <a16:creationId xmlns:a16="http://schemas.microsoft.com/office/drawing/2014/main" id="{6FFFFCDC-868A-DE7B-A8E0-5E1178E41C5F}"/>
+            </a:ext>
+          </a:extLst>
+        </p:cNvPr>
+        <p:cNvGrpSpPr/>
+        <p:nvPr/>
+      </p:nvGrpSpPr>
+      <p:grpSpPr>
+        <a:xfrm>
+          <a:off x="0" y="0"/>
+          <a:ext cx="0" cy="0"/>
+          <a:chOff x="0" y="0"/>
+          <a:chExt cx="0" cy="0"/>
+        </a:xfrm>
+      </p:grpSpPr>
+      <p:sp>
+        <p:nvSpPr>
+          <p:cNvPr id="2" name="Title 1">
+            <a:extLst>
+              <a:ext uri="{FF2B5EF4-FFF2-40B4-BE49-F238E27FC236}">
+                <a16:creationId xmlns:a16="http://schemas.microsoft.com/office/drawing/2014/main" id="{D8C6D959-F64C-A101-97C3-B6B122457F8B}"/>
+              </a:ext>
+            </a:extLst>
+          </p:cNvPr>
+          <p:cNvSpPr>
+            <a:spLocks noGrp="1"/>
+          </p:cNvSpPr>
+          <p:nvPr>
+            <p:ph type="title"/>
+          </p:nvPr>
+        </p:nvSpPr>
+        <p:spPr>
+          <a:xfrm>
+            <a:off x="457201" y="204787"/>
+            <a:ext cx="8329352" cy="564140"/>
+          </a:xfrm>
+        </p:spPr>
+        <p:txBody>
+          <a:bodyPr>
+            <a:noAutofit/>
+          </a:bodyPr>
+          <a:lstStyle/>
+          <a:p>
+            <a:pPr marL="0" lvl="0" indent="0" algn="ctr">
+              <a:buNone/>
+            </a:pPr>
+            <a:r>
+              <a:rPr lang="en-US" sz="3200" b="0" dirty="0"/>
+              <a:t>Example: </a:t>
+            </a:r>
+            <a:r>
+              <a:rPr sz="3200" b="0" dirty="0"/>
+              <a:t>Dealing With Outliers</a:t>
+            </a:r>
+          </a:p>
+        </p:txBody>
+      </p:sp>
+      <p:sp>
+        <p:nvSpPr>
+          <p:cNvPr id="4" name="Text Placeholder 3">
+            <a:extLst>
+              <a:ext uri="{FF2B5EF4-FFF2-40B4-BE49-F238E27FC236}">
+                <a16:creationId xmlns:a16="http://schemas.microsoft.com/office/drawing/2014/main" id="{72C61C89-775D-8AB6-17F8-715917D6CB26}"/>
+              </a:ext>
+            </a:extLst>
+          </p:cNvPr>
+          <p:cNvSpPr>
+            <a:spLocks noGrp="1"/>
+          </p:cNvSpPr>
+          <p:nvPr>
+            <p:ph type="body" sz="half" idx="2"/>
+          </p:nvPr>
+        </p:nvSpPr>
+        <p:spPr>
+          <a:xfrm>
+            <a:off x="457201" y="1076326"/>
+            <a:ext cx="7930341" cy="3518297"/>
+          </a:xfrm>
+        </p:spPr>
+        <p:txBody>
+          <a:bodyPr>
+            <a:normAutofit fontScale="92500" lnSpcReduction="10000"/>
+          </a:bodyPr>
+          <a:lstStyle/>
+          <a:p>
+            <a:pPr marL="0" lvl="0" indent="0">
+              <a:buNone/>
+            </a:pPr>
+            <a:r>
+              <a:rPr lang="en-US" sz="2800" dirty="0"/>
+              <a:t>For further reading on robust statistical models</a:t>
+            </a:r>
+          </a:p>
+          <a:p>
+            <a:pPr marL="457200" lvl="0" indent="-457200">
+              <a:buFont typeface="Arial" panose="020B0604020202020204" pitchFamily="34" charset="0"/>
+              <a:buChar char="•"/>
+            </a:pPr>
+            <a:r>
+              <a:rPr lang="en-US" sz="2800" dirty="0"/>
+              <a:t>For an up to date broad and deep treatment of theory and practical use of robust models see </a:t>
+            </a:r>
+            <a:r>
+              <a:rPr lang="en-US" sz="2800" dirty="0">
+                <a:hlinkClick r:id="rId2"/>
+              </a:rPr>
+              <a:t>Robust Statistics, Theory and Methods (with R), Second Edition, </a:t>
+            </a:r>
+            <a:r>
+              <a:rPr lang="en-US" sz="2800" dirty="0" err="1">
+                <a:hlinkClick r:id="rId2"/>
+              </a:rPr>
+              <a:t>Maronna</a:t>
+            </a:r>
+            <a:r>
+              <a:rPr lang="en-US" sz="2800" dirty="0">
+                <a:hlinkClick r:id="rId2"/>
+              </a:rPr>
+              <a:t>, Martin, Yohai, </a:t>
+            </a:r>
+            <a:r>
+              <a:rPr lang="en-US" sz="2800" dirty="0" err="1">
+                <a:hlinkClick r:id="rId2"/>
+              </a:rPr>
+              <a:t>Salibian</a:t>
+            </a:r>
+            <a:r>
+              <a:rPr lang="en-US" sz="2800" dirty="0">
+                <a:hlinkClick r:id="rId2"/>
+              </a:rPr>
+              <a:t>-Barrera, Wiley, 2019</a:t>
+            </a:r>
+            <a:r>
+              <a:rPr lang="en-US" sz="2800" dirty="0"/>
+              <a:t>      </a:t>
+            </a:r>
+          </a:p>
+          <a:p>
+            <a:pPr marL="457200" lvl="0" indent="-457200">
+              <a:buFont typeface="Arial" panose="020B0604020202020204" pitchFamily="34" charset="0"/>
+              <a:buChar char="•"/>
+            </a:pPr>
+            <a:r>
+              <a:rPr lang="en-US" sz="2800" dirty="0"/>
+              <a:t>The classic treatment of this subject is Robust Statistics, </a:t>
+            </a:r>
+            <a:r>
+              <a:rPr lang="en-US" sz="2800" dirty="0">
+                <a:hlinkClick r:id="rId3"/>
+              </a:rPr>
+              <a:t>The Approach Based on Influence Functions, Hample, </a:t>
+            </a:r>
+            <a:r>
+              <a:rPr lang="en-US" sz="2800" dirty="0" err="1">
+                <a:hlinkClick r:id="rId3"/>
+              </a:rPr>
+              <a:t>Rousseeuw</a:t>
+            </a:r>
+            <a:r>
+              <a:rPr lang="en-US" sz="2800" dirty="0">
+                <a:hlinkClick r:id="rId3"/>
+              </a:rPr>
+              <a:t>, Ronchetti, Stahel, </a:t>
+            </a:r>
+            <a:r>
+              <a:rPr lang="en-US" sz="2800" dirty="0" err="1">
+                <a:hlinkClick r:id="rId3"/>
+              </a:rPr>
+              <a:t>Weily</a:t>
+            </a:r>
+            <a:r>
+              <a:rPr lang="en-US" sz="2800" dirty="0">
+                <a:hlinkClick r:id="rId3"/>
+              </a:rPr>
+              <a:t>, 1986</a:t>
+            </a:r>
+            <a:endParaRPr lang="en-US" sz="2800" dirty="0"/>
+          </a:p>
+          <a:p>
+            <a:pPr marL="457200" lvl="0" indent="-457200">
+              <a:buFont typeface="Arial" panose="020B0604020202020204" pitchFamily="34" charset="0"/>
+              <a:buChar char="•"/>
+            </a:pPr>
+            <a:endParaRPr lang="en-US" sz="2800" dirty="0"/>
+          </a:p>
+          <a:p>
+            <a:pPr marL="457200" lvl="0" indent="-457200">
+              <a:buFont typeface="Arial" panose="020B0604020202020204" pitchFamily="34" charset="0"/>
+              <a:buChar char="•"/>
+            </a:pPr>
+            <a:endParaRPr sz="2800" dirty="0"/>
+          </a:p>
+        </p:txBody>
+      </p:sp>
+    </p:spTree>
+    <p:extLst>
+      <p:ext uri="{BB962C8B-B14F-4D97-AF65-F5344CB8AC3E}">
+        <p14:creationId xmlns:p14="http://schemas.microsoft.com/office/powerpoint/2010/main" val="1083715279"/>
+      </p:ext>
+    </p:extLst>
+  </p:cSld>
+  <p:clrMapOvr>
+    <a:masterClrMapping/>
+  </p:clrMapOvr>
+</p:sld>
+</file>
+
+<file path=ppt/slides/slide56.xml><?xml version="1.0" encoding="utf-8"?>
 <p:sld xmlns:a="http://schemas.openxmlformats.org/drawingml/2006/main" xmlns:r="http://schemas.openxmlformats.org/officeDocument/2006/relationships" xmlns:p="http://schemas.openxmlformats.org/presentationml/2006/main">
   <p:cSld>
     <p:spTree>
@@ -31382,7 +31904,7 @@
 </p:sld>
 </file>
 
-<file path=ppt/slides/slide56.xml><?xml version="1.0" encoding="utf-8"?>
+<file path=ppt/slides/slide57.xml><?xml version="1.0" encoding="utf-8"?>
 <p:sld xmlns:a="http://schemas.openxmlformats.org/drawingml/2006/main" xmlns:r="http://schemas.openxmlformats.org/officeDocument/2006/relationships" xmlns:p="http://schemas.openxmlformats.org/presentationml/2006/main">
   <p:cSld>
     <p:spTree>
@@ -31461,7 +31983,7 @@
         </p:spPr>
         <p:txBody>
           <a:bodyPr>
-            <a:normAutofit lnSpcReduction="10000"/>
+            <a:normAutofit fontScale="92500" lnSpcReduction="20000"/>
           </a:bodyPr>
           <a:lstStyle/>
           <a:p>
@@ -31470,59 +31992,60 @@
             </a:pPr>
             <a:r>
               <a:rPr lang="en-US" dirty="0"/>
-              <a:t>We can classify missing data patterns into three categories    </a:t>
+              <a:t>Missing values are nearly ubiquitous when working with real-world data    </a:t>
             </a:r>
             <a:endParaRPr dirty="0"/>
           </a:p>
           <a:p>
-            <a:pPr marL="457200" lvl="0" indent="-457200">
-              <a:buFont typeface="+mj-lt"/>
-              <a:buAutoNum type="arabicPeriod"/>
-            </a:pPr>
             <a:r>
               <a:rPr lang="en-US" dirty="0"/>
-              <a:t>Observations that are </a:t>
-            </a:r>
-            <a:r>
-              <a:rPr lang="en-US" b="1" dirty="0"/>
-              <a:t>missing completely at random (MCAR)</a:t>
-            </a:r>
+              <a:t>Incomplete data entry </a:t>
+            </a:r>
+          </a:p>
+          <a:p>
             <a:r>
               <a:rPr lang="en-US" dirty="0"/>
-              <a:t> have missing observations that are a random subset of all observations of a random variable </a:t>
+              <a:t>Dataset results from merging tables with incomplete coverage of variables</a:t>
+            </a:r>
+          </a:p>
+          <a:p>
+            <a:r>
+              <a:rPr lang="en-US" dirty="0"/>
+              <a:t>Scientific, engineering, or medical measurement are sometimes not recorded </a:t>
             </a:r>
           </a:p>
           <a:p>
             <a:pPr lvl="1"/>
             <a:r>
               <a:rPr lang="en-US" dirty="0"/>
-              <a:t>The missing and observed values will have similar distributions in this case</a:t>
-            </a:r>
-          </a:p>
-          <a:p>
-            <a:pPr marL="457200" lvl="0" indent="-457200">
-              <a:buFont typeface="+mj-lt"/>
-              <a:buAutoNum type="arabicPeriod"/>
-            </a:pPr>
+              <a:t>Measurement procedure was skipped</a:t>
+            </a:r>
+          </a:p>
+          <a:p>
+            <a:pPr lvl="1"/>
             <a:r>
               <a:rPr lang="en-US" dirty="0"/>
-              <a:t>Observations that are </a:t>
-            </a:r>
-            <a:r>
-              <a:rPr lang="en-US" b="1" dirty="0"/>
-              <a:t>missing at random (MAR)</a:t>
-            </a:r>
+              <a:t>Instrument failure </a:t>
+            </a:r>
+          </a:p>
+          <a:p>
             <a:r>
               <a:rPr lang="en-US" dirty="0"/>
-              <a:t> have possible systematic differences between the missing and observed values of a random variable. </a:t>
-            </a:r>
-          </a:p>
-          <a:p>
-            <a:pPr lvl="1"/>
+              <a:t>People responding to surveys often skip questions   </a:t>
+            </a:r>
+          </a:p>
+          <a:p>
+            <a:r>
+              <a:rPr lang="en-US" dirty="0" err="1"/>
+              <a:t>Etc</a:t>
+            </a:r>
             <a:r>
               <a:rPr lang="en-US" dirty="0"/>
-              <a:t>MAR values can be entirely explained by other observed variables</a:t>
-            </a:r>
+              <a:t>….</a:t>
+            </a:r>
+          </a:p>
+          <a:p>
+            <a:endParaRPr lang="en-US" dirty="0"/>
           </a:p>
         </p:txBody>
       </p:sp>
@@ -31539,7 +32062,354 @@
 </p:sld>
 </file>
 
-<file path=ppt/slides/slide57.xml><?xml version="1.0" encoding="utf-8"?>
+<file path=ppt/slides/slide58.xml><?xml version="1.0" encoding="utf-8"?>
+<p:sld xmlns:a="http://schemas.openxmlformats.org/drawingml/2006/main" xmlns:r="http://schemas.openxmlformats.org/officeDocument/2006/relationships" xmlns:p="http://schemas.openxmlformats.org/presentationml/2006/main">
+  <p:cSld>
+    <p:spTree>
+      <p:nvGrpSpPr>
+        <p:cNvPr id="1" name="">
+          <a:extLst>
+            <a:ext uri="{FF2B5EF4-FFF2-40B4-BE49-F238E27FC236}">
+              <a16:creationId xmlns:a16="http://schemas.microsoft.com/office/drawing/2014/main" id="{9E646770-BC8B-1B96-0D91-5FE95D882AFC}"/>
+            </a:ext>
+          </a:extLst>
+        </p:cNvPr>
+        <p:cNvGrpSpPr/>
+        <p:nvPr/>
+      </p:nvGrpSpPr>
+      <p:grpSpPr>
+        <a:xfrm>
+          <a:off x="0" y="0"/>
+          <a:ext cx="0" cy="0"/>
+          <a:chOff x="0" y="0"/>
+          <a:chExt cx="0" cy="0"/>
+        </a:xfrm>
+      </p:grpSpPr>
+      <p:sp>
+        <p:nvSpPr>
+          <p:cNvPr id="2" name="Title 1">
+            <a:extLst>
+              <a:ext uri="{FF2B5EF4-FFF2-40B4-BE49-F238E27FC236}">
+                <a16:creationId xmlns:a16="http://schemas.microsoft.com/office/drawing/2014/main" id="{882CB0C6-AF9B-818E-18DC-07CEDC969F69}"/>
+              </a:ext>
+            </a:extLst>
+          </p:cNvPr>
+          <p:cNvSpPr>
+            <a:spLocks noGrp="1"/>
+          </p:cNvSpPr>
+          <p:nvPr>
+            <p:ph type="title"/>
+          </p:nvPr>
+        </p:nvSpPr>
+        <p:spPr/>
+        <p:txBody>
+          <a:bodyPr/>
+          <a:lstStyle/>
+          <a:p>
+            <a:pPr marL="0" lvl="0" indent="0">
+              <a:buNone/>
+            </a:pPr>
+            <a:r>
+              <a:rPr lang="en-US" dirty="0"/>
+              <a:t>Understanding Missing Values</a:t>
+            </a:r>
+            <a:endParaRPr dirty="0"/>
+          </a:p>
+        </p:txBody>
+      </p:sp>
+      <p:sp>
+        <p:nvSpPr>
+          <p:cNvPr id="3" name="Content Placeholder 2">
+            <a:extLst>
+              <a:ext uri="{FF2B5EF4-FFF2-40B4-BE49-F238E27FC236}">
+                <a16:creationId xmlns:a16="http://schemas.microsoft.com/office/drawing/2014/main" id="{7983A709-CA0A-9F7C-F2BB-9106EACE107B}"/>
+              </a:ext>
+            </a:extLst>
+          </p:cNvPr>
+          <p:cNvSpPr>
+            <a:spLocks noGrp="1"/>
+          </p:cNvSpPr>
+          <p:nvPr>
+            <p:ph idx="1"/>
+          </p:nvPr>
+        </p:nvSpPr>
+        <p:spPr>
+          <a:xfrm>
+            <a:off x="457200" y="1200151"/>
+            <a:ext cx="8229600" cy="3737370"/>
+          </a:xfrm>
+        </p:spPr>
+        <p:txBody>
+          <a:bodyPr>
+            <a:normAutofit lnSpcReduction="10000"/>
+          </a:bodyPr>
+          <a:lstStyle/>
+          <a:p>
+            <a:pPr marL="0" lvl="0" indent="0">
+              <a:buNone/>
+            </a:pPr>
+            <a:r>
+              <a:rPr lang="en-US" dirty="0"/>
+              <a:t>We can classify missing data patterns into three categories    </a:t>
+            </a:r>
+            <a:endParaRPr dirty="0"/>
+          </a:p>
+          <a:p>
+            <a:pPr marL="457200" lvl="0" indent="-457200">
+              <a:buFont typeface="+mj-lt"/>
+              <a:buAutoNum type="arabicPeriod"/>
+            </a:pPr>
+            <a:r>
+              <a:rPr lang="en-US" dirty="0"/>
+              <a:t>Observations that are </a:t>
+            </a:r>
+            <a:r>
+              <a:rPr lang="en-US" b="1" dirty="0"/>
+              <a:t>missing completely at random (MCAR)</a:t>
+            </a:r>
+            <a:r>
+              <a:rPr lang="en-US" dirty="0"/>
+              <a:t> have missing observations that are a random subset of all observations of a random variable </a:t>
+            </a:r>
+          </a:p>
+          <a:p>
+            <a:pPr lvl="1"/>
+            <a:r>
+              <a:rPr lang="en-US" dirty="0"/>
+              <a:t>The missing and observed values will have similar distributions in this case</a:t>
+            </a:r>
+          </a:p>
+          <a:p>
+            <a:pPr marL="457200" lvl="0" indent="-457200">
+              <a:buFont typeface="+mj-lt"/>
+              <a:buAutoNum type="arabicPeriod"/>
+            </a:pPr>
+            <a:r>
+              <a:rPr lang="en-US" dirty="0"/>
+              <a:t>Observations that are </a:t>
+            </a:r>
+            <a:r>
+              <a:rPr lang="en-US" b="1" dirty="0"/>
+              <a:t>missing at random (MAR)</a:t>
+            </a:r>
+            <a:r>
+              <a:rPr lang="en-US" dirty="0"/>
+              <a:t> have possible systematic differences between the missing and observed values of a random variable. </a:t>
+            </a:r>
+          </a:p>
+          <a:p>
+            <a:pPr lvl="1"/>
+            <a:r>
+              <a:rPr lang="en-US" dirty="0"/>
+              <a:t>MAR values can be entirely explained by other observed variables</a:t>
+            </a:r>
+          </a:p>
+        </p:txBody>
+      </p:sp>
+    </p:spTree>
+    <p:extLst>
+      <p:ext uri="{BB962C8B-B14F-4D97-AF65-F5344CB8AC3E}">
+        <p14:creationId xmlns:p14="http://schemas.microsoft.com/office/powerpoint/2010/main" val="2717070860"/>
+      </p:ext>
+    </p:extLst>
+  </p:cSld>
+  <p:clrMapOvr>
+    <a:masterClrMapping/>
+  </p:clrMapOvr>
+  <p:timing>
+    <p:tnLst>
+      <p:par>
+        <p:cTn id="1" dur="indefinite" restart="never" nodeType="tmRoot">
+          <p:childTnLst>
+            <p:seq concurrent="1" nextAc="seek">
+              <p:cTn id="2" dur="indefinite" nodeType="mainSeq">
+                <p:childTnLst>
+                  <p:par>
+                    <p:cTn id="3" fill="hold">
+                      <p:stCondLst>
+                        <p:cond delay="indefinite"/>
+                      </p:stCondLst>
+                      <p:childTnLst>
+                        <p:par>
+                          <p:cTn id="4" fill="hold">
+                            <p:stCondLst>
+                              <p:cond delay="0"/>
+                            </p:stCondLst>
+                            <p:childTnLst>
+                              <p:par>
+                                <p:cTn id="5" presetID="1" presetClass="entr" presetSubtype="0" fill="hold" nodeType="clickEffect">
+                                  <p:stCondLst>
+                                    <p:cond delay="0"/>
+                                  </p:stCondLst>
+                                  <p:childTnLst>
+                                    <p:set>
+                                      <p:cBhvr>
+                                        <p:cTn id="6" dur="1" fill="hold">
+                                          <p:stCondLst>
+                                            <p:cond delay="0"/>
+                                          </p:stCondLst>
+                                        </p:cTn>
+                                        <p:tgtEl>
+                                          <p:spTgt spid="3">
+                                            <p:txEl>
+                                              <p:pRg st="1" end="1"/>
+                                            </p:txEl>
+                                          </p:spTgt>
+                                        </p:tgtEl>
+                                        <p:attrNameLst>
+                                          <p:attrName>style.visibility</p:attrName>
+                                        </p:attrNameLst>
+                                      </p:cBhvr>
+                                      <p:to>
+                                        <p:strVal val="visible"/>
+                                      </p:to>
+                                    </p:set>
+                                  </p:childTnLst>
+                                </p:cTn>
+                              </p:par>
+                              <p:par>
+                                <p:cTn id="7" presetID="1" presetClass="entr" presetSubtype="0" fill="hold" nodeType="withEffect">
+                                  <p:stCondLst>
+                                    <p:cond delay="0"/>
+                                  </p:stCondLst>
+                                  <p:childTnLst>
+                                    <p:set>
+                                      <p:cBhvr>
+                                        <p:cTn id="8" dur="1" fill="hold">
+                                          <p:stCondLst>
+                                            <p:cond delay="0"/>
+                                          </p:stCondLst>
+                                        </p:cTn>
+                                        <p:tgtEl>
+                                          <p:spTgt spid="3">
+                                            <p:txEl>
+                                              <p:pRg st="2" end="2"/>
+                                            </p:txEl>
+                                          </p:spTgt>
+                                        </p:tgtEl>
+                                        <p:attrNameLst>
+                                          <p:attrName>style.visibility</p:attrName>
+                                        </p:attrNameLst>
+                                      </p:cBhvr>
+                                      <p:to>
+                                        <p:strVal val="visible"/>
+                                      </p:to>
+                                    </p:set>
+                                  </p:childTnLst>
+                                </p:cTn>
+                              </p:par>
+                            </p:childTnLst>
+                          </p:cTn>
+                        </p:par>
+                      </p:childTnLst>
+                    </p:cTn>
+                  </p:par>
+                  <p:par>
+                    <p:cTn id="9" fill="hold">
+                      <p:stCondLst>
+                        <p:cond delay="indefinite"/>
+                      </p:stCondLst>
+                      <p:childTnLst>
+                        <p:par>
+                          <p:cTn id="10" fill="hold">
+                            <p:stCondLst>
+                              <p:cond delay="0"/>
+                            </p:stCondLst>
+                            <p:childTnLst>
+                              <p:par>
+                                <p:cTn id="11" presetID="1" presetClass="entr" presetSubtype="0" fill="hold" nodeType="clickEffect">
+                                  <p:stCondLst>
+                                    <p:cond delay="0"/>
+                                  </p:stCondLst>
+                                  <p:childTnLst>
+                                    <p:set>
+                                      <p:cBhvr>
+                                        <p:cTn id="12" dur="1" fill="hold">
+                                          <p:stCondLst>
+                                            <p:cond delay="0"/>
+                                          </p:stCondLst>
+                                        </p:cTn>
+                                        <p:tgtEl>
+                                          <p:spTgt spid="3">
+                                            <p:txEl>
+                                              <p:pRg st="3" end="3"/>
+                                            </p:txEl>
+                                          </p:spTgt>
+                                        </p:tgtEl>
+                                        <p:attrNameLst>
+                                          <p:attrName>style.visibility</p:attrName>
+                                        </p:attrNameLst>
+                                      </p:cBhvr>
+                                      <p:to>
+                                        <p:strVal val="visible"/>
+                                      </p:to>
+                                    </p:set>
+                                  </p:childTnLst>
+                                </p:cTn>
+                              </p:par>
+                              <p:par>
+                                <p:cTn id="13" presetID="1" presetClass="entr" presetSubtype="0" fill="hold" nodeType="withEffect">
+                                  <p:stCondLst>
+                                    <p:cond delay="0"/>
+                                  </p:stCondLst>
+                                  <p:childTnLst>
+                                    <p:set>
+                                      <p:cBhvr>
+                                        <p:cTn id="14" dur="1" fill="hold">
+                                          <p:stCondLst>
+                                            <p:cond delay="0"/>
+                                          </p:stCondLst>
+                                        </p:cTn>
+                                        <p:tgtEl>
+                                          <p:spTgt spid="3">
+                                            <p:txEl>
+                                              <p:pRg st="4" end="4"/>
+                                            </p:txEl>
+                                          </p:spTgt>
+                                        </p:tgtEl>
+                                        <p:attrNameLst>
+                                          <p:attrName>style.visibility</p:attrName>
+                                        </p:attrNameLst>
+                                      </p:cBhvr>
+                                      <p:to>
+                                        <p:strVal val="visible"/>
+                                      </p:to>
+                                    </p:set>
+                                  </p:childTnLst>
+                                </p:cTn>
+                              </p:par>
+                            </p:childTnLst>
+                          </p:cTn>
+                        </p:par>
+                      </p:childTnLst>
+                    </p:cTn>
+                  </p:par>
+                </p:childTnLst>
+              </p:cTn>
+              <p:prevCondLst>
+                <p:cond evt="onPrev" delay="0">
+                  <p:tgtEl>
+                    <p:sldTgt/>
+                  </p:tgtEl>
+                </p:cond>
+              </p:prevCondLst>
+              <p:nextCondLst>
+                <p:cond evt="onNext" delay="0">
+                  <p:tgtEl>
+                    <p:sldTgt/>
+                  </p:tgtEl>
+                </p:cond>
+              </p:nextCondLst>
+            </p:seq>
+          </p:childTnLst>
+        </p:cTn>
+      </p:par>
+    </p:tnLst>
+  </p:timing>
+</p:sld>
+</file>
+
+<file path=ppt/slides/slide59.xml><?xml version="1.0" encoding="utf-8"?>
 <p:sld xmlns:a="http://schemas.openxmlformats.org/drawingml/2006/main" xmlns:r="http://schemas.openxmlformats.org/officeDocument/2006/relationships" xmlns:p="http://schemas.openxmlformats.org/presentationml/2006/main">
   <p:cSld>
     <p:spTree>
@@ -31665,631 +32535,6 @@
     <p:extLst>
       <p:ext uri="{BB962C8B-B14F-4D97-AF65-F5344CB8AC3E}">
         <p14:creationId xmlns:p14="http://schemas.microsoft.com/office/powerpoint/2010/main" val="3839456846"/>
-      </p:ext>
-    </p:extLst>
-  </p:cSld>
-  <p:clrMapOvr>
-    <a:masterClrMapping/>
-  </p:clrMapOvr>
-</p:sld>
-</file>
-
-<file path=ppt/slides/slide58.xml><?xml version="1.0" encoding="utf-8"?>
-<p:sld xmlns:a="http://schemas.openxmlformats.org/drawingml/2006/main" xmlns:r="http://schemas.openxmlformats.org/officeDocument/2006/relationships" xmlns:p="http://schemas.openxmlformats.org/presentationml/2006/main">
-  <p:cSld>
-    <p:spTree>
-      <p:nvGrpSpPr>
-        <p:cNvPr id="1" name="">
-          <a:extLst>
-            <a:ext uri="{FF2B5EF4-FFF2-40B4-BE49-F238E27FC236}">
-              <a16:creationId xmlns:a16="http://schemas.microsoft.com/office/drawing/2014/main" id="{DA02ECB3-6BBE-DCFD-B036-32887A538AC9}"/>
-            </a:ext>
-          </a:extLst>
-        </p:cNvPr>
-        <p:cNvGrpSpPr/>
-        <p:nvPr/>
-      </p:nvGrpSpPr>
-      <p:grpSpPr>
-        <a:xfrm>
-          <a:off x="0" y="0"/>
-          <a:ext cx="0" cy="0"/>
-          <a:chOff x="0" y="0"/>
-          <a:chExt cx="0" cy="0"/>
-        </a:xfrm>
-      </p:grpSpPr>
-      <p:sp>
-        <p:nvSpPr>
-          <p:cNvPr id="2" name="Title 1">
-            <a:extLst>
-              <a:ext uri="{FF2B5EF4-FFF2-40B4-BE49-F238E27FC236}">
-                <a16:creationId xmlns:a16="http://schemas.microsoft.com/office/drawing/2014/main" id="{6DD8DEE9-EFE3-5E17-CBBA-D4D63BA5D13C}"/>
-              </a:ext>
-            </a:extLst>
-          </p:cNvPr>
-          <p:cNvSpPr>
-            <a:spLocks noGrp="1"/>
-          </p:cNvSpPr>
-          <p:nvPr>
-            <p:ph type="title"/>
-          </p:nvPr>
-        </p:nvSpPr>
-        <p:spPr/>
-        <p:txBody>
-          <a:bodyPr/>
-          <a:lstStyle/>
-          <a:p>
-            <a:pPr marL="0" lvl="0" indent="0">
-              <a:buNone/>
-            </a:pPr>
-            <a:r>
-              <a:rPr lang="en-US" dirty="0"/>
-              <a:t>Understanding Missing Values</a:t>
-            </a:r>
-            <a:endParaRPr dirty="0"/>
-          </a:p>
-        </p:txBody>
-      </p:sp>
-      <p:sp>
-        <p:nvSpPr>
-          <p:cNvPr id="3" name="Content Placeholder 2">
-            <a:extLst>
-              <a:ext uri="{FF2B5EF4-FFF2-40B4-BE49-F238E27FC236}">
-                <a16:creationId xmlns:a16="http://schemas.microsoft.com/office/drawing/2014/main" id="{C5512292-9EC6-85A5-8689-82BEEAD3493E}"/>
-              </a:ext>
-            </a:extLst>
-          </p:cNvPr>
-          <p:cNvSpPr>
-            <a:spLocks noGrp="1"/>
-          </p:cNvSpPr>
-          <p:nvPr>
-            <p:ph idx="1"/>
-          </p:nvPr>
-        </p:nvSpPr>
-        <p:spPr>
-          <a:xfrm>
-            <a:off x="429610" y="924711"/>
-            <a:ext cx="8229600" cy="510408"/>
-          </a:xfrm>
-        </p:spPr>
-        <p:txBody>
-          <a:bodyPr>
-            <a:normAutofit/>
-          </a:bodyPr>
-          <a:lstStyle/>
-          <a:p>
-            <a:pPr marL="0" lvl="0" indent="0">
-              <a:buNone/>
-            </a:pPr>
-            <a:r>
-              <a:rPr lang="en-US" dirty="0"/>
-              <a:t>Exploring missing data patterns </a:t>
-            </a:r>
-          </a:p>
-        </p:txBody>
-      </p:sp>
-      <p:pic>
-        <p:nvPicPr>
-          <p:cNvPr id="6" name="Picture 5">
-            <a:extLst>
-              <a:ext uri="{FF2B5EF4-FFF2-40B4-BE49-F238E27FC236}">
-                <a16:creationId xmlns:a16="http://schemas.microsoft.com/office/drawing/2014/main" id="{EB6F8BBD-102D-4477-D7E5-A856650979A0}"/>
-              </a:ext>
-            </a:extLst>
-          </p:cNvPr>
-          <p:cNvPicPr>
-            <a:picLocks noChangeAspect="1"/>
-          </p:cNvPicPr>
-          <p:nvPr/>
-        </p:nvPicPr>
-        <p:blipFill>
-          <a:blip r:embed="rId2"/>
-          <a:stretch>
-            <a:fillRect/>
-          </a:stretch>
-        </p:blipFill>
-        <p:spPr>
-          <a:xfrm>
-            <a:off x="3565027" y="1730266"/>
-            <a:ext cx="5578973" cy="2982102"/>
-          </a:xfrm>
-          <a:prstGeom prst="rect">
-            <a:avLst/>
-          </a:prstGeom>
-        </p:spPr>
-      </p:pic>
-      <p:sp>
-        <p:nvSpPr>
-          <p:cNvPr id="7" name="Content Placeholder 2">
-            <a:extLst>
-              <a:ext uri="{FF2B5EF4-FFF2-40B4-BE49-F238E27FC236}">
-                <a16:creationId xmlns:a16="http://schemas.microsoft.com/office/drawing/2014/main" id="{0D483E30-C1C6-1F1B-F030-57B9C64F5F97}"/>
-              </a:ext>
-            </a:extLst>
-          </p:cNvPr>
-          <p:cNvSpPr txBox="1">
-            <a:spLocks/>
-          </p:cNvSpPr>
-          <p:nvPr/>
-        </p:nvSpPr>
-        <p:spPr>
-          <a:xfrm>
-            <a:off x="457200" y="1399674"/>
-            <a:ext cx="3007895" cy="3621505"/>
-          </a:xfrm>
-          <a:prstGeom prst="rect">
-            <a:avLst/>
-          </a:prstGeom>
-        </p:spPr>
-        <p:txBody>
-          <a:bodyPr vert="horz" lIns="91440" tIns="45720" rIns="91440" bIns="45720" rtlCol="0">
-            <a:normAutofit/>
-          </a:bodyPr>
-          <a:lstStyle>
-            <a:lvl1pPr marL="342900" indent="-342900" algn="l" defTabSz="342900" rtl="0" eaLnBrk="1" latinLnBrk="0" hangingPunct="1">
-              <a:spcBef>
-                <a:spcPct val="20000"/>
-              </a:spcBef>
-              <a:buFont typeface="Arial"/>
-              <a:buChar char="•"/>
-              <a:defRPr sz="2400" kern="1200">
-                <a:solidFill>
-                  <a:schemeClr val="tx1"/>
-                </a:solidFill>
-                <a:latin typeface="+mn-lt"/>
-                <a:ea typeface="+mn-ea"/>
-                <a:cs typeface="+mn-cs"/>
-              </a:defRPr>
-            </a:lvl1pPr>
-            <a:lvl2pPr marL="685800" indent="-342900" algn="l" defTabSz="342900" rtl="0" eaLnBrk="1" latinLnBrk="0" hangingPunct="1">
-              <a:spcBef>
-                <a:spcPct val="20000"/>
-              </a:spcBef>
-              <a:buFont typeface="Arial"/>
-              <a:buChar char="–"/>
-              <a:defRPr sz="2100" kern="1200">
-                <a:solidFill>
-                  <a:schemeClr val="tx1"/>
-                </a:solidFill>
-                <a:latin typeface="+mn-lt"/>
-                <a:ea typeface="+mn-ea"/>
-                <a:cs typeface="+mn-cs"/>
-              </a:defRPr>
-            </a:lvl2pPr>
-            <a:lvl3pPr marL="1028700" indent="-342900" algn="l" defTabSz="342900" rtl="0" eaLnBrk="1" latinLnBrk="0" hangingPunct="1">
-              <a:spcBef>
-                <a:spcPct val="20000"/>
-              </a:spcBef>
-              <a:buFont typeface="Arial"/>
-              <a:buChar char="•"/>
-              <a:defRPr sz="1800" kern="1200">
-                <a:solidFill>
-                  <a:schemeClr val="tx1"/>
-                </a:solidFill>
-                <a:latin typeface="+mn-lt"/>
-                <a:ea typeface="+mn-ea"/>
-                <a:cs typeface="+mn-cs"/>
-              </a:defRPr>
-            </a:lvl3pPr>
-            <a:lvl4pPr marL="1371600" indent="-342900" algn="l" defTabSz="342900" rtl="0" eaLnBrk="1" latinLnBrk="0" hangingPunct="1">
-              <a:spcBef>
-                <a:spcPct val="20000"/>
-              </a:spcBef>
-              <a:buFont typeface="Arial"/>
-              <a:buChar char="–"/>
-              <a:defRPr sz="1500" kern="1200">
-                <a:solidFill>
-                  <a:schemeClr val="tx1"/>
-                </a:solidFill>
-                <a:latin typeface="+mn-lt"/>
-                <a:ea typeface="+mn-ea"/>
-                <a:cs typeface="+mn-cs"/>
-              </a:defRPr>
-            </a:lvl4pPr>
-            <a:lvl5pPr marL="1714500" indent="-342900" algn="l" defTabSz="342900" rtl="0" eaLnBrk="1" latinLnBrk="0" hangingPunct="1">
-              <a:spcBef>
-                <a:spcPct val="20000"/>
-              </a:spcBef>
-              <a:buFont typeface="Arial"/>
-              <a:buChar char="»"/>
-              <a:defRPr sz="1500" kern="1200">
-                <a:solidFill>
-                  <a:schemeClr val="tx1"/>
-                </a:solidFill>
-                <a:latin typeface="+mn-lt"/>
-                <a:ea typeface="+mn-ea"/>
-                <a:cs typeface="+mn-cs"/>
-              </a:defRPr>
-            </a:lvl5pPr>
-            <a:lvl6pPr marL="2057400" indent="-342900" algn="l" defTabSz="342900" rtl="0" eaLnBrk="1" latinLnBrk="0" hangingPunct="1">
-              <a:spcBef>
-                <a:spcPct val="20000"/>
-              </a:spcBef>
-              <a:buFont typeface="Arial"/>
-              <a:buChar char="•"/>
-              <a:defRPr sz="1500" kern="1200">
-                <a:solidFill>
-                  <a:schemeClr val="tx1"/>
-                </a:solidFill>
-                <a:latin typeface="+mn-lt"/>
-                <a:ea typeface="+mn-ea"/>
-                <a:cs typeface="+mn-cs"/>
-              </a:defRPr>
-            </a:lvl6pPr>
-            <a:lvl7pPr marL="2400300" indent="-342900" algn="l" defTabSz="342900" rtl="0" eaLnBrk="1" latinLnBrk="0" hangingPunct="1">
-              <a:spcBef>
-                <a:spcPct val="20000"/>
-              </a:spcBef>
-              <a:buFont typeface="Arial"/>
-              <a:buChar char="•"/>
-              <a:defRPr sz="1500" kern="1200">
-                <a:solidFill>
-                  <a:schemeClr val="tx1"/>
-                </a:solidFill>
-                <a:latin typeface="+mn-lt"/>
-                <a:ea typeface="+mn-ea"/>
-                <a:cs typeface="+mn-cs"/>
-              </a:defRPr>
-            </a:lvl7pPr>
-            <a:lvl8pPr marL="2743200" indent="-342900" algn="l" defTabSz="342900" rtl="0" eaLnBrk="1" latinLnBrk="0" hangingPunct="1">
-              <a:spcBef>
-                <a:spcPct val="20000"/>
-              </a:spcBef>
-              <a:buFont typeface="Arial"/>
-              <a:buChar char="•"/>
-              <a:defRPr sz="1500" kern="1200">
-                <a:solidFill>
-                  <a:schemeClr val="tx1"/>
-                </a:solidFill>
-                <a:latin typeface="+mn-lt"/>
-                <a:ea typeface="+mn-ea"/>
-                <a:cs typeface="+mn-cs"/>
-              </a:defRPr>
-            </a:lvl8pPr>
-            <a:lvl9pPr marL="3086100" indent="-342900" algn="l" defTabSz="342900" rtl="0" eaLnBrk="1" latinLnBrk="0" hangingPunct="1">
-              <a:spcBef>
-                <a:spcPct val="20000"/>
-              </a:spcBef>
-              <a:buFont typeface="Arial"/>
-              <a:buChar char="•"/>
-              <a:defRPr sz="1500" kern="1200">
-                <a:solidFill>
-                  <a:schemeClr val="tx1"/>
-                </a:solidFill>
-                <a:latin typeface="+mn-lt"/>
-                <a:ea typeface="+mn-ea"/>
-                <a:cs typeface="+mn-cs"/>
-              </a:defRPr>
-            </a:lvl9pPr>
-          </a:lstStyle>
-          <a:p>
-            <a:r>
-              <a:rPr lang="en-US" dirty="0"/>
-              <a:t>Plot reveals missing value pattern in variables by row         </a:t>
-            </a:r>
-          </a:p>
-          <a:p>
-            <a:r>
-              <a:rPr lang="en-US" dirty="0"/>
-              <a:t>Some rows have only one missing value</a:t>
-            </a:r>
-          </a:p>
-          <a:p>
-            <a:r>
-              <a:rPr lang="en-US" dirty="0"/>
-              <a:t>Other rows have multiple missing values  </a:t>
-            </a:r>
-          </a:p>
-        </p:txBody>
-      </p:sp>
-    </p:spTree>
-    <p:extLst>
-      <p:ext uri="{BB962C8B-B14F-4D97-AF65-F5344CB8AC3E}">
-        <p14:creationId xmlns:p14="http://schemas.microsoft.com/office/powerpoint/2010/main" val="3028361265"/>
-      </p:ext>
-    </p:extLst>
-  </p:cSld>
-  <p:clrMapOvr>
-    <a:masterClrMapping/>
-  </p:clrMapOvr>
-</p:sld>
-</file>
-
-<file path=ppt/slides/slide59.xml><?xml version="1.0" encoding="utf-8"?>
-<p:sld xmlns:a="http://schemas.openxmlformats.org/drawingml/2006/main" xmlns:r="http://schemas.openxmlformats.org/officeDocument/2006/relationships" xmlns:p="http://schemas.openxmlformats.org/presentationml/2006/main">
-  <p:cSld>
-    <p:spTree>
-      <p:nvGrpSpPr>
-        <p:cNvPr id="1" name="">
-          <a:extLst>
-            <a:ext uri="{FF2B5EF4-FFF2-40B4-BE49-F238E27FC236}">
-              <a16:creationId xmlns:a16="http://schemas.microsoft.com/office/drawing/2014/main" id="{3D44FDFC-4F69-DFB8-A2BC-CF8EB3C07576}"/>
-            </a:ext>
-          </a:extLst>
-        </p:cNvPr>
-        <p:cNvGrpSpPr/>
-        <p:nvPr/>
-      </p:nvGrpSpPr>
-      <p:grpSpPr>
-        <a:xfrm>
-          <a:off x="0" y="0"/>
-          <a:ext cx="0" cy="0"/>
-          <a:chOff x="0" y="0"/>
-          <a:chExt cx="0" cy="0"/>
-        </a:xfrm>
-      </p:grpSpPr>
-      <p:sp>
-        <p:nvSpPr>
-          <p:cNvPr id="2" name="Title 1">
-            <a:extLst>
-              <a:ext uri="{FF2B5EF4-FFF2-40B4-BE49-F238E27FC236}">
-                <a16:creationId xmlns:a16="http://schemas.microsoft.com/office/drawing/2014/main" id="{91A30F1C-4589-D04C-A165-DD3A86E76EE2}"/>
-              </a:ext>
-            </a:extLst>
-          </p:cNvPr>
-          <p:cNvSpPr>
-            <a:spLocks noGrp="1"/>
-          </p:cNvSpPr>
-          <p:nvPr>
-            <p:ph type="title"/>
-          </p:nvPr>
-        </p:nvSpPr>
-        <p:spPr/>
-        <p:txBody>
-          <a:bodyPr/>
-          <a:lstStyle/>
-          <a:p>
-            <a:pPr marL="0" lvl="0" indent="0">
-              <a:buNone/>
-            </a:pPr>
-            <a:r>
-              <a:rPr lang="en-US" dirty="0"/>
-              <a:t>Understanding Missing Values</a:t>
-            </a:r>
-            <a:endParaRPr dirty="0"/>
-          </a:p>
-        </p:txBody>
-      </p:sp>
-      <mc:AlternateContent xmlns:mc="http://schemas.openxmlformats.org/markup-compatibility/2006" xmlns:a14="http://schemas.microsoft.com/office/drawing/2010/main">
-        <mc:Choice Requires="a14">
-          <p:sp>
-            <p:nvSpPr>
-              <p:cNvPr id="3" name="Content Placeholder 2">
-                <a:extLst>
-                  <a:ext uri="{FF2B5EF4-FFF2-40B4-BE49-F238E27FC236}">
-                    <a16:creationId xmlns:a16="http://schemas.microsoft.com/office/drawing/2014/main" id="{94599B7E-B879-000C-DCA7-404F6FA7D88B}"/>
-                  </a:ext>
-                </a:extLst>
-              </p:cNvPr>
-              <p:cNvSpPr>
-                <a:spLocks noGrp="1"/>
-              </p:cNvSpPr>
-              <p:nvPr>
-                <p:ph idx="1"/>
-              </p:nvPr>
-            </p:nvSpPr>
-            <p:spPr>
-              <a:xfrm>
-                <a:off x="457200" y="1200151"/>
-                <a:ext cx="8229600" cy="3737370"/>
-              </a:xfrm>
-            </p:spPr>
-            <p:txBody>
-              <a:bodyPr>
-                <a:normAutofit lnSpcReduction="10000"/>
-              </a:bodyPr>
-              <a:lstStyle/>
-              <a:p>
-                <a:pPr marL="0" lvl="0" indent="0">
-                  <a:buNone/>
-                </a:pPr>
-                <a:r>
-                  <a:rPr lang="en-US" dirty="0"/>
-                  <a:t>We can use </a:t>
-                </a:r>
-                <a:r>
-                  <a:rPr lang="en-US" b="1" dirty="0"/>
-                  <a:t>Little’s MCAR test </a:t>
-                </a:r>
-                <a:r>
-                  <a:rPr lang="en-US" dirty="0"/>
-                  <a:t>to support a hypothesis of a missing pattern</a:t>
-                </a:r>
-              </a:p>
-              <a:p>
-                <a:r>
-                  <a:rPr lang="en-US" b="1" dirty="0"/>
-                  <a:t>Test Statistic: </a:t>
-                </a:r>
-                <a:r>
-                  <a:rPr lang="en-US" dirty="0"/>
-                  <a:t>Observed means across different missing data patterns with expected population means are chi-square (χ²) distributed </a:t>
-                </a:r>
-              </a:p>
-              <a:p>
-                <a:pPr lvl="0"/>
-                <a:r>
-                  <a:rPr lang="en-US" b="1" dirty="0"/>
-                  <a:t>Null Hypothesis </a:t>
-                </a:r>
-                <a14:m>
-                  <m:oMath xmlns:m="http://schemas.openxmlformats.org/officeDocument/2006/math">
-                    <m:d>
-                      <m:dPr>
-                        <m:ctrlPr>
-                          <a:rPr lang="en-US" b="1" i="1" smtClean="0">
-                            <a:latin typeface="Cambria Math" panose="02040503050406030204" pitchFamily="18" charset="0"/>
-                          </a:rPr>
-                        </m:ctrlPr>
-                      </m:dPr>
-                      <m:e>
-                        <m:sSub>
-                          <m:sSubPr>
-                            <m:ctrlPr>
-                              <a:rPr lang="en-US" b="1" i="1" smtClean="0">
-                                <a:latin typeface="Cambria Math" panose="02040503050406030204" pitchFamily="18" charset="0"/>
-                              </a:rPr>
-                            </m:ctrlPr>
-                          </m:sSubPr>
-                          <m:e>
-                            <m:r>
-                              <a:rPr lang="en-US" b="1" i="1" smtClean="0">
-                                <a:latin typeface="Cambria Math" panose="02040503050406030204" pitchFamily="18" charset="0"/>
-                              </a:rPr>
-                              <m:t>𝑯</m:t>
-                            </m:r>
-                          </m:e>
-                          <m:sub>
-                            <m:r>
-                              <a:rPr lang="en-US" b="1" i="1" smtClean="0">
-                                <a:latin typeface="Cambria Math" panose="02040503050406030204" pitchFamily="18" charset="0"/>
-                              </a:rPr>
-                              <m:t>𝟎</m:t>
-                            </m:r>
-                          </m:sub>
-                        </m:sSub>
-                      </m:e>
-                    </m:d>
-                  </m:oMath>
-                </a14:m>
-                <a:r>
-                  <a:rPr lang="en-US" b="1" dirty="0"/>
-                  <a:t>:</a:t>
-                </a:r>
-                <a:r>
-                  <a:rPr lang="en-US" dirty="0"/>
-                  <a:t> The data are Missing Completely at Random</a:t>
-                </a:r>
-              </a:p>
-              <a:p>
-                <a:pPr lvl="1"/>
-                <a:r>
-                  <a:rPr lang="en-US" dirty="0"/>
-                  <a:t>The missing values do not depend on the data values)</a:t>
-                </a:r>
-              </a:p>
-              <a:p>
-                <a:pPr lvl="1"/>
-                <a:r>
-                  <a:rPr lang="en-US" b="1" dirty="0"/>
-                  <a:t>Alternative Hypothesis </a:t>
-                </a:r>
-                <a14:m>
-                  <m:oMath xmlns:m="http://schemas.openxmlformats.org/officeDocument/2006/math">
-                    <m:d>
-                      <m:dPr>
-                        <m:ctrlPr>
-                          <a:rPr lang="en-US" b="1" i="1">
-                            <a:latin typeface="Cambria Math" panose="02040503050406030204" pitchFamily="18" charset="0"/>
-                          </a:rPr>
-                        </m:ctrlPr>
-                      </m:dPr>
-                      <m:e>
-                        <m:sSub>
-                          <m:sSubPr>
-                            <m:ctrlPr>
-                              <a:rPr lang="en-US" b="1" i="1">
-                                <a:latin typeface="Cambria Math" panose="02040503050406030204" pitchFamily="18" charset="0"/>
-                              </a:rPr>
-                            </m:ctrlPr>
-                          </m:sSubPr>
-                          <m:e>
-                            <m:r>
-                              <a:rPr lang="en-US" b="1" i="1">
-                                <a:latin typeface="Cambria Math" panose="02040503050406030204" pitchFamily="18" charset="0"/>
-                              </a:rPr>
-                              <m:t>𝑯</m:t>
-                            </m:r>
-                          </m:e>
-                          <m:sub>
-                            <m:r>
-                              <a:rPr lang="en-US" b="1" i="1" smtClean="0">
-                                <a:latin typeface="Cambria Math" panose="02040503050406030204" pitchFamily="18" charset="0"/>
-                              </a:rPr>
-                              <m:t>𝒂</m:t>
-                            </m:r>
-                          </m:sub>
-                        </m:sSub>
-                      </m:e>
-                    </m:d>
-                    <m:r>
-                      <a:rPr lang="en-US" b="1" i="1">
-                        <a:latin typeface="Cambria Math" panose="02040503050406030204" pitchFamily="18" charset="0"/>
-                      </a:rPr>
-                      <m:t> </m:t>
-                    </m:r>
-                  </m:oMath>
-                </a14:m>
-                <a:r>
-                  <a:rPr lang="en-US" b="1" dirty="0"/>
-                  <a:t>:</a:t>
-                </a:r>
-                <a:r>
-                  <a:rPr lang="en-US" dirty="0"/>
-                  <a:t> Data are </a:t>
-                </a:r>
-                <a:r>
-                  <a:rPr lang="en-US" i="1" dirty="0"/>
-                  <a:t>not</a:t>
-                </a:r>
-                <a:r>
-                  <a:rPr lang="en-US" dirty="0"/>
-                  <a:t> Missing Completely at Random</a:t>
-                </a:r>
-              </a:p>
-              <a:p>
-                <a:endParaRPr dirty="0"/>
-              </a:p>
-            </p:txBody>
-          </p:sp>
-        </mc:Choice>
-        <mc:Fallback xmlns="">
-          <p:sp>
-            <p:nvSpPr>
-              <p:cNvPr id="3" name="Content Placeholder 2">
-                <a:extLst>
-                  <a:ext uri="{FF2B5EF4-FFF2-40B4-BE49-F238E27FC236}">
-                    <a16:creationId xmlns:a16="http://schemas.microsoft.com/office/drawing/2014/main" id="{94599B7E-B879-000C-DCA7-404F6FA7D88B}"/>
-                  </a:ext>
-                </a:extLst>
-              </p:cNvPr>
-              <p:cNvSpPr>
-                <a:spLocks noGrp="1" noRot="1" noChangeAspect="1" noMove="1" noResize="1" noEditPoints="1" noAdjustHandles="1" noChangeArrowheads="1" noChangeShapeType="1" noTextEdit="1"/>
-              </p:cNvSpPr>
-              <p:nvPr>
-                <p:ph idx="1"/>
-              </p:nvPr>
-            </p:nvSpPr>
-            <p:spPr>
-              <a:xfrm>
-                <a:off x="457200" y="1200151"/>
-                <a:ext cx="8229600" cy="3737370"/>
-              </a:xfrm>
-              <a:blipFill>
-                <a:blip r:embed="rId2"/>
-                <a:stretch>
-                  <a:fillRect l="-1111" t="-2284"/>
-                </a:stretch>
-              </a:blipFill>
-            </p:spPr>
-            <p:txBody>
-              <a:bodyPr/>
-              <a:lstStyle/>
-              <a:p>
-                <a:r>
-                  <a:rPr lang="en-US">
-                    <a:noFill/>
-                  </a:rPr>
-                  <a:t> </a:t>
-                </a:r>
-              </a:p>
-            </p:txBody>
-          </p:sp>
-        </mc:Fallback>
-      </mc:AlternateContent>
-    </p:spTree>
-    <p:extLst>
-      <p:ext uri="{BB962C8B-B14F-4D97-AF65-F5344CB8AC3E}">
-        <p14:creationId xmlns:p14="http://schemas.microsoft.com/office/powerpoint/2010/main" val="3368580357"/>
       </p:ext>
     </p:extLst>
   </p:cSld>
@@ -32799,6 +33044,1309 @@
         <p:cNvPr id="1" name="">
           <a:extLst>
             <a:ext uri="{FF2B5EF4-FFF2-40B4-BE49-F238E27FC236}">
+              <a16:creationId xmlns:a16="http://schemas.microsoft.com/office/drawing/2014/main" id="{DA02ECB3-6BBE-DCFD-B036-32887A538AC9}"/>
+            </a:ext>
+          </a:extLst>
+        </p:cNvPr>
+        <p:cNvGrpSpPr/>
+        <p:nvPr/>
+      </p:nvGrpSpPr>
+      <p:grpSpPr>
+        <a:xfrm>
+          <a:off x="0" y="0"/>
+          <a:ext cx="0" cy="0"/>
+          <a:chOff x="0" y="0"/>
+          <a:chExt cx="0" cy="0"/>
+        </a:xfrm>
+      </p:grpSpPr>
+      <p:sp>
+        <p:nvSpPr>
+          <p:cNvPr id="2" name="Title 1">
+            <a:extLst>
+              <a:ext uri="{FF2B5EF4-FFF2-40B4-BE49-F238E27FC236}">
+                <a16:creationId xmlns:a16="http://schemas.microsoft.com/office/drawing/2014/main" id="{6DD8DEE9-EFE3-5E17-CBBA-D4D63BA5D13C}"/>
+              </a:ext>
+            </a:extLst>
+          </p:cNvPr>
+          <p:cNvSpPr>
+            <a:spLocks noGrp="1"/>
+          </p:cNvSpPr>
+          <p:nvPr>
+            <p:ph type="title"/>
+          </p:nvPr>
+        </p:nvSpPr>
+        <p:spPr/>
+        <p:txBody>
+          <a:bodyPr/>
+          <a:lstStyle/>
+          <a:p>
+            <a:pPr marL="0" lvl="0" indent="0">
+              <a:buNone/>
+            </a:pPr>
+            <a:r>
+              <a:rPr lang="en-US" dirty="0"/>
+              <a:t>Understanding Missing Values</a:t>
+            </a:r>
+            <a:endParaRPr dirty="0"/>
+          </a:p>
+        </p:txBody>
+      </p:sp>
+      <p:sp>
+        <p:nvSpPr>
+          <p:cNvPr id="3" name="Content Placeholder 2">
+            <a:extLst>
+              <a:ext uri="{FF2B5EF4-FFF2-40B4-BE49-F238E27FC236}">
+                <a16:creationId xmlns:a16="http://schemas.microsoft.com/office/drawing/2014/main" id="{C5512292-9EC6-85A5-8689-82BEEAD3493E}"/>
+              </a:ext>
+            </a:extLst>
+          </p:cNvPr>
+          <p:cNvSpPr>
+            <a:spLocks noGrp="1"/>
+          </p:cNvSpPr>
+          <p:nvPr>
+            <p:ph idx="1"/>
+          </p:nvPr>
+        </p:nvSpPr>
+        <p:spPr>
+          <a:xfrm>
+            <a:off x="429610" y="924711"/>
+            <a:ext cx="8229600" cy="510408"/>
+          </a:xfrm>
+        </p:spPr>
+        <p:txBody>
+          <a:bodyPr>
+            <a:normAutofit/>
+          </a:bodyPr>
+          <a:lstStyle/>
+          <a:p>
+            <a:pPr marL="0" lvl="0" indent="0">
+              <a:buNone/>
+            </a:pPr>
+            <a:r>
+              <a:rPr lang="en-US" dirty="0"/>
+              <a:t>Exploring missing data patterns </a:t>
+            </a:r>
+          </a:p>
+        </p:txBody>
+      </p:sp>
+      <p:pic>
+        <p:nvPicPr>
+          <p:cNvPr id="6" name="Picture 5">
+            <a:extLst>
+              <a:ext uri="{FF2B5EF4-FFF2-40B4-BE49-F238E27FC236}">
+                <a16:creationId xmlns:a16="http://schemas.microsoft.com/office/drawing/2014/main" id="{EB6F8BBD-102D-4477-D7E5-A856650979A0}"/>
+              </a:ext>
+            </a:extLst>
+          </p:cNvPr>
+          <p:cNvPicPr>
+            <a:picLocks noChangeAspect="1"/>
+          </p:cNvPicPr>
+          <p:nvPr/>
+        </p:nvPicPr>
+        <p:blipFill>
+          <a:blip r:embed="rId2"/>
+          <a:stretch>
+            <a:fillRect/>
+          </a:stretch>
+        </p:blipFill>
+        <p:spPr>
+          <a:xfrm>
+            <a:off x="3565027" y="1730266"/>
+            <a:ext cx="5578973" cy="2982102"/>
+          </a:xfrm>
+          <a:prstGeom prst="rect">
+            <a:avLst/>
+          </a:prstGeom>
+        </p:spPr>
+      </p:pic>
+      <p:sp>
+        <p:nvSpPr>
+          <p:cNvPr id="7" name="Content Placeholder 2">
+            <a:extLst>
+              <a:ext uri="{FF2B5EF4-FFF2-40B4-BE49-F238E27FC236}">
+                <a16:creationId xmlns:a16="http://schemas.microsoft.com/office/drawing/2014/main" id="{0D483E30-C1C6-1F1B-F030-57B9C64F5F97}"/>
+              </a:ext>
+            </a:extLst>
+          </p:cNvPr>
+          <p:cNvSpPr txBox="1">
+            <a:spLocks/>
+          </p:cNvSpPr>
+          <p:nvPr/>
+        </p:nvSpPr>
+        <p:spPr>
+          <a:xfrm>
+            <a:off x="457200" y="1399674"/>
+            <a:ext cx="3007895" cy="3621505"/>
+          </a:xfrm>
+          <a:prstGeom prst="rect">
+            <a:avLst/>
+          </a:prstGeom>
+        </p:spPr>
+        <p:txBody>
+          <a:bodyPr vert="horz" lIns="91440" tIns="45720" rIns="91440" bIns="45720" rtlCol="0">
+            <a:normAutofit/>
+          </a:bodyPr>
+          <a:lstStyle>
+            <a:lvl1pPr marL="342900" indent="-342900" algn="l" defTabSz="342900" rtl="0" eaLnBrk="1" latinLnBrk="0" hangingPunct="1">
+              <a:spcBef>
+                <a:spcPct val="20000"/>
+              </a:spcBef>
+              <a:buFont typeface="Arial"/>
+              <a:buChar char="•"/>
+              <a:defRPr sz="2400" kern="1200">
+                <a:solidFill>
+                  <a:schemeClr val="tx1"/>
+                </a:solidFill>
+                <a:latin typeface="+mn-lt"/>
+                <a:ea typeface="+mn-ea"/>
+                <a:cs typeface="+mn-cs"/>
+              </a:defRPr>
+            </a:lvl1pPr>
+            <a:lvl2pPr marL="685800" indent="-342900" algn="l" defTabSz="342900" rtl="0" eaLnBrk="1" latinLnBrk="0" hangingPunct="1">
+              <a:spcBef>
+                <a:spcPct val="20000"/>
+              </a:spcBef>
+              <a:buFont typeface="Arial"/>
+              <a:buChar char="–"/>
+              <a:defRPr sz="2100" kern="1200">
+                <a:solidFill>
+                  <a:schemeClr val="tx1"/>
+                </a:solidFill>
+                <a:latin typeface="+mn-lt"/>
+                <a:ea typeface="+mn-ea"/>
+                <a:cs typeface="+mn-cs"/>
+              </a:defRPr>
+            </a:lvl2pPr>
+            <a:lvl3pPr marL="1028700" indent="-342900" algn="l" defTabSz="342900" rtl="0" eaLnBrk="1" latinLnBrk="0" hangingPunct="1">
+              <a:spcBef>
+                <a:spcPct val="20000"/>
+              </a:spcBef>
+              <a:buFont typeface="Arial"/>
+              <a:buChar char="•"/>
+              <a:defRPr sz="1800" kern="1200">
+                <a:solidFill>
+                  <a:schemeClr val="tx1"/>
+                </a:solidFill>
+                <a:latin typeface="+mn-lt"/>
+                <a:ea typeface="+mn-ea"/>
+                <a:cs typeface="+mn-cs"/>
+              </a:defRPr>
+            </a:lvl3pPr>
+            <a:lvl4pPr marL="1371600" indent="-342900" algn="l" defTabSz="342900" rtl="0" eaLnBrk="1" latinLnBrk="0" hangingPunct="1">
+              <a:spcBef>
+                <a:spcPct val="20000"/>
+              </a:spcBef>
+              <a:buFont typeface="Arial"/>
+              <a:buChar char="–"/>
+              <a:defRPr sz="1500" kern="1200">
+                <a:solidFill>
+                  <a:schemeClr val="tx1"/>
+                </a:solidFill>
+                <a:latin typeface="+mn-lt"/>
+                <a:ea typeface="+mn-ea"/>
+                <a:cs typeface="+mn-cs"/>
+              </a:defRPr>
+            </a:lvl4pPr>
+            <a:lvl5pPr marL="1714500" indent="-342900" algn="l" defTabSz="342900" rtl="0" eaLnBrk="1" latinLnBrk="0" hangingPunct="1">
+              <a:spcBef>
+                <a:spcPct val="20000"/>
+              </a:spcBef>
+              <a:buFont typeface="Arial"/>
+              <a:buChar char="»"/>
+              <a:defRPr sz="1500" kern="1200">
+                <a:solidFill>
+                  <a:schemeClr val="tx1"/>
+                </a:solidFill>
+                <a:latin typeface="+mn-lt"/>
+                <a:ea typeface="+mn-ea"/>
+                <a:cs typeface="+mn-cs"/>
+              </a:defRPr>
+            </a:lvl5pPr>
+            <a:lvl6pPr marL="2057400" indent="-342900" algn="l" defTabSz="342900" rtl="0" eaLnBrk="1" latinLnBrk="0" hangingPunct="1">
+              <a:spcBef>
+                <a:spcPct val="20000"/>
+              </a:spcBef>
+              <a:buFont typeface="Arial"/>
+              <a:buChar char="•"/>
+              <a:defRPr sz="1500" kern="1200">
+                <a:solidFill>
+                  <a:schemeClr val="tx1"/>
+                </a:solidFill>
+                <a:latin typeface="+mn-lt"/>
+                <a:ea typeface="+mn-ea"/>
+                <a:cs typeface="+mn-cs"/>
+              </a:defRPr>
+            </a:lvl6pPr>
+            <a:lvl7pPr marL="2400300" indent="-342900" algn="l" defTabSz="342900" rtl="0" eaLnBrk="1" latinLnBrk="0" hangingPunct="1">
+              <a:spcBef>
+                <a:spcPct val="20000"/>
+              </a:spcBef>
+              <a:buFont typeface="Arial"/>
+              <a:buChar char="•"/>
+              <a:defRPr sz="1500" kern="1200">
+                <a:solidFill>
+                  <a:schemeClr val="tx1"/>
+                </a:solidFill>
+                <a:latin typeface="+mn-lt"/>
+                <a:ea typeface="+mn-ea"/>
+                <a:cs typeface="+mn-cs"/>
+              </a:defRPr>
+            </a:lvl7pPr>
+            <a:lvl8pPr marL="2743200" indent="-342900" algn="l" defTabSz="342900" rtl="0" eaLnBrk="1" latinLnBrk="0" hangingPunct="1">
+              <a:spcBef>
+                <a:spcPct val="20000"/>
+              </a:spcBef>
+              <a:buFont typeface="Arial"/>
+              <a:buChar char="•"/>
+              <a:defRPr sz="1500" kern="1200">
+                <a:solidFill>
+                  <a:schemeClr val="tx1"/>
+                </a:solidFill>
+                <a:latin typeface="+mn-lt"/>
+                <a:ea typeface="+mn-ea"/>
+                <a:cs typeface="+mn-cs"/>
+              </a:defRPr>
+            </a:lvl8pPr>
+            <a:lvl9pPr marL="3086100" indent="-342900" algn="l" defTabSz="342900" rtl="0" eaLnBrk="1" latinLnBrk="0" hangingPunct="1">
+              <a:spcBef>
+                <a:spcPct val="20000"/>
+              </a:spcBef>
+              <a:buFont typeface="Arial"/>
+              <a:buChar char="•"/>
+              <a:defRPr sz="1500" kern="1200">
+                <a:solidFill>
+                  <a:schemeClr val="tx1"/>
+                </a:solidFill>
+                <a:latin typeface="+mn-lt"/>
+                <a:ea typeface="+mn-ea"/>
+                <a:cs typeface="+mn-cs"/>
+              </a:defRPr>
+            </a:lvl9pPr>
+          </a:lstStyle>
+          <a:p>
+            <a:r>
+              <a:rPr lang="en-US" dirty="0"/>
+              <a:t>Plot reveals missing value pattern in variables by row         </a:t>
+            </a:r>
+          </a:p>
+          <a:p>
+            <a:r>
+              <a:rPr lang="en-US" dirty="0"/>
+              <a:t>Some rows have only one missing value</a:t>
+            </a:r>
+          </a:p>
+          <a:p>
+            <a:r>
+              <a:rPr lang="en-US" dirty="0"/>
+              <a:t>Other rows have multiple missing values  </a:t>
+            </a:r>
+          </a:p>
+        </p:txBody>
+      </p:sp>
+      <p:cxnSp>
+        <p:nvCxnSpPr>
+          <p:cNvPr id="4" name="Straight Arrow Connector 3">
+            <a:extLst>
+              <a:ext uri="{FF2B5EF4-FFF2-40B4-BE49-F238E27FC236}">
+                <a16:creationId xmlns:a16="http://schemas.microsoft.com/office/drawing/2014/main" id="{0B455D9A-07F3-3B46-D00E-629971CA3BEB}"/>
+              </a:ext>
+            </a:extLst>
+          </p:cNvPr>
+          <p:cNvCxnSpPr>
+            <a:cxnSpLocks/>
+          </p:cNvCxnSpPr>
+          <p:nvPr/>
+        </p:nvCxnSpPr>
+        <p:spPr>
+          <a:xfrm flipV="1">
+            <a:off x="3046686" y="2353003"/>
+            <a:ext cx="1115411" cy="737038"/>
+          </a:xfrm>
+          <a:prstGeom prst="straightConnector1">
+            <a:avLst/>
+          </a:prstGeom>
+          <a:ln w="38100">
+            <a:solidFill>
+              <a:srgbClr val="C00000"/>
+            </a:solidFill>
+            <a:tailEnd type="triangle"/>
+          </a:ln>
+        </p:spPr>
+        <p:style>
+          <a:lnRef idx="2">
+            <a:schemeClr val="accent1"/>
+          </a:lnRef>
+          <a:fillRef idx="0">
+            <a:schemeClr val="accent1"/>
+          </a:fillRef>
+          <a:effectRef idx="1">
+            <a:schemeClr val="accent1"/>
+          </a:effectRef>
+          <a:fontRef idx="minor">
+            <a:schemeClr val="tx1"/>
+          </a:fontRef>
+        </p:style>
+      </p:cxnSp>
+      <p:cxnSp>
+        <p:nvCxnSpPr>
+          <p:cNvPr id="10" name="Straight Arrow Connector 9">
+            <a:extLst>
+              <a:ext uri="{FF2B5EF4-FFF2-40B4-BE49-F238E27FC236}">
+                <a16:creationId xmlns:a16="http://schemas.microsoft.com/office/drawing/2014/main" id="{6CF8B714-95E3-8727-745E-10A15BD91247}"/>
+              </a:ext>
+            </a:extLst>
+          </p:cNvPr>
+          <p:cNvCxnSpPr>
+            <a:cxnSpLocks/>
+          </p:cNvCxnSpPr>
+          <p:nvPr/>
+        </p:nvCxnSpPr>
+        <p:spPr>
+          <a:xfrm flipV="1">
+            <a:off x="3046686" y="2959976"/>
+            <a:ext cx="1056290" cy="130065"/>
+          </a:xfrm>
+          <a:prstGeom prst="straightConnector1">
+            <a:avLst/>
+          </a:prstGeom>
+          <a:ln w="38100">
+            <a:solidFill>
+              <a:srgbClr val="C00000"/>
+            </a:solidFill>
+            <a:tailEnd type="triangle"/>
+          </a:ln>
+        </p:spPr>
+        <p:style>
+          <a:lnRef idx="2">
+            <a:schemeClr val="accent1"/>
+          </a:lnRef>
+          <a:fillRef idx="0">
+            <a:schemeClr val="accent1"/>
+          </a:fillRef>
+          <a:effectRef idx="1">
+            <a:schemeClr val="accent1"/>
+          </a:effectRef>
+          <a:fontRef idx="minor">
+            <a:schemeClr val="tx1"/>
+          </a:fontRef>
+        </p:style>
+      </p:cxnSp>
+      <p:cxnSp>
+        <p:nvCxnSpPr>
+          <p:cNvPr id="13" name="Straight Arrow Connector 12">
+            <a:extLst>
+              <a:ext uri="{FF2B5EF4-FFF2-40B4-BE49-F238E27FC236}">
+                <a16:creationId xmlns:a16="http://schemas.microsoft.com/office/drawing/2014/main" id="{1EA39998-F433-1891-D761-827A74434CD5}"/>
+              </a:ext>
+            </a:extLst>
+          </p:cNvPr>
+          <p:cNvCxnSpPr>
+            <a:cxnSpLocks/>
+          </p:cNvCxnSpPr>
+          <p:nvPr/>
+        </p:nvCxnSpPr>
+        <p:spPr>
+          <a:xfrm flipV="1">
+            <a:off x="3046686" y="3444766"/>
+            <a:ext cx="835573" cy="717331"/>
+          </a:xfrm>
+          <a:prstGeom prst="straightConnector1">
+            <a:avLst/>
+          </a:prstGeom>
+          <a:ln w="38100">
+            <a:solidFill>
+              <a:srgbClr val="C00000"/>
+            </a:solidFill>
+            <a:tailEnd type="triangle"/>
+          </a:ln>
+        </p:spPr>
+        <p:style>
+          <a:lnRef idx="2">
+            <a:schemeClr val="accent1"/>
+          </a:lnRef>
+          <a:fillRef idx="0">
+            <a:schemeClr val="accent1"/>
+          </a:fillRef>
+          <a:effectRef idx="1">
+            <a:schemeClr val="accent1"/>
+          </a:effectRef>
+          <a:fontRef idx="minor">
+            <a:schemeClr val="tx1"/>
+          </a:fontRef>
+        </p:style>
+      </p:cxnSp>
+      <p:cxnSp>
+        <p:nvCxnSpPr>
+          <p:cNvPr id="16" name="Straight Arrow Connector 15">
+            <a:extLst>
+              <a:ext uri="{FF2B5EF4-FFF2-40B4-BE49-F238E27FC236}">
+                <a16:creationId xmlns:a16="http://schemas.microsoft.com/office/drawing/2014/main" id="{DBF6DBA6-0B04-95BF-E250-B1E8E743B5BC}"/>
+              </a:ext>
+            </a:extLst>
+          </p:cNvPr>
+          <p:cNvCxnSpPr>
+            <a:cxnSpLocks/>
+          </p:cNvCxnSpPr>
+          <p:nvPr/>
+        </p:nvCxnSpPr>
+        <p:spPr>
+          <a:xfrm>
+            <a:off x="3046686" y="4162097"/>
+            <a:ext cx="622738" cy="56692"/>
+          </a:xfrm>
+          <a:prstGeom prst="straightConnector1">
+            <a:avLst/>
+          </a:prstGeom>
+          <a:ln w="38100">
+            <a:solidFill>
+              <a:srgbClr val="C00000"/>
+            </a:solidFill>
+            <a:tailEnd type="triangle"/>
+          </a:ln>
+        </p:spPr>
+        <p:style>
+          <a:lnRef idx="2">
+            <a:schemeClr val="accent1"/>
+          </a:lnRef>
+          <a:fillRef idx="0">
+            <a:schemeClr val="accent1"/>
+          </a:fillRef>
+          <a:effectRef idx="1">
+            <a:schemeClr val="accent1"/>
+          </a:effectRef>
+          <a:fontRef idx="minor">
+            <a:schemeClr val="tx1"/>
+          </a:fontRef>
+        </p:style>
+      </p:cxnSp>
+    </p:spTree>
+    <p:extLst>
+      <p:ext uri="{BB962C8B-B14F-4D97-AF65-F5344CB8AC3E}">
+        <p14:creationId xmlns:p14="http://schemas.microsoft.com/office/powerpoint/2010/main" val="3028361265"/>
+      </p:ext>
+    </p:extLst>
+  </p:cSld>
+  <p:clrMapOvr>
+    <a:masterClrMapping/>
+  </p:clrMapOvr>
+  <p:timing>
+    <p:tnLst>
+      <p:par>
+        <p:cTn id="1" dur="indefinite" restart="never" nodeType="tmRoot">
+          <p:childTnLst>
+            <p:seq concurrent="1" nextAc="seek">
+              <p:cTn id="2" dur="indefinite" nodeType="mainSeq">
+                <p:childTnLst>
+                  <p:par>
+                    <p:cTn id="3" fill="hold">
+                      <p:stCondLst>
+                        <p:cond delay="indefinite"/>
+                      </p:stCondLst>
+                      <p:childTnLst>
+                        <p:par>
+                          <p:cTn id="4" fill="hold">
+                            <p:stCondLst>
+                              <p:cond delay="0"/>
+                            </p:stCondLst>
+                            <p:childTnLst>
+                              <p:par>
+                                <p:cTn id="5" presetID="1" presetClass="entr" presetSubtype="0" fill="hold" nodeType="clickEffect">
+                                  <p:stCondLst>
+                                    <p:cond delay="0"/>
+                                  </p:stCondLst>
+                                  <p:childTnLst>
+                                    <p:set>
+                                      <p:cBhvr>
+                                        <p:cTn id="6" dur="1" fill="hold">
+                                          <p:stCondLst>
+                                            <p:cond delay="0"/>
+                                          </p:stCondLst>
+                                        </p:cTn>
+                                        <p:tgtEl>
+                                          <p:spTgt spid="7">
+                                            <p:txEl>
+                                              <p:pRg st="0" end="0"/>
+                                            </p:txEl>
+                                          </p:spTgt>
+                                        </p:tgtEl>
+                                        <p:attrNameLst>
+                                          <p:attrName>style.visibility</p:attrName>
+                                        </p:attrNameLst>
+                                      </p:cBhvr>
+                                      <p:to>
+                                        <p:strVal val="visible"/>
+                                      </p:to>
+                                    </p:set>
+                                  </p:childTnLst>
+                                </p:cTn>
+                              </p:par>
+                              <p:par>
+                                <p:cTn id="7" presetID="1" presetClass="entr" presetSubtype="0" fill="hold" nodeType="withEffect">
+                                  <p:stCondLst>
+                                    <p:cond delay="0"/>
+                                  </p:stCondLst>
+                                  <p:childTnLst>
+                                    <p:set>
+                                      <p:cBhvr>
+                                        <p:cTn id="8" dur="1" fill="hold">
+                                          <p:stCondLst>
+                                            <p:cond delay="0"/>
+                                          </p:stCondLst>
+                                        </p:cTn>
+                                        <p:tgtEl>
+                                          <p:spTgt spid="6"/>
+                                        </p:tgtEl>
+                                        <p:attrNameLst>
+                                          <p:attrName>style.visibility</p:attrName>
+                                        </p:attrNameLst>
+                                      </p:cBhvr>
+                                      <p:to>
+                                        <p:strVal val="visible"/>
+                                      </p:to>
+                                    </p:set>
+                                  </p:childTnLst>
+                                </p:cTn>
+                              </p:par>
+                            </p:childTnLst>
+                          </p:cTn>
+                        </p:par>
+                      </p:childTnLst>
+                    </p:cTn>
+                  </p:par>
+                  <p:par>
+                    <p:cTn id="9" fill="hold">
+                      <p:stCondLst>
+                        <p:cond delay="indefinite"/>
+                      </p:stCondLst>
+                      <p:childTnLst>
+                        <p:par>
+                          <p:cTn id="10" fill="hold">
+                            <p:stCondLst>
+                              <p:cond delay="0"/>
+                            </p:stCondLst>
+                            <p:childTnLst>
+                              <p:par>
+                                <p:cTn id="11" presetID="1" presetClass="entr" presetSubtype="0" fill="hold" nodeType="clickEffect">
+                                  <p:stCondLst>
+                                    <p:cond delay="0"/>
+                                  </p:stCondLst>
+                                  <p:childTnLst>
+                                    <p:set>
+                                      <p:cBhvr>
+                                        <p:cTn id="12" dur="1" fill="hold">
+                                          <p:stCondLst>
+                                            <p:cond delay="0"/>
+                                          </p:stCondLst>
+                                        </p:cTn>
+                                        <p:tgtEl>
+                                          <p:spTgt spid="7">
+                                            <p:txEl>
+                                              <p:pRg st="1" end="1"/>
+                                            </p:txEl>
+                                          </p:spTgt>
+                                        </p:tgtEl>
+                                        <p:attrNameLst>
+                                          <p:attrName>style.visibility</p:attrName>
+                                        </p:attrNameLst>
+                                      </p:cBhvr>
+                                      <p:to>
+                                        <p:strVal val="visible"/>
+                                      </p:to>
+                                    </p:set>
+                                  </p:childTnLst>
+                                </p:cTn>
+                              </p:par>
+                              <p:par>
+                                <p:cTn id="13" presetID="1" presetClass="entr" presetSubtype="0" fill="hold" nodeType="withEffect">
+                                  <p:stCondLst>
+                                    <p:cond delay="0"/>
+                                  </p:stCondLst>
+                                  <p:childTnLst>
+                                    <p:set>
+                                      <p:cBhvr>
+                                        <p:cTn id="14" dur="1" fill="hold">
+                                          <p:stCondLst>
+                                            <p:cond delay="0"/>
+                                          </p:stCondLst>
+                                        </p:cTn>
+                                        <p:tgtEl>
+                                          <p:spTgt spid="4"/>
+                                        </p:tgtEl>
+                                        <p:attrNameLst>
+                                          <p:attrName>style.visibility</p:attrName>
+                                        </p:attrNameLst>
+                                      </p:cBhvr>
+                                      <p:to>
+                                        <p:strVal val="visible"/>
+                                      </p:to>
+                                    </p:set>
+                                  </p:childTnLst>
+                                </p:cTn>
+                              </p:par>
+                              <p:par>
+                                <p:cTn id="15" presetID="1" presetClass="entr" presetSubtype="0" fill="hold" nodeType="withEffect">
+                                  <p:stCondLst>
+                                    <p:cond delay="0"/>
+                                  </p:stCondLst>
+                                  <p:childTnLst>
+                                    <p:set>
+                                      <p:cBhvr>
+                                        <p:cTn id="16" dur="1" fill="hold">
+                                          <p:stCondLst>
+                                            <p:cond delay="0"/>
+                                          </p:stCondLst>
+                                        </p:cTn>
+                                        <p:tgtEl>
+                                          <p:spTgt spid="10"/>
+                                        </p:tgtEl>
+                                        <p:attrNameLst>
+                                          <p:attrName>style.visibility</p:attrName>
+                                        </p:attrNameLst>
+                                      </p:cBhvr>
+                                      <p:to>
+                                        <p:strVal val="visible"/>
+                                      </p:to>
+                                    </p:set>
+                                  </p:childTnLst>
+                                </p:cTn>
+                              </p:par>
+                            </p:childTnLst>
+                          </p:cTn>
+                        </p:par>
+                      </p:childTnLst>
+                    </p:cTn>
+                  </p:par>
+                  <p:par>
+                    <p:cTn id="17" fill="hold">
+                      <p:stCondLst>
+                        <p:cond delay="indefinite"/>
+                      </p:stCondLst>
+                      <p:childTnLst>
+                        <p:par>
+                          <p:cTn id="18" fill="hold">
+                            <p:stCondLst>
+                              <p:cond delay="0"/>
+                            </p:stCondLst>
+                            <p:childTnLst>
+                              <p:par>
+                                <p:cTn id="19" presetID="1" presetClass="entr" presetSubtype="0" fill="hold" nodeType="clickEffect">
+                                  <p:stCondLst>
+                                    <p:cond delay="0"/>
+                                  </p:stCondLst>
+                                  <p:childTnLst>
+                                    <p:set>
+                                      <p:cBhvr>
+                                        <p:cTn id="20" dur="1" fill="hold">
+                                          <p:stCondLst>
+                                            <p:cond delay="0"/>
+                                          </p:stCondLst>
+                                        </p:cTn>
+                                        <p:tgtEl>
+                                          <p:spTgt spid="7">
+                                            <p:txEl>
+                                              <p:pRg st="2" end="2"/>
+                                            </p:txEl>
+                                          </p:spTgt>
+                                        </p:tgtEl>
+                                        <p:attrNameLst>
+                                          <p:attrName>style.visibility</p:attrName>
+                                        </p:attrNameLst>
+                                      </p:cBhvr>
+                                      <p:to>
+                                        <p:strVal val="visible"/>
+                                      </p:to>
+                                    </p:set>
+                                  </p:childTnLst>
+                                </p:cTn>
+                              </p:par>
+                              <p:par>
+                                <p:cTn id="21" presetID="1" presetClass="entr" presetSubtype="0" fill="hold" nodeType="withEffect">
+                                  <p:stCondLst>
+                                    <p:cond delay="0"/>
+                                  </p:stCondLst>
+                                  <p:childTnLst>
+                                    <p:set>
+                                      <p:cBhvr>
+                                        <p:cTn id="22" dur="1" fill="hold">
+                                          <p:stCondLst>
+                                            <p:cond delay="0"/>
+                                          </p:stCondLst>
+                                        </p:cTn>
+                                        <p:tgtEl>
+                                          <p:spTgt spid="13"/>
+                                        </p:tgtEl>
+                                        <p:attrNameLst>
+                                          <p:attrName>style.visibility</p:attrName>
+                                        </p:attrNameLst>
+                                      </p:cBhvr>
+                                      <p:to>
+                                        <p:strVal val="visible"/>
+                                      </p:to>
+                                    </p:set>
+                                  </p:childTnLst>
+                                </p:cTn>
+                              </p:par>
+                              <p:par>
+                                <p:cTn id="23" presetID="1" presetClass="entr" presetSubtype="0" fill="hold" nodeType="withEffect">
+                                  <p:stCondLst>
+                                    <p:cond delay="0"/>
+                                  </p:stCondLst>
+                                  <p:childTnLst>
+                                    <p:set>
+                                      <p:cBhvr>
+                                        <p:cTn id="24" dur="1" fill="hold">
+                                          <p:stCondLst>
+                                            <p:cond delay="0"/>
+                                          </p:stCondLst>
+                                        </p:cTn>
+                                        <p:tgtEl>
+                                          <p:spTgt spid="16"/>
+                                        </p:tgtEl>
+                                        <p:attrNameLst>
+                                          <p:attrName>style.visibility</p:attrName>
+                                        </p:attrNameLst>
+                                      </p:cBhvr>
+                                      <p:to>
+                                        <p:strVal val="visible"/>
+                                      </p:to>
+                                    </p:set>
+                                  </p:childTnLst>
+                                </p:cTn>
+                              </p:par>
+                            </p:childTnLst>
+                          </p:cTn>
+                        </p:par>
+                      </p:childTnLst>
+                    </p:cTn>
+                  </p:par>
+                </p:childTnLst>
+              </p:cTn>
+              <p:prevCondLst>
+                <p:cond evt="onPrev" delay="0">
+                  <p:tgtEl>
+                    <p:sldTgt/>
+                  </p:tgtEl>
+                </p:cond>
+              </p:prevCondLst>
+              <p:nextCondLst>
+                <p:cond evt="onNext" delay="0">
+                  <p:tgtEl>
+                    <p:sldTgt/>
+                  </p:tgtEl>
+                </p:cond>
+              </p:nextCondLst>
+            </p:seq>
+          </p:childTnLst>
+        </p:cTn>
+      </p:par>
+    </p:tnLst>
+  </p:timing>
+</p:sld>
+</file>
+
+<file path=ppt/slides/slide61.xml><?xml version="1.0" encoding="utf-8"?>
+<p:sld xmlns:a="http://schemas.openxmlformats.org/drawingml/2006/main" xmlns:r="http://schemas.openxmlformats.org/officeDocument/2006/relationships" xmlns:p="http://schemas.openxmlformats.org/presentationml/2006/main">
+  <p:cSld>
+    <p:spTree>
+      <p:nvGrpSpPr>
+        <p:cNvPr id="1" name="">
+          <a:extLst>
+            <a:ext uri="{FF2B5EF4-FFF2-40B4-BE49-F238E27FC236}">
+              <a16:creationId xmlns:a16="http://schemas.microsoft.com/office/drawing/2014/main" id="{3D44FDFC-4F69-DFB8-A2BC-CF8EB3C07576}"/>
+            </a:ext>
+          </a:extLst>
+        </p:cNvPr>
+        <p:cNvGrpSpPr/>
+        <p:nvPr/>
+      </p:nvGrpSpPr>
+      <p:grpSpPr>
+        <a:xfrm>
+          <a:off x="0" y="0"/>
+          <a:ext cx="0" cy="0"/>
+          <a:chOff x="0" y="0"/>
+          <a:chExt cx="0" cy="0"/>
+        </a:xfrm>
+      </p:grpSpPr>
+      <p:sp>
+        <p:nvSpPr>
+          <p:cNvPr id="2" name="Title 1">
+            <a:extLst>
+              <a:ext uri="{FF2B5EF4-FFF2-40B4-BE49-F238E27FC236}">
+                <a16:creationId xmlns:a16="http://schemas.microsoft.com/office/drawing/2014/main" id="{91A30F1C-4589-D04C-A165-DD3A86E76EE2}"/>
+              </a:ext>
+            </a:extLst>
+          </p:cNvPr>
+          <p:cNvSpPr>
+            <a:spLocks noGrp="1"/>
+          </p:cNvSpPr>
+          <p:nvPr>
+            <p:ph type="title"/>
+          </p:nvPr>
+        </p:nvSpPr>
+        <p:spPr/>
+        <p:txBody>
+          <a:bodyPr/>
+          <a:lstStyle/>
+          <a:p>
+            <a:pPr marL="0" lvl="0" indent="0">
+              <a:buNone/>
+            </a:pPr>
+            <a:r>
+              <a:rPr lang="en-US" dirty="0"/>
+              <a:t>Understanding Missing Values</a:t>
+            </a:r>
+            <a:endParaRPr dirty="0"/>
+          </a:p>
+        </p:txBody>
+      </p:sp>
+      <mc:AlternateContent xmlns:mc="http://schemas.openxmlformats.org/markup-compatibility/2006" xmlns:a14="http://schemas.microsoft.com/office/drawing/2010/main">
+        <mc:Choice Requires="a14">
+          <p:sp>
+            <p:nvSpPr>
+              <p:cNvPr id="3" name="Content Placeholder 2">
+                <a:extLst>
+                  <a:ext uri="{FF2B5EF4-FFF2-40B4-BE49-F238E27FC236}">
+                    <a16:creationId xmlns:a16="http://schemas.microsoft.com/office/drawing/2014/main" id="{94599B7E-B879-000C-DCA7-404F6FA7D88B}"/>
+                  </a:ext>
+                </a:extLst>
+              </p:cNvPr>
+              <p:cNvSpPr>
+                <a:spLocks noGrp="1"/>
+              </p:cNvSpPr>
+              <p:nvPr>
+                <p:ph idx="1"/>
+              </p:nvPr>
+            </p:nvSpPr>
+            <p:spPr>
+              <a:xfrm>
+                <a:off x="457200" y="1200151"/>
+                <a:ext cx="8229600" cy="3737370"/>
+              </a:xfrm>
+            </p:spPr>
+            <p:txBody>
+              <a:bodyPr>
+                <a:normAutofit lnSpcReduction="10000"/>
+              </a:bodyPr>
+              <a:lstStyle/>
+              <a:p>
+                <a:pPr marL="0" lvl="0" indent="0">
+                  <a:buNone/>
+                </a:pPr>
+                <a:r>
+                  <a:rPr lang="en-US" dirty="0"/>
+                  <a:t>We can use </a:t>
+                </a:r>
+                <a:r>
+                  <a:rPr lang="en-US" b="1" dirty="0"/>
+                  <a:t>Little’s MCAR test </a:t>
+                </a:r>
+                <a:r>
+                  <a:rPr lang="en-US" dirty="0"/>
+                  <a:t>to support a hypothesis of a missing pattern</a:t>
+                </a:r>
+              </a:p>
+              <a:p>
+                <a:r>
+                  <a:rPr lang="en-US" b="1" dirty="0"/>
+                  <a:t>Test Statistic: </a:t>
+                </a:r>
+                <a:r>
+                  <a:rPr lang="en-US" dirty="0"/>
+                  <a:t>Observed means across different missing data patterns with expected population means are chi-square (χ²) distributed </a:t>
+                </a:r>
+              </a:p>
+              <a:p>
+                <a:pPr lvl="0"/>
+                <a:r>
+                  <a:rPr lang="en-US" b="1" dirty="0"/>
+                  <a:t>Null Hypothesis </a:t>
+                </a:r>
+                <a14:m>
+                  <m:oMath xmlns:m="http://schemas.openxmlformats.org/officeDocument/2006/math">
+                    <m:d>
+                      <m:dPr>
+                        <m:ctrlPr>
+                          <a:rPr lang="en-US" b="1" i="1" smtClean="0">
+                            <a:latin typeface="Cambria Math" panose="02040503050406030204" pitchFamily="18" charset="0"/>
+                          </a:rPr>
+                        </m:ctrlPr>
+                      </m:dPr>
+                      <m:e>
+                        <m:sSub>
+                          <m:sSubPr>
+                            <m:ctrlPr>
+                              <a:rPr lang="en-US" b="1" i="1" smtClean="0">
+                                <a:latin typeface="Cambria Math" panose="02040503050406030204" pitchFamily="18" charset="0"/>
+                              </a:rPr>
+                            </m:ctrlPr>
+                          </m:sSubPr>
+                          <m:e>
+                            <m:r>
+                              <a:rPr lang="en-US" b="1" i="1" smtClean="0">
+                                <a:latin typeface="Cambria Math" panose="02040503050406030204" pitchFamily="18" charset="0"/>
+                              </a:rPr>
+                              <m:t>𝑯</m:t>
+                            </m:r>
+                          </m:e>
+                          <m:sub>
+                            <m:r>
+                              <a:rPr lang="en-US" b="1" i="1" smtClean="0">
+                                <a:latin typeface="Cambria Math" panose="02040503050406030204" pitchFamily="18" charset="0"/>
+                              </a:rPr>
+                              <m:t>𝟎</m:t>
+                            </m:r>
+                          </m:sub>
+                        </m:sSub>
+                      </m:e>
+                    </m:d>
+                  </m:oMath>
+                </a14:m>
+                <a:r>
+                  <a:rPr lang="en-US" b="1" dirty="0"/>
+                  <a:t>:</a:t>
+                </a:r>
+                <a:r>
+                  <a:rPr lang="en-US" dirty="0"/>
+                  <a:t> The data are Missing Completely at Random</a:t>
+                </a:r>
+              </a:p>
+              <a:p>
+                <a:pPr lvl="1"/>
+                <a:r>
+                  <a:rPr lang="en-US" dirty="0"/>
+                  <a:t>The missing values do not depend on the data values)</a:t>
+                </a:r>
+              </a:p>
+              <a:p>
+                <a:pPr lvl="1"/>
+                <a:r>
+                  <a:rPr lang="en-US" b="1" dirty="0"/>
+                  <a:t>Alternative Hypothesis </a:t>
+                </a:r>
+                <a14:m>
+                  <m:oMath xmlns:m="http://schemas.openxmlformats.org/officeDocument/2006/math">
+                    <m:d>
+                      <m:dPr>
+                        <m:ctrlPr>
+                          <a:rPr lang="en-US" b="1" i="1">
+                            <a:latin typeface="Cambria Math" panose="02040503050406030204" pitchFamily="18" charset="0"/>
+                          </a:rPr>
+                        </m:ctrlPr>
+                      </m:dPr>
+                      <m:e>
+                        <m:sSub>
+                          <m:sSubPr>
+                            <m:ctrlPr>
+                              <a:rPr lang="en-US" b="1" i="1">
+                                <a:latin typeface="Cambria Math" panose="02040503050406030204" pitchFamily="18" charset="0"/>
+                              </a:rPr>
+                            </m:ctrlPr>
+                          </m:sSubPr>
+                          <m:e>
+                            <m:r>
+                              <a:rPr lang="en-US" b="1" i="1">
+                                <a:latin typeface="Cambria Math" panose="02040503050406030204" pitchFamily="18" charset="0"/>
+                              </a:rPr>
+                              <m:t>𝑯</m:t>
+                            </m:r>
+                          </m:e>
+                          <m:sub>
+                            <m:r>
+                              <a:rPr lang="en-US" b="1" i="1" smtClean="0">
+                                <a:latin typeface="Cambria Math" panose="02040503050406030204" pitchFamily="18" charset="0"/>
+                              </a:rPr>
+                              <m:t>𝒂</m:t>
+                            </m:r>
+                          </m:sub>
+                        </m:sSub>
+                      </m:e>
+                    </m:d>
+                    <m:r>
+                      <a:rPr lang="en-US" b="1" i="1">
+                        <a:latin typeface="Cambria Math" panose="02040503050406030204" pitchFamily="18" charset="0"/>
+                      </a:rPr>
+                      <m:t> </m:t>
+                    </m:r>
+                  </m:oMath>
+                </a14:m>
+                <a:r>
+                  <a:rPr lang="en-US" b="1" dirty="0"/>
+                  <a:t>:</a:t>
+                </a:r>
+                <a:r>
+                  <a:rPr lang="en-US" dirty="0"/>
+                  <a:t> Data are </a:t>
+                </a:r>
+                <a:r>
+                  <a:rPr lang="en-US" i="1" dirty="0"/>
+                  <a:t>not</a:t>
+                </a:r>
+                <a:r>
+                  <a:rPr lang="en-US" dirty="0"/>
+                  <a:t> Missing Completely at Random</a:t>
+                </a:r>
+              </a:p>
+              <a:p>
+                <a:endParaRPr dirty="0"/>
+              </a:p>
+            </p:txBody>
+          </p:sp>
+        </mc:Choice>
+        <mc:Fallback xmlns="">
+          <p:sp>
+            <p:nvSpPr>
+              <p:cNvPr id="3" name="Content Placeholder 2">
+                <a:extLst>
+                  <a:ext uri="{FF2B5EF4-FFF2-40B4-BE49-F238E27FC236}">
+                    <a16:creationId xmlns:a16="http://schemas.microsoft.com/office/drawing/2014/main" id="{94599B7E-B879-000C-DCA7-404F6FA7D88B}"/>
+                  </a:ext>
+                </a:extLst>
+              </p:cNvPr>
+              <p:cNvSpPr>
+                <a:spLocks noGrp="1" noRot="1" noChangeAspect="1" noMove="1" noResize="1" noEditPoints="1" noAdjustHandles="1" noChangeArrowheads="1" noChangeShapeType="1" noTextEdit="1"/>
+              </p:cNvSpPr>
+              <p:nvPr>
+                <p:ph idx="1"/>
+              </p:nvPr>
+            </p:nvSpPr>
+            <p:spPr>
+              <a:xfrm>
+                <a:off x="457200" y="1200151"/>
+                <a:ext cx="8229600" cy="3737370"/>
+              </a:xfrm>
+              <a:blipFill>
+                <a:blip r:embed="rId2"/>
+                <a:stretch>
+                  <a:fillRect l="-1111" t="-2284"/>
+                </a:stretch>
+              </a:blipFill>
+            </p:spPr>
+            <p:txBody>
+              <a:bodyPr/>
+              <a:lstStyle/>
+              <a:p>
+                <a:r>
+                  <a:rPr lang="en-US">
+                    <a:noFill/>
+                  </a:rPr>
+                  <a:t> </a:t>
+                </a:r>
+              </a:p>
+            </p:txBody>
+          </p:sp>
+        </mc:Fallback>
+      </mc:AlternateContent>
+    </p:spTree>
+    <p:extLst>
+      <p:ext uri="{BB962C8B-B14F-4D97-AF65-F5344CB8AC3E}">
+        <p14:creationId xmlns:p14="http://schemas.microsoft.com/office/powerpoint/2010/main" val="3368580357"/>
+      </p:ext>
+    </p:extLst>
+  </p:cSld>
+  <p:clrMapOvr>
+    <a:masterClrMapping/>
+  </p:clrMapOvr>
+  <p:timing>
+    <p:tnLst>
+      <p:par>
+        <p:cTn id="1" dur="indefinite" restart="never" nodeType="tmRoot">
+          <p:childTnLst>
+            <p:seq concurrent="1" nextAc="seek">
+              <p:cTn id="2" dur="indefinite" nodeType="mainSeq">
+                <p:childTnLst>
+                  <p:par>
+                    <p:cTn id="3" fill="hold">
+                      <p:stCondLst>
+                        <p:cond delay="indefinite"/>
+                      </p:stCondLst>
+                      <p:childTnLst>
+                        <p:par>
+                          <p:cTn id="4" fill="hold">
+                            <p:stCondLst>
+                              <p:cond delay="0"/>
+                            </p:stCondLst>
+                            <p:childTnLst>
+                              <p:par>
+                                <p:cTn id="5" presetID="1" presetClass="entr" presetSubtype="0" fill="hold" nodeType="clickEffect">
+                                  <p:stCondLst>
+                                    <p:cond delay="0"/>
+                                  </p:stCondLst>
+                                  <p:childTnLst>
+                                    <p:set>
+                                      <p:cBhvr>
+                                        <p:cTn id="6" dur="1" fill="hold">
+                                          <p:stCondLst>
+                                            <p:cond delay="0"/>
+                                          </p:stCondLst>
+                                        </p:cTn>
+                                        <p:tgtEl>
+                                          <p:spTgt spid="3">
+                                            <p:txEl>
+                                              <p:pRg st="1" end="1"/>
+                                            </p:txEl>
+                                          </p:spTgt>
+                                        </p:tgtEl>
+                                        <p:attrNameLst>
+                                          <p:attrName>style.visibility</p:attrName>
+                                        </p:attrNameLst>
+                                      </p:cBhvr>
+                                      <p:to>
+                                        <p:strVal val="visible"/>
+                                      </p:to>
+                                    </p:set>
+                                  </p:childTnLst>
+                                </p:cTn>
+                              </p:par>
+                            </p:childTnLst>
+                          </p:cTn>
+                        </p:par>
+                      </p:childTnLst>
+                    </p:cTn>
+                  </p:par>
+                  <p:par>
+                    <p:cTn id="7" fill="hold">
+                      <p:stCondLst>
+                        <p:cond delay="indefinite"/>
+                      </p:stCondLst>
+                      <p:childTnLst>
+                        <p:par>
+                          <p:cTn id="8" fill="hold">
+                            <p:stCondLst>
+                              <p:cond delay="0"/>
+                            </p:stCondLst>
+                            <p:childTnLst>
+                              <p:par>
+                                <p:cTn id="9" presetID="1" presetClass="entr" presetSubtype="0" fill="hold" nodeType="clickEffect">
+                                  <p:stCondLst>
+                                    <p:cond delay="0"/>
+                                  </p:stCondLst>
+                                  <p:childTnLst>
+                                    <p:set>
+                                      <p:cBhvr>
+                                        <p:cTn id="10" dur="1" fill="hold">
+                                          <p:stCondLst>
+                                            <p:cond delay="0"/>
+                                          </p:stCondLst>
+                                        </p:cTn>
+                                        <p:tgtEl>
+                                          <p:spTgt spid="3">
+                                            <p:txEl>
+                                              <p:pRg st="2" end="2"/>
+                                            </p:txEl>
+                                          </p:spTgt>
+                                        </p:tgtEl>
+                                        <p:attrNameLst>
+                                          <p:attrName>style.visibility</p:attrName>
+                                        </p:attrNameLst>
+                                      </p:cBhvr>
+                                      <p:to>
+                                        <p:strVal val="visible"/>
+                                      </p:to>
+                                    </p:set>
+                                  </p:childTnLst>
+                                </p:cTn>
+                              </p:par>
+                              <p:par>
+                                <p:cTn id="11" presetID="1" presetClass="entr" presetSubtype="0" fill="hold" nodeType="withEffect">
+                                  <p:stCondLst>
+                                    <p:cond delay="0"/>
+                                  </p:stCondLst>
+                                  <p:childTnLst>
+                                    <p:set>
+                                      <p:cBhvr>
+                                        <p:cTn id="12" dur="1" fill="hold">
+                                          <p:stCondLst>
+                                            <p:cond delay="0"/>
+                                          </p:stCondLst>
+                                        </p:cTn>
+                                        <p:tgtEl>
+                                          <p:spTgt spid="3">
+                                            <p:txEl>
+                                              <p:pRg st="3" end="3"/>
+                                            </p:txEl>
+                                          </p:spTgt>
+                                        </p:tgtEl>
+                                        <p:attrNameLst>
+                                          <p:attrName>style.visibility</p:attrName>
+                                        </p:attrNameLst>
+                                      </p:cBhvr>
+                                      <p:to>
+                                        <p:strVal val="visible"/>
+                                      </p:to>
+                                    </p:set>
+                                  </p:childTnLst>
+                                </p:cTn>
+                              </p:par>
+                              <p:par>
+                                <p:cTn id="13" presetID="1" presetClass="entr" presetSubtype="0" fill="hold" nodeType="withEffect">
+                                  <p:stCondLst>
+                                    <p:cond delay="0"/>
+                                  </p:stCondLst>
+                                  <p:childTnLst>
+                                    <p:set>
+                                      <p:cBhvr>
+                                        <p:cTn id="14" dur="1" fill="hold">
+                                          <p:stCondLst>
+                                            <p:cond delay="0"/>
+                                          </p:stCondLst>
+                                        </p:cTn>
+                                        <p:tgtEl>
+                                          <p:spTgt spid="3">
+                                            <p:txEl>
+                                              <p:pRg st="4" end="4"/>
+                                            </p:txEl>
+                                          </p:spTgt>
+                                        </p:tgtEl>
+                                        <p:attrNameLst>
+                                          <p:attrName>style.visibility</p:attrName>
+                                        </p:attrNameLst>
+                                      </p:cBhvr>
+                                      <p:to>
+                                        <p:strVal val="visible"/>
+                                      </p:to>
+                                    </p:set>
+                                  </p:childTnLst>
+                                </p:cTn>
+                              </p:par>
+                            </p:childTnLst>
+                          </p:cTn>
+                        </p:par>
+                      </p:childTnLst>
+                    </p:cTn>
+                  </p:par>
+                </p:childTnLst>
+              </p:cTn>
+              <p:prevCondLst>
+                <p:cond evt="onPrev" delay="0">
+                  <p:tgtEl>
+                    <p:sldTgt/>
+                  </p:tgtEl>
+                </p:cond>
+              </p:prevCondLst>
+              <p:nextCondLst>
+                <p:cond evt="onNext" delay="0">
+                  <p:tgtEl>
+                    <p:sldTgt/>
+                  </p:tgtEl>
+                </p:cond>
+              </p:nextCondLst>
+            </p:seq>
+          </p:childTnLst>
+        </p:cTn>
+      </p:par>
+    </p:tnLst>
+  </p:timing>
+</p:sld>
+</file>
+
+<file path=ppt/slides/slide62.xml><?xml version="1.0" encoding="utf-8"?>
+<p:sld xmlns:a="http://schemas.openxmlformats.org/drawingml/2006/main" xmlns:r="http://schemas.openxmlformats.org/officeDocument/2006/relationships" xmlns:p="http://schemas.openxmlformats.org/presentationml/2006/main">
+  <p:cSld>
+    <p:spTree>
+      <p:nvGrpSpPr>
+        <p:cNvPr id="1" name="">
+          <a:extLst>
+            <a:ext uri="{FF2B5EF4-FFF2-40B4-BE49-F238E27FC236}">
               <a16:creationId xmlns:a16="http://schemas.microsoft.com/office/drawing/2014/main" id="{B2E95FDB-1853-8343-20B0-D9B47438654D}"/>
             </a:ext>
           </a:extLst>
@@ -32902,12 +34450,8 @@
               <a:p>
                 <a:pPr lvl="0"/>
                 <a:r>
-                  <a:rPr lang="en-US" b="1"/>
-                  <a:t>No Specific Variable </a:t>
-                </a:r>
-                <a:r>
                   <a:rPr lang="en-US" b="1" dirty="0"/>
-                  <a:t>Identification:</a:t>
+                  <a:t>No Specific Variable Identification:</a:t>
                 </a:r>
                 <a:r>
                   <a:rPr lang="en-US" dirty="0"/>
@@ -33006,10 +34550,218 @@
   <p:clrMapOvr>
     <a:masterClrMapping/>
   </p:clrMapOvr>
+  <p:timing>
+    <p:tnLst>
+      <p:par>
+        <p:cTn id="1" dur="indefinite" restart="never" nodeType="tmRoot">
+          <p:childTnLst>
+            <p:seq concurrent="1" nextAc="seek">
+              <p:cTn id="2" dur="indefinite" nodeType="mainSeq">
+                <p:childTnLst>
+                  <p:par>
+                    <p:cTn id="3" fill="hold">
+                      <p:stCondLst>
+                        <p:cond delay="indefinite"/>
+                      </p:stCondLst>
+                      <p:childTnLst>
+                        <p:par>
+                          <p:cTn id="4" fill="hold">
+                            <p:stCondLst>
+                              <p:cond delay="0"/>
+                            </p:stCondLst>
+                            <p:childTnLst>
+                              <p:par>
+                                <p:cTn id="5" presetID="1" presetClass="entr" presetSubtype="0" fill="hold" nodeType="clickEffect">
+                                  <p:stCondLst>
+                                    <p:cond delay="0"/>
+                                  </p:stCondLst>
+                                  <p:childTnLst>
+                                    <p:set>
+                                      <p:cBhvr>
+                                        <p:cTn id="6" dur="1" fill="hold">
+                                          <p:stCondLst>
+                                            <p:cond delay="0"/>
+                                          </p:stCondLst>
+                                        </p:cTn>
+                                        <p:tgtEl>
+                                          <p:spTgt spid="3">
+                                            <p:txEl>
+                                              <p:pRg st="1" end="1"/>
+                                            </p:txEl>
+                                          </p:spTgt>
+                                        </p:tgtEl>
+                                        <p:attrNameLst>
+                                          <p:attrName>style.visibility</p:attrName>
+                                        </p:attrNameLst>
+                                      </p:cBhvr>
+                                      <p:to>
+                                        <p:strVal val="visible"/>
+                                      </p:to>
+                                    </p:set>
+                                  </p:childTnLst>
+                                </p:cTn>
+                              </p:par>
+                            </p:childTnLst>
+                          </p:cTn>
+                        </p:par>
+                      </p:childTnLst>
+                    </p:cTn>
+                  </p:par>
+                  <p:par>
+                    <p:cTn id="7" fill="hold">
+                      <p:stCondLst>
+                        <p:cond delay="indefinite"/>
+                      </p:stCondLst>
+                      <p:childTnLst>
+                        <p:par>
+                          <p:cTn id="8" fill="hold">
+                            <p:stCondLst>
+                              <p:cond delay="0"/>
+                            </p:stCondLst>
+                            <p:childTnLst>
+                              <p:par>
+                                <p:cTn id="9" presetID="1" presetClass="entr" presetSubtype="0" fill="hold" nodeType="clickEffect">
+                                  <p:stCondLst>
+                                    <p:cond delay="0"/>
+                                  </p:stCondLst>
+                                  <p:childTnLst>
+                                    <p:set>
+                                      <p:cBhvr>
+                                        <p:cTn id="10" dur="1" fill="hold">
+                                          <p:stCondLst>
+                                            <p:cond delay="0"/>
+                                          </p:stCondLst>
+                                        </p:cTn>
+                                        <p:tgtEl>
+                                          <p:spTgt spid="3">
+                                            <p:txEl>
+                                              <p:pRg st="2" end="2"/>
+                                            </p:txEl>
+                                          </p:spTgt>
+                                        </p:tgtEl>
+                                        <p:attrNameLst>
+                                          <p:attrName>style.visibility</p:attrName>
+                                        </p:attrNameLst>
+                                      </p:cBhvr>
+                                      <p:to>
+                                        <p:strVal val="visible"/>
+                                      </p:to>
+                                    </p:set>
+                                  </p:childTnLst>
+                                </p:cTn>
+                              </p:par>
+                              <p:par>
+                                <p:cTn id="11" presetID="1" presetClass="entr" presetSubtype="0" fill="hold" nodeType="withEffect">
+                                  <p:stCondLst>
+                                    <p:cond delay="0"/>
+                                  </p:stCondLst>
+                                  <p:childTnLst>
+                                    <p:set>
+                                      <p:cBhvr>
+                                        <p:cTn id="12" dur="1" fill="hold">
+                                          <p:stCondLst>
+                                            <p:cond delay="0"/>
+                                          </p:stCondLst>
+                                        </p:cTn>
+                                        <p:tgtEl>
+                                          <p:spTgt spid="3">
+                                            <p:txEl>
+                                              <p:pRg st="3" end="3"/>
+                                            </p:txEl>
+                                          </p:spTgt>
+                                        </p:tgtEl>
+                                        <p:attrNameLst>
+                                          <p:attrName>style.visibility</p:attrName>
+                                        </p:attrNameLst>
+                                      </p:cBhvr>
+                                      <p:to>
+                                        <p:strVal val="visible"/>
+                                      </p:to>
+                                    </p:set>
+                                  </p:childTnLst>
+                                </p:cTn>
+                              </p:par>
+                            </p:childTnLst>
+                          </p:cTn>
+                        </p:par>
+                      </p:childTnLst>
+                    </p:cTn>
+                  </p:par>
+                  <p:par>
+                    <p:cTn id="13" fill="hold">
+                      <p:stCondLst>
+                        <p:cond delay="indefinite"/>
+                      </p:stCondLst>
+                      <p:childTnLst>
+                        <p:par>
+                          <p:cTn id="14" fill="hold">
+                            <p:stCondLst>
+                              <p:cond delay="0"/>
+                            </p:stCondLst>
+                            <p:childTnLst>
+                              <p:par>
+                                <p:cTn id="15" presetID="1" presetClass="entr" presetSubtype="0" fill="hold" nodeType="clickEffect">
+                                  <p:stCondLst>
+                                    <p:cond delay="0"/>
+                                  </p:stCondLst>
+                                  <p:childTnLst>
+                                    <p:set>
+                                      <p:cBhvr>
+                                        <p:cTn id="16" dur="1" fill="hold">
+                                          <p:stCondLst>
+                                            <p:cond delay="0"/>
+                                          </p:stCondLst>
+                                        </p:cTn>
+                                        <p:tgtEl>
+                                          <p:spTgt spid="3">
+                                            <p:txEl>
+                                              <p:pRg st="4" end="4"/>
+                                            </p:txEl>
+                                          </p:spTgt>
+                                        </p:tgtEl>
+                                        <p:attrNameLst>
+                                          <p:attrName>style.visibility</p:attrName>
+                                        </p:attrNameLst>
+                                      </p:cBhvr>
+                                      <p:to>
+                                        <p:strVal val="visible"/>
+                                      </p:to>
+                                    </p:set>
+                                  </p:childTnLst>
+                                </p:cTn>
+                              </p:par>
+                            </p:childTnLst>
+                          </p:cTn>
+                        </p:par>
+                      </p:childTnLst>
+                    </p:cTn>
+                  </p:par>
+                </p:childTnLst>
+              </p:cTn>
+              <p:prevCondLst>
+                <p:cond evt="onPrev" delay="0">
+                  <p:tgtEl>
+                    <p:sldTgt/>
+                  </p:tgtEl>
+                </p:cond>
+              </p:prevCondLst>
+              <p:nextCondLst>
+                <p:cond evt="onNext" delay="0">
+                  <p:tgtEl>
+                    <p:sldTgt/>
+                  </p:tgtEl>
+                </p:cond>
+              </p:nextCondLst>
+            </p:seq>
+          </p:childTnLst>
+        </p:cTn>
+      </p:par>
+    </p:tnLst>
+  </p:timing>
 </p:sld>
 </file>
 
-<file path=ppt/slides/slide61.xml><?xml version="1.0" encoding="utf-8"?>
+<file path=ppt/slides/slide63.xml><?xml version="1.0" encoding="utf-8"?>
 <p:sld xmlns:a="http://schemas.openxmlformats.org/drawingml/2006/main" xmlns:r="http://schemas.openxmlformats.org/officeDocument/2006/relationships" xmlns:p="http://schemas.openxmlformats.org/presentationml/2006/main">
   <p:cSld>
     <p:spTree>
@@ -33141,10 +34893,200 @@
   <p:clrMapOvr>
     <a:masterClrMapping/>
   </p:clrMapOvr>
+  <p:timing>
+    <p:tnLst>
+      <p:par>
+        <p:cTn id="1" dur="indefinite" restart="never" nodeType="tmRoot">
+          <p:childTnLst>
+            <p:seq concurrent="1" nextAc="seek">
+              <p:cTn id="2" dur="indefinite" nodeType="mainSeq">
+                <p:childTnLst>
+                  <p:par>
+                    <p:cTn id="3" fill="hold">
+                      <p:stCondLst>
+                        <p:cond delay="indefinite"/>
+                      </p:stCondLst>
+                      <p:childTnLst>
+                        <p:par>
+                          <p:cTn id="4" fill="hold">
+                            <p:stCondLst>
+                              <p:cond delay="0"/>
+                            </p:stCondLst>
+                            <p:childTnLst>
+                              <p:par>
+                                <p:cTn id="5" presetID="1" presetClass="entr" presetSubtype="0" fill="hold" nodeType="clickEffect">
+                                  <p:stCondLst>
+                                    <p:cond delay="0"/>
+                                  </p:stCondLst>
+                                  <p:childTnLst>
+                                    <p:set>
+                                      <p:cBhvr>
+                                        <p:cTn id="6" dur="1" fill="hold">
+                                          <p:stCondLst>
+                                            <p:cond delay="0"/>
+                                          </p:stCondLst>
+                                        </p:cTn>
+                                        <p:tgtEl>
+                                          <p:spTgt spid="3">
+                                            <p:txEl>
+                                              <p:pRg st="1" end="1"/>
+                                            </p:txEl>
+                                          </p:spTgt>
+                                        </p:tgtEl>
+                                        <p:attrNameLst>
+                                          <p:attrName>style.visibility</p:attrName>
+                                        </p:attrNameLst>
+                                      </p:cBhvr>
+                                      <p:to>
+                                        <p:strVal val="visible"/>
+                                      </p:to>
+                                    </p:set>
+                                  </p:childTnLst>
+                                </p:cTn>
+                              </p:par>
+                              <p:par>
+                                <p:cTn id="7" presetID="1" presetClass="entr" presetSubtype="0" fill="hold" nodeType="withEffect">
+                                  <p:stCondLst>
+                                    <p:cond delay="0"/>
+                                  </p:stCondLst>
+                                  <p:childTnLst>
+                                    <p:set>
+                                      <p:cBhvr>
+                                        <p:cTn id="8" dur="1" fill="hold">
+                                          <p:stCondLst>
+                                            <p:cond delay="0"/>
+                                          </p:stCondLst>
+                                        </p:cTn>
+                                        <p:tgtEl>
+                                          <p:spTgt spid="3">
+                                            <p:txEl>
+                                              <p:pRg st="2" end="2"/>
+                                            </p:txEl>
+                                          </p:spTgt>
+                                        </p:tgtEl>
+                                        <p:attrNameLst>
+                                          <p:attrName>style.visibility</p:attrName>
+                                        </p:attrNameLst>
+                                      </p:cBhvr>
+                                      <p:to>
+                                        <p:strVal val="visible"/>
+                                      </p:to>
+                                    </p:set>
+                                  </p:childTnLst>
+                                </p:cTn>
+                              </p:par>
+                            </p:childTnLst>
+                          </p:cTn>
+                        </p:par>
+                      </p:childTnLst>
+                    </p:cTn>
+                  </p:par>
+                  <p:par>
+                    <p:cTn id="9" fill="hold">
+                      <p:stCondLst>
+                        <p:cond delay="indefinite"/>
+                      </p:stCondLst>
+                      <p:childTnLst>
+                        <p:par>
+                          <p:cTn id="10" fill="hold">
+                            <p:stCondLst>
+                              <p:cond delay="0"/>
+                            </p:stCondLst>
+                            <p:childTnLst>
+                              <p:par>
+                                <p:cTn id="11" presetID="1" presetClass="entr" presetSubtype="0" fill="hold" nodeType="clickEffect">
+                                  <p:stCondLst>
+                                    <p:cond delay="0"/>
+                                  </p:stCondLst>
+                                  <p:childTnLst>
+                                    <p:set>
+                                      <p:cBhvr>
+                                        <p:cTn id="12" dur="1" fill="hold">
+                                          <p:stCondLst>
+                                            <p:cond delay="0"/>
+                                          </p:stCondLst>
+                                        </p:cTn>
+                                        <p:tgtEl>
+                                          <p:spTgt spid="3">
+                                            <p:txEl>
+                                              <p:pRg st="3" end="3"/>
+                                            </p:txEl>
+                                          </p:spTgt>
+                                        </p:tgtEl>
+                                        <p:attrNameLst>
+                                          <p:attrName>style.visibility</p:attrName>
+                                        </p:attrNameLst>
+                                      </p:cBhvr>
+                                      <p:to>
+                                        <p:strVal val="visible"/>
+                                      </p:to>
+                                    </p:set>
+                                  </p:childTnLst>
+                                </p:cTn>
+                              </p:par>
+                              <p:par>
+                                <p:cTn id="13" presetID="1" presetClass="entr" presetSubtype="0" fill="hold" nodeType="withEffect">
+                                  <p:stCondLst>
+                                    <p:cond delay="0"/>
+                                  </p:stCondLst>
+                                  <p:childTnLst>
+                                    <p:set>
+                                      <p:cBhvr>
+                                        <p:cTn id="14" dur="1" fill="hold">
+                                          <p:stCondLst>
+                                            <p:cond delay="0"/>
+                                          </p:stCondLst>
+                                        </p:cTn>
+                                        <p:tgtEl>
+                                          <p:spTgt spid="3">
+                                            <p:txEl>
+                                              <p:pRg st="4" end="4"/>
+                                            </p:txEl>
+                                          </p:spTgt>
+                                        </p:tgtEl>
+                                        <p:attrNameLst>
+                                          <p:attrName>style.visibility</p:attrName>
+                                        </p:attrNameLst>
+                                      </p:cBhvr>
+                                      <p:to>
+                                        <p:strVal val="visible"/>
+                                      </p:to>
+                                    </p:set>
+                                  </p:childTnLst>
+                                </p:cTn>
+                              </p:par>
+                            </p:childTnLst>
+                          </p:cTn>
+                        </p:par>
+                      </p:childTnLst>
+                    </p:cTn>
+                  </p:par>
+                </p:childTnLst>
+              </p:cTn>
+              <p:prevCondLst>
+                <p:cond evt="onPrev" delay="0">
+                  <p:tgtEl>
+                    <p:sldTgt/>
+                  </p:tgtEl>
+                </p:cond>
+              </p:prevCondLst>
+              <p:nextCondLst>
+                <p:cond evt="onNext" delay="0">
+                  <p:tgtEl>
+                    <p:sldTgt/>
+                  </p:tgtEl>
+                </p:cond>
+              </p:nextCondLst>
+            </p:seq>
+          </p:childTnLst>
+        </p:cTn>
+      </p:par>
+    </p:tnLst>
+  </p:timing>
 </p:sld>
 </file>
 
-<file path=ppt/slides/slide62.xml><?xml version="1.0" encoding="utf-8"?>
+<file path=ppt/slides/slide64.xml><?xml version="1.0" encoding="utf-8"?>
 <p:sld xmlns:a="http://schemas.openxmlformats.org/drawingml/2006/main" xmlns:r="http://schemas.openxmlformats.org/officeDocument/2006/relationships" xmlns:p="http://schemas.openxmlformats.org/presentationml/2006/main">
   <p:cSld>
     <p:spTree>
@@ -33309,10 +35251,293 @@
   <p:clrMapOvr>
     <a:masterClrMapping/>
   </p:clrMapOvr>
+  <p:timing>
+    <p:tnLst>
+      <p:par>
+        <p:cTn id="1" dur="indefinite" restart="never" nodeType="tmRoot">
+          <p:childTnLst>
+            <p:seq concurrent="1" nextAc="seek">
+              <p:cTn id="2" dur="indefinite" nodeType="mainSeq">
+                <p:childTnLst>
+                  <p:par>
+                    <p:cTn id="3" fill="hold">
+                      <p:stCondLst>
+                        <p:cond delay="indefinite"/>
+                      </p:stCondLst>
+                      <p:childTnLst>
+                        <p:par>
+                          <p:cTn id="4" fill="hold">
+                            <p:stCondLst>
+                              <p:cond delay="0"/>
+                            </p:stCondLst>
+                            <p:childTnLst>
+                              <p:par>
+                                <p:cTn id="5" presetID="1" presetClass="entr" presetSubtype="0" fill="hold" nodeType="clickEffect">
+                                  <p:stCondLst>
+                                    <p:cond delay="0"/>
+                                  </p:stCondLst>
+                                  <p:childTnLst>
+                                    <p:set>
+                                      <p:cBhvr>
+                                        <p:cTn id="6" dur="1" fill="hold">
+                                          <p:stCondLst>
+                                            <p:cond delay="0"/>
+                                          </p:stCondLst>
+                                        </p:cTn>
+                                        <p:tgtEl>
+                                          <p:spTgt spid="3">
+                                            <p:txEl>
+                                              <p:pRg st="1" end="1"/>
+                                            </p:txEl>
+                                          </p:spTgt>
+                                        </p:tgtEl>
+                                        <p:attrNameLst>
+                                          <p:attrName>style.visibility</p:attrName>
+                                        </p:attrNameLst>
+                                      </p:cBhvr>
+                                      <p:to>
+                                        <p:strVal val="visible"/>
+                                      </p:to>
+                                    </p:set>
+                                  </p:childTnLst>
+                                </p:cTn>
+                              </p:par>
+                              <p:par>
+                                <p:cTn id="7" presetID="1" presetClass="entr" presetSubtype="0" fill="hold" nodeType="withEffect">
+                                  <p:stCondLst>
+                                    <p:cond delay="0"/>
+                                  </p:stCondLst>
+                                  <p:childTnLst>
+                                    <p:set>
+                                      <p:cBhvr>
+                                        <p:cTn id="8" dur="1" fill="hold">
+                                          <p:stCondLst>
+                                            <p:cond delay="0"/>
+                                          </p:stCondLst>
+                                        </p:cTn>
+                                        <p:tgtEl>
+                                          <p:spTgt spid="3">
+                                            <p:txEl>
+                                              <p:pRg st="2" end="2"/>
+                                            </p:txEl>
+                                          </p:spTgt>
+                                        </p:tgtEl>
+                                        <p:attrNameLst>
+                                          <p:attrName>style.visibility</p:attrName>
+                                        </p:attrNameLst>
+                                      </p:cBhvr>
+                                      <p:to>
+                                        <p:strVal val="visible"/>
+                                      </p:to>
+                                    </p:set>
+                                  </p:childTnLst>
+                                </p:cTn>
+                              </p:par>
+                              <p:par>
+                                <p:cTn id="9" presetID="1" presetClass="entr" presetSubtype="0" fill="hold" nodeType="withEffect">
+                                  <p:stCondLst>
+                                    <p:cond delay="0"/>
+                                  </p:stCondLst>
+                                  <p:childTnLst>
+                                    <p:set>
+                                      <p:cBhvr>
+                                        <p:cTn id="10" dur="1" fill="hold">
+                                          <p:stCondLst>
+                                            <p:cond delay="0"/>
+                                          </p:stCondLst>
+                                        </p:cTn>
+                                        <p:tgtEl>
+                                          <p:spTgt spid="3">
+                                            <p:txEl>
+                                              <p:pRg st="3" end="3"/>
+                                            </p:txEl>
+                                          </p:spTgt>
+                                        </p:tgtEl>
+                                        <p:attrNameLst>
+                                          <p:attrName>style.visibility</p:attrName>
+                                        </p:attrNameLst>
+                                      </p:cBhvr>
+                                      <p:to>
+                                        <p:strVal val="visible"/>
+                                      </p:to>
+                                    </p:set>
+                                  </p:childTnLst>
+                                </p:cTn>
+                              </p:par>
+                              <p:par>
+                                <p:cTn id="11" presetID="1" presetClass="entr" presetSubtype="0" fill="hold" nodeType="withEffect">
+                                  <p:stCondLst>
+                                    <p:cond delay="0"/>
+                                  </p:stCondLst>
+                                  <p:childTnLst>
+                                    <p:set>
+                                      <p:cBhvr>
+                                        <p:cTn id="12" dur="1" fill="hold">
+                                          <p:stCondLst>
+                                            <p:cond delay="0"/>
+                                          </p:stCondLst>
+                                        </p:cTn>
+                                        <p:tgtEl>
+                                          <p:spTgt spid="3">
+                                            <p:txEl>
+                                              <p:pRg st="4" end="4"/>
+                                            </p:txEl>
+                                          </p:spTgt>
+                                        </p:tgtEl>
+                                        <p:attrNameLst>
+                                          <p:attrName>style.visibility</p:attrName>
+                                        </p:attrNameLst>
+                                      </p:cBhvr>
+                                      <p:to>
+                                        <p:strVal val="visible"/>
+                                      </p:to>
+                                    </p:set>
+                                  </p:childTnLst>
+                                </p:cTn>
+                              </p:par>
+                              <p:par>
+                                <p:cTn id="13" presetID="1" presetClass="entr" presetSubtype="0" fill="hold" nodeType="withEffect">
+                                  <p:stCondLst>
+                                    <p:cond delay="0"/>
+                                  </p:stCondLst>
+                                  <p:childTnLst>
+                                    <p:set>
+                                      <p:cBhvr>
+                                        <p:cTn id="14" dur="1" fill="hold">
+                                          <p:stCondLst>
+                                            <p:cond delay="0"/>
+                                          </p:stCondLst>
+                                        </p:cTn>
+                                        <p:tgtEl>
+                                          <p:spTgt spid="3">
+                                            <p:txEl>
+                                              <p:pRg st="5" end="5"/>
+                                            </p:txEl>
+                                          </p:spTgt>
+                                        </p:tgtEl>
+                                        <p:attrNameLst>
+                                          <p:attrName>style.visibility</p:attrName>
+                                        </p:attrNameLst>
+                                      </p:cBhvr>
+                                      <p:to>
+                                        <p:strVal val="visible"/>
+                                      </p:to>
+                                    </p:set>
+                                  </p:childTnLst>
+                                </p:cTn>
+                              </p:par>
+                              <p:par>
+                                <p:cTn id="15" presetID="1" presetClass="entr" presetSubtype="0" fill="hold" nodeType="withEffect">
+                                  <p:stCondLst>
+                                    <p:cond delay="0"/>
+                                  </p:stCondLst>
+                                  <p:childTnLst>
+                                    <p:set>
+                                      <p:cBhvr>
+                                        <p:cTn id="16" dur="1" fill="hold">
+                                          <p:stCondLst>
+                                            <p:cond delay="0"/>
+                                          </p:stCondLst>
+                                        </p:cTn>
+                                        <p:tgtEl>
+                                          <p:spTgt spid="3">
+                                            <p:txEl>
+                                              <p:pRg st="6" end="6"/>
+                                            </p:txEl>
+                                          </p:spTgt>
+                                        </p:tgtEl>
+                                        <p:attrNameLst>
+                                          <p:attrName>style.visibility</p:attrName>
+                                        </p:attrNameLst>
+                                      </p:cBhvr>
+                                      <p:to>
+                                        <p:strVal val="visible"/>
+                                      </p:to>
+                                    </p:set>
+                                  </p:childTnLst>
+                                </p:cTn>
+                              </p:par>
+                            </p:childTnLst>
+                          </p:cTn>
+                        </p:par>
+                      </p:childTnLst>
+                    </p:cTn>
+                  </p:par>
+                  <p:par>
+                    <p:cTn id="17" fill="hold">
+                      <p:stCondLst>
+                        <p:cond delay="indefinite"/>
+                      </p:stCondLst>
+                      <p:childTnLst>
+                        <p:par>
+                          <p:cTn id="18" fill="hold">
+                            <p:stCondLst>
+                              <p:cond delay="0"/>
+                            </p:stCondLst>
+                            <p:childTnLst>
+                              <p:par>
+                                <p:cTn id="19" presetID="1" presetClass="entr" presetSubtype="0" fill="hold" nodeType="clickEffect">
+                                  <p:stCondLst>
+                                    <p:cond delay="0"/>
+                                  </p:stCondLst>
+                                  <p:childTnLst>
+                                    <p:set>
+                                      <p:cBhvr>
+                                        <p:cTn id="20" dur="1" fill="hold">
+                                          <p:stCondLst>
+                                            <p:cond delay="0"/>
+                                          </p:stCondLst>
+                                        </p:cTn>
+                                        <p:tgtEl>
+                                          <p:spTgt spid="3">
+                                            <p:txEl>
+                                              <p:pRg st="7" end="7"/>
+                                            </p:txEl>
+                                          </p:spTgt>
+                                        </p:tgtEl>
+                                        <p:attrNameLst>
+                                          <p:attrName>style.visibility</p:attrName>
+                                        </p:attrNameLst>
+                                      </p:cBhvr>
+                                      <p:to>
+                                        <p:strVal val="visible"/>
+                                      </p:to>
+                                    </p:set>
+                                  </p:childTnLst>
+                                </p:cTn>
+                              </p:par>
+                            </p:childTnLst>
+                          </p:cTn>
+                        </p:par>
+                      </p:childTnLst>
+                    </p:cTn>
+                  </p:par>
+                </p:childTnLst>
+              </p:cTn>
+              <p:prevCondLst>
+                <p:cond evt="onPrev" delay="0">
+                  <p:tgtEl>
+                    <p:sldTgt/>
+                  </p:tgtEl>
+                </p:cond>
+              </p:prevCondLst>
+              <p:nextCondLst>
+                <p:cond evt="onNext" delay="0">
+                  <p:tgtEl>
+                    <p:sldTgt/>
+                  </p:tgtEl>
+                </p:cond>
+              </p:nextCondLst>
+            </p:seq>
+          </p:childTnLst>
+        </p:cTn>
+      </p:par>
+    </p:tnLst>
+  </p:timing>
 </p:sld>
 </file>
 
-<file path=ppt/slides/slide63.xml><?xml version="1.0" encoding="utf-8"?>
+<file path=ppt/slides/slide65.xml><?xml version="1.0" encoding="utf-8"?>
 <p:sld xmlns:a="http://schemas.openxmlformats.org/drawingml/2006/main" xmlns:r="http://schemas.openxmlformats.org/officeDocument/2006/relationships" xmlns:p="http://schemas.openxmlformats.org/presentationml/2006/main">
   <p:cSld>
     <p:spTree>
@@ -33450,10 +35675,249 @@
   <p:clrMapOvr>
     <a:masterClrMapping/>
   </p:clrMapOvr>
+  <p:timing>
+    <p:tnLst>
+      <p:par>
+        <p:cTn id="1" dur="indefinite" restart="never" nodeType="tmRoot">
+          <p:childTnLst>
+            <p:seq concurrent="1" nextAc="seek">
+              <p:cTn id="2" dur="indefinite" nodeType="mainSeq">
+                <p:childTnLst>
+                  <p:par>
+                    <p:cTn id="3" fill="hold">
+                      <p:stCondLst>
+                        <p:cond delay="indefinite"/>
+                      </p:stCondLst>
+                      <p:childTnLst>
+                        <p:par>
+                          <p:cTn id="4" fill="hold">
+                            <p:stCondLst>
+                              <p:cond delay="0"/>
+                            </p:stCondLst>
+                            <p:childTnLst>
+                              <p:par>
+                                <p:cTn id="5" presetID="1" presetClass="entr" presetSubtype="0" fill="hold" nodeType="clickEffect">
+                                  <p:stCondLst>
+                                    <p:cond delay="0"/>
+                                  </p:stCondLst>
+                                  <p:childTnLst>
+                                    <p:set>
+                                      <p:cBhvr>
+                                        <p:cTn id="6" dur="1" fill="hold">
+                                          <p:stCondLst>
+                                            <p:cond delay="0"/>
+                                          </p:stCondLst>
+                                        </p:cTn>
+                                        <p:tgtEl>
+                                          <p:spTgt spid="3">
+                                            <p:txEl>
+                                              <p:pRg st="1" end="1"/>
+                                            </p:txEl>
+                                          </p:spTgt>
+                                        </p:tgtEl>
+                                        <p:attrNameLst>
+                                          <p:attrName>style.visibility</p:attrName>
+                                        </p:attrNameLst>
+                                      </p:cBhvr>
+                                      <p:to>
+                                        <p:strVal val="visible"/>
+                                      </p:to>
+                                    </p:set>
+                                  </p:childTnLst>
+                                </p:cTn>
+                              </p:par>
+                            </p:childTnLst>
+                          </p:cTn>
+                        </p:par>
+                      </p:childTnLst>
+                    </p:cTn>
+                  </p:par>
+                  <p:par>
+                    <p:cTn id="7" fill="hold">
+                      <p:stCondLst>
+                        <p:cond delay="indefinite"/>
+                      </p:stCondLst>
+                      <p:childTnLst>
+                        <p:par>
+                          <p:cTn id="8" fill="hold">
+                            <p:stCondLst>
+                              <p:cond delay="0"/>
+                            </p:stCondLst>
+                            <p:childTnLst>
+                              <p:par>
+                                <p:cTn id="9" presetID="1" presetClass="entr" presetSubtype="0" fill="hold" nodeType="clickEffect">
+                                  <p:stCondLst>
+                                    <p:cond delay="0"/>
+                                  </p:stCondLst>
+                                  <p:childTnLst>
+                                    <p:set>
+                                      <p:cBhvr>
+                                        <p:cTn id="10" dur="1" fill="hold">
+                                          <p:stCondLst>
+                                            <p:cond delay="0"/>
+                                          </p:stCondLst>
+                                        </p:cTn>
+                                        <p:tgtEl>
+                                          <p:spTgt spid="3">
+                                            <p:txEl>
+                                              <p:pRg st="2" end="2"/>
+                                            </p:txEl>
+                                          </p:spTgt>
+                                        </p:tgtEl>
+                                        <p:attrNameLst>
+                                          <p:attrName>style.visibility</p:attrName>
+                                        </p:attrNameLst>
+                                      </p:cBhvr>
+                                      <p:to>
+                                        <p:strVal val="visible"/>
+                                      </p:to>
+                                    </p:set>
+                                  </p:childTnLst>
+                                </p:cTn>
+                              </p:par>
+                              <p:par>
+                                <p:cTn id="11" presetID="1" presetClass="entr" presetSubtype="0" fill="hold" nodeType="withEffect">
+                                  <p:stCondLst>
+                                    <p:cond delay="0"/>
+                                  </p:stCondLst>
+                                  <p:childTnLst>
+                                    <p:set>
+                                      <p:cBhvr>
+                                        <p:cTn id="12" dur="1" fill="hold">
+                                          <p:stCondLst>
+                                            <p:cond delay="0"/>
+                                          </p:stCondLst>
+                                        </p:cTn>
+                                        <p:tgtEl>
+                                          <p:spTgt spid="3">
+                                            <p:txEl>
+                                              <p:pRg st="3" end="3"/>
+                                            </p:txEl>
+                                          </p:spTgt>
+                                        </p:tgtEl>
+                                        <p:attrNameLst>
+                                          <p:attrName>style.visibility</p:attrName>
+                                        </p:attrNameLst>
+                                      </p:cBhvr>
+                                      <p:to>
+                                        <p:strVal val="visible"/>
+                                      </p:to>
+                                    </p:set>
+                                  </p:childTnLst>
+                                </p:cTn>
+                              </p:par>
+                              <p:par>
+                                <p:cTn id="13" presetID="1" presetClass="entr" presetSubtype="0" fill="hold" nodeType="withEffect">
+                                  <p:stCondLst>
+                                    <p:cond delay="0"/>
+                                  </p:stCondLst>
+                                  <p:childTnLst>
+                                    <p:set>
+                                      <p:cBhvr>
+                                        <p:cTn id="14" dur="1" fill="hold">
+                                          <p:stCondLst>
+                                            <p:cond delay="0"/>
+                                          </p:stCondLst>
+                                        </p:cTn>
+                                        <p:tgtEl>
+                                          <p:spTgt spid="3">
+                                            <p:txEl>
+                                              <p:pRg st="4" end="4"/>
+                                            </p:txEl>
+                                          </p:spTgt>
+                                        </p:tgtEl>
+                                        <p:attrNameLst>
+                                          <p:attrName>style.visibility</p:attrName>
+                                        </p:attrNameLst>
+                                      </p:cBhvr>
+                                      <p:to>
+                                        <p:strVal val="visible"/>
+                                      </p:to>
+                                    </p:set>
+                                  </p:childTnLst>
+                                </p:cTn>
+                              </p:par>
+                            </p:childTnLst>
+                          </p:cTn>
+                        </p:par>
+                      </p:childTnLst>
+                    </p:cTn>
+                  </p:par>
+                  <p:par>
+                    <p:cTn id="15" fill="hold">
+                      <p:stCondLst>
+                        <p:cond delay="indefinite"/>
+                      </p:stCondLst>
+                      <p:childTnLst>
+                        <p:par>
+                          <p:cTn id="16" fill="hold">
+                            <p:stCondLst>
+                              <p:cond delay="0"/>
+                            </p:stCondLst>
+                            <p:childTnLst>
+                              <p:par>
+                                <p:cTn id="17" presetID="1" presetClass="entr" presetSubtype="0" fill="hold" nodeType="clickEffect">
+                                  <p:stCondLst>
+                                    <p:cond delay="0"/>
+                                  </p:stCondLst>
+                                  <p:childTnLst>
+                                    <p:set>
+                                      <p:cBhvr>
+                                        <p:cTn id="18" dur="1" fill="hold">
+                                          <p:stCondLst>
+                                            <p:cond delay="0"/>
+                                          </p:stCondLst>
+                                        </p:cTn>
+                                        <p:tgtEl>
+                                          <p:spTgt spid="3">
+                                            <p:txEl>
+                                              <p:pRg st="5" end="5"/>
+                                            </p:txEl>
+                                          </p:spTgt>
+                                        </p:tgtEl>
+                                        <p:attrNameLst>
+                                          <p:attrName>style.visibility</p:attrName>
+                                        </p:attrNameLst>
+                                      </p:cBhvr>
+                                      <p:to>
+                                        <p:strVal val="visible"/>
+                                      </p:to>
+                                    </p:set>
+                                  </p:childTnLst>
+                                </p:cTn>
+                              </p:par>
+                            </p:childTnLst>
+                          </p:cTn>
+                        </p:par>
+                      </p:childTnLst>
+                    </p:cTn>
+                  </p:par>
+                </p:childTnLst>
+              </p:cTn>
+              <p:prevCondLst>
+                <p:cond evt="onPrev" delay="0">
+                  <p:tgtEl>
+                    <p:sldTgt/>
+                  </p:tgtEl>
+                </p:cond>
+              </p:prevCondLst>
+              <p:nextCondLst>
+                <p:cond evt="onNext" delay="0">
+                  <p:tgtEl>
+                    <p:sldTgt/>
+                  </p:tgtEl>
+                </p:cond>
+              </p:nextCondLst>
+            </p:seq>
+          </p:childTnLst>
+        </p:cTn>
+      </p:par>
+    </p:tnLst>
+  </p:timing>
 </p:sld>
 </file>
 
-<file path=ppt/slides/slide64.xml><?xml version="1.0" encoding="utf-8"?>
+<file path=ppt/slides/slide66.xml><?xml version="1.0" encoding="utf-8"?>
 <p:sld xmlns:a="http://schemas.openxmlformats.org/drawingml/2006/main" xmlns:r="http://schemas.openxmlformats.org/officeDocument/2006/relationships" xmlns:p="http://schemas.openxmlformats.org/presentationml/2006/main">
   <p:cSld>
     <p:spTree>
@@ -33720,7 +36184,7 @@
 </p:sld>
 </file>
 
-<file path=ppt/slides/slide65.xml><?xml version="1.0" encoding="utf-8"?>
+<file path=ppt/slides/slide67.xml><?xml version="1.0" encoding="utf-8"?>
 <p:sld xmlns:a="http://schemas.openxmlformats.org/drawingml/2006/main" xmlns:r="http://schemas.openxmlformats.org/officeDocument/2006/relationships" xmlns:p="http://schemas.openxmlformats.org/presentationml/2006/main">
   <p:cSld>
     <p:spTree>
@@ -33870,7 +36334,7 @@
 </p:sld>
 </file>
 
-<file path=ppt/slides/slide66.xml><?xml version="1.0" encoding="utf-8"?>
+<file path=ppt/slides/slide68.xml><?xml version="1.0" encoding="utf-8"?>
 <p:sld xmlns:a="http://schemas.openxmlformats.org/drawingml/2006/main" xmlns:r="http://schemas.openxmlformats.org/officeDocument/2006/relationships" xmlns:p="http://schemas.openxmlformats.org/presentationml/2006/main">
   <p:cSld>
     <p:spTree>
@@ -33999,7 +36463,7 @@
 </p:sld>
 </file>
 
-<file path=ppt/slides/slide67.xml><?xml version="1.0" encoding="utf-8"?>
+<file path=ppt/slides/slide69.xml><?xml version="1.0" encoding="utf-8"?>
 <p:sld xmlns:a="http://schemas.openxmlformats.org/drawingml/2006/main" xmlns:r="http://schemas.openxmlformats.org/officeDocument/2006/relationships" xmlns:p="http://schemas.openxmlformats.org/presentationml/2006/main">
   <p:cSld>
     <p:spTree>
@@ -34147,7 +36611,386 @@
 </p:sld>
 </file>
 
-<file path=ppt/slides/slide68.xml><?xml version="1.0" encoding="utf-8"?>
+<file path=ppt/slides/slide7.xml><?xml version="1.0" encoding="utf-8"?>
+<p:sld xmlns:a="http://schemas.openxmlformats.org/drawingml/2006/main" xmlns:r="http://schemas.openxmlformats.org/officeDocument/2006/relationships" xmlns:p="http://schemas.openxmlformats.org/presentationml/2006/main">
+  <p:cSld>
+    <p:spTree>
+      <p:nvGrpSpPr>
+        <p:cNvPr id="1" name="">
+          <a:extLst>
+            <a:ext uri="{FF2B5EF4-FFF2-40B4-BE49-F238E27FC236}">
+              <a16:creationId xmlns:a16="http://schemas.microsoft.com/office/drawing/2014/main" id="{B3993F59-9009-4191-4BD0-62EAFBE3087E}"/>
+            </a:ext>
+          </a:extLst>
+        </p:cNvPr>
+        <p:cNvGrpSpPr/>
+        <p:nvPr/>
+      </p:nvGrpSpPr>
+      <p:grpSpPr>
+        <a:xfrm>
+          <a:off x="0" y="0"/>
+          <a:ext cx="0" cy="0"/>
+          <a:chOff x="0" y="0"/>
+          <a:chExt cx="0" cy="0"/>
+        </a:xfrm>
+      </p:grpSpPr>
+      <p:sp>
+        <p:nvSpPr>
+          <p:cNvPr id="2" name="Title 1">
+            <a:extLst>
+              <a:ext uri="{FF2B5EF4-FFF2-40B4-BE49-F238E27FC236}">
+                <a16:creationId xmlns:a16="http://schemas.microsoft.com/office/drawing/2014/main" id="{5A5D5B7B-EC31-F645-671E-3F2116407953}"/>
+              </a:ext>
+            </a:extLst>
+          </p:cNvPr>
+          <p:cNvSpPr>
+            <a:spLocks noGrp="1"/>
+          </p:cNvSpPr>
+          <p:nvPr>
+            <p:ph type="title"/>
+          </p:nvPr>
+        </p:nvSpPr>
+        <p:spPr/>
+        <p:txBody>
+          <a:bodyPr/>
+          <a:lstStyle/>
+          <a:p>
+            <a:pPr marL="0" lvl="0" indent="0">
+              <a:buNone/>
+            </a:pPr>
+            <a:r>
+              <a:rPr lang="en-US" dirty="0"/>
+              <a:t>Modeling Zero-Inflated Distributions</a:t>
+            </a:r>
+            <a:endParaRPr dirty="0"/>
+          </a:p>
+        </p:txBody>
+      </p:sp>
+      <p:sp>
+        <p:nvSpPr>
+          <p:cNvPr id="3" name="Content Placeholder 2">
+            <a:extLst>
+              <a:ext uri="{FF2B5EF4-FFF2-40B4-BE49-F238E27FC236}">
+                <a16:creationId xmlns:a16="http://schemas.microsoft.com/office/drawing/2014/main" id="{4C4AB32E-A8D9-3191-4BF8-4C76B8CCB7FC}"/>
+              </a:ext>
+            </a:extLst>
+          </p:cNvPr>
+          <p:cNvSpPr>
+            <a:spLocks noGrp="1"/>
+          </p:cNvSpPr>
+          <p:nvPr>
+            <p:ph idx="1"/>
+          </p:nvPr>
+        </p:nvSpPr>
+        <p:spPr/>
+        <p:txBody>
+          <a:bodyPr>
+            <a:normAutofit/>
+          </a:bodyPr>
+          <a:lstStyle/>
+          <a:p>
+            <a:pPr marL="0" lvl="0" indent="0">
+              <a:buNone/>
+            </a:pPr>
+            <a:r>
+              <a:rPr lang="en-US" dirty="0"/>
+              <a:t>How can we model zero inflated distributions?  </a:t>
+            </a:r>
+            <a:endParaRPr dirty="0"/>
+          </a:p>
+          <a:p>
+            <a:pPr lvl="0"/>
+            <a:r>
+              <a:rPr lang="en-US" dirty="0"/>
+              <a:t>Standard ‘named’ distributions do not account for zero-inflation  </a:t>
+            </a:r>
+          </a:p>
+          <a:p>
+            <a:pPr lvl="0"/>
+            <a:r>
+              <a:rPr lang="en-US" dirty="0"/>
+              <a:t>Can use a mixture of two distributions  </a:t>
+            </a:r>
+          </a:p>
+          <a:p>
+            <a:pPr lvl="1"/>
+            <a:r>
+              <a:rPr lang="en-US" dirty="0"/>
+              <a:t>A binomial distribution, or switching distribution  </a:t>
+            </a:r>
+          </a:p>
+          <a:p>
+            <a:pPr lvl="1"/>
+            <a:r>
+              <a:rPr lang="en-US" dirty="0"/>
+              <a:t>A standard distribution </a:t>
+            </a:r>
+          </a:p>
+          <a:p>
+            <a:r>
+              <a:rPr lang="en-US" dirty="0"/>
+              <a:t>The binomial distribution serves as a ‘switch’ between 0 response and the other distribution   </a:t>
+            </a:r>
+          </a:p>
+          <a:p>
+            <a:pPr lvl="0"/>
+            <a:endParaRPr dirty="0"/>
+          </a:p>
+        </p:txBody>
+      </p:sp>
+    </p:spTree>
+    <p:extLst>
+      <p:ext uri="{BB962C8B-B14F-4D97-AF65-F5344CB8AC3E}">
+        <p14:creationId xmlns:p14="http://schemas.microsoft.com/office/powerpoint/2010/main" val="4064511800"/>
+      </p:ext>
+    </p:extLst>
+  </p:cSld>
+  <p:clrMapOvr>
+    <a:masterClrMapping/>
+  </p:clrMapOvr>
+  <p:timing>
+    <p:tnLst>
+      <p:par>
+        <p:cTn id="1" dur="indefinite" restart="never" nodeType="tmRoot">
+          <p:childTnLst>
+            <p:seq concurrent="1" nextAc="seek">
+              <p:cTn id="2" dur="indefinite" nodeType="mainSeq">
+                <p:childTnLst>
+                  <p:par>
+                    <p:cTn id="3" fill="hold">
+                      <p:stCondLst>
+                        <p:cond delay="indefinite"/>
+                      </p:stCondLst>
+                      <p:childTnLst>
+                        <p:par>
+                          <p:cTn id="4" fill="hold">
+                            <p:stCondLst>
+                              <p:cond delay="0"/>
+                            </p:stCondLst>
+                            <p:childTnLst>
+                              <p:par>
+                                <p:cTn id="5" presetID="1" presetClass="entr" presetSubtype="0" fill="hold" nodeType="clickEffect">
+                                  <p:stCondLst>
+                                    <p:cond delay="0"/>
+                                  </p:stCondLst>
+                                  <p:childTnLst>
+                                    <p:set>
+                                      <p:cBhvr>
+                                        <p:cTn id="6" dur="1" fill="hold">
+                                          <p:stCondLst>
+                                            <p:cond delay="0"/>
+                                          </p:stCondLst>
+                                        </p:cTn>
+                                        <p:tgtEl>
+                                          <p:spTgt spid="3">
+                                            <p:txEl>
+                                              <p:pRg st="1" end="1"/>
+                                            </p:txEl>
+                                          </p:spTgt>
+                                        </p:tgtEl>
+                                        <p:attrNameLst>
+                                          <p:attrName>style.visibility</p:attrName>
+                                        </p:attrNameLst>
+                                      </p:cBhvr>
+                                      <p:to>
+                                        <p:strVal val="visible"/>
+                                      </p:to>
+                                    </p:set>
+                                  </p:childTnLst>
+                                </p:cTn>
+                              </p:par>
+                            </p:childTnLst>
+                          </p:cTn>
+                        </p:par>
+                      </p:childTnLst>
+                    </p:cTn>
+                  </p:par>
+                  <p:par>
+                    <p:cTn id="7" fill="hold">
+                      <p:stCondLst>
+                        <p:cond delay="indefinite"/>
+                      </p:stCondLst>
+                      <p:childTnLst>
+                        <p:par>
+                          <p:cTn id="8" fill="hold">
+                            <p:stCondLst>
+                              <p:cond delay="0"/>
+                            </p:stCondLst>
+                            <p:childTnLst>
+                              <p:par>
+                                <p:cTn id="9" presetID="1" presetClass="entr" presetSubtype="0" fill="hold" nodeType="clickEffect">
+                                  <p:stCondLst>
+                                    <p:cond delay="0"/>
+                                  </p:stCondLst>
+                                  <p:childTnLst>
+                                    <p:set>
+                                      <p:cBhvr>
+                                        <p:cTn id="10" dur="1" fill="hold">
+                                          <p:stCondLst>
+                                            <p:cond delay="0"/>
+                                          </p:stCondLst>
+                                        </p:cTn>
+                                        <p:tgtEl>
+                                          <p:spTgt spid="3">
+                                            <p:txEl>
+                                              <p:pRg st="2" end="2"/>
+                                            </p:txEl>
+                                          </p:spTgt>
+                                        </p:tgtEl>
+                                        <p:attrNameLst>
+                                          <p:attrName>style.visibility</p:attrName>
+                                        </p:attrNameLst>
+                                      </p:cBhvr>
+                                      <p:to>
+                                        <p:strVal val="visible"/>
+                                      </p:to>
+                                    </p:set>
+                                  </p:childTnLst>
+                                </p:cTn>
+                              </p:par>
+                              <p:par>
+                                <p:cTn id="11" presetID="1" presetClass="entr" presetSubtype="0" fill="hold" nodeType="withEffect">
+                                  <p:stCondLst>
+                                    <p:cond delay="0"/>
+                                  </p:stCondLst>
+                                  <p:childTnLst>
+                                    <p:set>
+                                      <p:cBhvr>
+                                        <p:cTn id="12" dur="1" fill="hold">
+                                          <p:stCondLst>
+                                            <p:cond delay="0"/>
+                                          </p:stCondLst>
+                                        </p:cTn>
+                                        <p:tgtEl>
+                                          <p:spTgt spid="3">
+                                            <p:txEl>
+                                              <p:pRg st="3" end="3"/>
+                                            </p:txEl>
+                                          </p:spTgt>
+                                        </p:tgtEl>
+                                        <p:attrNameLst>
+                                          <p:attrName>style.visibility</p:attrName>
+                                        </p:attrNameLst>
+                                      </p:cBhvr>
+                                      <p:to>
+                                        <p:strVal val="visible"/>
+                                      </p:to>
+                                    </p:set>
+                                  </p:childTnLst>
+                                </p:cTn>
+                              </p:par>
+                              <p:par>
+                                <p:cTn id="13" presetID="1" presetClass="entr" presetSubtype="0" fill="hold" nodeType="withEffect">
+                                  <p:stCondLst>
+                                    <p:cond delay="0"/>
+                                  </p:stCondLst>
+                                  <p:childTnLst>
+                                    <p:set>
+                                      <p:cBhvr>
+                                        <p:cTn id="14" dur="1" fill="hold">
+                                          <p:stCondLst>
+                                            <p:cond delay="0"/>
+                                          </p:stCondLst>
+                                        </p:cTn>
+                                        <p:tgtEl>
+                                          <p:spTgt spid="3">
+                                            <p:txEl>
+                                              <p:pRg st="4" end="4"/>
+                                            </p:txEl>
+                                          </p:spTgt>
+                                        </p:tgtEl>
+                                        <p:attrNameLst>
+                                          <p:attrName>style.visibility</p:attrName>
+                                        </p:attrNameLst>
+                                      </p:cBhvr>
+                                      <p:to>
+                                        <p:strVal val="visible"/>
+                                      </p:to>
+                                    </p:set>
+                                  </p:childTnLst>
+                                </p:cTn>
+                              </p:par>
+                            </p:childTnLst>
+                          </p:cTn>
+                        </p:par>
+                      </p:childTnLst>
+                    </p:cTn>
+                  </p:par>
+                  <p:par>
+                    <p:cTn id="15" fill="hold">
+                      <p:stCondLst>
+                        <p:cond delay="indefinite"/>
+                      </p:stCondLst>
+                      <p:childTnLst>
+                        <p:par>
+                          <p:cTn id="16" fill="hold">
+                            <p:stCondLst>
+                              <p:cond delay="0"/>
+                            </p:stCondLst>
+                            <p:childTnLst>
+                              <p:par>
+                                <p:cTn id="17" presetID="1" presetClass="entr" presetSubtype="0" fill="hold" nodeType="clickEffect">
+                                  <p:stCondLst>
+                                    <p:cond delay="0"/>
+                                  </p:stCondLst>
+                                  <p:childTnLst>
+                                    <p:set>
+                                      <p:cBhvr>
+                                        <p:cTn id="18" dur="1" fill="hold">
+                                          <p:stCondLst>
+                                            <p:cond delay="0"/>
+                                          </p:stCondLst>
+                                        </p:cTn>
+                                        <p:tgtEl>
+                                          <p:spTgt spid="3">
+                                            <p:txEl>
+                                              <p:pRg st="5" end="5"/>
+                                            </p:txEl>
+                                          </p:spTgt>
+                                        </p:tgtEl>
+                                        <p:attrNameLst>
+                                          <p:attrName>style.visibility</p:attrName>
+                                        </p:attrNameLst>
+                                      </p:cBhvr>
+                                      <p:to>
+                                        <p:strVal val="visible"/>
+                                      </p:to>
+                                    </p:set>
+                                  </p:childTnLst>
+                                </p:cTn>
+                              </p:par>
+                            </p:childTnLst>
+                          </p:cTn>
+                        </p:par>
+                      </p:childTnLst>
+                    </p:cTn>
+                  </p:par>
+                </p:childTnLst>
+              </p:cTn>
+              <p:prevCondLst>
+                <p:cond evt="onPrev" delay="0">
+                  <p:tgtEl>
+                    <p:sldTgt/>
+                  </p:tgtEl>
+                </p:cond>
+              </p:prevCondLst>
+              <p:nextCondLst>
+                <p:cond evt="onNext" delay="0">
+                  <p:tgtEl>
+                    <p:sldTgt/>
+                  </p:tgtEl>
+                </p:cond>
+              </p:nextCondLst>
+            </p:seq>
+          </p:childTnLst>
+        </p:cTn>
+      </p:par>
+    </p:tnLst>
+  </p:timing>
+</p:sld>
+</file>
+
+<file path=ppt/slides/slide70.xml><?xml version="1.0" encoding="utf-8"?>
 <p:sld xmlns:a="http://schemas.openxmlformats.org/drawingml/2006/main" xmlns:r="http://schemas.openxmlformats.org/officeDocument/2006/relationships" xmlns:p="http://schemas.openxmlformats.org/presentationml/2006/main">
   <p:cSld>
     <p:spTree>
@@ -34265,6 +37108,17 @@
           <a:p>
             <a:pPr lvl="1"/>
             <a:r>
+              <a:rPr lang="en-US" b="1" dirty="0"/>
+              <a:t>Multiple draws</a:t>
+            </a:r>
+            <a:r>
+              <a:rPr lang="en-US" dirty="0"/>
+              <a:t> give an estimate of the posterior distribution characterizing the uncertainty of imputed value estimates</a:t>
+            </a:r>
+          </a:p>
+          <a:p>
+            <a:pPr lvl="1"/>
+            <a:r>
               <a:rPr lang="en-US" b="1" dirty="0">
                 <a:hlinkClick r:id="rId3"/>
               </a:rPr>
@@ -34290,7 +37144,7 @@
 </p:sld>
 </file>
 
-<file path=ppt/slides/slide69.xml><?xml version="1.0" encoding="utf-8"?>
+<file path=ppt/slides/slide71.xml><?xml version="1.0" encoding="utf-8"?>
 <p:sld xmlns:a="http://schemas.openxmlformats.org/drawingml/2006/main" xmlns:r="http://schemas.openxmlformats.org/officeDocument/2006/relationships" xmlns:p="http://schemas.openxmlformats.org/presentationml/2006/main">
   <p:cSld>
     <p:spTree>
@@ -34630,146 +37484,6 @@
   <p:clrMapOvr>
     <a:masterClrMapping/>
   </p:clrMapOvr>
-</p:sld>
-</file>
-
-<file path=ppt/slides/slide7.xml><?xml version="1.0" encoding="utf-8"?>
-<p:sld xmlns:a="http://schemas.openxmlformats.org/drawingml/2006/main" xmlns:r="http://schemas.openxmlformats.org/officeDocument/2006/relationships" xmlns:p="http://schemas.openxmlformats.org/presentationml/2006/main">
-  <p:cSld>
-    <p:spTree>
-      <p:nvGrpSpPr>
-        <p:cNvPr id="1" name="">
-          <a:extLst>
-            <a:ext uri="{FF2B5EF4-FFF2-40B4-BE49-F238E27FC236}">
-              <a16:creationId xmlns:a16="http://schemas.microsoft.com/office/drawing/2014/main" id="{B3993F59-9009-4191-4BD0-62EAFBE3087E}"/>
-            </a:ext>
-          </a:extLst>
-        </p:cNvPr>
-        <p:cNvGrpSpPr/>
-        <p:nvPr/>
-      </p:nvGrpSpPr>
-      <p:grpSpPr>
-        <a:xfrm>
-          <a:off x="0" y="0"/>
-          <a:ext cx="0" cy="0"/>
-          <a:chOff x="0" y="0"/>
-          <a:chExt cx="0" cy="0"/>
-        </a:xfrm>
-      </p:grpSpPr>
-      <p:sp>
-        <p:nvSpPr>
-          <p:cNvPr id="2" name="Title 1">
-            <a:extLst>
-              <a:ext uri="{FF2B5EF4-FFF2-40B4-BE49-F238E27FC236}">
-                <a16:creationId xmlns:a16="http://schemas.microsoft.com/office/drawing/2014/main" id="{5A5D5B7B-EC31-F645-671E-3F2116407953}"/>
-              </a:ext>
-            </a:extLst>
-          </p:cNvPr>
-          <p:cNvSpPr>
-            <a:spLocks noGrp="1"/>
-          </p:cNvSpPr>
-          <p:nvPr>
-            <p:ph type="title"/>
-          </p:nvPr>
-        </p:nvSpPr>
-        <p:spPr/>
-        <p:txBody>
-          <a:bodyPr/>
-          <a:lstStyle/>
-          <a:p>
-            <a:pPr marL="0" lvl="0" indent="0">
-              <a:buNone/>
-            </a:pPr>
-            <a:r>
-              <a:rPr lang="en-US" dirty="0"/>
-              <a:t>Modeling Zero-Inflated Distributions</a:t>
-            </a:r>
-            <a:endParaRPr dirty="0"/>
-          </a:p>
-        </p:txBody>
-      </p:sp>
-      <p:sp>
-        <p:nvSpPr>
-          <p:cNvPr id="3" name="Content Placeholder 2">
-            <a:extLst>
-              <a:ext uri="{FF2B5EF4-FFF2-40B4-BE49-F238E27FC236}">
-                <a16:creationId xmlns:a16="http://schemas.microsoft.com/office/drawing/2014/main" id="{4C4AB32E-A8D9-3191-4BF8-4C76B8CCB7FC}"/>
-              </a:ext>
-            </a:extLst>
-          </p:cNvPr>
-          <p:cNvSpPr>
-            <a:spLocks noGrp="1"/>
-          </p:cNvSpPr>
-          <p:nvPr>
-            <p:ph idx="1"/>
-          </p:nvPr>
-        </p:nvSpPr>
-        <p:spPr/>
-        <p:txBody>
-          <a:bodyPr>
-            <a:normAutofit/>
-          </a:bodyPr>
-          <a:lstStyle/>
-          <a:p>
-            <a:pPr marL="0" lvl="0" indent="0">
-              <a:buNone/>
-            </a:pPr>
-            <a:r>
-              <a:rPr lang="en-US" dirty="0"/>
-              <a:t>How can we model zero inflated distributions?  </a:t>
-            </a:r>
-            <a:endParaRPr dirty="0"/>
-          </a:p>
-          <a:p>
-            <a:pPr lvl="0"/>
-            <a:r>
-              <a:rPr lang="en-US" dirty="0"/>
-              <a:t>Standard ‘named’ distributions do not account for zero-inflation  </a:t>
-            </a:r>
-          </a:p>
-          <a:p>
-            <a:pPr lvl="0"/>
-            <a:r>
-              <a:rPr lang="en-US" dirty="0"/>
-              <a:t>Can use a mixture of two distributions  </a:t>
-            </a:r>
-          </a:p>
-          <a:p>
-            <a:pPr lvl="1"/>
-            <a:r>
-              <a:rPr lang="en-US" dirty="0"/>
-              <a:t>A binomial distribution, or switching distribution  </a:t>
-            </a:r>
-          </a:p>
-          <a:p>
-            <a:pPr lvl="1"/>
-            <a:r>
-              <a:rPr lang="en-US" dirty="0"/>
-              <a:t>A standard distribution </a:t>
-            </a:r>
-          </a:p>
-          <a:p>
-            <a:r>
-              <a:rPr lang="en-US" dirty="0"/>
-              <a:t>The binomial distribution serves as a ‘switch’ between 0 response and the other distribution   </a:t>
-            </a:r>
-          </a:p>
-          <a:p>
-            <a:pPr lvl="0"/>
-            <a:endParaRPr dirty="0"/>
-          </a:p>
-        </p:txBody>
-      </p:sp>
-    </p:spTree>
-    <p:extLst>
-      <p:ext uri="{BB962C8B-B14F-4D97-AF65-F5344CB8AC3E}">
-        <p14:creationId xmlns:p14="http://schemas.microsoft.com/office/powerpoint/2010/main" val="4064511800"/>
-      </p:ext>
-    </p:extLst>
-  </p:cSld>
-  <p:clrMapOvr>
-    <a:masterClrMapping/>
-  </p:clrMapOvr>
   <p:timing>
     <p:tnLst>
       <p:par>
@@ -34821,33 +37535,15 @@
                                   </p:childTnLst>
                                 </p:cTn>
                               </p:par>
-                            </p:childTnLst>
-                          </p:cTn>
-                        </p:par>
-                      </p:childTnLst>
-                    </p:cTn>
-                  </p:par>
-                  <p:par>
-                    <p:cTn id="7" fill="hold">
-                      <p:stCondLst>
-                        <p:cond delay="indefinite"/>
-                      </p:stCondLst>
-                      <p:childTnLst>
-                        <p:par>
-                          <p:cTn id="8" fill="hold">
-                            <p:stCondLst>
-                              <p:cond delay="0"/>
-                            </p:stCondLst>
-                            <p:childTnLst>
                               <p:par>
-                                <p:cTn id="9" presetID="1" presetClass="entr" presetSubtype="0" fill="hold" nodeType="clickEffect">
+                                <p:cTn id="7" presetID="1" presetClass="entr" presetSubtype="0" fill="hold" nodeType="withEffect">
                                   <p:stCondLst>
                                     <p:cond delay="0"/>
                                   </p:stCondLst>
                                   <p:childTnLst>
                                     <p:set>
                                       <p:cBhvr>
-                                        <p:cTn id="10" dur="1" fill="hold">
+                                        <p:cTn id="8" dur="1" fill="hold">
                                           <p:stCondLst>
                                             <p:cond delay="0"/>
                                           </p:stCondLst>
@@ -34871,14 +37567,14 @@
                                 </p:cTn>
                               </p:par>
                               <p:par>
-                                <p:cTn id="11" presetID="1" presetClass="entr" presetSubtype="0" fill="hold" nodeType="withEffect">
+                                <p:cTn id="9" presetID="1" presetClass="entr" presetSubtype="0" fill="hold" nodeType="withEffect">
                                   <p:stCondLst>
                                     <p:cond delay="0"/>
                                   </p:stCondLst>
                                   <p:childTnLst>
                                     <p:set>
                                       <p:cBhvr>
-                                        <p:cTn id="12" dur="1" fill="hold">
+                                        <p:cTn id="10" dur="1" fill="hold">
                                           <p:stCondLst>
                                             <p:cond delay="0"/>
                                           </p:stCondLst>
@@ -34901,8 +37597,26 @@
                                   </p:childTnLst>
                                 </p:cTn>
                               </p:par>
+                            </p:childTnLst>
+                          </p:cTn>
+                        </p:par>
+                      </p:childTnLst>
+                    </p:cTn>
+                  </p:par>
+                  <p:par>
+                    <p:cTn id="11" fill="hold">
+                      <p:stCondLst>
+                        <p:cond delay="indefinite"/>
+                      </p:stCondLst>
+                      <p:childTnLst>
+                        <p:par>
+                          <p:cTn id="12" fill="hold">
+                            <p:stCondLst>
+                              <p:cond delay="0"/>
+                            </p:stCondLst>
+                            <p:childTnLst>
                               <p:par>
-                                <p:cTn id="13" presetID="1" presetClass="entr" presetSubtype="0" fill="hold" nodeType="withEffect">
+                                <p:cTn id="13" presetID="1" presetClass="entr" presetSubtype="0" fill="hold" nodeType="clickEffect">
                                   <p:stCondLst>
                                     <p:cond delay="0"/>
                                   </p:stCondLst>
@@ -34918,55 +37632,6 @@
                                           <p:spTgt spid="3">
                                             <p:txEl>
                                               <p:pRg st="4" end="4"/>
-                                            </p:txEl>
-                                          </p:spTgt>
-                                        </p:tgtEl>
-                                        <p:attrNameLst>
-                                          <p:attrName>style.visibility</p:attrName>
-                                        </p:attrNameLst>
-                                      </p:cBhvr>
-                                      <p:to>
-                                        <p:strVal val="visible"/>
-                                      </p:to>
-                                    </p:set>
-                                  </p:childTnLst>
-                                </p:cTn>
-                              </p:par>
-                            </p:childTnLst>
-                          </p:cTn>
-                        </p:par>
-                      </p:childTnLst>
-                    </p:cTn>
-                  </p:par>
-                  <p:par>
-                    <p:cTn id="15" fill="hold">
-                      <p:stCondLst>
-                        <p:cond delay="indefinite"/>
-                      </p:stCondLst>
-                      <p:childTnLst>
-                        <p:par>
-                          <p:cTn id="16" fill="hold">
-                            <p:stCondLst>
-                              <p:cond delay="0"/>
-                            </p:stCondLst>
-                            <p:childTnLst>
-                              <p:par>
-                                <p:cTn id="17" presetID="1" presetClass="entr" presetSubtype="0" fill="hold" nodeType="clickEffect">
-                                  <p:stCondLst>
-                                    <p:cond delay="0"/>
-                                  </p:stCondLst>
-                                  <p:childTnLst>
-                                    <p:set>
-                                      <p:cBhvr>
-                                        <p:cTn id="18" dur="1" fill="hold">
-                                          <p:stCondLst>
-                                            <p:cond delay="0"/>
-                                          </p:stCondLst>
-                                        </p:cTn>
-                                        <p:tgtEl>
-                                          <p:spTgt spid="3">
-                                            <p:txEl>
-                                              <p:pRg st="5" end="5"/>
                                             </p:txEl>
                                           </p:spTgt>
                                         </p:tgtEl>
@@ -35012,7 +37677,7 @@
 </p:sld>
 </file>
 
-<file path=ppt/slides/slide70.xml><?xml version="1.0" encoding="utf-8"?>
+<file path=ppt/slides/slide72.xml><?xml version="1.0" encoding="utf-8"?>
 <p:sld xmlns:a="http://schemas.openxmlformats.org/drawingml/2006/main" xmlns:r="http://schemas.openxmlformats.org/officeDocument/2006/relationships" xmlns:p="http://schemas.openxmlformats.org/presentationml/2006/main">
   <p:cSld>
     <p:spTree>
@@ -35671,7 +38336,7 @@
 </p:sld>
 </file>
 
-<file path=ppt/slides/slide71.xml><?xml version="1.0" encoding="utf-8"?>
+<file path=ppt/slides/slide73.xml><?xml version="1.0" encoding="utf-8"?>
 <p:sld xmlns:a="http://schemas.openxmlformats.org/drawingml/2006/main" xmlns:r="http://schemas.openxmlformats.org/officeDocument/2006/relationships" xmlns:p="http://schemas.openxmlformats.org/presentationml/2006/main">
   <p:cSld>
     <p:spTree>
@@ -35783,7 +38448,7 @@
         </p:nvSpPr>
         <p:spPr>
           <a:xfrm>
-            <a:off x="457200" y="1872916"/>
+            <a:off x="5038984" y="1967341"/>
             <a:ext cx="4002505" cy="2891589"/>
           </a:xfrm>
           <a:prstGeom prst="rect">
@@ -35934,7 +38599,13 @@
           <a:p>
             <a:r>
               <a:rPr lang="en-US" dirty="0"/>
-              <a:t>The distributions of imputed and observed values should match</a:t>
+              <a:t>The distributions of imputed and observed values should match even for complex distributions </a:t>
+            </a:r>
+          </a:p>
+          <a:p>
+            <a:r>
+              <a:rPr lang="en-US" dirty="0"/>
+              <a:t>Deviations in density show less than ideal behavior </a:t>
             </a:r>
           </a:p>
           <a:p>
@@ -35967,14 +38638,146 @@
         </p:blipFill>
         <p:spPr>
           <a:xfrm>
-            <a:off x="4503821" y="1749148"/>
-            <a:ext cx="4483337" cy="3348036"/>
+            <a:off x="172219" y="1560782"/>
+            <a:ext cx="4756520" cy="3552042"/>
           </a:xfrm>
           <a:prstGeom prst="rect">
             <a:avLst/>
           </a:prstGeom>
         </p:spPr>
       </p:pic>
+      <p:cxnSp>
+        <p:nvCxnSpPr>
+          <p:cNvPr id="5" name="Straight Arrow Connector 4">
+            <a:extLst>
+              <a:ext uri="{FF2B5EF4-FFF2-40B4-BE49-F238E27FC236}">
+                <a16:creationId xmlns:a16="http://schemas.microsoft.com/office/drawing/2014/main" id="{C9E3B467-98DD-494C-9372-0888740E82AF}"/>
+              </a:ext>
+            </a:extLst>
+          </p:cNvPr>
+          <p:cNvCxnSpPr>
+            <a:cxnSpLocks/>
+          </p:cNvCxnSpPr>
+          <p:nvPr/>
+        </p:nvCxnSpPr>
+        <p:spPr>
+          <a:xfrm flipH="1" flipV="1">
+            <a:off x="4231663" y="3413135"/>
+            <a:ext cx="897998" cy="318273"/>
+          </a:xfrm>
+          <a:prstGeom prst="straightConnector1">
+            <a:avLst/>
+          </a:prstGeom>
+          <a:ln w="38100">
+            <a:solidFill>
+              <a:srgbClr val="C00000"/>
+            </a:solidFill>
+            <a:tailEnd type="triangle"/>
+          </a:ln>
+        </p:spPr>
+        <p:style>
+          <a:lnRef idx="2">
+            <a:schemeClr val="accent1"/>
+          </a:lnRef>
+          <a:fillRef idx="0">
+            <a:schemeClr val="accent1"/>
+          </a:fillRef>
+          <a:effectRef idx="1">
+            <a:schemeClr val="accent1"/>
+          </a:effectRef>
+          <a:fontRef idx="minor">
+            <a:schemeClr val="tx1"/>
+          </a:fontRef>
+        </p:style>
+      </p:cxnSp>
+      <p:cxnSp>
+        <p:nvCxnSpPr>
+          <p:cNvPr id="9" name="Straight Arrow Connector 8">
+            <a:extLst>
+              <a:ext uri="{FF2B5EF4-FFF2-40B4-BE49-F238E27FC236}">
+                <a16:creationId xmlns:a16="http://schemas.microsoft.com/office/drawing/2014/main" id="{5ADF8342-C4B8-383D-BC03-523112A0B310}"/>
+              </a:ext>
+            </a:extLst>
+          </p:cNvPr>
+          <p:cNvCxnSpPr>
+            <a:cxnSpLocks/>
+          </p:cNvCxnSpPr>
+          <p:nvPr/>
+        </p:nvCxnSpPr>
+        <p:spPr>
+          <a:xfrm flipH="1">
+            <a:off x="4572000" y="3731408"/>
+            <a:ext cx="557661" cy="118913"/>
+          </a:xfrm>
+          <a:prstGeom prst="straightConnector1">
+            <a:avLst/>
+          </a:prstGeom>
+          <a:ln w="38100">
+            <a:solidFill>
+              <a:srgbClr val="C00000"/>
+            </a:solidFill>
+            <a:tailEnd type="triangle"/>
+          </a:ln>
+        </p:spPr>
+        <p:style>
+          <a:lnRef idx="2">
+            <a:schemeClr val="accent1"/>
+          </a:lnRef>
+          <a:fillRef idx="0">
+            <a:schemeClr val="accent1"/>
+          </a:fillRef>
+          <a:effectRef idx="1">
+            <a:schemeClr val="accent1"/>
+          </a:effectRef>
+          <a:fontRef idx="minor">
+            <a:schemeClr val="tx1"/>
+          </a:fontRef>
+        </p:style>
+      </p:cxnSp>
+      <p:cxnSp>
+        <p:nvCxnSpPr>
+          <p:cNvPr id="12" name="Straight Arrow Connector 11">
+            <a:extLst>
+              <a:ext uri="{FF2B5EF4-FFF2-40B4-BE49-F238E27FC236}">
+                <a16:creationId xmlns:a16="http://schemas.microsoft.com/office/drawing/2014/main" id="{9740561B-4C18-337E-913A-BD94442E532B}"/>
+              </a:ext>
+            </a:extLst>
+          </p:cNvPr>
+          <p:cNvCxnSpPr>
+            <a:cxnSpLocks/>
+          </p:cNvCxnSpPr>
+          <p:nvPr/>
+        </p:nvCxnSpPr>
+        <p:spPr>
+          <a:xfrm flipH="1">
+            <a:off x="4505926" y="2308552"/>
+            <a:ext cx="623735" cy="437726"/>
+          </a:xfrm>
+          <a:prstGeom prst="straightConnector1">
+            <a:avLst/>
+          </a:prstGeom>
+          <a:ln w="38100">
+            <a:solidFill>
+              <a:srgbClr val="C00000"/>
+            </a:solidFill>
+            <a:tailEnd type="triangle"/>
+          </a:ln>
+        </p:spPr>
+        <p:style>
+          <a:lnRef idx="2">
+            <a:schemeClr val="accent1"/>
+          </a:lnRef>
+          <a:fillRef idx="0">
+            <a:schemeClr val="accent1"/>
+          </a:fillRef>
+          <a:effectRef idx="1">
+            <a:schemeClr val="accent1"/>
+          </a:effectRef>
+          <a:fontRef idx="minor">
+            <a:schemeClr val="tx1"/>
+          </a:fontRef>
+        </p:style>
+      </p:cxnSp>
     </p:spTree>
     <p:extLst>
       <p:ext uri="{BB962C8B-B14F-4D97-AF65-F5344CB8AC3E}">
@@ -35985,10 +38788,246 @@
   <p:clrMapOvr>
     <a:masterClrMapping/>
   </p:clrMapOvr>
+  <p:timing>
+    <p:tnLst>
+      <p:par>
+        <p:cTn id="1" dur="indefinite" restart="never" nodeType="tmRoot">
+          <p:childTnLst>
+            <p:seq concurrent="1" nextAc="seek">
+              <p:cTn id="2" dur="indefinite" nodeType="mainSeq">
+                <p:childTnLst>
+                  <p:par>
+                    <p:cTn id="3" fill="hold">
+                      <p:stCondLst>
+                        <p:cond delay="indefinite"/>
+                      </p:stCondLst>
+                      <p:childTnLst>
+                        <p:par>
+                          <p:cTn id="4" fill="hold">
+                            <p:stCondLst>
+                              <p:cond delay="0"/>
+                            </p:stCondLst>
+                            <p:childTnLst>
+                              <p:par>
+                                <p:cTn id="5" presetID="1" presetClass="entr" presetSubtype="0" fill="hold" nodeType="clickEffect">
+                                  <p:stCondLst>
+                                    <p:cond delay="0"/>
+                                  </p:stCondLst>
+                                  <p:childTnLst>
+                                    <p:set>
+                                      <p:cBhvr>
+                                        <p:cTn id="6" dur="1" fill="hold">
+                                          <p:stCondLst>
+                                            <p:cond delay="0"/>
+                                          </p:stCondLst>
+                                        </p:cTn>
+                                        <p:tgtEl>
+                                          <p:spTgt spid="4">
+                                            <p:txEl>
+                                              <p:pRg st="0" end="0"/>
+                                            </p:txEl>
+                                          </p:spTgt>
+                                        </p:tgtEl>
+                                        <p:attrNameLst>
+                                          <p:attrName>style.visibility</p:attrName>
+                                        </p:attrNameLst>
+                                      </p:cBhvr>
+                                      <p:to>
+                                        <p:strVal val="visible"/>
+                                      </p:to>
+                                    </p:set>
+                                  </p:childTnLst>
+                                </p:cTn>
+                              </p:par>
+                              <p:par>
+                                <p:cTn id="7" presetID="1" presetClass="entr" presetSubtype="0" fill="hold" nodeType="withEffect">
+                                  <p:stCondLst>
+                                    <p:cond delay="0"/>
+                                  </p:stCondLst>
+                                  <p:childTnLst>
+                                    <p:set>
+                                      <p:cBhvr>
+                                        <p:cTn id="8" dur="1" fill="hold">
+                                          <p:stCondLst>
+                                            <p:cond delay="0"/>
+                                          </p:stCondLst>
+                                        </p:cTn>
+                                        <p:tgtEl>
+                                          <p:spTgt spid="12"/>
+                                        </p:tgtEl>
+                                        <p:attrNameLst>
+                                          <p:attrName>style.visibility</p:attrName>
+                                        </p:attrNameLst>
+                                      </p:cBhvr>
+                                      <p:to>
+                                        <p:strVal val="visible"/>
+                                      </p:to>
+                                    </p:set>
+                                  </p:childTnLst>
+                                </p:cTn>
+                              </p:par>
+                              <p:par>
+                                <p:cTn id="9" presetID="1" presetClass="entr" presetSubtype="0" fill="hold" nodeType="withEffect">
+                                  <p:stCondLst>
+                                    <p:cond delay="0"/>
+                                  </p:stCondLst>
+                                  <p:childTnLst>
+                                    <p:set>
+                                      <p:cBhvr>
+                                        <p:cTn id="10" dur="1" fill="hold">
+                                          <p:stCondLst>
+                                            <p:cond delay="0"/>
+                                          </p:stCondLst>
+                                        </p:cTn>
+                                        <p:tgtEl>
+                                          <p:spTgt spid="6"/>
+                                        </p:tgtEl>
+                                        <p:attrNameLst>
+                                          <p:attrName>style.visibility</p:attrName>
+                                        </p:attrNameLst>
+                                      </p:cBhvr>
+                                      <p:to>
+                                        <p:strVal val="visible"/>
+                                      </p:to>
+                                    </p:set>
+                                  </p:childTnLst>
+                                </p:cTn>
+                              </p:par>
+                            </p:childTnLst>
+                          </p:cTn>
+                        </p:par>
+                      </p:childTnLst>
+                    </p:cTn>
+                  </p:par>
+                  <p:par>
+                    <p:cTn id="11" fill="hold">
+                      <p:stCondLst>
+                        <p:cond delay="indefinite"/>
+                      </p:stCondLst>
+                      <p:childTnLst>
+                        <p:par>
+                          <p:cTn id="12" fill="hold">
+                            <p:stCondLst>
+                              <p:cond delay="0"/>
+                            </p:stCondLst>
+                            <p:childTnLst>
+                              <p:par>
+                                <p:cTn id="13" presetID="1" presetClass="entr" presetSubtype="0" fill="hold" nodeType="clickEffect">
+                                  <p:stCondLst>
+                                    <p:cond delay="0"/>
+                                  </p:stCondLst>
+                                  <p:childTnLst>
+                                    <p:set>
+                                      <p:cBhvr>
+                                        <p:cTn id="14" dur="1" fill="hold">
+                                          <p:stCondLst>
+                                            <p:cond delay="0"/>
+                                          </p:stCondLst>
+                                        </p:cTn>
+                                        <p:tgtEl>
+                                          <p:spTgt spid="4">
+                                            <p:txEl>
+                                              <p:pRg st="1" end="1"/>
+                                            </p:txEl>
+                                          </p:spTgt>
+                                        </p:tgtEl>
+                                        <p:attrNameLst>
+                                          <p:attrName>style.visibility</p:attrName>
+                                        </p:attrNameLst>
+                                      </p:cBhvr>
+                                      <p:to>
+                                        <p:strVal val="visible"/>
+                                      </p:to>
+                                    </p:set>
+                                  </p:childTnLst>
+                                </p:cTn>
+                              </p:par>
+                              <p:par>
+                                <p:cTn id="15" presetID="1" presetClass="entr" presetSubtype="0" fill="hold" nodeType="withEffect">
+                                  <p:stCondLst>
+                                    <p:cond delay="0"/>
+                                  </p:stCondLst>
+                                  <p:childTnLst>
+                                    <p:set>
+                                      <p:cBhvr>
+                                        <p:cTn id="16" dur="1" fill="hold">
+                                          <p:stCondLst>
+                                            <p:cond delay="0"/>
+                                          </p:stCondLst>
+                                        </p:cTn>
+                                        <p:tgtEl>
+                                          <p:spTgt spid="5"/>
+                                        </p:tgtEl>
+                                        <p:attrNameLst>
+                                          <p:attrName>style.visibility</p:attrName>
+                                        </p:attrNameLst>
+                                      </p:cBhvr>
+                                      <p:to>
+                                        <p:strVal val="visible"/>
+                                      </p:to>
+                                    </p:set>
+                                  </p:childTnLst>
+                                </p:cTn>
+                              </p:par>
+                              <p:par>
+                                <p:cTn id="17" presetID="1" presetClass="entr" presetSubtype="0" fill="hold" nodeType="withEffect">
+                                  <p:stCondLst>
+                                    <p:cond delay="0"/>
+                                  </p:stCondLst>
+                                  <p:childTnLst>
+                                    <p:set>
+                                      <p:cBhvr>
+                                        <p:cTn id="18" dur="1" fill="hold">
+                                          <p:stCondLst>
+                                            <p:cond delay="0"/>
+                                          </p:stCondLst>
+                                        </p:cTn>
+                                        <p:tgtEl>
+                                          <p:spTgt spid="9"/>
+                                        </p:tgtEl>
+                                        <p:attrNameLst>
+                                          <p:attrName>style.visibility</p:attrName>
+                                        </p:attrNameLst>
+                                      </p:cBhvr>
+                                      <p:to>
+                                        <p:strVal val="visible"/>
+                                      </p:to>
+                                    </p:set>
+                                  </p:childTnLst>
+                                </p:cTn>
+                              </p:par>
+                            </p:childTnLst>
+                          </p:cTn>
+                        </p:par>
+                      </p:childTnLst>
+                    </p:cTn>
+                  </p:par>
+                </p:childTnLst>
+              </p:cTn>
+              <p:prevCondLst>
+                <p:cond evt="onPrev" delay="0">
+                  <p:tgtEl>
+                    <p:sldTgt/>
+                  </p:tgtEl>
+                </p:cond>
+              </p:prevCondLst>
+              <p:nextCondLst>
+                <p:cond evt="onNext" delay="0">
+                  <p:tgtEl>
+                    <p:sldTgt/>
+                  </p:tgtEl>
+                </p:cond>
+              </p:nextCondLst>
+            </p:seq>
+          </p:childTnLst>
+        </p:cTn>
+      </p:par>
+    </p:tnLst>
+  </p:timing>
 </p:sld>
 </file>
 
-<file path=ppt/slides/slide72.xml><?xml version="1.0" encoding="utf-8"?>
+<file path=ppt/slides/slide74.xml><?xml version="1.0" encoding="utf-8"?>
 <p:sld xmlns:a="http://schemas.openxmlformats.org/drawingml/2006/main" xmlns:r="http://schemas.openxmlformats.org/officeDocument/2006/relationships" xmlns:p="http://schemas.openxmlformats.org/presentationml/2006/main">
   <p:cSld>
     <p:spTree>
@@ -36100,8 +39139,8 @@
         </p:nvSpPr>
         <p:spPr>
           <a:xfrm>
-            <a:off x="457200" y="1872916"/>
-            <a:ext cx="4002505" cy="2891589"/>
+            <a:off x="4874754" y="1666371"/>
+            <a:ext cx="4002505" cy="3368980"/>
           </a:xfrm>
           <a:prstGeom prst="rect">
             <a:avLst/>
@@ -36109,7 +39148,7 @@
         </p:spPr>
         <p:txBody>
           <a:bodyPr vert="horz" lIns="91440" tIns="45720" rIns="91440" bIns="45720" rtlCol="0">
-            <a:normAutofit/>
+            <a:normAutofit fontScale="85000" lnSpcReduction="10000"/>
           </a:bodyPr>
           <a:lstStyle>
             <a:lvl1pPr marL="342900" indent="-342900" algn="l" defTabSz="342900" rtl="0" eaLnBrk="1" latinLnBrk="0" hangingPunct="1">
@@ -36255,6 +39294,27 @@
             </a:r>
           </a:p>
           <a:p>
+            <a:r>
+              <a:rPr lang="en-US" dirty="0"/>
+              <a:t>4 possible combinations of observed and missing</a:t>
+            </a:r>
+          </a:p>
+          <a:p>
+            <a:r>
+              <a:rPr lang="en-US" dirty="0"/>
+              <a:t>The imputed values of the variables should not deviate noticeably from the observed cases </a:t>
+            </a:r>
+          </a:p>
+          <a:p>
+            <a:r>
+              <a:rPr lang="en-US" dirty="0"/>
+              <a:t>Limited number of missing cases makes interpretation uncertain</a:t>
+            </a:r>
+          </a:p>
+          <a:p>
+            <a:endParaRPr lang="en-US" dirty="0"/>
+          </a:p>
+          <a:p>
             <a:endParaRPr lang="en-US" dirty="0"/>
           </a:p>
           <a:p>
@@ -36284,7 +39344,7 @@
         </p:blipFill>
         <p:spPr>
           <a:xfrm>
-            <a:off x="4512639" y="1666371"/>
+            <a:off x="55180" y="1819816"/>
             <a:ext cx="4469043" cy="3026698"/>
           </a:xfrm>
           <a:prstGeom prst="rect">
@@ -36292,6 +39352,51 @@
           </a:prstGeom>
         </p:spPr>
       </p:pic>
+      <p:cxnSp>
+        <p:nvCxnSpPr>
+          <p:cNvPr id="5" name="Straight Arrow Connector 4">
+            <a:extLst>
+              <a:ext uri="{FF2B5EF4-FFF2-40B4-BE49-F238E27FC236}">
+                <a16:creationId xmlns:a16="http://schemas.microsoft.com/office/drawing/2014/main" id="{528B43E9-007F-1AB3-7BF8-EBF3B51EE15C}"/>
+              </a:ext>
+            </a:extLst>
+          </p:cNvPr>
+          <p:cNvCxnSpPr>
+            <a:cxnSpLocks/>
+            <a:endCxn id="7" idx="3"/>
+          </p:cNvCxnSpPr>
+          <p:nvPr/>
+        </p:nvCxnSpPr>
+        <p:spPr>
+          <a:xfrm flipH="1">
+            <a:off x="4524223" y="2960524"/>
+            <a:ext cx="560333" cy="372641"/>
+          </a:xfrm>
+          <a:prstGeom prst="straightConnector1">
+            <a:avLst/>
+          </a:prstGeom>
+          <a:ln w="38100">
+            <a:solidFill>
+              <a:srgbClr val="C00000"/>
+            </a:solidFill>
+            <a:tailEnd type="triangle"/>
+          </a:ln>
+        </p:spPr>
+        <p:style>
+          <a:lnRef idx="2">
+            <a:schemeClr val="accent1"/>
+          </a:lnRef>
+          <a:fillRef idx="0">
+            <a:schemeClr val="accent1"/>
+          </a:fillRef>
+          <a:effectRef idx="1">
+            <a:schemeClr val="accent1"/>
+          </a:effectRef>
+          <a:fontRef idx="minor">
+            <a:schemeClr val="tx1"/>
+          </a:fontRef>
+        </p:style>
+      </p:cxnSp>
     </p:spTree>
     <p:extLst>
       <p:ext uri="{BB962C8B-B14F-4D97-AF65-F5344CB8AC3E}">
@@ -36302,10 +39407,290 @@
   <p:clrMapOvr>
     <a:masterClrMapping/>
   </p:clrMapOvr>
+  <p:timing>
+    <p:tnLst>
+      <p:par>
+        <p:cTn id="1" dur="indefinite" restart="never" nodeType="tmRoot">
+          <p:childTnLst>
+            <p:seq concurrent="1" nextAc="seek">
+              <p:cTn id="2" dur="indefinite" nodeType="mainSeq">
+                <p:childTnLst>
+                  <p:par>
+                    <p:cTn id="3" fill="hold">
+                      <p:stCondLst>
+                        <p:cond delay="indefinite"/>
+                      </p:stCondLst>
+                      <p:childTnLst>
+                        <p:par>
+                          <p:cTn id="4" fill="hold">
+                            <p:stCondLst>
+                              <p:cond delay="0"/>
+                            </p:stCondLst>
+                            <p:childTnLst>
+                              <p:par>
+                                <p:cTn id="5" presetID="1" presetClass="entr" presetSubtype="0" fill="hold" nodeType="clickEffect">
+                                  <p:stCondLst>
+                                    <p:cond delay="0"/>
+                                  </p:stCondLst>
+                                  <p:childTnLst>
+                                    <p:set>
+                                      <p:cBhvr>
+                                        <p:cTn id="6" dur="1" fill="hold">
+                                          <p:stCondLst>
+                                            <p:cond delay="0"/>
+                                          </p:stCondLst>
+                                        </p:cTn>
+                                        <p:tgtEl>
+                                          <p:spTgt spid="4">
+                                            <p:txEl>
+                                              <p:pRg st="0" end="0"/>
+                                            </p:txEl>
+                                          </p:spTgt>
+                                        </p:tgtEl>
+                                        <p:attrNameLst>
+                                          <p:attrName>style.visibility</p:attrName>
+                                        </p:attrNameLst>
+                                      </p:cBhvr>
+                                      <p:to>
+                                        <p:strVal val="visible"/>
+                                      </p:to>
+                                    </p:set>
+                                  </p:childTnLst>
+                                </p:cTn>
+                              </p:par>
+                              <p:par>
+                                <p:cTn id="7" presetID="1" presetClass="entr" presetSubtype="0" fill="hold" nodeType="withEffect">
+                                  <p:stCondLst>
+                                    <p:cond delay="0"/>
+                                  </p:stCondLst>
+                                  <p:childTnLst>
+                                    <p:set>
+                                      <p:cBhvr>
+                                        <p:cTn id="8" dur="1" fill="hold">
+                                          <p:stCondLst>
+                                            <p:cond delay="0"/>
+                                          </p:stCondLst>
+                                        </p:cTn>
+                                        <p:tgtEl>
+                                          <p:spTgt spid="7"/>
+                                        </p:tgtEl>
+                                        <p:attrNameLst>
+                                          <p:attrName>style.visibility</p:attrName>
+                                        </p:attrNameLst>
+                                      </p:cBhvr>
+                                      <p:to>
+                                        <p:strVal val="visible"/>
+                                      </p:to>
+                                    </p:set>
+                                  </p:childTnLst>
+                                </p:cTn>
+                              </p:par>
+                            </p:childTnLst>
+                          </p:cTn>
+                        </p:par>
+                      </p:childTnLst>
+                    </p:cTn>
+                  </p:par>
+                  <p:par>
+                    <p:cTn id="9" fill="hold">
+                      <p:stCondLst>
+                        <p:cond delay="indefinite"/>
+                      </p:stCondLst>
+                      <p:childTnLst>
+                        <p:par>
+                          <p:cTn id="10" fill="hold">
+                            <p:stCondLst>
+                              <p:cond delay="0"/>
+                            </p:stCondLst>
+                            <p:childTnLst>
+                              <p:par>
+                                <p:cTn id="11" presetID="1" presetClass="entr" presetSubtype="0" fill="hold" nodeType="clickEffect">
+                                  <p:stCondLst>
+                                    <p:cond delay="0"/>
+                                  </p:stCondLst>
+                                  <p:childTnLst>
+                                    <p:set>
+                                      <p:cBhvr>
+                                        <p:cTn id="12" dur="1" fill="hold">
+                                          <p:stCondLst>
+                                            <p:cond delay="0"/>
+                                          </p:stCondLst>
+                                        </p:cTn>
+                                        <p:tgtEl>
+                                          <p:spTgt spid="4">
+                                            <p:txEl>
+                                              <p:pRg st="1" end="1"/>
+                                            </p:txEl>
+                                          </p:spTgt>
+                                        </p:tgtEl>
+                                        <p:attrNameLst>
+                                          <p:attrName>style.visibility</p:attrName>
+                                        </p:attrNameLst>
+                                      </p:cBhvr>
+                                      <p:to>
+                                        <p:strVal val="visible"/>
+                                      </p:to>
+                                    </p:set>
+                                  </p:childTnLst>
+                                </p:cTn>
+                              </p:par>
+                              <p:par>
+                                <p:cTn id="13" presetID="1" presetClass="entr" presetSubtype="0" fill="hold" nodeType="withEffect">
+                                  <p:stCondLst>
+                                    <p:cond delay="0"/>
+                                  </p:stCondLst>
+                                  <p:childTnLst>
+                                    <p:set>
+                                      <p:cBhvr>
+                                        <p:cTn id="14" dur="1" fill="hold">
+                                          <p:stCondLst>
+                                            <p:cond delay="0"/>
+                                          </p:stCondLst>
+                                        </p:cTn>
+                                        <p:tgtEl>
+                                          <p:spTgt spid="5"/>
+                                        </p:tgtEl>
+                                        <p:attrNameLst>
+                                          <p:attrName>style.visibility</p:attrName>
+                                        </p:attrNameLst>
+                                      </p:cBhvr>
+                                      <p:to>
+                                        <p:strVal val="visible"/>
+                                      </p:to>
+                                    </p:set>
+                                  </p:childTnLst>
+                                </p:cTn>
+                              </p:par>
+                            </p:childTnLst>
+                          </p:cTn>
+                        </p:par>
+                      </p:childTnLst>
+                    </p:cTn>
+                  </p:par>
+                  <p:par>
+                    <p:cTn id="15" fill="hold">
+                      <p:stCondLst>
+                        <p:cond delay="indefinite"/>
+                      </p:stCondLst>
+                      <p:childTnLst>
+                        <p:par>
+                          <p:cTn id="16" fill="hold">
+                            <p:stCondLst>
+                              <p:cond delay="0"/>
+                            </p:stCondLst>
+                            <p:childTnLst>
+                              <p:par>
+                                <p:cTn id="17" presetID="1" presetClass="entr" presetSubtype="0" fill="hold" nodeType="clickEffect">
+                                  <p:stCondLst>
+                                    <p:cond delay="0"/>
+                                  </p:stCondLst>
+                                  <p:childTnLst>
+                                    <p:set>
+                                      <p:cBhvr>
+                                        <p:cTn id="18" dur="1" fill="hold">
+                                          <p:stCondLst>
+                                            <p:cond delay="0"/>
+                                          </p:stCondLst>
+                                        </p:cTn>
+                                        <p:tgtEl>
+                                          <p:spTgt spid="4">
+                                            <p:txEl>
+                                              <p:pRg st="2" end="2"/>
+                                            </p:txEl>
+                                          </p:spTgt>
+                                        </p:tgtEl>
+                                        <p:attrNameLst>
+                                          <p:attrName>style.visibility</p:attrName>
+                                        </p:attrNameLst>
+                                      </p:cBhvr>
+                                      <p:to>
+                                        <p:strVal val="visible"/>
+                                      </p:to>
+                                    </p:set>
+                                  </p:childTnLst>
+                                </p:cTn>
+                              </p:par>
+                            </p:childTnLst>
+                          </p:cTn>
+                        </p:par>
+                      </p:childTnLst>
+                    </p:cTn>
+                  </p:par>
+                  <p:par>
+                    <p:cTn id="19" fill="hold">
+                      <p:stCondLst>
+                        <p:cond delay="indefinite"/>
+                      </p:stCondLst>
+                      <p:childTnLst>
+                        <p:par>
+                          <p:cTn id="20" fill="hold">
+                            <p:stCondLst>
+                              <p:cond delay="0"/>
+                            </p:stCondLst>
+                            <p:childTnLst>
+                              <p:par>
+                                <p:cTn id="21" presetID="1" presetClass="entr" presetSubtype="0" fill="hold" nodeType="clickEffect">
+                                  <p:stCondLst>
+                                    <p:cond delay="0"/>
+                                  </p:stCondLst>
+                                  <p:childTnLst>
+                                    <p:set>
+                                      <p:cBhvr>
+                                        <p:cTn id="22" dur="1" fill="hold">
+                                          <p:stCondLst>
+                                            <p:cond delay="0"/>
+                                          </p:stCondLst>
+                                        </p:cTn>
+                                        <p:tgtEl>
+                                          <p:spTgt spid="4">
+                                            <p:txEl>
+                                              <p:pRg st="3" end="3"/>
+                                            </p:txEl>
+                                          </p:spTgt>
+                                        </p:tgtEl>
+                                        <p:attrNameLst>
+                                          <p:attrName>style.visibility</p:attrName>
+                                        </p:attrNameLst>
+                                      </p:cBhvr>
+                                      <p:to>
+                                        <p:strVal val="visible"/>
+                                      </p:to>
+                                    </p:set>
+                                  </p:childTnLst>
+                                </p:cTn>
+                              </p:par>
+                            </p:childTnLst>
+                          </p:cTn>
+                        </p:par>
+                      </p:childTnLst>
+                    </p:cTn>
+                  </p:par>
+                </p:childTnLst>
+              </p:cTn>
+              <p:prevCondLst>
+                <p:cond evt="onPrev" delay="0">
+                  <p:tgtEl>
+                    <p:sldTgt/>
+                  </p:tgtEl>
+                </p:cond>
+              </p:prevCondLst>
+              <p:nextCondLst>
+                <p:cond evt="onNext" delay="0">
+                  <p:tgtEl>
+                    <p:sldTgt/>
+                  </p:tgtEl>
+                </p:cond>
+              </p:nextCondLst>
+            </p:seq>
+          </p:childTnLst>
+        </p:cTn>
+      </p:par>
+    </p:tnLst>
+  </p:timing>
 </p:sld>
 </file>
 
-<file path=ppt/slides/slide73.xml><?xml version="1.0" encoding="utf-8"?>
+<file path=ppt/slides/slide75.xml><?xml version="1.0" encoding="utf-8"?>
 <p:sld xmlns:a="http://schemas.openxmlformats.org/drawingml/2006/main" xmlns:r="http://schemas.openxmlformats.org/officeDocument/2006/relationships" xmlns:p="http://schemas.openxmlformats.org/presentationml/2006/main">
   <p:cSld>
     <p:spTree>
@@ -36393,34 +39778,26 @@
             </a:pPr>
             <a:r>
               <a:rPr lang="en-US" dirty="0"/>
-              <a:t>For further reading: </a:t>
+              <a:t>The MICE algorithm has several advantages</a:t>
             </a:r>
           </a:p>
           <a:p>
             <a:r>
               <a:rPr lang="en-US" dirty="0"/>
-              <a:t>For a detailed discussion of imputation with the MICE algorithm see </a:t>
-            </a:r>
-            <a:r>
-              <a:rPr lang="en-US" dirty="0">
-                <a:hlinkClick r:id="rId2"/>
-              </a:rPr>
-              <a:t>Flexible Imputation of Missing Data, Second Edition, Stef van Buuren, Chapman and Hall, 2018</a:t>
-            </a:r>
-            <a:endParaRPr lang="en-US" dirty="0"/>
+              <a:t>MICE is effective for MCAR and particularly MAR where there is a relationship between missing values and other variables. </a:t>
+            </a:r>
           </a:p>
           <a:p>
             <a:r>
               <a:rPr lang="en-US" dirty="0"/>
-              <a:t>For a broad and deep exploration of working with missing data see </a:t>
-            </a:r>
-            <a:r>
-              <a:rPr lang="en-US" dirty="0">
-                <a:hlinkClick r:id="rId3"/>
-              </a:rPr>
-              <a:t>Statistical Analysis with Missing Data, Little and Rudin, Wiley, 2020</a:t>
-            </a:r>
-            <a:endParaRPr lang="en-US" dirty="0"/>
+              <a:t>MICE preserves the uncertainty of the posterior distribution by using multiple imputations </a:t>
+            </a:r>
+          </a:p>
+          <a:p>
+            <a:r>
+              <a:rPr lang="en-US" dirty="0"/>
+              <a:t>Since MICE uses a different regression model for each variable, supporting multiple variable types</a:t>
+            </a:r>
           </a:p>
           <a:p>
             <a:endParaRPr lang="en-US" dirty="0"/>
@@ -36437,10 +39814,741 @@
   <p:clrMapOvr>
     <a:masterClrMapping/>
   </p:clrMapOvr>
+  <p:timing>
+    <p:tnLst>
+      <p:par>
+        <p:cTn id="1" dur="indefinite" restart="never" nodeType="tmRoot">
+          <p:childTnLst>
+            <p:seq concurrent="1" nextAc="seek">
+              <p:cTn id="2" dur="indefinite" nodeType="mainSeq">
+                <p:childTnLst>
+                  <p:par>
+                    <p:cTn id="3" fill="hold">
+                      <p:stCondLst>
+                        <p:cond delay="indefinite"/>
+                      </p:stCondLst>
+                      <p:childTnLst>
+                        <p:par>
+                          <p:cTn id="4" fill="hold">
+                            <p:stCondLst>
+                              <p:cond delay="0"/>
+                            </p:stCondLst>
+                            <p:childTnLst>
+                              <p:par>
+                                <p:cTn id="5" presetID="1" presetClass="entr" presetSubtype="0" fill="hold" nodeType="clickEffect">
+                                  <p:stCondLst>
+                                    <p:cond delay="0"/>
+                                  </p:stCondLst>
+                                  <p:childTnLst>
+                                    <p:set>
+                                      <p:cBhvr>
+                                        <p:cTn id="6" dur="1" fill="hold">
+                                          <p:stCondLst>
+                                            <p:cond delay="0"/>
+                                          </p:stCondLst>
+                                        </p:cTn>
+                                        <p:tgtEl>
+                                          <p:spTgt spid="3">
+                                            <p:txEl>
+                                              <p:pRg st="1" end="1"/>
+                                            </p:txEl>
+                                          </p:spTgt>
+                                        </p:tgtEl>
+                                        <p:attrNameLst>
+                                          <p:attrName>style.visibility</p:attrName>
+                                        </p:attrNameLst>
+                                      </p:cBhvr>
+                                      <p:to>
+                                        <p:strVal val="visible"/>
+                                      </p:to>
+                                    </p:set>
+                                  </p:childTnLst>
+                                </p:cTn>
+                              </p:par>
+                            </p:childTnLst>
+                          </p:cTn>
+                        </p:par>
+                      </p:childTnLst>
+                    </p:cTn>
+                  </p:par>
+                  <p:par>
+                    <p:cTn id="7" fill="hold">
+                      <p:stCondLst>
+                        <p:cond delay="indefinite"/>
+                      </p:stCondLst>
+                      <p:childTnLst>
+                        <p:par>
+                          <p:cTn id="8" fill="hold">
+                            <p:stCondLst>
+                              <p:cond delay="0"/>
+                            </p:stCondLst>
+                            <p:childTnLst>
+                              <p:par>
+                                <p:cTn id="9" presetID="1" presetClass="entr" presetSubtype="0" fill="hold" nodeType="clickEffect">
+                                  <p:stCondLst>
+                                    <p:cond delay="0"/>
+                                  </p:stCondLst>
+                                  <p:childTnLst>
+                                    <p:set>
+                                      <p:cBhvr>
+                                        <p:cTn id="10" dur="1" fill="hold">
+                                          <p:stCondLst>
+                                            <p:cond delay="0"/>
+                                          </p:stCondLst>
+                                        </p:cTn>
+                                        <p:tgtEl>
+                                          <p:spTgt spid="3">
+                                            <p:txEl>
+                                              <p:pRg st="2" end="2"/>
+                                            </p:txEl>
+                                          </p:spTgt>
+                                        </p:tgtEl>
+                                        <p:attrNameLst>
+                                          <p:attrName>style.visibility</p:attrName>
+                                        </p:attrNameLst>
+                                      </p:cBhvr>
+                                      <p:to>
+                                        <p:strVal val="visible"/>
+                                      </p:to>
+                                    </p:set>
+                                  </p:childTnLst>
+                                </p:cTn>
+                              </p:par>
+                            </p:childTnLst>
+                          </p:cTn>
+                        </p:par>
+                      </p:childTnLst>
+                    </p:cTn>
+                  </p:par>
+                  <p:par>
+                    <p:cTn id="11" fill="hold">
+                      <p:stCondLst>
+                        <p:cond delay="indefinite"/>
+                      </p:stCondLst>
+                      <p:childTnLst>
+                        <p:par>
+                          <p:cTn id="12" fill="hold">
+                            <p:stCondLst>
+                              <p:cond delay="0"/>
+                            </p:stCondLst>
+                            <p:childTnLst>
+                              <p:par>
+                                <p:cTn id="13" presetID="1" presetClass="entr" presetSubtype="0" fill="hold" nodeType="clickEffect">
+                                  <p:stCondLst>
+                                    <p:cond delay="0"/>
+                                  </p:stCondLst>
+                                  <p:childTnLst>
+                                    <p:set>
+                                      <p:cBhvr>
+                                        <p:cTn id="14" dur="1" fill="hold">
+                                          <p:stCondLst>
+                                            <p:cond delay="0"/>
+                                          </p:stCondLst>
+                                        </p:cTn>
+                                        <p:tgtEl>
+                                          <p:spTgt spid="3">
+                                            <p:txEl>
+                                              <p:pRg st="3" end="3"/>
+                                            </p:txEl>
+                                          </p:spTgt>
+                                        </p:tgtEl>
+                                        <p:attrNameLst>
+                                          <p:attrName>style.visibility</p:attrName>
+                                        </p:attrNameLst>
+                                      </p:cBhvr>
+                                      <p:to>
+                                        <p:strVal val="visible"/>
+                                      </p:to>
+                                    </p:set>
+                                  </p:childTnLst>
+                                </p:cTn>
+                              </p:par>
+                            </p:childTnLst>
+                          </p:cTn>
+                        </p:par>
+                      </p:childTnLst>
+                    </p:cTn>
+                  </p:par>
+                </p:childTnLst>
+              </p:cTn>
+              <p:prevCondLst>
+                <p:cond evt="onPrev" delay="0">
+                  <p:tgtEl>
+                    <p:sldTgt/>
+                  </p:tgtEl>
+                </p:cond>
+              </p:prevCondLst>
+              <p:nextCondLst>
+                <p:cond evt="onNext" delay="0">
+                  <p:tgtEl>
+                    <p:sldTgt/>
+                  </p:tgtEl>
+                </p:cond>
+              </p:nextCondLst>
+            </p:seq>
+          </p:childTnLst>
+        </p:cTn>
+      </p:par>
+    </p:tnLst>
+  </p:timing>
 </p:sld>
 </file>
 
-<file path=ppt/slides/slide74.xml><?xml version="1.0" encoding="utf-8"?>
+<file path=ppt/slides/slide76.xml><?xml version="1.0" encoding="utf-8"?>
+<p:sld xmlns:a="http://schemas.openxmlformats.org/drawingml/2006/main" xmlns:r="http://schemas.openxmlformats.org/officeDocument/2006/relationships" xmlns:p="http://schemas.openxmlformats.org/presentationml/2006/main">
+  <p:cSld>
+    <p:spTree>
+      <p:nvGrpSpPr>
+        <p:cNvPr id="1" name="">
+          <a:extLst>
+            <a:ext uri="{FF2B5EF4-FFF2-40B4-BE49-F238E27FC236}">
+              <a16:creationId xmlns:a16="http://schemas.microsoft.com/office/drawing/2014/main" id="{915F9CB3-63B1-EF8E-8257-1574A6FD359E}"/>
+            </a:ext>
+          </a:extLst>
+        </p:cNvPr>
+        <p:cNvGrpSpPr/>
+        <p:nvPr/>
+      </p:nvGrpSpPr>
+      <p:grpSpPr>
+        <a:xfrm>
+          <a:off x="0" y="0"/>
+          <a:ext cx="0" cy="0"/>
+          <a:chOff x="0" y="0"/>
+          <a:chExt cx="0" cy="0"/>
+        </a:xfrm>
+      </p:grpSpPr>
+      <p:sp>
+        <p:nvSpPr>
+          <p:cNvPr id="2" name="Title 1">
+            <a:extLst>
+              <a:ext uri="{FF2B5EF4-FFF2-40B4-BE49-F238E27FC236}">
+                <a16:creationId xmlns:a16="http://schemas.microsoft.com/office/drawing/2014/main" id="{8F1CF54F-5901-BFDA-8B3D-01941AF79CD1}"/>
+              </a:ext>
+            </a:extLst>
+          </p:cNvPr>
+          <p:cNvSpPr>
+            <a:spLocks noGrp="1"/>
+          </p:cNvSpPr>
+          <p:nvPr>
+            <p:ph type="title"/>
+          </p:nvPr>
+        </p:nvSpPr>
+        <p:spPr/>
+        <p:txBody>
+          <a:bodyPr/>
+          <a:lstStyle/>
+          <a:p>
+            <a:pPr marL="0" lvl="0" indent="0">
+              <a:buNone/>
+            </a:pPr>
+            <a:r>
+              <a:rPr lang="en-US" dirty="0"/>
+              <a:t>Imputation of Missing Values</a:t>
+            </a:r>
+            <a:endParaRPr dirty="0"/>
+          </a:p>
+        </p:txBody>
+      </p:sp>
+      <p:sp>
+        <p:nvSpPr>
+          <p:cNvPr id="3" name="Content Placeholder 2">
+            <a:extLst>
+              <a:ext uri="{FF2B5EF4-FFF2-40B4-BE49-F238E27FC236}">
+                <a16:creationId xmlns:a16="http://schemas.microsoft.com/office/drawing/2014/main" id="{EBDE533E-7382-51BD-441F-25D4B006345A}"/>
+              </a:ext>
+            </a:extLst>
+          </p:cNvPr>
+          <p:cNvSpPr>
+            <a:spLocks noGrp="1"/>
+          </p:cNvSpPr>
+          <p:nvPr>
+            <p:ph idx="1"/>
+          </p:nvPr>
+        </p:nvSpPr>
+        <p:spPr>
+          <a:xfrm>
+            <a:off x="457200" y="1200151"/>
+            <a:ext cx="8229600" cy="3737370"/>
+          </a:xfrm>
+        </p:spPr>
+        <p:txBody>
+          <a:bodyPr>
+            <a:normAutofit fontScale="92500" lnSpcReduction="10000"/>
+          </a:bodyPr>
+          <a:lstStyle/>
+          <a:p>
+            <a:pPr marL="0" indent="0">
+              <a:buNone/>
+            </a:pPr>
+            <a:r>
+              <a:rPr lang="en-US" dirty="0"/>
+              <a:t>Like all </a:t>
+            </a:r>
+            <a:r>
+              <a:rPr lang="en-US" dirty="0" err="1"/>
+              <a:t>imputatiom</a:t>
+            </a:r>
+            <a:r>
+              <a:rPr lang="en-US" dirty="0"/>
+              <a:t> algorithms, MICE algorithm has several disadvantages</a:t>
+            </a:r>
+          </a:p>
+          <a:p>
+            <a:r>
+              <a:rPr lang="en-US" dirty="0"/>
+              <a:t>MICE requires multiple imputation which is computationally intensive for large datasets or data with many variables   </a:t>
+            </a:r>
+          </a:p>
+          <a:p>
+            <a:r>
+              <a:rPr lang="en-US" dirty="0"/>
+              <a:t>MICE is not suitable for time series data </a:t>
+            </a:r>
+          </a:p>
+          <a:p>
+            <a:r>
+              <a:rPr lang="en-US" dirty="0"/>
+              <a:t>MICE is not ideal for MNAR variables </a:t>
+            </a:r>
+          </a:p>
+          <a:p>
+            <a:r>
+              <a:rPr lang="en-US" dirty="0"/>
+              <a:t>MICE is susceptible to misspecification of the regressions for the missing values   </a:t>
+            </a:r>
+          </a:p>
+          <a:p>
+            <a:r>
+              <a:rPr lang="en-US" dirty="0"/>
+              <a:t>There are no convergence guarantees and the uncertainty estimate can be overly optimistic </a:t>
+            </a:r>
+          </a:p>
+        </p:txBody>
+      </p:sp>
+    </p:spTree>
+    <p:extLst>
+      <p:ext uri="{BB962C8B-B14F-4D97-AF65-F5344CB8AC3E}">
+        <p14:creationId xmlns:p14="http://schemas.microsoft.com/office/powerpoint/2010/main" val="3763879227"/>
+      </p:ext>
+    </p:extLst>
+  </p:cSld>
+  <p:clrMapOvr>
+    <a:masterClrMapping/>
+  </p:clrMapOvr>
+  <p:timing>
+    <p:tnLst>
+      <p:par>
+        <p:cTn id="1" dur="indefinite" restart="never" nodeType="tmRoot">
+          <p:childTnLst>
+            <p:seq concurrent="1" nextAc="seek">
+              <p:cTn id="2" dur="indefinite" nodeType="mainSeq">
+                <p:childTnLst>
+                  <p:par>
+                    <p:cTn id="3" fill="hold">
+                      <p:stCondLst>
+                        <p:cond delay="indefinite"/>
+                      </p:stCondLst>
+                      <p:childTnLst>
+                        <p:par>
+                          <p:cTn id="4" fill="hold">
+                            <p:stCondLst>
+                              <p:cond delay="0"/>
+                            </p:stCondLst>
+                            <p:childTnLst>
+                              <p:par>
+                                <p:cTn id="5" presetID="1" presetClass="entr" presetSubtype="0" fill="hold" nodeType="clickEffect">
+                                  <p:stCondLst>
+                                    <p:cond delay="0"/>
+                                  </p:stCondLst>
+                                  <p:childTnLst>
+                                    <p:set>
+                                      <p:cBhvr>
+                                        <p:cTn id="6" dur="1" fill="hold">
+                                          <p:stCondLst>
+                                            <p:cond delay="0"/>
+                                          </p:stCondLst>
+                                        </p:cTn>
+                                        <p:tgtEl>
+                                          <p:spTgt spid="3">
+                                            <p:txEl>
+                                              <p:pRg st="1" end="1"/>
+                                            </p:txEl>
+                                          </p:spTgt>
+                                        </p:tgtEl>
+                                        <p:attrNameLst>
+                                          <p:attrName>style.visibility</p:attrName>
+                                        </p:attrNameLst>
+                                      </p:cBhvr>
+                                      <p:to>
+                                        <p:strVal val="visible"/>
+                                      </p:to>
+                                    </p:set>
+                                  </p:childTnLst>
+                                </p:cTn>
+                              </p:par>
+                            </p:childTnLst>
+                          </p:cTn>
+                        </p:par>
+                      </p:childTnLst>
+                    </p:cTn>
+                  </p:par>
+                  <p:par>
+                    <p:cTn id="7" fill="hold">
+                      <p:stCondLst>
+                        <p:cond delay="indefinite"/>
+                      </p:stCondLst>
+                      <p:childTnLst>
+                        <p:par>
+                          <p:cTn id="8" fill="hold">
+                            <p:stCondLst>
+                              <p:cond delay="0"/>
+                            </p:stCondLst>
+                            <p:childTnLst>
+                              <p:par>
+                                <p:cTn id="9" presetID="1" presetClass="entr" presetSubtype="0" fill="hold" nodeType="clickEffect">
+                                  <p:stCondLst>
+                                    <p:cond delay="0"/>
+                                  </p:stCondLst>
+                                  <p:childTnLst>
+                                    <p:set>
+                                      <p:cBhvr>
+                                        <p:cTn id="10" dur="1" fill="hold">
+                                          <p:stCondLst>
+                                            <p:cond delay="0"/>
+                                          </p:stCondLst>
+                                        </p:cTn>
+                                        <p:tgtEl>
+                                          <p:spTgt spid="3">
+                                            <p:txEl>
+                                              <p:pRg st="2" end="2"/>
+                                            </p:txEl>
+                                          </p:spTgt>
+                                        </p:tgtEl>
+                                        <p:attrNameLst>
+                                          <p:attrName>style.visibility</p:attrName>
+                                        </p:attrNameLst>
+                                      </p:cBhvr>
+                                      <p:to>
+                                        <p:strVal val="visible"/>
+                                      </p:to>
+                                    </p:set>
+                                  </p:childTnLst>
+                                </p:cTn>
+                              </p:par>
+                            </p:childTnLst>
+                          </p:cTn>
+                        </p:par>
+                      </p:childTnLst>
+                    </p:cTn>
+                  </p:par>
+                  <p:par>
+                    <p:cTn id="11" fill="hold">
+                      <p:stCondLst>
+                        <p:cond delay="indefinite"/>
+                      </p:stCondLst>
+                      <p:childTnLst>
+                        <p:par>
+                          <p:cTn id="12" fill="hold">
+                            <p:stCondLst>
+                              <p:cond delay="0"/>
+                            </p:stCondLst>
+                            <p:childTnLst>
+                              <p:par>
+                                <p:cTn id="13" presetID="1" presetClass="entr" presetSubtype="0" fill="hold" nodeType="clickEffect">
+                                  <p:stCondLst>
+                                    <p:cond delay="0"/>
+                                  </p:stCondLst>
+                                  <p:childTnLst>
+                                    <p:set>
+                                      <p:cBhvr>
+                                        <p:cTn id="14" dur="1" fill="hold">
+                                          <p:stCondLst>
+                                            <p:cond delay="0"/>
+                                          </p:stCondLst>
+                                        </p:cTn>
+                                        <p:tgtEl>
+                                          <p:spTgt spid="3">
+                                            <p:txEl>
+                                              <p:pRg st="3" end="3"/>
+                                            </p:txEl>
+                                          </p:spTgt>
+                                        </p:tgtEl>
+                                        <p:attrNameLst>
+                                          <p:attrName>style.visibility</p:attrName>
+                                        </p:attrNameLst>
+                                      </p:cBhvr>
+                                      <p:to>
+                                        <p:strVal val="visible"/>
+                                      </p:to>
+                                    </p:set>
+                                  </p:childTnLst>
+                                </p:cTn>
+                              </p:par>
+                            </p:childTnLst>
+                          </p:cTn>
+                        </p:par>
+                      </p:childTnLst>
+                    </p:cTn>
+                  </p:par>
+                  <p:par>
+                    <p:cTn id="15" fill="hold">
+                      <p:stCondLst>
+                        <p:cond delay="indefinite"/>
+                      </p:stCondLst>
+                      <p:childTnLst>
+                        <p:par>
+                          <p:cTn id="16" fill="hold">
+                            <p:stCondLst>
+                              <p:cond delay="0"/>
+                            </p:stCondLst>
+                            <p:childTnLst>
+                              <p:par>
+                                <p:cTn id="17" presetID="1" presetClass="entr" presetSubtype="0" fill="hold" nodeType="clickEffect">
+                                  <p:stCondLst>
+                                    <p:cond delay="0"/>
+                                  </p:stCondLst>
+                                  <p:childTnLst>
+                                    <p:set>
+                                      <p:cBhvr>
+                                        <p:cTn id="18" dur="1" fill="hold">
+                                          <p:stCondLst>
+                                            <p:cond delay="0"/>
+                                          </p:stCondLst>
+                                        </p:cTn>
+                                        <p:tgtEl>
+                                          <p:spTgt spid="3">
+                                            <p:txEl>
+                                              <p:pRg st="4" end="4"/>
+                                            </p:txEl>
+                                          </p:spTgt>
+                                        </p:tgtEl>
+                                        <p:attrNameLst>
+                                          <p:attrName>style.visibility</p:attrName>
+                                        </p:attrNameLst>
+                                      </p:cBhvr>
+                                      <p:to>
+                                        <p:strVal val="visible"/>
+                                      </p:to>
+                                    </p:set>
+                                  </p:childTnLst>
+                                </p:cTn>
+                              </p:par>
+                            </p:childTnLst>
+                          </p:cTn>
+                        </p:par>
+                      </p:childTnLst>
+                    </p:cTn>
+                  </p:par>
+                  <p:par>
+                    <p:cTn id="19" fill="hold">
+                      <p:stCondLst>
+                        <p:cond delay="indefinite"/>
+                      </p:stCondLst>
+                      <p:childTnLst>
+                        <p:par>
+                          <p:cTn id="20" fill="hold">
+                            <p:stCondLst>
+                              <p:cond delay="0"/>
+                            </p:stCondLst>
+                            <p:childTnLst>
+                              <p:par>
+                                <p:cTn id="21" presetID="1" presetClass="entr" presetSubtype="0" fill="hold" nodeType="clickEffect">
+                                  <p:stCondLst>
+                                    <p:cond delay="0"/>
+                                  </p:stCondLst>
+                                  <p:childTnLst>
+                                    <p:set>
+                                      <p:cBhvr>
+                                        <p:cTn id="22" dur="1" fill="hold">
+                                          <p:stCondLst>
+                                            <p:cond delay="0"/>
+                                          </p:stCondLst>
+                                        </p:cTn>
+                                        <p:tgtEl>
+                                          <p:spTgt spid="3">
+                                            <p:txEl>
+                                              <p:pRg st="5" end="5"/>
+                                            </p:txEl>
+                                          </p:spTgt>
+                                        </p:tgtEl>
+                                        <p:attrNameLst>
+                                          <p:attrName>style.visibility</p:attrName>
+                                        </p:attrNameLst>
+                                      </p:cBhvr>
+                                      <p:to>
+                                        <p:strVal val="visible"/>
+                                      </p:to>
+                                    </p:set>
+                                  </p:childTnLst>
+                                </p:cTn>
+                              </p:par>
+                            </p:childTnLst>
+                          </p:cTn>
+                        </p:par>
+                      </p:childTnLst>
+                    </p:cTn>
+                  </p:par>
+                </p:childTnLst>
+              </p:cTn>
+              <p:prevCondLst>
+                <p:cond evt="onPrev" delay="0">
+                  <p:tgtEl>
+                    <p:sldTgt/>
+                  </p:tgtEl>
+                </p:cond>
+              </p:prevCondLst>
+              <p:nextCondLst>
+                <p:cond evt="onNext" delay="0">
+                  <p:tgtEl>
+                    <p:sldTgt/>
+                  </p:tgtEl>
+                </p:cond>
+              </p:nextCondLst>
+            </p:seq>
+          </p:childTnLst>
+        </p:cTn>
+      </p:par>
+    </p:tnLst>
+  </p:timing>
+</p:sld>
+</file>
+
+<file path=ppt/slides/slide77.xml><?xml version="1.0" encoding="utf-8"?>
+<p:sld xmlns:a="http://schemas.openxmlformats.org/drawingml/2006/main" xmlns:r="http://schemas.openxmlformats.org/officeDocument/2006/relationships" xmlns:p="http://schemas.openxmlformats.org/presentationml/2006/main">
+  <p:cSld>
+    <p:spTree>
+      <p:nvGrpSpPr>
+        <p:cNvPr id="1" name="">
+          <a:extLst>
+            <a:ext uri="{FF2B5EF4-FFF2-40B4-BE49-F238E27FC236}">
+              <a16:creationId xmlns:a16="http://schemas.microsoft.com/office/drawing/2014/main" id="{BC83BA4C-835E-AEBE-C4AC-A63FF9EBAA24}"/>
+            </a:ext>
+          </a:extLst>
+        </p:cNvPr>
+        <p:cNvGrpSpPr/>
+        <p:nvPr/>
+      </p:nvGrpSpPr>
+      <p:grpSpPr>
+        <a:xfrm>
+          <a:off x="0" y="0"/>
+          <a:ext cx="0" cy="0"/>
+          <a:chOff x="0" y="0"/>
+          <a:chExt cx="0" cy="0"/>
+        </a:xfrm>
+      </p:grpSpPr>
+      <p:sp>
+        <p:nvSpPr>
+          <p:cNvPr id="2" name="Title 1">
+            <a:extLst>
+              <a:ext uri="{FF2B5EF4-FFF2-40B4-BE49-F238E27FC236}">
+                <a16:creationId xmlns:a16="http://schemas.microsoft.com/office/drawing/2014/main" id="{492FCFFF-4975-42B7-BA3E-88DED488FA1E}"/>
+              </a:ext>
+            </a:extLst>
+          </p:cNvPr>
+          <p:cNvSpPr>
+            <a:spLocks noGrp="1"/>
+          </p:cNvSpPr>
+          <p:nvPr>
+            <p:ph type="title"/>
+          </p:nvPr>
+        </p:nvSpPr>
+        <p:spPr/>
+        <p:txBody>
+          <a:bodyPr/>
+          <a:lstStyle/>
+          <a:p>
+            <a:pPr marL="0" lvl="0" indent="0">
+              <a:buNone/>
+            </a:pPr>
+            <a:r>
+              <a:rPr lang="en-US" dirty="0"/>
+              <a:t>Imputation of Missing Values</a:t>
+            </a:r>
+            <a:endParaRPr dirty="0"/>
+          </a:p>
+        </p:txBody>
+      </p:sp>
+      <p:sp>
+        <p:nvSpPr>
+          <p:cNvPr id="3" name="Content Placeholder 2">
+            <a:extLst>
+              <a:ext uri="{FF2B5EF4-FFF2-40B4-BE49-F238E27FC236}">
+                <a16:creationId xmlns:a16="http://schemas.microsoft.com/office/drawing/2014/main" id="{21131AFE-186B-4407-DAD1-C6FCE5424FFF}"/>
+              </a:ext>
+            </a:extLst>
+          </p:cNvPr>
+          <p:cNvSpPr>
+            <a:spLocks noGrp="1"/>
+          </p:cNvSpPr>
+          <p:nvPr>
+            <p:ph idx="1"/>
+          </p:nvPr>
+        </p:nvSpPr>
+        <p:spPr>
+          <a:xfrm>
+            <a:off x="457200" y="1200151"/>
+            <a:ext cx="8229600" cy="3737370"/>
+          </a:xfrm>
+        </p:spPr>
+        <p:txBody>
+          <a:bodyPr>
+            <a:normAutofit/>
+          </a:bodyPr>
+          <a:lstStyle/>
+          <a:p>
+            <a:pPr marL="0" indent="0">
+              <a:buNone/>
+            </a:pPr>
+            <a:r>
+              <a:rPr lang="en-US" dirty="0"/>
+              <a:t>For further reading: </a:t>
+            </a:r>
+          </a:p>
+          <a:p>
+            <a:r>
+              <a:rPr lang="en-US" dirty="0"/>
+              <a:t>For a detailed discussion of imputation with the MICE algorithm see </a:t>
+            </a:r>
+            <a:r>
+              <a:rPr lang="en-US" dirty="0">
+                <a:hlinkClick r:id="rId2"/>
+              </a:rPr>
+              <a:t>Flexible Imputation of Missing Data, Second Edition, Stef van Buuren, Chapman and Hall, 2018</a:t>
+            </a:r>
+            <a:endParaRPr lang="en-US" dirty="0"/>
+          </a:p>
+          <a:p>
+            <a:r>
+              <a:rPr lang="en-US" dirty="0"/>
+              <a:t>For a broad and deep exploration of working with missing data see </a:t>
+            </a:r>
+            <a:r>
+              <a:rPr lang="en-US" dirty="0">
+                <a:hlinkClick r:id="rId3"/>
+              </a:rPr>
+              <a:t>Statistical Analysis with Missing Data, Little and Rudin, Wiley, 2020</a:t>
+            </a:r>
+            <a:endParaRPr lang="en-US" dirty="0"/>
+          </a:p>
+          <a:p>
+            <a:endParaRPr lang="en-US" dirty="0"/>
+          </a:p>
+        </p:txBody>
+      </p:sp>
+    </p:spTree>
+    <p:extLst>
+      <p:ext uri="{BB962C8B-B14F-4D97-AF65-F5344CB8AC3E}">
+        <p14:creationId xmlns:p14="http://schemas.microsoft.com/office/powerpoint/2010/main" val="703126358"/>
+      </p:ext>
+    </p:extLst>
+  </p:cSld>
+  <p:clrMapOvr>
+    <a:masterClrMapping/>
+  </p:clrMapOvr>
+</p:sld>
+</file>
+
+<file path=ppt/slides/slide78.xml><?xml version="1.0" encoding="utf-8"?>
 <p:sld xmlns:a="http://schemas.openxmlformats.org/drawingml/2006/main" xmlns:r="http://schemas.openxmlformats.org/officeDocument/2006/relationships" xmlns:p="http://schemas.openxmlformats.org/presentationml/2006/main">
   <p:cSld>
     <p:spTree>
@@ -36510,7 +40618,7 @@
 </p:sld>
 </file>
 
-<file path=ppt/slides/slide75.xml><?xml version="1.0" encoding="utf-8"?>
+<file path=ppt/slides/slide79.xml><?xml version="1.0" encoding="utf-8"?>
 <p:sld xmlns:a="http://schemas.openxmlformats.org/drawingml/2006/main" xmlns:r="http://schemas.openxmlformats.org/officeDocument/2006/relationships" xmlns:p="http://schemas.openxmlformats.org/presentationml/2006/main">
   <p:cSld>
     <p:spTree>

--- a/LectureSlides/11_ModelsForMessyData.pptx
+++ b/LectureSlides/11_ModelsForMessyData.pptx
@@ -7158,7 +7158,7 @@
             <a:pPr lvl="0"/>
             <a:r>
               <a:rPr lang="en-US" dirty="0"/>
-              <a:t>Sightings of heard and flock animals seen at a location can have large numbers at some times</a:t>
+              <a:t>Sightings of herd and flock animals seen at a location can have large numbers at some times</a:t>
             </a:r>
           </a:p>
           <a:p>
@@ -8226,7 +8226,7 @@
             <a:pPr lvl="1"/>
             <a:r>
               <a:rPr lang="en-US" dirty="0"/>
-              <a:t>Imputation methods must preserve distributions to be valid for influence   </a:t>
+              <a:t>Imputation methods must preserve distributions to be valid for inference   </a:t>
             </a:r>
           </a:p>
           <a:p>
@@ -36003,7 +36003,7 @@
               <a:rPr lang="en-US" b="1" dirty="0">
                 <a:hlinkClick r:id="rId2"/>
               </a:rPr>
-              <a:t>The Multivariate Imputation by Chained Equations (MICE) </a:t>
+              <a:t>The Multiple Imputation by Chained Equations (MICE) </a:t>
             </a:r>
             <a:r>
               <a:rPr lang="en-US" dirty="0"/>
@@ -36280,7 +36280,7 @@
               <a:rPr lang="en-US" b="1" dirty="0">
                 <a:hlinkClick r:id="rId2"/>
               </a:rPr>
-              <a:t>The Multivariate Imputation by Chained Equations (MICE) </a:t>
+              <a:t>The Multiple Imputation by Chained Equations (MICE) </a:t>
             </a:r>
             <a:r>
               <a:rPr lang="en-US" dirty="0"/>
@@ -36438,7 +36438,7 @@
               <a:rPr lang="en-US" b="1" dirty="0">
                 <a:hlinkClick r:id="rId2"/>
               </a:rPr>
-              <a:t>The Multivariate Imputation by Chained Equations (MICE) </a:t>
+              <a:t>The Multiple Imputation by Chained Equations (MICE) </a:t>
             </a:r>
             <a:r>
               <a:rPr lang="en-US" dirty="0"/>
@@ -36567,7 +36567,7 @@
               <a:rPr lang="en-US" b="1" dirty="0">
                 <a:hlinkClick r:id="rId2"/>
               </a:rPr>
-              <a:t>The Multivariate Imputation by Chained Equations (MICE) </a:t>
+              <a:t>The Multiple Imputation by Chained Equations (MICE) </a:t>
             </a:r>
             <a:r>
               <a:rPr lang="en-US" dirty="0"/>
@@ -36715,7 +36715,7 @@
               <a:rPr lang="en-US" b="1" dirty="0">
                 <a:hlinkClick r:id="rId2"/>
               </a:rPr>
-              <a:t>The Multivariate Imputation by Chained Equations (MICE) </a:t>
+              <a:t>The Multiple Imputation by Chained Equations (MICE) </a:t>
             </a:r>
             <a:r>
               <a:rPr lang="en-US" dirty="0"/>
@@ -40823,11 +40823,7 @@
               <a:p>
                 <a:r>
                   <a:rPr lang="en-US" dirty="0"/>
-                  <a:t>MICE is not effective for </a:t>
-                </a:r>
-                <a:r>
-                  <a:rPr lang="en-US"/>
-                  <a:t>missing percent of about </a:t>
+                  <a:t>MICE is not effective for missing percent of about </a:t>
                 </a:r>
                 <a14:m>
                   <m:oMath xmlns:m="http://schemas.openxmlformats.org/officeDocument/2006/math">
@@ -40931,6 +40927,330 @@
   <p:clrMapOvr>
     <a:masterClrMapping/>
   </p:clrMapOvr>
+  <p:timing>
+    <p:tnLst>
+      <p:par>
+        <p:cTn id="1" dur="indefinite" restart="never" nodeType="tmRoot">
+          <p:childTnLst>
+            <p:seq concurrent="1" nextAc="seek">
+              <p:cTn id="2" dur="indefinite" nodeType="mainSeq">
+                <p:childTnLst>
+                  <p:par>
+                    <p:cTn id="3" fill="hold">
+                      <p:stCondLst>
+                        <p:cond delay="indefinite"/>
+                      </p:stCondLst>
+                      <p:childTnLst>
+                        <p:par>
+                          <p:cTn id="4" fill="hold">
+                            <p:stCondLst>
+                              <p:cond delay="0"/>
+                            </p:stCondLst>
+                            <p:childTnLst>
+                              <p:par>
+                                <p:cTn id="5" presetID="1" presetClass="entr" presetSubtype="0" fill="hold" nodeType="clickEffect">
+                                  <p:stCondLst>
+                                    <p:cond delay="0"/>
+                                  </p:stCondLst>
+                                  <p:childTnLst>
+                                    <p:set>
+                                      <p:cBhvr>
+                                        <p:cTn id="6" dur="1" fill="hold">
+                                          <p:stCondLst>
+                                            <p:cond delay="0"/>
+                                          </p:stCondLst>
+                                        </p:cTn>
+                                        <p:tgtEl>
+                                          <p:spTgt spid="3">
+                                            <p:txEl>
+                                              <p:pRg st="1" end="1"/>
+                                            </p:txEl>
+                                          </p:spTgt>
+                                        </p:tgtEl>
+                                        <p:attrNameLst>
+                                          <p:attrName>style.visibility</p:attrName>
+                                        </p:attrNameLst>
+                                      </p:cBhvr>
+                                      <p:to>
+                                        <p:strVal val="visible"/>
+                                      </p:to>
+                                    </p:set>
+                                  </p:childTnLst>
+                                </p:cTn>
+                              </p:par>
+                            </p:childTnLst>
+                          </p:cTn>
+                        </p:par>
+                      </p:childTnLst>
+                    </p:cTn>
+                  </p:par>
+                  <p:par>
+                    <p:cTn id="7" fill="hold">
+                      <p:stCondLst>
+                        <p:cond delay="indefinite"/>
+                      </p:stCondLst>
+                      <p:childTnLst>
+                        <p:par>
+                          <p:cTn id="8" fill="hold">
+                            <p:stCondLst>
+                              <p:cond delay="0"/>
+                            </p:stCondLst>
+                            <p:childTnLst>
+                              <p:par>
+                                <p:cTn id="9" presetID="1" presetClass="entr" presetSubtype="0" fill="hold" nodeType="clickEffect">
+                                  <p:stCondLst>
+                                    <p:cond delay="0"/>
+                                  </p:stCondLst>
+                                  <p:childTnLst>
+                                    <p:set>
+                                      <p:cBhvr>
+                                        <p:cTn id="10" dur="1" fill="hold">
+                                          <p:stCondLst>
+                                            <p:cond delay="0"/>
+                                          </p:stCondLst>
+                                        </p:cTn>
+                                        <p:tgtEl>
+                                          <p:spTgt spid="3">
+                                            <p:txEl>
+                                              <p:pRg st="2" end="2"/>
+                                            </p:txEl>
+                                          </p:spTgt>
+                                        </p:tgtEl>
+                                        <p:attrNameLst>
+                                          <p:attrName>style.visibility</p:attrName>
+                                        </p:attrNameLst>
+                                      </p:cBhvr>
+                                      <p:to>
+                                        <p:strVal val="visible"/>
+                                      </p:to>
+                                    </p:set>
+                                  </p:childTnLst>
+                                </p:cTn>
+                              </p:par>
+                            </p:childTnLst>
+                          </p:cTn>
+                        </p:par>
+                      </p:childTnLst>
+                    </p:cTn>
+                  </p:par>
+                  <p:par>
+                    <p:cTn id="11" fill="hold">
+                      <p:stCondLst>
+                        <p:cond delay="indefinite"/>
+                      </p:stCondLst>
+                      <p:childTnLst>
+                        <p:par>
+                          <p:cTn id="12" fill="hold">
+                            <p:stCondLst>
+                              <p:cond delay="0"/>
+                            </p:stCondLst>
+                            <p:childTnLst>
+                              <p:par>
+                                <p:cTn id="13" presetID="1" presetClass="entr" presetSubtype="0" fill="hold" nodeType="clickEffect">
+                                  <p:stCondLst>
+                                    <p:cond delay="0"/>
+                                  </p:stCondLst>
+                                  <p:childTnLst>
+                                    <p:set>
+                                      <p:cBhvr>
+                                        <p:cTn id="14" dur="1" fill="hold">
+                                          <p:stCondLst>
+                                            <p:cond delay="0"/>
+                                          </p:stCondLst>
+                                        </p:cTn>
+                                        <p:tgtEl>
+                                          <p:spTgt spid="3">
+                                            <p:txEl>
+                                              <p:pRg st="3" end="3"/>
+                                            </p:txEl>
+                                          </p:spTgt>
+                                        </p:tgtEl>
+                                        <p:attrNameLst>
+                                          <p:attrName>style.visibility</p:attrName>
+                                        </p:attrNameLst>
+                                      </p:cBhvr>
+                                      <p:to>
+                                        <p:strVal val="visible"/>
+                                      </p:to>
+                                    </p:set>
+                                  </p:childTnLst>
+                                </p:cTn>
+                              </p:par>
+                            </p:childTnLst>
+                          </p:cTn>
+                        </p:par>
+                      </p:childTnLst>
+                    </p:cTn>
+                  </p:par>
+                  <p:par>
+                    <p:cTn id="15" fill="hold">
+                      <p:stCondLst>
+                        <p:cond delay="indefinite"/>
+                      </p:stCondLst>
+                      <p:childTnLst>
+                        <p:par>
+                          <p:cTn id="16" fill="hold">
+                            <p:stCondLst>
+                              <p:cond delay="0"/>
+                            </p:stCondLst>
+                            <p:childTnLst>
+                              <p:par>
+                                <p:cTn id="17" presetID="1" presetClass="entr" presetSubtype="0" fill="hold" nodeType="clickEffect">
+                                  <p:stCondLst>
+                                    <p:cond delay="0"/>
+                                  </p:stCondLst>
+                                  <p:childTnLst>
+                                    <p:set>
+                                      <p:cBhvr>
+                                        <p:cTn id="18" dur="1" fill="hold">
+                                          <p:stCondLst>
+                                            <p:cond delay="0"/>
+                                          </p:stCondLst>
+                                        </p:cTn>
+                                        <p:tgtEl>
+                                          <p:spTgt spid="3">
+                                            <p:txEl>
+                                              <p:pRg st="4" end="4"/>
+                                            </p:txEl>
+                                          </p:spTgt>
+                                        </p:tgtEl>
+                                        <p:attrNameLst>
+                                          <p:attrName>style.visibility</p:attrName>
+                                        </p:attrNameLst>
+                                      </p:cBhvr>
+                                      <p:to>
+                                        <p:strVal val="visible"/>
+                                      </p:to>
+                                    </p:set>
+                                  </p:childTnLst>
+                                </p:cTn>
+                              </p:par>
+                            </p:childTnLst>
+                          </p:cTn>
+                        </p:par>
+                      </p:childTnLst>
+                    </p:cTn>
+                  </p:par>
+                  <p:par>
+                    <p:cTn id="19" fill="hold">
+                      <p:stCondLst>
+                        <p:cond delay="indefinite"/>
+                      </p:stCondLst>
+                      <p:childTnLst>
+                        <p:par>
+                          <p:cTn id="20" fill="hold">
+                            <p:stCondLst>
+                              <p:cond delay="0"/>
+                            </p:stCondLst>
+                            <p:childTnLst>
+                              <p:par>
+                                <p:cTn id="21" presetID="1" presetClass="entr" presetSubtype="0" fill="hold" nodeType="clickEffect">
+                                  <p:stCondLst>
+                                    <p:cond delay="0"/>
+                                  </p:stCondLst>
+                                  <p:childTnLst>
+                                    <p:set>
+                                      <p:cBhvr>
+                                        <p:cTn id="22" dur="1" fill="hold">
+                                          <p:stCondLst>
+                                            <p:cond delay="0"/>
+                                          </p:stCondLst>
+                                        </p:cTn>
+                                        <p:tgtEl>
+                                          <p:spTgt spid="3">
+                                            <p:txEl>
+                                              <p:pRg st="5" end="5"/>
+                                            </p:txEl>
+                                          </p:spTgt>
+                                        </p:tgtEl>
+                                        <p:attrNameLst>
+                                          <p:attrName>style.visibility</p:attrName>
+                                        </p:attrNameLst>
+                                      </p:cBhvr>
+                                      <p:to>
+                                        <p:strVal val="visible"/>
+                                      </p:to>
+                                    </p:set>
+                                  </p:childTnLst>
+                                </p:cTn>
+                              </p:par>
+                            </p:childTnLst>
+                          </p:cTn>
+                        </p:par>
+                      </p:childTnLst>
+                    </p:cTn>
+                  </p:par>
+                  <p:par>
+                    <p:cTn id="23" fill="hold">
+                      <p:stCondLst>
+                        <p:cond delay="indefinite"/>
+                      </p:stCondLst>
+                      <p:childTnLst>
+                        <p:par>
+                          <p:cTn id="24" fill="hold">
+                            <p:stCondLst>
+                              <p:cond delay="0"/>
+                            </p:stCondLst>
+                            <p:childTnLst>
+                              <p:par>
+                                <p:cTn id="25" presetID="1" presetClass="entr" presetSubtype="0" fill="hold" nodeType="clickEffect">
+                                  <p:stCondLst>
+                                    <p:cond delay="0"/>
+                                  </p:stCondLst>
+                                  <p:childTnLst>
+                                    <p:set>
+                                      <p:cBhvr>
+                                        <p:cTn id="26" dur="1" fill="hold">
+                                          <p:stCondLst>
+                                            <p:cond delay="0"/>
+                                          </p:stCondLst>
+                                        </p:cTn>
+                                        <p:tgtEl>
+                                          <p:spTgt spid="3">
+                                            <p:txEl>
+                                              <p:pRg st="6" end="6"/>
+                                            </p:txEl>
+                                          </p:spTgt>
+                                        </p:tgtEl>
+                                        <p:attrNameLst>
+                                          <p:attrName>style.visibility</p:attrName>
+                                        </p:attrNameLst>
+                                      </p:cBhvr>
+                                      <p:to>
+                                        <p:strVal val="visible"/>
+                                      </p:to>
+                                    </p:set>
+                                  </p:childTnLst>
+                                </p:cTn>
+                              </p:par>
+                            </p:childTnLst>
+                          </p:cTn>
+                        </p:par>
+                      </p:childTnLst>
+                    </p:cTn>
+                  </p:par>
+                </p:childTnLst>
+              </p:cTn>
+              <p:prevCondLst>
+                <p:cond evt="onPrev" delay="0">
+                  <p:tgtEl>
+                    <p:sldTgt/>
+                  </p:tgtEl>
+                </p:cond>
+              </p:prevCondLst>
+              <p:nextCondLst>
+                <p:cond evt="onNext" delay="0">
+                  <p:tgtEl>
+                    <p:sldTgt/>
+                  </p:tgtEl>
+                </p:cond>
+              </p:nextCondLst>
+            </p:seq>
+          </p:childTnLst>
+        </p:cTn>
+      </p:par>
+    </p:tnLst>
+  </p:timing>
 </p:sld>
 </file>
 
